--- a/Konsolidasi_Analyzer_Solution_Architecture.pptx
+++ b/Konsolidasi_Analyzer_Solution_Architecture.pptx
@@ -3112,7 +3112,7 @@
             <a:avLst/>
           </a:prstGeom>
           <a:solidFill>
-            <a:srgbClr val="0F2A1D"/>
+            <a:srgbClr val="FFFFFF"/>
           </a:solidFill>
           <a:ln>
             <a:noFill/>
@@ -3149,13 +3149,13 @@
         <p:spPr>
           <a:xfrm>
             <a:off x="1097280" y="1645920"/>
-            <a:ext cx="1828800" cy="54864"/>
+            <a:ext cx="73152" cy="3474720"/>
           </a:xfrm>
           <a:prstGeom prst="rect">
             <a:avLst/>
           </a:prstGeom>
           <a:solidFill>
-            <a:srgbClr val="B8902E"/>
+            <a:srgbClr val="1B4332"/>
           </a:solidFill>
           <a:ln>
             <a:noFill/>
@@ -3191,8 +3191,8 @@
         </p:nvSpPr>
         <p:spPr>
           <a:xfrm>
-            <a:off x="1097280" y="2011680"/>
-            <a:ext cx="9875520" cy="2286000"/>
+            <a:off x="1371600" y="1554480"/>
+            <a:ext cx="9601200" cy="2926080"/>
           </a:xfrm>
           <a:prstGeom prst="rect">
             <a:avLst/>
@@ -3206,24 +3206,39 @@
           <a:lstStyle/>
           <a:p>
             <a:pPr>
-              <a:defRPr sz="3600" b="1">
-                <a:solidFill>
-                  <a:srgbClr val="FFFFFF"/>
-                </a:solidFill>
-              </a:defRPr>
-            </a:pPr>
-            <a:r>
-              <a:t>Konsolidasi Analyzer &amp; Review Workspace</a:t>
+              <a:defRPr sz="1100" b="1">
+                <a:solidFill>
+                  <a:srgbClr val="B48214"/>
+                </a:solidFill>
+              </a:defRPr>
+            </a:pPr>
+            <a:r>
+              <a:t>ENTERPRISE SOLUTION ARCHITECTURE &amp; STAKEHOLDER ALIGNMENT</a:t>
             </a:r>
           </a:p>
           <a:p>
             <a:pPr>
               <a:spcBef>
-                <a:spcPts val="1000"/>
+                <a:spcPts val="800"/>
               </a:spcBef>
-              <a:defRPr sz="2000">
-                <a:solidFill>
-                  <a:srgbClr val="B8902E"/>
+              <a:defRPr sz="3200" b="1">
+                <a:solidFill>
+                  <a:srgbClr val="0F172A"/>
+                </a:solidFill>
+              </a:defRPr>
+            </a:pPr>
+            <a:r>
+              <a:t>Financial Consolidation Analyzer &amp; Review Workspace</a:t>
+            </a:r>
+          </a:p>
+          <a:p>
+            <a:pPr>
+              <a:spcBef>
+                <a:spcPts val="800"/>
+              </a:spcBef>
+              <a:defRPr sz="1800" b="1">
+                <a:solidFill>
+                  <a:srgbClr val="1B4332"/>
                 </a:solidFill>
               </a:defRPr>
             </a:pPr>
@@ -3234,30 +3249,75 @@
           <a:p>
             <a:pPr>
               <a:spcBef>
-                <a:spcPts val="1600"/>
+                <a:spcPts val="1400"/>
               </a:spcBef>
-              <a:defRPr sz="1300">
-                <a:solidFill>
-                  <a:srgbClr val="D2CDC3"/>
-                </a:solidFill>
-              </a:defRPr>
-            </a:pPr>
-            <a:r>
-              <a:t>Solution Architecture &amp; Stakeholder Alignment for Multi-Entity Holding Financial Consolidation</a:t>
-            </a:r>
-          </a:p>
-        </p:txBody>
-      </p:sp>
-      <p:sp>
-        <p:nvSpPr>
-          <p:cNvPr id="5" name="TextBox 4"/>
+              <a:defRPr sz="1200">
+                <a:solidFill>
+                  <a:srgbClr val="64748B"/>
+                </a:solidFill>
+              </a:defRPr>
+            </a:pPr>
+            <a:r>
+              <a:t>An automated system for group financial consolidation review, mathematical anomaly detection (IFRS 10 / PSAK 65 NCI &amp; IAS 24 / PSAK 7 Related-Parties), and internal audit sign-off workflows.</a:t>
+            </a:r>
+          </a:p>
+        </p:txBody>
+      </p:sp>
+      <p:sp>
+        <p:nvSpPr>
+          <p:cNvPr id="5" name="Rounded Rectangle 4"/>
+          <p:cNvSpPr/>
+          <p:nvPr/>
+        </p:nvSpPr>
+        <p:spPr>
+          <a:xfrm>
+            <a:off x="1097280" y="5120640"/>
+            <a:ext cx="9966960" cy="1005840"/>
+          </a:xfrm>
+          <a:prstGeom prst="roundRect">
+            <a:avLst/>
+          </a:prstGeom>
+          <a:solidFill>
+            <a:srgbClr val="F8FAFC"/>
+          </a:solidFill>
+          <a:ln>
+            <a:solidFill>
+              <a:srgbClr val="E2E8F0"/>
+            </a:solidFill>
+          </a:ln>
+        </p:spPr>
+        <p:style>
+          <a:lnRef idx="1">
+            <a:schemeClr val="accent1"/>
+          </a:lnRef>
+          <a:fillRef idx="3">
+            <a:schemeClr val="accent1"/>
+          </a:fillRef>
+          <a:effectRef idx="2">
+            <a:schemeClr val="accent1"/>
+          </a:effectRef>
+          <a:fontRef idx="minor">
+            <a:schemeClr val="lt1"/>
+          </a:fontRef>
+        </p:style>
+        <p:txBody>
+          <a:bodyPr rtlCol="0" anchor="ctr"/>
+          <a:lstStyle/>
+          <a:p>
+            <a:pPr algn="ctr"/>
+          </a:p>
+        </p:txBody>
+      </p:sp>
+      <p:sp>
+        <p:nvSpPr>
+          <p:cNvPr id="6" name="TextBox 5"/>
           <p:cNvSpPr txBox="1"/>
           <p:nvPr/>
         </p:nvSpPr>
         <p:spPr>
           <a:xfrm>
-            <a:off x="1097280" y="5120640"/>
-            <a:ext cx="9875520" cy="914400"/>
+            <a:off x="1371600" y="5212080"/>
+            <a:ext cx="9418320" cy="822960"/>
           </a:xfrm>
           <a:prstGeom prst="rect">
             <a:avLst/>
@@ -3265,24 +3325,35 @@
           <a:noFill/>
         </p:spPr>
         <p:txBody>
-          <a:bodyPr wrap="none">
+          <a:bodyPr wrap="square">
             <a:spAutoFit/>
           </a:bodyPr>
           <a:lstStyle/>
           <a:p>
             <a:pPr>
+              <a:defRPr sz="1150" b="1">
+                <a:solidFill>
+                  <a:srgbClr val="0F172A"/>
+                </a:solidFill>
+              </a:defRPr>
+            </a:pPr>
+            <a:r>
+              <a:t>Target Structure: Holding Foundation (Induk) &amp; 5 Operating Subsidiaries (Subsidiaries I – V)</a:t>
+            </a:r>
+          </a:p>
+          <a:p>
+            <a:pPr>
+              <a:spcBef>
+                <a:spcPts val="300"/>
+              </a:spcBef>
               <a:defRPr sz="1100">
                 <a:solidFill>
-                  <a:srgbClr val="AAA59B"/>
-                </a:solidFill>
-              </a:defRPr>
-            </a:pPr>
-            <a:r>
-              <a:t>Entitas Sasaran: Yayasan (Holding Induk) &amp; 5 Anak Perusahaan (PT Anak I – V)</a:t>
-            </a:r>
-            <a:br/>
-            <a:r>
-              <a:t>Fokus Regulasi: PSAK 65 (Konsolidasian/NCI), PSAK 7 (Transaksi Berelasi), POJK Lembaga Keuangan</a:t>
+                  <a:srgbClr val="64748B"/>
+                </a:solidFill>
+              </a:defRPr>
+            </a:pPr>
+            <a:r>
+              <a:t>Standards: IFRS 10 / PSAK 65 (NCI Attribution) &amp;bull; IAS 24 / PSAK 7 (Related-Party Transactions) &amp;bull; POJK Prudential Ratios</a:t>
             </a:r>
           </a:p>
         </p:txBody>
@@ -3320,7 +3391,7 @@
             <a:avLst/>
           </a:prstGeom>
           <a:solidFill>
-            <a:srgbClr val="0F2A1D"/>
+            <a:srgbClr val="FFFFFF"/>
           </a:solidFill>
           <a:ln>
             <a:noFill/>
@@ -3350,75 +3421,23 @@
       </p:sp>
       <p:sp>
         <p:nvSpPr>
-          <p:cNvPr id="3" name="TextBox 2"/>
-          <p:cNvSpPr txBox="1"/>
-          <p:nvPr/>
-        </p:nvSpPr>
-        <p:spPr>
-          <a:xfrm>
-            <a:off x="1097280" y="914400"/>
-            <a:ext cx="9875520" cy="1371600"/>
+          <p:cNvPr id="3" name="Rectangle 2"/>
+          <p:cNvSpPr/>
+          <p:nvPr/>
+        </p:nvSpPr>
+        <p:spPr>
+          <a:xfrm>
+            <a:off x="731520" y="365760"/>
+            <a:ext cx="10728655" cy="36576"/>
           </a:xfrm>
           <a:prstGeom prst="rect">
-            <a:avLst/>
-          </a:prstGeom>
-          <a:noFill/>
-        </p:spPr>
-        <p:txBody>
-          <a:bodyPr wrap="square">
-            <a:spAutoFit/>
-          </a:bodyPr>
-          <a:lstStyle/>
-          <a:p>
-            <a:pPr>
-              <a:defRPr sz="2800" b="1">
-                <a:solidFill>
-                  <a:srgbClr val="FFFFFF"/>
-                </a:solidFill>
-              </a:defRPr>
-            </a:pPr>
-            <a:r>
-              <a:t>Kesimpulan Eksekutif &amp; Langkah Tindak Lanjut</a:t>
-            </a:r>
-          </a:p>
-          <a:p>
-            <a:pPr>
-              <a:spcBef>
-                <a:spcPts val="800"/>
-              </a:spcBef>
-              <a:defRPr sz="1400">
-                <a:solidFill>
-                  <a:srgbClr val="B8902E"/>
-                </a:solidFill>
-              </a:defRPr>
-            </a:pPr>
-            <a:r>
-              <a:t>Transformasi Pengawasan Finansial Konsolidasi: Proaktif, Akuntabel, dan Terdokumentasi Sempurna.</a:t>
-            </a:r>
-          </a:p>
-        </p:txBody>
-      </p:sp>
-      <p:sp>
-        <p:nvSpPr>
-          <p:cNvPr id="4" name="Rounded Rectangle 3"/>
-          <p:cNvSpPr/>
-          <p:nvPr/>
-        </p:nvSpPr>
-        <p:spPr>
-          <a:xfrm>
-            <a:off x="1097280" y="2560320"/>
-            <a:ext cx="3108960" cy="3291840"/>
-          </a:xfrm>
-          <a:prstGeom prst="roundRect">
             <a:avLst/>
           </a:prstGeom>
           <a:solidFill>
             <a:srgbClr val="1B4332"/>
           </a:solidFill>
-          <a:ln w="19050">
-            <a:solidFill>
-              <a:srgbClr val="B8902E"/>
-            </a:solidFill>
+          <a:ln>
+            <a:noFill/>
           </a:ln>
         </p:spPr>
         <p:style>
@@ -3445,14 +3464,14 @@
       </p:sp>
       <p:sp>
         <p:nvSpPr>
-          <p:cNvPr id="5" name="TextBox 4"/>
+          <p:cNvPr id="4" name="TextBox 3"/>
           <p:cNvSpPr txBox="1"/>
           <p:nvPr/>
         </p:nvSpPr>
         <p:spPr>
           <a:xfrm>
-            <a:off x="1280160" y="2743200"/>
-            <a:ext cx="2743200" cy="2926080"/>
+            <a:off x="731520" y="502920"/>
+            <a:ext cx="9144000" cy="320040"/>
           </a:xfrm>
           <a:prstGeom prst="rect">
             <a:avLst/>
@@ -3466,47 +3485,49 @@
           <a:lstStyle/>
           <a:p>
             <a:pPr>
-              <a:spcAft>
-                <a:spcPts val="1000"/>
-              </a:spcAft>
-              <a:defRPr sz="1400" b="1">
-                <a:solidFill>
-                  <a:srgbClr val="FFFFFF"/>
-                </a:solidFill>
-              </a:defRPr>
-            </a:pPr>
-            <a:r>
-              <a:t>Efisiensi Waktu Closing 60%</a:t>
-            </a:r>
-          </a:p>
-          <a:p>
-            <a:pPr>
-              <a:spcAft>
-                <a:spcPts val="600"/>
-              </a:spcAft>
-              <a:defRPr sz="1100">
-                <a:solidFill>
-                  <a:srgbClr val="D7D2C8"/>
-                </a:solidFill>
-              </a:defRPr>
-            </a:pPr>
-            <a:r>
-              <a:t>• Deteksi instan atas anomali matematis eliminasi &amp; alokasi NCI.</a:t>
-            </a:r>
-          </a:p>
-          <a:p>
-            <a:pPr>
-              <a:spcAft>
-                <a:spcPts val="600"/>
-              </a:spcAft>
-              <a:defRPr sz="1100">
-                <a:solidFill>
-                  <a:srgbClr val="D7D2C8"/>
-                </a:solidFill>
-              </a:defRPr>
-            </a:pPr>
-            <a:r>
-              <a:t>• Mengurangi iterasi koreksi lembar kerja pada akhir periode.</a:t>
+              <a:defRPr sz="1000" b="1">
+                <a:solidFill>
+                  <a:srgbClr val="B48214"/>
+                </a:solidFill>
+              </a:defRPr>
+            </a:pPr>
+            <a:r>
+              <a:t>STRATEGIC IMPACT</a:t>
+            </a:r>
+          </a:p>
+        </p:txBody>
+      </p:sp>
+      <p:sp>
+        <p:nvSpPr>
+          <p:cNvPr id="5" name="TextBox 4"/>
+          <p:cNvSpPr txBox="1"/>
+          <p:nvPr/>
+        </p:nvSpPr>
+        <p:spPr>
+          <a:xfrm>
+            <a:off x="731520" y="777240"/>
+            <a:ext cx="10728655" cy="640080"/>
+          </a:xfrm>
+          <a:prstGeom prst="rect">
+            <a:avLst/>
+          </a:prstGeom>
+          <a:noFill/>
+        </p:spPr>
+        <p:txBody>
+          <a:bodyPr wrap="square">
+            <a:spAutoFit/>
+          </a:bodyPr>
+          <a:lstStyle/>
+          <a:p>
+            <a:pPr>
+              <a:defRPr sz="2200" b="1">
+                <a:solidFill>
+                  <a:srgbClr val="0F172A"/>
+                </a:solidFill>
+              </a:defRPr>
+            </a:pPr>
+            <a:r>
+              <a:t>Executive Value Proposition &amp; Recommended Next Steps</a:t>
             </a:r>
           </a:p>
         </p:txBody>
@@ -3519,18 +3540,18 @@
         </p:nvSpPr>
         <p:spPr>
           <a:xfrm>
-            <a:off x="4572000" y="2560320"/>
-            <a:ext cx="3108960" cy="3291840"/>
+            <a:off x="731520" y="1600200"/>
+            <a:ext cx="3328416" cy="4389120"/>
           </a:xfrm>
           <a:prstGeom prst="roundRect">
             <a:avLst/>
           </a:prstGeom>
           <a:solidFill>
-            <a:srgbClr val="1B4332"/>
+            <a:srgbClr val="F8FAFC"/>
           </a:solidFill>
-          <a:ln w="19050">
+          <a:ln w="12700">
             <a:solidFill>
-              <a:srgbClr val="B8902E"/>
+              <a:srgbClr val="E2E8F0"/>
             </a:solidFill>
           </a:ln>
         </p:spPr>
@@ -3558,82 +3579,14 @@
       </p:sp>
       <p:sp>
         <p:nvSpPr>
-          <p:cNvPr id="7" name="TextBox 6"/>
-          <p:cNvSpPr txBox="1"/>
-          <p:nvPr/>
-        </p:nvSpPr>
-        <p:spPr>
-          <a:xfrm>
-            <a:off x="4754880" y="2743200"/>
-            <a:ext cx="2743200" cy="2926080"/>
-          </a:xfrm>
-          <a:prstGeom prst="rect">
-            <a:avLst/>
-          </a:prstGeom>
-          <a:noFill/>
-        </p:spPr>
-        <p:txBody>
-          <a:bodyPr wrap="square">
-            <a:spAutoFit/>
-          </a:bodyPr>
-          <a:lstStyle/>
-          <a:p>
-            <a:pPr>
-              <a:spcAft>
-                <a:spcPts val="1000"/>
-              </a:spcAft>
-              <a:defRPr sz="1400" b="1">
-                <a:solidFill>
-                  <a:srgbClr val="FFFFFF"/>
-                </a:solidFill>
-              </a:defRPr>
-            </a:pPr>
-            <a:r>
-              <a:t>Mitigasi Risiko Audit 100%</a:t>
-            </a:r>
-          </a:p>
-          <a:p>
-            <a:pPr>
-              <a:spcAft>
-                <a:spcPts val="600"/>
-              </a:spcAft>
-              <a:defRPr sz="1100">
-                <a:solidFill>
-                  <a:srgbClr val="D7D2C8"/>
-                </a:solidFill>
-              </a:defRPr>
-            </a:pPr>
-            <a:r>
-              <a:t>• Seluruh transaksi berelasi (PSAK 7) terpantau lonjakannya.</a:t>
-            </a:r>
-          </a:p>
-          <a:p>
-            <a:pPr>
-              <a:spcAft>
-                <a:spcPts val="600"/>
-              </a:spcAft>
-              <a:defRPr sz="1100">
-                <a:solidFill>
-                  <a:srgbClr val="D7D2C8"/>
-                </a:solidFill>
-              </a:defRPr>
-            </a:pPr>
-            <a:r>
-              <a:t>• Hak pemegang saham minoritas (PSAK 65) terlindungi secara transparan.</a:t>
-            </a:r>
-          </a:p>
-        </p:txBody>
-      </p:sp>
-      <p:sp>
-        <p:nvSpPr>
-          <p:cNvPr id="8" name="Rounded Rectangle 7"/>
+          <p:cNvPr id="7" name="Rounded Rectangle 6"/>
           <p:cNvSpPr/>
           <p:nvPr/>
         </p:nvSpPr>
         <p:spPr>
           <a:xfrm>
-            <a:off x="8046719" y="2560320"/>
-            <a:ext cx="3108960" cy="3291840"/>
+            <a:off x="731520" y="1600200"/>
+            <a:ext cx="3328416" cy="73152"/>
           </a:xfrm>
           <a:prstGeom prst="roundRect">
             <a:avLst/>
@@ -3641,10 +3594,8 @@
           <a:solidFill>
             <a:srgbClr val="1B4332"/>
           </a:solidFill>
-          <a:ln w="19050">
-            <a:solidFill>
-              <a:srgbClr val="B8902E"/>
-            </a:solidFill>
+          <a:ln>
+            <a:noFill/>
           </a:ln>
         </p:spPr>
         <p:style>
@@ -3671,14 +3622,14 @@
       </p:sp>
       <p:sp>
         <p:nvSpPr>
-          <p:cNvPr id="9" name="TextBox 8"/>
+          <p:cNvPr id="8" name="TextBox 7"/>
           <p:cNvSpPr txBox="1"/>
           <p:nvPr/>
         </p:nvSpPr>
         <p:spPr>
           <a:xfrm>
-            <a:off x="8229599" y="2743200"/>
-            <a:ext cx="2743200" cy="2926080"/>
+            <a:off x="950976" y="1819656"/>
+            <a:ext cx="2889504" cy="3950208"/>
           </a:xfrm>
           <a:prstGeom prst="rect">
             <a:avLst/>
@@ -3693,61 +3644,373 @@
           <a:p>
             <a:pPr>
               <a:spcAft>
-                <a:spcPts val="1000"/>
+                <a:spcPts val="800"/>
               </a:spcAft>
-              <a:defRPr sz="1400" b="1">
-                <a:solidFill>
-                  <a:srgbClr val="FFFFFF"/>
-                </a:solidFill>
-              </a:defRPr>
-            </a:pPr>
-            <a:r>
-              <a:t>Langkah Berikutnya</a:t>
+              <a:defRPr sz="1350" b="1">
+                <a:solidFill>
+                  <a:srgbClr val="1B4332"/>
+                </a:solidFill>
+              </a:defRPr>
+            </a:pPr>
+            <a:r>
+              <a:t>60% Faster Closing Cycle</a:t>
             </a:r>
           </a:p>
           <a:p>
             <a:pPr>
               <a:spcAft>
-                <a:spcPts val="600"/>
+                <a:spcPts val="400"/>
               </a:spcAft>
               <a:defRPr sz="1100">
                 <a:solidFill>
-                  <a:srgbClr val="D7D2C8"/>
-                </a:solidFill>
-              </a:defRPr>
-            </a:pPr>
-            <a:r>
-              <a:t>• 1. Presentasi hasil telaah kepada Komite Audit Yayasan.</a:t>
+                  <a:srgbClr val="1E293B"/>
+                </a:solidFill>
+              </a:defRPr>
+            </a:pPr>
+            <a:r>
+              <a:t>• Automated anomaly screening eliminates tedious manual spreadsheet reconciliations.</a:t>
             </a:r>
           </a:p>
           <a:p>
             <a:pPr>
               <a:spcAft>
-                <a:spcPts val="600"/>
+                <a:spcPts val="400"/>
               </a:spcAft>
               <a:defRPr sz="1100">
                 <a:solidFill>
-                  <a:srgbClr val="D7D2C8"/>
-                </a:solidFill>
-              </a:defRPr>
-            </a:pPr>
-            <a:r>
-              <a:t>• 2. Pengujian data historis audit 2025 untuk validasi sensitivitas.</a:t>
-            </a:r>
-          </a:p>
+                  <a:srgbClr val="1E293B"/>
+                </a:solidFill>
+              </a:defRPr>
+            </a:pPr>
+            <a:r>
+              <a:t>• Immediate flagging of NCI disparities removes late-stage closing bottlenecks.</a:t>
+            </a:r>
+          </a:p>
+        </p:txBody>
+      </p:sp>
+      <p:sp>
+        <p:nvSpPr>
+          <p:cNvPr id="9" name="Rounded Rectangle 8"/>
+          <p:cNvSpPr/>
+          <p:nvPr/>
+        </p:nvSpPr>
+        <p:spPr>
+          <a:xfrm>
+            <a:off x="4416552" y="1600200"/>
+            <a:ext cx="3328416" cy="4389120"/>
+          </a:xfrm>
+          <a:prstGeom prst="roundRect">
+            <a:avLst/>
+          </a:prstGeom>
+          <a:solidFill>
+            <a:srgbClr val="F8FAFC"/>
+          </a:solidFill>
+          <a:ln w="12700">
+            <a:solidFill>
+              <a:srgbClr val="E2E8F0"/>
+            </a:solidFill>
+          </a:ln>
+        </p:spPr>
+        <p:style>
+          <a:lnRef idx="1">
+            <a:schemeClr val="accent1"/>
+          </a:lnRef>
+          <a:fillRef idx="3">
+            <a:schemeClr val="accent1"/>
+          </a:fillRef>
+          <a:effectRef idx="2">
+            <a:schemeClr val="accent1"/>
+          </a:effectRef>
+          <a:fontRef idx="minor">
+            <a:schemeClr val="lt1"/>
+          </a:fontRef>
+        </p:style>
+        <p:txBody>
+          <a:bodyPr rtlCol="0" anchor="ctr"/>
+          <a:lstStyle/>
+          <a:p>
+            <a:pPr algn="ctr"/>
+          </a:p>
+        </p:txBody>
+      </p:sp>
+      <p:sp>
+        <p:nvSpPr>
+          <p:cNvPr id="10" name="Rounded Rectangle 9"/>
+          <p:cNvSpPr/>
+          <p:nvPr/>
+        </p:nvSpPr>
+        <p:spPr>
+          <a:xfrm>
+            <a:off x="4416552" y="1600200"/>
+            <a:ext cx="3328416" cy="73152"/>
+          </a:xfrm>
+          <a:prstGeom prst="roundRect">
+            <a:avLst/>
+          </a:prstGeom>
+          <a:solidFill>
+            <a:srgbClr val="B48214"/>
+          </a:solidFill>
+          <a:ln>
+            <a:noFill/>
+          </a:ln>
+        </p:spPr>
+        <p:style>
+          <a:lnRef idx="1">
+            <a:schemeClr val="accent1"/>
+          </a:lnRef>
+          <a:fillRef idx="3">
+            <a:schemeClr val="accent1"/>
+          </a:fillRef>
+          <a:effectRef idx="2">
+            <a:schemeClr val="accent1"/>
+          </a:effectRef>
+          <a:fontRef idx="minor">
+            <a:schemeClr val="lt1"/>
+          </a:fontRef>
+        </p:style>
+        <p:txBody>
+          <a:bodyPr rtlCol="0" anchor="ctr"/>
+          <a:lstStyle/>
+          <a:p>
+            <a:pPr algn="ctr"/>
+          </a:p>
+        </p:txBody>
+      </p:sp>
+      <p:sp>
+        <p:nvSpPr>
+          <p:cNvPr id="11" name="TextBox 10"/>
+          <p:cNvSpPr txBox="1"/>
+          <p:nvPr/>
+        </p:nvSpPr>
+        <p:spPr>
+          <a:xfrm>
+            <a:off x="4636008" y="1819656"/>
+            <a:ext cx="2889504" cy="3950208"/>
+          </a:xfrm>
+          <a:prstGeom prst="rect">
+            <a:avLst/>
+          </a:prstGeom>
+          <a:noFill/>
+        </p:spPr>
+        <p:txBody>
+          <a:bodyPr wrap="square">
+            <a:spAutoFit/>
+          </a:bodyPr>
+          <a:lstStyle/>
           <a:p>
             <a:pPr>
               <a:spcAft>
-                <a:spcPts val="600"/>
+                <a:spcPts val="800"/>
+              </a:spcAft>
+              <a:defRPr sz="1350" b="1">
+                <a:solidFill>
+                  <a:srgbClr val="B48214"/>
+                </a:solidFill>
+              </a:defRPr>
+            </a:pPr>
+            <a:r>
+              <a:t>100% Audit Readiness</a:t>
+            </a:r>
+          </a:p>
+          <a:p>
+            <a:pPr>
+              <a:spcAft>
+                <a:spcPts val="400"/>
               </a:spcAft>
               <a:defRPr sz="1100">
                 <a:solidFill>
-                  <a:srgbClr val="D7D2C8"/>
-                </a:solidFill>
-              </a:defRPr>
-            </a:pPr>
-            <a:r>
-              <a:t>• 3. Integrasi feed ERP langsung untuk otomasi periode berikutnya.</a:t>
+                  <a:srgbClr val="1E293B"/>
+                </a:solidFill>
+              </a:defRPr>
+            </a:pPr>
+            <a:r>
+              <a:t>• Continuous adherence to IFRS 10 (NCI) and IAS 24 (Related Parties).</a:t>
+            </a:r>
+          </a:p>
+          <a:p>
+            <a:pPr>
+              <a:spcAft>
+                <a:spcPts val="400"/>
+              </a:spcAft>
+              <a:defRPr sz="1100">
+                <a:solidFill>
+                  <a:srgbClr val="1E293B"/>
+                </a:solidFill>
+              </a:defRPr>
+            </a:pPr>
+            <a:r>
+              <a:t>• Complete digital audit trail protects holding executives and board members.</a:t>
+            </a:r>
+          </a:p>
+        </p:txBody>
+      </p:sp>
+      <p:sp>
+        <p:nvSpPr>
+          <p:cNvPr id="12" name="Rounded Rectangle 11"/>
+          <p:cNvSpPr/>
+          <p:nvPr/>
+        </p:nvSpPr>
+        <p:spPr>
+          <a:xfrm>
+            <a:off x="8101584" y="1600200"/>
+            <a:ext cx="3328416" cy="4389120"/>
+          </a:xfrm>
+          <a:prstGeom prst="roundRect">
+            <a:avLst/>
+          </a:prstGeom>
+          <a:solidFill>
+            <a:srgbClr val="F8FAFC"/>
+          </a:solidFill>
+          <a:ln w="12700">
+            <a:solidFill>
+              <a:srgbClr val="E2E8F0"/>
+            </a:solidFill>
+          </a:ln>
+        </p:spPr>
+        <p:style>
+          <a:lnRef idx="1">
+            <a:schemeClr val="accent1"/>
+          </a:lnRef>
+          <a:fillRef idx="3">
+            <a:schemeClr val="accent1"/>
+          </a:fillRef>
+          <a:effectRef idx="2">
+            <a:schemeClr val="accent1"/>
+          </a:effectRef>
+          <a:fontRef idx="minor">
+            <a:schemeClr val="lt1"/>
+          </a:fontRef>
+        </p:style>
+        <p:txBody>
+          <a:bodyPr rtlCol="0" anchor="ctr"/>
+          <a:lstStyle/>
+          <a:p>
+            <a:pPr algn="ctr"/>
+          </a:p>
+        </p:txBody>
+      </p:sp>
+      <p:sp>
+        <p:nvSpPr>
+          <p:cNvPr id="13" name="Rounded Rectangle 12"/>
+          <p:cNvSpPr/>
+          <p:nvPr/>
+        </p:nvSpPr>
+        <p:spPr>
+          <a:xfrm>
+            <a:off x="8101584" y="1600200"/>
+            <a:ext cx="3328416" cy="73152"/>
+          </a:xfrm>
+          <a:prstGeom prst="roundRect">
+            <a:avLst/>
+          </a:prstGeom>
+          <a:solidFill>
+            <a:srgbClr val="0284C7"/>
+          </a:solidFill>
+          <a:ln>
+            <a:noFill/>
+          </a:ln>
+        </p:spPr>
+        <p:style>
+          <a:lnRef idx="1">
+            <a:schemeClr val="accent1"/>
+          </a:lnRef>
+          <a:fillRef idx="3">
+            <a:schemeClr val="accent1"/>
+          </a:fillRef>
+          <a:effectRef idx="2">
+            <a:schemeClr val="accent1"/>
+          </a:effectRef>
+          <a:fontRef idx="minor">
+            <a:schemeClr val="lt1"/>
+          </a:fontRef>
+        </p:style>
+        <p:txBody>
+          <a:bodyPr rtlCol="0" anchor="ctr"/>
+          <a:lstStyle/>
+          <a:p>
+            <a:pPr algn="ctr"/>
+          </a:p>
+        </p:txBody>
+      </p:sp>
+      <p:sp>
+        <p:nvSpPr>
+          <p:cNvPr id="14" name="TextBox 13"/>
+          <p:cNvSpPr txBox="1"/>
+          <p:nvPr/>
+        </p:nvSpPr>
+        <p:spPr>
+          <a:xfrm>
+            <a:off x="8321040" y="1819656"/>
+            <a:ext cx="2889504" cy="3950208"/>
+          </a:xfrm>
+          <a:prstGeom prst="rect">
+            <a:avLst/>
+          </a:prstGeom>
+          <a:noFill/>
+        </p:spPr>
+        <p:txBody>
+          <a:bodyPr wrap="square">
+            <a:spAutoFit/>
+          </a:bodyPr>
+          <a:lstStyle/>
+          <a:p>
+            <a:pPr>
+              <a:spcAft>
+                <a:spcPts val="800"/>
+              </a:spcAft>
+              <a:defRPr sz="1350" b="1">
+                <a:solidFill>
+                  <a:srgbClr val="0284C7"/>
+                </a:solidFill>
+              </a:defRPr>
+            </a:pPr>
+            <a:r>
+              <a:t>Recommended Next Steps</a:t>
+            </a:r>
+          </a:p>
+          <a:p>
+            <a:pPr>
+              <a:spcAft>
+                <a:spcPts val="400"/>
+              </a:spcAft>
+              <a:defRPr sz="1100">
+                <a:solidFill>
+                  <a:srgbClr val="1E293B"/>
+                </a:solidFill>
+              </a:defRPr>
+            </a:pPr>
+            <a:r>
+              <a:t>• 1. Present PoC findings to the Audit Committee and Group CFO.</a:t>
+            </a:r>
+          </a:p>
+          <a:p>
+            <a:pPr>
+              <a:spcAft>
+                <a:spcPts val="400"/>
+              </a:spcAft>
+              <a:defRPr sz="1100">
+                <a:solidFill>
+                  <a:srgbClr val="1E293B"/>
+                </a:solidFill>
+              </a:defRPr>
+            </a:pPr>
+            <a:r>
+              <a:t>• 2. Execute pilot validation using 2025 audited financial statements.</a:t>
+            </a:r>
+          </a:p>
+          <a:p>
+            <a:pPr>
+              <a:spcAft>
+                <a:spcPts val="400"/>
+              </a:spcAft>
+              <a:defRPr sz="1100">
+                <a:solidFill>
+                  <a:srgbClr val="1E293B"/>
+                </a:solidFill>
+              </a:defRPr>
+            </a:pPr>
+            <a:r>
+              <a:t>• 3. Establish direct subsidiary GL connectors for automated data feeds.</a:t>
             </a:r>
           </a:p>
         </p:txBody>
@@ -3785,7 +4048,7 @@
             <a:avLst/>
           </a:prstGeom>
           <a:solidFill>
-            <a:srgbClr val="F6F3EC"/>
+            <a:srgbClr val="FFFFFF"/>
           </a:solidFill>
           <a:ln>
             <a:noFill/>
@@ -3815,95 +4078,23 @@
       </p:sp>
       <p:sp>
         <p:nvSpPr>
-          <p:cNvPr id="3" name="TextBox 2"/>
-          <p:cNvSpPr txBox="1"/>
-          <p:nvPr/>
-        </p:nvSpPr>
-        <p:spPr>
-          <a:xfrm>
-            <a:off x="731520" y="457200"/>
-            <a:ext cx="9144000" cy="365760"/>
+          <p:cNvPr id="3" name="Rectangle 2"/>
+          <p:cNvSpPr/>
+          <p:nvPr/>
+        </p:nvSpPr>
+        <p:spPr>
+          <a:xfrm>
+            <a:off x="731520" y="365760"/>
+            <a:ext cx="10728655" cy="36576"/>
           </a:xfrm>
           <a:prstGeom prst="rect">
             <a:avLst/>
           </a:prstGeom>
-          <a:noFill/>
-        </p:spPr>
-        <p:txBody>
-          <a:bodyPr wrap="square">
-            <a:spAutoFit/>
-          </a:bodyPr>
-          <a:lstStyle/>
-          <a:p>
-            <a:pPr>
-              <a:defRPr sz="1050" b="1">
-                <a:solidFill>
-                  <a:srgbClr val="B8902E"/>
-                </a:solidFill>
-              </a:defRPr>
-            </a:pPr>
-            <a:r>
-              <a:t>LATAR BELAKANG &amp; MASALAH</a:t>
-            </a:r>
-          </a:p>
-        </p:txBody>
-      </p:sp>
-      <p:sp>
-        <p:nvSpPr>
-          <p:cNvPr id="4" name="TextBox 3"/>
-          <p:cNvSpPr txBox="1"/>
-          <p:nvPr/>
-        </p:nvSpPr>
-        <p:spPr>
-          <a:xfrm>
-            <a:off x="731520" y="731520"/>
-            <a:ext cx="10698480" cy="640080"/>
-          </a:xfrm>
-          <a:prstGeom prst="rect">
-            <a:avLst/>
-          </a:prstGeom>
-          <a:noFill/>
-        </p:spPr>
-        <p:txBody>
-          <a:bodyPr wrap="square">
-            <a:spAutoFit/>
-          </a:bodyPr>
-          <a:lstStyle/>
-          <a:p>
-            <a:pPr>
-              <a:defRPr sz="2200" b="1">
-                <a:solidFill>
-                  <a:srgbClr val="0F2A1D"/>
-                </a:solidFill>
-              </a:defRPr>
-            </a:pPr>
-            <a:r>
-              <a:t>Tantangan Konsolidasi Finansial Multientitas</a:t>
-            </a:r>
-          </a:p>
-        </p:txBody>
-      </p:sp>
-      <p:sp>
-        <p:nvSpPr>
-          <p:cNvPr id="5" name="Rounded Rectangle 4"/>
-          <p:cNvSpPr/>
-          <p:nvPr/>
-        </p:nvSpPr>
-        <p:spPr>
-          <a:xfrm>
-            <a:off x="731520" y="1554480"/>
-            <a:ext cx="3328416" cy="4389120"/>
-          </a:xfrm>
-          <a:prstGeom prst="roundRect">
-            <a:avLst/>
-          </a:prstGeom>
           <a:solidFill>
-            <a:srgbClr val="FFFFFF"/>
+            <a:srgbClr val="1B4332"/>
           </a:solidFill>
-          <a:ln w="19050">
-            <a:solidFill>
-              <a:srgbClr val="A6402A"/>
-            </a:solidFill>
+          <a:ln>
+            <a:noFill/>
           </a:ln>
         </p:spPr>
         <p:style>
@@ -3930,14 +4121,14 @@
       </p:sp>
       <p:sp>
         <p:nvSpPr>
-          <p:cNvPr id="6" name="TextBox 5"/>
+          <p:cNvPr id="4" name="TextBox 3"/>
           <p:cNvSpPr txBox="1"/>
           <p:nvPr/>
         </p:nvSpPr>
         <p:spPr>
           <a:xfrm>
-            <a:off x="932688" y="1755648"/>
-            <a:ext cx="2926080" cy="3986784"/>
+            <a:off x="731520" y="502920"/>
+            <a:ext cx="9144000" cy="320040"/>
           </a:xfrm>
           <a:prstGeom prst="rect">
             <a:avLst/>
@@ -3951,101 +4142,73 @@
           <a:lstStyle/>
           <a:p>
             <a:pPr>
-              <a:spcAft>
-                <a:spcPts val="800"/>
-              </a:spcAft>
-              <a:defRPr sz="1400" b="1">
-                <a:solidFill>
-                  <a:srgbClr val="A6402A"/>
-                </a:solidFill>
-              </a:defRPr>
-            </a:pPr>
-            <a:r>
-              <a:t>1. Kebocoran Alokasi NCI (PSAK 65)</a:t>
-            </a:r>
-          </a:p>
-          <a:p>
-            <a:pPr>
-              <a:spcAft>
-                <a:spcPts val="400"/>
-              </a:spcAft>
-              <a:defRPr sz="1150">
-                <a:solidFill>
-                  <a:srgbClr val="5C564A"/>
-                </a:solidFill>
-              </a:defRPr>
-            </a:pPr>
-            <a:r>
-              <a:t>• Kepemilikan minoritas (NCI 22% - 40%) pada 4 anak perusahaan rawan ketidaksesuaian matematis.</a:t>
-            </a:r>
-          </a:p>
-          <a:p>
-            <a:pPr>
-              <a:spcAft>
-                <a:spcPts val="400"/>
-              </a:spcAft>
-              <a:defRPr sz="1150">
-                <a:solidFill>
-                  <a:srgbClr val="5C564A"/>
-                </a:solidFill>
-              </a:defRPr>
-            </a:pPr>
-            <a:r>
-              <a:t>• Kasus PT Anak II: Laba NCI dilaporkan 24.4 M vs porsi proporsional 18.2 M (deviasi +34.1%).</a:t>
-            </a:r>
-          </a:p>
-          <a:p>
-            <a:pPr>
-              <a:spcAft>
-                <a:spcPts val="400"/>
-              </a:spcAft>
-              <a:defRPr sz="1150">
-                <a:solidFill>
-                  <a:srgbClr val="5C564A"/>
-                </a:solidFill>
-              </a:defRPr>
-            </a:pPr>
-            <a:r>
-              <a:t>• Dampak: Understatement laba yang dapat diatribusikan ke induk yayasan atau dividen terselubung.</a:t>
-            </a:r>
-          </a:p>
-          <a:p>
-            <a:pPr>
-              <a:spcAft>
-                <a:spcPts val="400"/>
-              </a:spcAft>
-              <a:defRPr sz="1150">
-                <a:solidFill>
-                  <a:srgbClr val="5C564A"/>
-                </a:solidFill>
-              </a:defRPr>
-            </a:pPr>
-            <a:r>
-              <a:t>• Spreadsheet manual tidak memiliki validasi otomatis atas hak efektif pemegang saham non-pengendali.</a:t>
-            </a:r>
-          </a:p>
-        </p:txBody>
-      </p:sp>
-      <p:sp>
-        <p:nvSpPr>
-          <p:cNvPr id="7" name="Rounded Rectangle 6"/>
+              <a:defRPr sz="1000" b="1">
+                <a:solidFill>
+                  <a:srgbClr val="B48214"/>
+                </a:solidFill>
+              </a:defRPr>
+            </a:pPr>
+            <a:r>
+              <a:t>PROBLEM STATEMENT &amp; CONTEXT</a:t>
+            </a:r>
+          </a:p>
+        </p:txBody>
+      </p:sp>
+      <p:sp>
+        <p:nvSpPr>
+          <p:cNvPr id="5" name="TextBox 4"/>
+          <p:cNvSpPr txBox="1"/>
+          <p:nvPr/>
+        </p:nvSpPr>
+        <p:spPr>
+          <a:xfrm>
+            <a:off x="731520" y="777240"/>
+            <a:ext cx="10728655" cy="640080"/>
+          </a:xfrm>
+          <a:prstGeom prst="rect">
+            <a:avLst/>
+          </a:prstGeom>
+          <a:noFill/>
+        </p:spPr>
+        <p:txBody>
+          <a:bodyPr wrap="square">
+            <a:spAutoFit/>
+          </a:bodyPr>
+          <a:lstStyle/>
+          <a:p>
+            <a:pPr>
+              <a:defRPr sz="2200" b="1">
+                <a:solidFill>
+                  <a:srgbClr val="0F172A"/>
+                </a:solidFill>
+              </a:defRPr>
+            </a:pPr>
+            <a:r>
+              <a:t>The Multi-Entity Consolidation Challenge</a:t>
+            </a:r>
+          </a:p>
+        </p:txBody>
+      </p:sp>
+      <p:sp>
+        <p:nvSpPr>
+          <p:cNvPr id="6" name="Rounded Rectangle 5"/>
           <p:cNvSpPr/>
           <p:nvPr/>
         </p:nvSpPr>
         <p:spPr>
           <a:xfrm>
-            <a:off x="4425696" y="1554480"/>
+            <a:off x="731520" y="1600200"/>
             <a:ext cx="3328416" cy="4389120"/>
           </a:xfrm>
           <a:prstGeom prst="roundRect">
             <a:avLst/>
           </a:prstGeom>
           <a:solidFill>
-            <a:srgbClr val="FFFFFF"/>
+            <a:srgbClr val="F8FAFC"/>
           </a:solidFill>
-          <a:ln w="19050">
+          <a:ln w="12700">
             <a:solidFill>
-              <a:srgbClr val="B8902E"/>
+              <a:srgbClr val="E2E8F0"/>
             </a:solidFill>
           </a:ln>
         </p:spPr>
@@ -4073,123 +4236,23 @@
       </p:sp>
       <p:sp>
         <p:nvSpPr>
-          <p:cNvPr id="8" name="TextBox 7"/>
-          <p:cNvSpPr txBox="1"/>
-          <p:nvPr/>
-        </p:nvSpPr>
-        <p:spPr>
-          <a:xfrm>
-            <a:off x="4626864" y="1755648"/>
-            <a:ext cx="2926080" cy="3986784"/>
-          </a:xfrm>
-          <a:prstGeom prst="rect">
-            <a:avLst/>
-          </a:prstGeom>
-          <a:noFill/>
-        </p:spPr>
-        <p:txBody>
-          <a:bodyPr wrap="square">
-            <a:spAutoFit/>
-          </a:bodyPr>
-          <a:lstStyle/>
-          <a:p>
-            <a:pPr>
-              <a:spcAft>
-                <a:spcPts val="800"/>
-              </a:spcAft>
-              <a:defRPr sz="1400" b="1">
-                <a:solidFill>
-                  <a:srgbClr val="B8902E"/>
-                </a:solidFill>
-              </a:defRPr>
-            </a:pPr>
-            <a:r>
-              <a:t>2. Lonjakan Piutang Berelasi (PSAK 7)</a:t>
-            </a:r>
-          </a:p>
-          <a:p>
-            <a:pPr>
-              <a:spcAft>
-                <a:spcPts val="400"/>
-              </a:spcAft>
-              <a:defRPr sz="1150">
-                <a:solidFill>
-                  <a:srgbClr val="5C564A"/>
-                </a:solidFill>
-              </a:defRPr>
-            </a:pPr>
-            <a:r>
-              <a:t>• Piutang pihak berelasi (related-party) konsolidasi melonjak tajam tanpa pertumbuhan omzet sepadan.</a:t>
-            </a:r>
-          </a:p>
-          <a:p>
-            <a:pPr>
-              <a:spcAft>
-                <a:spcPts val="400"/>
-              </a:spcAft>
-              <a:defRPr sz="1150">
-                <a:solidFill>
-                  <a:srgbClr val="5C564A"/>
-                </a:solidFill>
-              </a:defRPr>
-            </a:pPr>
-            <a:r>
-              <a:t>• Kasus PT Anak II: Piutang relasi melesat +158.8% YoY sementara pendapatan hanya tumbuh +4.9%.</a:t>
-            </a:r>
-          </a:p>
-          <a:p>
-            <a:pPr>
-              <a:spcAft>
-                <a:spcPts val="400"/>
-              </a:spcAft>
-              <a:defRPr sz="1150">
-                <a:solidFill>
-                  <a:srgbClr val="5C564A"/>
-                </a:solidFill>
-              </a:defRPr>
-            </a:pPr>
-            <a:r>
-              <a:t>• Risiko likuiditas terserap ke entitas afiliasi lain secara non-arms-length.</a:t>
-            </a:r>
-          </a:p>
-          <a:p>
-            <a:pPr>
-              <a:spcAft>
-                <a:spcPts val="400"/>
-              </a:spcAft>
-              <a:defRPr sz="1150">
-                <a:solidFill>
-                  <a:srgbClr val="5C564A"/>
-                </a:solidFill>
-              </a:defRPr>
-            </a:pPr>
-            <a:r>
-              <a:t>• Potensi bad debts tersembunyi dan komplikasi eliminasi intercompany pada akhir periode.</a:t>
-            </a:r>
-          </a:p>
-        </p:txBody>
-      </p:sp>
-      <p:sp>
-        <p:nvSpPr>
-          <p:cNvPr id="9" name="Rounded Rectangle 8"/>
+          <p:cNvPr id="7" name="Rounded Rectangle 6"/>
           <p:cNvSpPr/>
           <p:nvPr/>
         </p:nvSpPr>
         <p:spPr>
           <a:xfrm>
-            <a:off x="8119872" y="1554480"/>
-            <a:ext cx="3328416" cy="4389120"/>
+            <a:off x="731520" y="1600200"/>
+            <a:ext cx="3328416" cy="73152"/>
           </a:xfrm>
           <a:prstGeom prst="roundRect">
             <a:avLst/>
           </a:prstGeom>
           <a:solidFill>
-            <a:srgbClr val="FFFFFF"/>
+            <a:srgbClr val="E11D48"/>
           </a:solidFill>
-          <a:ln w="19050">
-            <a:solidFill>
-              <a:srgbClr val="1B4332"/>
-            </a:solidFill>
+          <a:ln>
+            <a:noFill/>
           </a:ln>
         </p:spPr>
         <p:style>
@@ -4216,14 +4279,14 @@
       </p:sp>
       <p:sp>
         <p:nvSpPr>
-          <p:cNvPr id="10" name="TextBox 9"/>
+          <p:cNvPr id="8" name="TextBox 7"/>
           <p:cNvSpPr txBox="1"/>
           <p:nvPr/>
         </p:nvSpPr>
         <p:spPr>
           <a:xfrm>
-            <a:off x="8321040" y="1755648"/>
-            <a:ext cx="2926080" cy="3986784"/>
+            <a:off x="950976" y="1819656"/>
+            <a:ext cx="2889504" cy="3950208"/>
           </a:xfrm>
           <a:prstGeom prst="rect">
             <a:avLst/>
@@ -4240,14 +4303,14 @@
               <a:spcAft>
                 <a:spcPts val="800"/>
               </a:spcAft>
-              <a:defRPr sz="1400" b="1">
-                <a:solidFill>
-                  <a:srgbClr val="1B4332"/>
-                </a:solidFill>
-              </a:defRPr>
-            </a:pPr>
-            <a:r>
-              <a:t>3. Ketiadaan Audit Trail Terintegrasi</a:t>
+              <a:defRPr sz="1350" b="1">
+                <a:solidFill>
+                  <a:srgbClr val="E11D48"/>
+                </a:solidFill>
+              </a:defRPr>
+            </a:pPr>
+            <a:r>
+              <a:t>1. NCI Allocation Leakage (IFRS 10)</a:t>
             </a:r>
           </a:p>
           <a:p>
@@ -4255,14 +4318,14 @@
               <a:spcAft>
                 <a:spcPts val="400"/>
               </a:spcAft>
-              <a:defRPr sz="1150">
-                <a:solidFill>
-                  <a:srgbClr val="5C564A"/>
-                </a:solidFill>
-              </a:defRPr>
-            </a:pPr>
-            <a:r>
-              <a:t>• Review konsolidasi terfragmentasi antara email, catatan kertas kerja terpisah, dan spreadsheet.</a:t>
+              <a:defRPr sz="1100">
+                <a:solidFill>
+                  <a:srgbClr val="1E293B"/>
+                </a:solidFill>
+              </a:defRPr>
+            </a:pPr>
+            <a:r>
+              <a:t>• Minority interests (NCI 22% - 40%) across 4 operating subsidiaries are prone to manual calculation errors.</a:t>
             </a:r>
           </a:p>
           <a:p>
@@ -4270,14 +4333,14 @@
               <a:spcAft>
                 <a:spcPts val="400"/>
               </a:spcAft>
-              <a:defRPr sz="1150">
-                <a:solidFill>
-                  <a:srgbClr val="5C564A"/>
-                </a:solidFill>
-              </a:defRPr>
-            </a:pPr>
-            <a:r>
-              <a:t>• Komite Audit dan CFO tidak memiliki visibilitas atas tindak lanjut klarifikasi anomali.</a:t>
+              <a:defRPr sz="1100">
+                <a:solidFill>
+                  <a:srgbClr val="1E293B"/>
+                </a:solidFill>
+              </a:defRPr>
+            </a:pPr>
+            <a:r>
+              <a:t>• Case in Point: Subsidiary II reported NCI profit share of $24.4M vs. statutory share of $18.2M (+34.1% gap).</a:t>
             </a:r>
           </a:p>
           <a:p>
@@ -4285,14 +4348,14 @@
               <a:spcAft>
                 <a:spcPts val="400"/>
               </a:spcAft>
-              <a:defRPr sz="1150">
-                <a:solidFill>
-                  <a:srgbClr val="5C564A"/>
-                </a:solidFill>
-              </a:defRPr>
-            </a:pPr>
-            <a:r>
-              <a:t>• Tidak ada tracking formal atas temuan yang memerlukan jurnal penyesuaian audit vs justifikasi operasional.</a:t>
+              <a:defRPr sz="1100">
+                <a:solidFill>
+                  <a:srgbClr val="1E293B"/>
+                </a:solidFill>
+              </a:defRPr>
+            </a:pPr>
+            <a:r>
+              <a:t>• Material Impact: Distorts parent net income downwards or masks disguised profit extractions.</a:t>
             </a:r>
           </a:p>
           <a:p>
@@ -4300,14 +4363,386 @@
               <a:spcAft>
                 <a:spcPts val="400"/>
               </a:spcAft>
-              <a:defRPr sz="1150">
-                <a:solidFill>
-                  <a:srgbClr val="5C564A"/>
-                </a:solidFill>
-              </a:defRPr>
-            </a:pPr>
-            <a:r>
-              <a:t>• Keterlambatan mitigasi risiko hingga temuan muncul pada audit eksternal formal.</a:t>
+              <a:defRPr sz="1100">
+                <a:solidFill>
+                  <a:srgbClr val="1E293B"/>
+                </a:solidFill>
+              </a:defRPr>
+            </a:pPr>
+            <a:r>
+              <a:t>• Traditional spreadsheets lack automated mathematical reconciliation of effective minority stakes.</a:t>
+            </a:r>
+          </a:p>
+        </p:txBody>
+      </p:sp>
+      <p:sp>
+        <p:nvSpPr>
+          <p:cNvPr id="9" name="Rounded Rectangle 8"/>
+          <p:cNvSpPr/>
+          <p:nvPr/>
+        </p:nvSpPr>
+        <p:spPr>
+          <a:xfrm>
+            <a:off x="4425696" y="1600200"/>
+            <a:ext cx="3328416" cy="4389120"/>
+          </a:xfrm>
+          <a:prstGeom prst="roundRect">
+            <a:avLst/>
+          </a:prstGeom>
+          <a:solidFill>
+            <a:srgbClr val="F8FAFC"/>
+          </a:solidFill>
+          <a:ln w="12700">
+            <a:solidFill>
+              <a:srgbClr val="E2E8F0"/>
+            </a:solidFill>
+          </a:ln>
+        </p:spPr>
+        <p:style>
+          <a:lnRef idx="1">
+            <a:schemeClr val="accent1"/>
+          </a:lnRef>
+          <a:fillRef idx="3">
+            <a:schemeClr val="accent1"/>
+          </a:fillRef>
+          <a:effectRef idx="2">
+            <a:schemeClr val="accent1"/>
+          </a:effectRef>
+          <a:fontRef idx="minor">
+            <a:schemeClr val="lt1"/>
+          </a:fontRef>
+        </p:style>
+        <p:txBody>
+          <a:bodyPr rtlCol="0" anchor="ctr"/>
+          <a:lstStyle/>
+          <a:p>
+            <a:pPr algn="ctr"/>
+          </a:p>
+        </p:txBody>
+      </p:sp>
+      <p:sp>
+        <p:nvSpPr>
+          <p:cNvPr id="10" name="Rounded Rectangle 9"/>
+          <p:cNvSpPr/>
+          <p:nvPr/>
+        </p:nvSpPr>
+        <p:spPr>
+          <a:xfrm>
+            <a:off x="4425696" y="1600200"/>
+            <a:ext cx="3328416" cy="73152"/>
+          </a:xfrm>
+          <a:prstGeom prst="roundRect">
+            <a:avLst/>
+          </a:prstGeom>
+          <a:solidFill>
+            <a:srgbClr val="D97706"/>
+          </a:solidFill>
+          <a:ln>
+            <a:noFill/>
+          </a:ln>
+        </p:spPr>
+        <p:style>
+          <a:lnRef idx="1">
+            <a:schemeClr val="accent1"/>
+          </a:lnRef>
+          <a:fillRef idx="3">
+            <a:schemeClr val="accent1"/>
+          </a:fillRef>
+          <a:effectRef idx="2">
+            <a:schemeClr val="accent1"/>
+          </a:effectRef>
+          <a:fontRef idx="minor">
+            <a:schemeClr val="lt1"/>
+          </a:fontRef>
+        </p:style>
+        <p:txBody>
+          <a:bodyPr rtlCol="0" anchor="ctr"/>
+          <a:lstStyle/>
+          <a:p>
+            <a:pPr algn="ctr"/>
+          </a:p>
+        </p:txBody>
+      </p:sp>
+      <p:sp>
+        <p:nvSpPr>
+          <p:cNvPr id="11" name="TextBox 10"/>
+          <p:cNvSpPr txBox="1"/>
+          <p:nvPr/>
+        </p:nvSpPr>
+        <p:spPr>
+          <a:xfrm>
+            <a:off x="4645152" y="1819656"/>
+            <a:ext cx="2889504" cy="3950208"/>
+          </a:xfrm>
+          <a:prstGeom prst="rect">
+            <a:avLst/>
+          </a:prstGeom>
+          <a:noFill/>
+        </p:spPr>
+        <p:txBody>
+          <a:bodyPr wrap="square">
+            <a:spAutoFit/>
+          </a:bodyPr>
+          <a:lstStyle/>
+          <a:p>
+            <a:pPr>
+              <a:spcAft>
+                <a:spcPts val="800"/>
+              </a:spcAft>
+              <a:defRPr sz="1350" b="1">
+                <a:solidFill>
+                  <a:srgbClr val="D97706"/>
+                </a:solidFill>
+              </a:defRPr>
+            </a:pPr>
+            <a:r>
+              <a:t>2. Related-Party Debt Spikes (IAS 24)</a:t>
+            </a:r>
+          </a:p>
+          <a:p>
+            <a:pPr>
+              <a:spcAft>
+                <a:spcPts val="400"/>
+              </a:spcAft>
+              <a:defRPr sz="1100">
+                <a:solidFill>
+                  <a:srgbClr val="1E293B"/>
+                </a:solidFill>
+              </a:defRPr>
+            </a:pPr>
+            <a:r>
+              <a:t>• Intercompany receivables frequently surge without commensurate commercial revenue growth.</a:t>
+            </a:r>
+          </a:p>
+          <a:p>
+            <a:pPr>
+              <a:spcAft>
+                <a:spcPts val="400"/>
+              </a:spcAft>
+              <a:defRPr sz="1100">
+                <a:solidFill>
+                  <a:srgbClr val="1E293B"/>
+                </a:solidFill>
+              </a:defRPr>
+            </a:pPr>
+            <a:r>
+              <a:t>• Case in Point: Subsidiary II related-party receivables spiked +158.8% YoY while revenues grew just +4.9%.</a:t>
+            </a:r>
+          </a:p>
+          <a:p>
+            <a:pPr>
+              <a:spcAft>
+                <a:spcPts val="400"/>
+              </a:spcAft>
+              <a:defRPr sz="1100">
+                <a:solidFill>
+                  <a:srgbClr val="1E293B"/>
+                </a:solidFill>
+              </a:defRPr>
+            </a:pPr>
+            <a:r>
+              <a:t>• Severe Risk: Holding liquidity becomes trapped in affiliated entities under non-arms-length terms.</a:t>
+            </a:r>
+          </a:p>
+          <a:p>
+            <a:pPr>
+              <a:spcAft>
+                <a:spcPts val="400"/>
+              </a:spcAft>
+              <a:defRPr sz="1100">
+                <a:solidFill>
+                  <a:srgbClr val="1E293B"/>
+                </a:solidFill>
+              </a:defRPr>
+            </a:pPr>
+            <a:r>
+              <a:t>• Increases intercompany elimination friction and triggers uncollectible debt exposure.</a:t>
+            </a:r>
+          </a:p>
+        </p:txBody>
+      </p:sp>
+      <p:sp>
+        <p:nvSpPr>
+          <p:cNvPr id="12" name="Rounded Rectangle 11"/>
+          <p:cNvSpPr/>
+          <p:nvPr/>
+        </p:nvSpPr>
+        <p:spPr>
+          <a:xfrm>
+            <a:off x="8119872" y="1600200"/>
+            <a:ext cx="3328416" cy="4389120"/>
+          </a:xfrm>
+          <a:prstGeom prst="roundRect">
+            <a:avLst/>
+          </a:prstGeom>
+          <a:solidFill>
+            <a:srgbClr val="F8FAFC"/>
+          </a:solidFill>
+          <a:ln w="12700">
+            <a:solidFill>
+              <a:srgbClr val="E2E8F0"/>
+            </a:solidFill>
+          </a:ln>
+        </p:spPr>
+        <p:style>
+          <a:lnRef idx="1">
+            <a:schemeClr val="accent1"/>
+          </a:lnRef>
+          <a:fillRef idx="3">
+            <a:schemeClr val="accent1"/>
+          </a:fillRef>
+          <a:effectRef idx="2">
+            <a:schemeClr val="accent1"/>
+          </a:effectRef>
+          <a:fontRef idx="minor">
+            <a:schemeClr val="lt1"/>
+          </a:fontRef>
+        </p:style>
+        <p:txBody>
+          <a:bodyPr rtlCol="0" anchor="ctr"/>
+          <a:lstStyle/>
+          <a:p>
+            <a:pPr algn="ctr"/>
+          </a:p>
+        </p:txBody>
+      </p:sp>
+      <p:sp>
+        <p:nvSpPr>
+          <p:cNvPr id="13" name="Rounded Rectangle 12"/>
+          <p:cNvSpPr/>
+          <p:nvPr/>
+        </p:nvSpPr>
+        <p:spPr>
+          <a:xfrm>
+            <a:off x="8119872" y="1600200"/>
+            <a:ext cx="3328416" cy="73152"/>
+          </a:xfrm>
+          <a:prstGeom prst="roundRect">
+            <a:avLst/>
+          </a:prstGeom>
+          <a:solidFill>
+            <a:srgbClr val="0284C7"/>
+          </a:solidFill>
+          <a:ln>
+            <a:noFill/>
+          </a:ln>
+        </p:spPr>
+        <p:style>
+          <a:lnRef idx="1">
+            <a:schemeClr val="accent1"/>
+          </a:lnRef>
+          <a:fillRef idx="3">
+            <a:schemeClr val="accent1"/>
+          </a:fillRef>
+          <a:effectRef idx="2">
+            <a:schemeClr val="accent1"/>
+          </a:effectRef>
+          <a:fontRef idx="minor">
+            <a:schemeClr val="lt1"/>
+          </a:fontRef>
+        </p:style>
+        <p:txBody>
+          <a:bodyPr rtlCol="0" anchor="ctr"/>
+          <a:lstStyle/>
+          <a:p>
+            <a:pPr algn="ctr"/>
+          </a:p>
+        </p:txBody>
+      </p:sp>
+      <p:sp>
+        <p:nvSpPr>
+          <p:cNvPr id="14" name="TextBox 13"/>
+          <p:cNvSpPr txBox="1"/>
+          <p:nvPr/>
+        </p:nvSpPr>
+        <p:spPr>
+          <a:xfrm>
+            <a:off x="8339328" y="1819656"/>
+            <a:ext cx="2889504" cy="3950208"/>
+          </a:xfrm>
+          <a:prstGeom prst="rect">
+            <a:avLst/>
+          </a:prstGeom>
+          <a:noFill/>
+        </p:spPr>
+        <p:txBody>
+          <a:bodyPr wrap="square">
+            <a:spAutoFit/>
+          </a:bodyPr>
+          <a:lstStyle/>
+          <a:p>
+            <a:pPr>
+              <a:spcAft>
+                <a:spcPts val="800"/>
+              </a:spcAft>
+              <a:defRPr sz="1350" b="1">
+                <a:solidFill>
+                  <a:srgbClr val="0284C7"/>
+                </a:solidFill>
+              </a:defRPr>
+            </a:pPr>
+            <a:r>
+              <a:t>3. Fragmented Audit Trails</a:t>
+            </a:r>
+          </a:p>
+          <a:p>
+            <a:pPr>
+              <a:spcAft>
+                <a:spcPts val="400"/>
+              </a:spcAft>
+              <a:defRPr sz="1100">
+                <a:solidFill>
+                  <a:srgbClr val="1E293B"/>
+                </a:solidFill>
+              </a:defRPr>
+            </a:pPr>
+            <a:r>
+              <a:t>• Consolidation workpapers and variance inquiries are scattered across email threads and disconnected sheets.</a:t>
+            </a:r>
+          </a:p>
+          <a:p>
+            <a:pPr>
+              <a:spcAft>
+                <a:spcPts val="400"/>
+              </a:spcAft>
+              <a:defRPr sz="1100">
+                <a:solidFill>
+                  <a:srgbClr val="1E293B"/>
+                </a:solidFill>
+              </a:defRPr>
+            </a:pPr>
+            <a:r>
+              <a:t>• The Audit Committee and Group CFO lack real-time visibility into anomaly resolution statuses.</a:t>
+            </a:r>
+          </a:p>
+          <a:p>
+            <a:pPr>
+              <a:spcAft>
+                <a:spcPts val="400"/>
+              </a:spcAft>
+              <a:defRPr sz="1100">
+                <a:solidFill>
+                  <a:srgbClr val="1E293B"/>
+                </a:solidFill>
+              </a:defRPr>
+            </a:pPr>
+            <a:r>
+              <a:t>• No centralized tracking distinguishes accepted operational variances from required audit adjustments.</a:t>
+            </a:r>
+          </a:p>
+          <a:p>
+            <a:pPr>
+              <a:spcAft>
+                <a:spcPts val="400"/>
+              </a:spcAft>
+              <a:defRPr sz="1100">
+                <a:solidFill>
+                  <a:srgbClr val="1E293B"/>
+                </a:solidFill>
+              </a:defRPr>
+            </a:pPr>
+            <a:r>
+              <a:t>• Critical errors are often discovered late during external auditor year-end field examinations.</a:t>
             </a:r>
           </a:p>
         </p:txBody>
@@ -4345,7 +4780,7 @@
             <a:avLst/>
           </a:prstGeom>
           <a:solidFill>
-            <a:srgbClr val="F6F3EC"/>
+            <a:srgbClr val="FFFFFF"/>
           </a:solidFill>
           <a:ln>
             <a:noFill/>
@@ -4375,95 +4810,23 @@
       </p:sp>
       <p:sp>
         <p:nvSpPr>
-          <p:cNvPr id="3" name="TextBox 2"/>
-          <p:cNvSpPr txBox="1"/>
-          <p:nvPr/>
-        </p:nvSpPr>
-        <p:spPr>
-          <a:xfrm>
-            <a:off x="731520" y="457200"/>
-            <a:ext cx="9144000" cy="365760"/>
+          <p:cNvPr id="3" name="Rectangle 2"/>
+          <p:cNvSpPr/>
+          <p:nvPr/>
+        </p:nvSpPr>
+        <p:spPr>
+          <a:xfrm>
+            <a:off x="731520" y="365760"/>
+            <a:ext cx="10728655" cy="36576"/>
           </a:xfrm>
           <a:prstGeom prst="rect">
             <a:avLst/>
           </a:prstGeom>
-          <a:noFill/>
-        </p:spPr>
-        <p:txBody>
-          <a:bodyPr wrap="square">
-            <a:spAutoFit/>
-          </a:bodyPr>
-          <a:lstStyle/>
-          <a:p>
-            <a:pPr>
-              <a:defRPr sz="1050" b="1">
-                <a:solidFill>
-                  <a:srgbClr val="B8902E"/>
-                </a:solidFill>
-              </a:defRPr>
-            </a:pPr>
-            <a:r>
-              <a:t>VISI ARSITEKTUR</a:t>
-            </a:r>
-          </a:p>
-        </p:txBody>
-      </p:sp>
-      <p:sp>
-        <p:nvSpPr>
-          <p:cNvPr id="4" name="TextBox 3"/>
-          <p:cNvSpPr txBox="1"/>
-          <p:nvPr/>
-        </p:nvSpPr>
-        <p:spPr>
-          <a:xfrm>
-            <a:off x="731520" y="731520"/>
-            <a:ext cx="10698480" cy="640080"/>
-          </a:xfrm>
-          <a:prstGeom prst="rect">
-            <a:avLst/>
-          </a:prstGeom>
-          <a:noFill/>
-        </p:spPr>
-        <p:txBody>
-          <a:bodyPr wrap="square">
-            <a:spAutoFit/>
-          </a:bodyPr>
-          <a:lstStyle/>
-          <a:p>
-            <a:pPr>
-              <a:defRPr sz="2200" b="1">
-                <a:solidFill>
-                  <a:srgbClr val="0F2A1D"/>
-                </a:solidFill>
-              </a:defRPr>
-            </a:pPr>
-            <a:r>
-              <a:t>Solusi: Arsitektur Dual-Engine + Review Workspace</a:t>
-            </a:r>
-          </a:p>
-        </p:txBody>
-      </p:sp>
-      <p:sp>
-        <p:nvSpPr>
-          <p:cNvPr id="5" name="Rounded Rectangle 4"/>
-          <p:cNvSpPr/>
-          <p:nvPr/>
-        </p:nvSpPr>
-        <p:spPr>
-          <a:xfrm>
-            <a:off x="731520" y="1554480"/>
-            <a:ext cx="5120640" cy="4389120"/>
-          </a:xfrm>
-          <a:prstGeom prst="roundRect">
-            <a:avLst/>
-          </a:prstGeom>
           <a:solidFill>
-            <a:srgbClr val="FFFFFF"/>
+            <a:srgbClr val="1B4332"/>
           </a:solidFill>
-          <a:ln w="19050">
-            <a:solidFill>
-              <a:srgbClr val="1B4332"/>
-            </a:solidFill>
+          <a:ln>
+            <a:noFill/>
           </a:ln>
         </p:spPr>
         <p:style>
@@ -4490,14 +4853,14 @@
       </p:sp>
       <p:sp>
         <p:nvSpPr>
-          <p:cNvPr id="6" name="TextBox 5"/>
+          <p:cNvPr id="4" name="TextBox 3"/>
           <p:cNvSpPr txBox="1"/>
           <p:nvPr/>
         </p:nvSpPr>
         <p:spPr>
           <a:xfrm>
-            <a:off x="932688" y="1755648"/>
-            <a:ext cx="4718304" cy="3986784"/>
+            <a:off x="731520" y="502920"/>
+            <a:ext cx="9144000" cy="320040"/>
           </a:xfrm>
           <a:prstGeom prst="rect">
             <a:avLst/>
@@ -4511,116 +4874,73 @@
           <a:lstStyle/>
           <a:p>
             <a:pPr>
-              <a:spcAft>
-                <a:spcPts val="800"/>
-              </a:spcAft>
-              <a:defRPr sz="1400" b="1">
-                <a:solidFill>
-                  <a:srgbClr val="1B4332"/>
-                </a:solidFill>
-              </a:defRPr>
-            </a:pPr>
-            <a:r>
-              <a:t>Engine 1: Deterministic Accounting Engine</a:t>
-            </a:r>
-          </a:p>
-          <a:p>
-            <a:pPr>
-              <a:spcAft>
-                <a:spcPts val="400"/>
-              </a:spcAft>
-              <a:defRPr sz="1150">
-                <a:solidFill>
-                  <a:srgbClr val="5C564A"/>
-                </a:solidFill>
-              </a:defRPr>
-            </a:pPr>
-            <a:r>
-              <a:t>• Perhitungan Konsolidasi Presisi 100%: Menjumlahkan revenue, laba, aset, liabilitas, ekuitas 6 entitas.</a:t>
-            </a:r>
-          </a:p>
-          <a:p>
-            <a:pPr>
-              <a:spcAft>
-                <a:spcPts val="400"/>
-              </a:spcAft>
-              <a:defRPr sz="1150">
-                <a:solidFill>
-                  <a:srgbClr val="5C564A"/>
-                </a:solidFill>
-              </a:defRPr>
-            </a:pPr>
-            <a:r>
-              <a:t>• Eliminasi Intercompany &amp; Alokasi NCI: Formula baku PSAK 65 menghitung porsi induk vs hak minoritas.</a:t>
-            </a:r>
-          </a:p>
-          <a:p>
-            <a:pPr>
-              <a:spcAft>
-                <a:spcPts val="400"/>
-              </a:spcAft>
-              <a:defRPr sz="1150">
-                <a:solidFill>
-                  <a:srgbClr val="5C564A"/>
-                </a:solidFill>
-              </a:defRPr>
-            </a:pPr>
-            <a:r>
-              <a:t>• Forensic Rule Engine: Ambang deviasi matematis otomatis mendeteksi 5 pola anomali material.</a:t>
-            </a:r>
-          </a:p>
-          <a:p>
-            <a:pPr>
-              <a:spcAft>
-                <a:spcPts val="400"/>
-              </a:spcAft>
-              <a:defRPr sz="1150">
-                <a:solidFill>
-                  <a:srgbClr val="5C564A"/>
-                </a:solidFill>
-              </a:defRPr>
-            </a:pPr>
-            <a:r>
-              <a:t>• Zero Black-Box: Setiap angka memiliki sumber, as-of date, dan formula matematis yang dapat diverifikasi.</a:t>
-            </a:r>
-          </a:p>
-          <a:p>
-            <a:pPr>
-              <a:spcAft>
-                <a:spcPts val="400"/>
-              </a:spcAft>
-              <a:defRPr sz="1150">
-                <a:solidFill>
-                  <a:srgbClr val="5C564A"/>
-                </a:solidFill>
-              </a:defRPr>
-            </a:pPr>
-            <a:r>
-              <a:t>• Real-time Recalculation: Setiap perubahan angka di tabel langsung mengupdate rasio solvabilitas &amp; profitabilitas.</a:t>
-            </a:r>
-          </a:p>
-        </p:txBody>
-      </p:sp>
-      <p:sp>
-        <p:nvSpPr>
-          <p:cNvPr id="7" name="Rounded Rectangle 6"/>
+              <a:defRPr sz="1000" b="1">
+                <a:solidFill>
+                  <a:srgbClr val="B48214"/>
+                </a:solidFill>
+              </a:defRPr>
+            </a:pPr>
+            <a:r>
+              <a:t>CORE ARCHITECTURE</a:t>
+            </a:r>
+          </a:p>
+        </p:txBody>
+      </p:sp>
+      <p:sp>
+        <p:nvSpPr>
+          <p:cNvPr id="5" name="TextBox 4"/>
+          <p:cNvSpPr txBox="1"/>
+          <p:nvPr/>
+        </p:nvSpPr>
+        <p:spPr>
+          <a:xfrm>
+            <a:off x="731520" y="777240"/>
+            <a:ext cx="10728655" cy="640080"/>
+          </a:xfrm>
+          <a:prstGeom prst="rect">
+            <a:avLst/>
+          </a:prstGeom>
+          <a:noFill/>
+        </p:spPr>
+        <p:txBody>
+          <a:bodyPr wrap="square">
+            <a:spAutoFit/>
+          </a:bodyPr>
+          <a:lstStyle/>
+          <a:p>
+            <a:pPr>
+              <a:defRPr sz="2200" b="1">
+                <a:solidFill>
+                  <a:srgbClr val="0F172A"/>
+                </a:solidFill>
+              </a:defRPr>
+            </a:pPr>
+            <a:r>
+              <a:t>Dual-Engine Architecture: Precision Math + Cognitive AI</a:t>
+            </a:r>
+          </a:p>
+        </p:txBody>
+      </p:sp>
+      <p:sp>
+        <p:nvSpPr>
+          <p:cNvPr id="6" name="Rounded Rectangle 5"/>
           <p:cNvSpPr/>
           <p:nvPr/>
         </p:nvSpPr>
         <p:spPr>
           <a:xfrm>
-            <a:off x="6217920" y="1554480"/>
+            <a:off x="731520" y="1600200"/>
             <a:ext cx="5120640" cy="4389120"/>
           </a:xfrm>
           <a:prstGeom prst="roundRect">
             <a:avLst/>
           </a:prstGeom>
           <a:solidFill>
-            <a:srgbClr val="FFFFFF"/>
+            <a:srgbClr val="F8FAFC"/>
           </a:solidFill>
-          <a:ln w="19050">
+          <a:ln w="12700">
             <a:solidFill>
-              <a:srgbClr val="B8902E"/>
+              <a:srgbClr val="E2E8F0"/>
             </a:solidFill>
           </a:ln>
         </p:spPr>
@@ -4648,14 +4968,57 @@
       </p:sp>
       <p:sp>
         <p:nvSpPr>
+          <p:cNvPr id="7" name="Rounded Rectangle 6"/>
+          <p:cNvSpPr/>
+          <p:nvPr/>
+        </p:nvSpPr>
+        <p:spPr>
+          <a:xfrm>
+            <a:off x="731520" y="1600200"/>
+            <a:ext cx="5120640" cy="73152"/>
+          </a:xfrm>
+          <a:prstGeom prst="roundRect">
+            <a:avLst/>
+          </a:prstGeom>
+          <a:solidFill>
+            <a:srgbClr val="1B4332"/>
+          </a:solidFill>
+          <a:ln>
+            <a:noFill/>
+          </a:ln>
+        </p:spPr>
+        <p:style>
+          <a:lnRef idx="1">
+            <a:schemeClr val="accent1"/>
+          </a:lnRef>
+          <a:fillRef idx="3">
+            <a:schemeClr val="accent1"/>
+          </a:fillRef>
+          <a:effectRef idx="2">
+            <a:schemeClr val="accent1"/>
+          </a:effectRef>
+          <a:fontRef idx="minor">
+            <a:schemeClr val="lt1"/>
+          </a:fontRef>
+        </p:style>
+        <p:txBody>
+          <a:bodyPr rtlCol="0" anchor="ctr"/>
+          <a:lstStyle/>
+          <a:p>
+            <a:pPr algn="ctr"/>
+          </a:p>
+        </p:txBody>
+      </p:sp>
+      <p:sp>
+        <p:nvSpPr>
           <p:cNvPr id="8" name="TextBox 7"/>
           <p:cNvSpPr txBox="1"/>
           <p:nvPr/>
         </p:nvSpPr>
         <p:spPr>
           <a:xfrm>
-            <a:off x="6419088" y="1755648"/>
-            <a:ext cx="4718304" cy="3986784"/>
+            <a:off x="950976" y="1819656"/>
+            <a:ext cx="4681728" cy="3950208"/>
           </a:xfrm>
           <a:prstGeom prst="rect">
             <a:avLst/>
@@ -4672,14 +5035,14 @@
               <a:spcAft>
                 <a:spcPts val="800"/>
               </a:spcAft>
-              <a:defRPr sz="1400" b="1">
-                <a:solidFill>
-                  <a:srgbClr val="B8902E"/>
-                </a:solidFill>
-              </a:defRPr>
-            </a:pPr>
-            <a:r>
-              <a:t>Engine 2: Cognitive AI Agent Copilot &amp; Review</a:t>
+              <a:defRPr sz="1350" b="1">
+                <a:solidFill>
+                  <a:srgbClr val="1B4332"/>
+                </a:solidFill>
+              </a:defRPr>
+            </a:pPr>
+            <a:r>
+              <a:t>Engine 1: Deterministic Accounting Engine</a:t>
             </a:r>
           </a:p>
           <a:p>
@@ -4687,14 +5050,14 @@
               <a:spcAft>
                 <a:spcPts val="400"/>
               </a:spcAft>
-              <a:defRPr sz="1150">
-                <a:solidFill>
-                  <a:srgbClr val="5C564A"/>
-                </a:solidFill>
-              </a:defRPr>
-            </a:pPr>
-            <a:r>
-              <a:t>• Conversational Copilot: Menjawab pertanyaan pimpinan secara kontekstual dalam Bahasa Indonesia analis.</a:t>
+              <a:defRPr sz="1100">
+                <a:solidFill>
+                  <a:srgbClr val="1E293B"/>
+                </a:solidFill>
+              </a:defRPr>
+            </a:pPr>
+            <a:r>
+              <a:t>• 100% Mathematical Precision: Rigorous aggregation of Revenues, Net Income, Assets, Liabilities, and Equity.</a:t>
             </a:r>
           </a:p>
           <a:p>
@@ -4702,14 +5065,14 @@
               <a:spcAft>
                 <a:spcPts val="400"/>
               </a:spcAft>
-              <a:defRPr sz="1150">
-                <a:solidFill>
-                  <a:srgbClr val="5C564A"/>
-                </a:solidFill>
-              </a:defRPr>
-            </a:pPr>
-            <a:r>
-              <a:t>• Forensic Reasoning &amp; Rationale: Menjelaskan mengapa anomali terjadi dan implikasi risiko auditnya.</a:t>
+              <a:defRPr sz="1100">
+                <a:solidFill>
+                  <a:srgbClr val="1E293B"/>
+                </a:solidFill>
+              </a:defRPr>
+            </a:pPr>
+            <a:r>
+              <a:t>• Automated Intercompany Eliminations: Standardized matrices eliminate cross-holdings and reciprocal debt.</a:t>
             </a:r>
           </a:p>
           <a:p>
@@ -4717,14 +5080,14 @@
               <a:spcAft>
                 <a:spcPts val="400"/>
               </a:spcAft>
-              <a:defRPr sz="1150">
-                <a:solidFill>
-                  <a:srgbClr val="5C564A"/>
-                </a:solidFill>
-              </a:defRPr>
-            </a:pPr>
-            <a:r>
-              <a:t>• Interactive Review Workspace: Setiap anomali memiliki status (Klarifikasi / Temuan / Disetujui) &amp; catatan reviewer.</a:t>
+              <a:defRPr sz="1100">
+                <a:solidFill>
+                  <a:srgbClr val="1E293B"/>
+                </a:solidFill>
+              </a:defRPr>
+            </a:pPr>
+            <a:r>
+              <a:t>• Statutory NCI Attribution: Precise IFRS 10 formulas calculate parent earnings vs. minority equity claims.</a:t>
             </a:r>
           </a:p>
           <a:p>
@@ -4732,14 +5095,14 @@
               <a:spcAft>
                 <a:spcPts val="400"/>
               </a:spcAft>
-              <a:defRPr sz="1150">
-                <a:solidFill>
-                  <a:srgbClr val="5C564A"/>
-                </a:solidFill>
-              </a:defRPr>
-            </a:pPr>
-            <a:r>
-              <a:t>• Smart Action Buttons: Chat langsung mengarahkan dan menghighlight kartu review yang relevan di dashboard.</a:t>
+              <a:defRPr sz="1100">
+                <a:solidFill>
+                  <a:srgbClr val="1E293B"/>
+                </a:solidFill>
+              </a:defRPr>
+            </a:pPr>
+            <a:r>
+              <a:t>• Zero Black-Box Calculations: Every number is derived from transparent, reproducible accounting formulas.</a:t>
             </a:r>
           </a:p>
           <a:p>
@@ -4747,14 +5110,215 @@
               <a:spcAft>
                 <a:spcPts val="400"/>
               </a:spcAft>
-              <a:defRPr sz="1150">
-                <a:solidFill>
-                  <a:srgbClr val="5C564A"/>
-                </a:solidFill>
-              </a:defRPr>
-            </a:pPr>
-            <a:r>
-              <a:t>• OJK Sectoral Benchmarking: Membandingkan DER konsolidasi (0.96x) &amp; ROA (5.4%) dengan standar industri.</a:t>
+              <a:defRPr sz="1100">
+                <a:solidFill>
+                  <a:srgbClr val="1E293B"/>
+                </a:solidFill>
+              </a:defRPr>
+            </a:pPr>
+            <a:r>
+              <a:t>• Instant Dynamic Recalculation: Input modifications dynamically update solvency and profitability indicators.</a:t>
+            </a:r>
+          </a:p>
+        </p:txBody>
+      </p:sp>
+      <p:sp>
+        <p:nvSpPr>
+          <p:cNvPr id="9" name="Rounded Rectangle 8"/>
+          <p:cNvSpPr/>
+          <p:nvPr/>
+        </p:nvSpPr>
+        <p:spPr>
+          <a:xfrm>
+            <a:off x="6217920" y="1600200"/>
+            <a:ext cx="5120640" cy="4389120"/>
+          </a:xfrm>
+          <a:prstGeom prst="roundRect">
+            <a:avLst/>
+          </a:prstGeom>
+          <a:solidFill>
+            <a:srgbClr val="F8FAFC"/>
+          </a:solidFill>
+          <a:ln w="12700">
+            <a:solidFill>
+              <a:srgbClr val="E2E8F0"/>
+            </a:solidFill>
+          </a:ln>
+        </p:spPr>
+        <p:style>
+          <a:lnRef idx="1">
+            <a:schemeClr val="accent1"/>
+          </a:lnRef>
+          <a:fillRef idx="3">
+            <a:schemeClr val="accent1"/>
+          </a:fillRef>
+          <a:effectRef idx="2">
+            <a:schemeClr val="accent1"/>
+          </a:effectRef>
+          <a:fontRef idx="minor">
+            <a:schemeClr val="lt1"/>
+          </a:fontRef>
+        </p:style>
+        <p:txBody>
+          <a:bodyPr rtlCol="0" anchor="ctr"/>
+          <a:lstStyle/>
+          <a:p>
+            <a:pPr algn="ctr"/>
+          </a:p>
+        </p:txBody>
+      </p:sp>
+      <p:sp>
+        <p:nvSpPr>
+          <p:cNvPr id="10" name="Rounded Rectangle 9"/>
+          <p:cNvSpPr/>
+          <p:nvPr/>
+        </p:nvSpPr>
+        <p:spPr>
+          <a:xfrm>
+            <a:off x="6217920" y="1600200"/>
+            <a:ext cx="5120640" cy="73152"/>
+          </a:xfrm>
+          <a:prstGeom prst="roundRect">
+            <a:avLst/>
+          </a:prstGeom>
+          <a:solidFill>
+            <a:srgbClr val="B48214"/>
+          </a:solidFill>
+          <a:ln>
+            <a:noFill/>
+          </a:ln>
+        </p:spPr>
+        <p:style>
+          <a:lnRef idx="1">
+            <a:schemeClr val="accent1"/>
+          </a:lnRef>
+          <a:fillRef idx="3">
+            <a:schemeClr val="accent1"/>
+          </a:fillRef>
+          <a:effectRef idx="2">
+            <a:schemeClr val="accent1"/>
+          </a:effectRef>
+          <a:fontRef idx="minor">
+            <a:schemeClr val="lt1"/>
+          </a:fontRef>
+        </p:style>
+        <p:txBody>
+          <a:bodyPr rtlCol="0" anchor="ctr"/>
+          <a:lstStyle/>
+          <a:p>
+            <a:pPr algn="ctr"/>
+          </a:p>
+        </p:txBody>
+      </p:sp>
+      <p:sp>
+        <p:nvSpPr>
+          <p:cNvPr id="11" name="TextBox 10"/>
+          <p:cNvSpPr txBox="1"/>
+          <p:nvPr/>
+        </p:nvSpPr>
+        <p:spPr>
+          <a:xfrm>
+            <a:off x="6437376" y="1819656"/>
+            <a:ext cx="4681728" cy="3950208"/>
+          </a:xfrm>
+          <a:prstGeom prst="rect">
+            <a:avLst/>
+          </a:prstGeom>
+          <a:noFill/>
+        </p:spPr>
+        <p:txBody>
+          <a:bodyPr wrap="square">
+            <a:spAutoFit/>
+          </a:bodyPr>
+          <a:lstStyle/>
+          <a:p>
+            <a:pPr>
+              <a:spcAft>
+                <a:spcPts val="800"/>
+              </a:spcAft>
+              <a:defRPr sz="1350" b="1">
+                <a:solidFill>
+                  <a:srgbClr val="B48214"/>
+                </a:solidFill>
+              </a:defRPr>
+            </a:pPr>
+            <a:r>
+              <a:t>Engine 2: Cognitive AI Forensic Copilot</a:t>
+            </a:r>
+          </a:p>
+          <a:p>
+            <a:pPr>
+              <a:spcAft>
+                <a:spcPts val="400"/>
+              </a:spcAft>
+              <a:defRPr sz="1100">
+                <a:solidFill>
+                  <a:srgbClr val="1E293B"/>
+                </a:solidFill>
+              </a:defRPr>
+            </a:pPr>
+            <a:r>
+              <a:t>• Conversational Copilot: Answers executive inquiries in natural, professional corporate finance language.</a:t>
+            </a:r>
+          </a:p>
+          <a:p>
+            <a:pPr>
+              <a:spcAft>
+                <a:spcPts val="400"/>
+              </a:spcAft>
+              <a:defRPr sz="1100">
+                <a:solidFill>
+                  <a:srgbClr val="1E293B"/>
+                </a:solidFill>
+              </a:defRPr>
+            </a:pPr>
+            <a:r>
+              <a:t>• Forensic Root-Cause Reasoning: Translates raw numerical deltas into concrete audit and compliance risk rationales.</a:t>
+            </a:r>
+          </a:p>
+          <a:p>
+            <a:pPr>
+              <a:spcAft>
+                <a:spcPts val="400"/>
+              </a:spcAft>
+              <a:defRPr sz="1100">
+                <a:solidFill>
+                  <a:srgbClr val="1E293B"/>
+                </a:solidFill>
+              </a:defRPr>
+            </a:pPr>
+            <a:r>
+              <a:t>• Actionable Review Workspace: Empowers auditors to mark items as Clarify, Audit Finding, or Approved.</a:t>
+            </a:r>
+          </a:p>
+          <a:p>
+            <a:pPr>
+              <a:spcAft>
+                <a:spcPts val="400"/>
+              </a:spcAft>
+              <a:defRPr sz="1100">
+                <a:solidFill>
+                  <a:srgbClr val="1E293B"/>
+                </a:solidFill>
+              </a:defRPr>
+            </a:pPr>
+            <a:r>
+              <a:t>• Contextual Smart Navigation: Conversational insights feature direct jump buttons to highlighted review cards.</a:t>
+            </a:r>
+          </a:p>
+          <a:p>
+            <a:pPr>
+              <a:spcAft>
+                <a:spcPts val="400"/>
+              </a:spcAft>
+              <a:defRPr sz="1100">
+                <a:solidFill>
+                  <a:srgbClr val="1E293B"/>
+                </a:solidFill>
+              </a:defRPr>
+            </a:pPr>
+            <a:r>
+              <a:t>• Prudential Benchmarking: Contextualizes group leverage (DER 0.96x) and returns (ROA 5.4%) against sector standards.</a:t>
             </a:r>
           </a:p>
         </p:txBody>
@@ -4792,7 +5356,7 @@
             <a:avLst/>
           </a:prstGeom>
           <a:solidFill>
-            <a:srgbClr val="F6F3EC"/>
+            <a:srgbClr val="FFFFFF"/>
           </a:solidFill>
           <a:ln>
             <a:noFill/>
@@ -4822,95 +5386,23 @@
       </p:sp>
       <p:sp>
         <p:nvSpPr>
-          <p:cNvPr id="3" name="TextBox 2"/>
-          <p:cNvSpPr txBox="1"/>
-          <p:nvPr/>
-        </p:nvSpPr>
-        <p:spPr>
-          <a:xfrm>
-            <a:off x="731520" y="457200"/>
-            <a:ext cx="9144000" cy="365760"/>
+          <p:cNvPr id="3" name="Rectangle 2"/>
+          <p:cNvSpPr/>
+          <p:nvPr/>
+        </p:nvSpPr>
+        <p:spPr>
+          <a:xfrm>
+            <a:off x="731520" y="365760"/>
+            <a:ext cx="10728655" cy="36576"/>
           </a:xfrm>
           <a:prstGeom prst="rect">
             <a:avLst/>
           </a:prstGeom>
-          <a:noFill/>
-        </p:spPr>
-        <p:txBody>
-          <a:bodyPr wrap="square">
-            <a:spAutoFit/>
-          </a:bodyPr>
-          <a:lstStyle/>
-          <a:p>
-            <a:pPr>
-              <a:defRPr sz="1050" b="1">
-                <a:solidFill>
-                  <a:srgbClr val="B8902E"/>
-                </a:solidFill>
-              </a:defRPr>
-            </a:pPr>
-            <a:r>
-              <a:t>TECHNICAL BLUEPRINT</a:t>
-            </a:r>
-          </a:p>
-        </p:txBody>
-      </p:sp>
-      <p:sp>
-        <p:nvSpPr>
-          <p:cNvPr id="4" name="TextBox 3"/>
-          <p:cNvSpPr txBox="1"/>
-          <p:nvPr/>
-        </p:nvSpPr>
-        <p:spPr>
-          <a:xfrm>
-            <a:off x="731520" y="731520"/>
-            <a:ext cx="10698480" cy="640080"/>
-          </a:xfrm>
-          <a:prstGeom prst="rect">
-            <a:avLst/>
-          </a:prstGeom>
-          <a:noFill/>
-        </p:spPr>
-        <p:txBody>
-          <a:bodyPr wrap="square">
-            <a:spAutoFit/>
-          </a:bodyPr>
-          <a:lstStyle/>
-          <a:p>
-            <a:pPr>
-              <a:defRPr sz="2200" b="1">
-                <a:solidFill>
-                  <a:srgbClr val="0F2A1D"/>
-                </a:solidFill>
-              </a:defRPr>
-            </a:pPr>
-            <a:r>
-              <a:t>Arsitektur Solusi 5-Tier End-to-End</a:t>
-            </a:r>
-          </a:p>
-        </p:txBody>
-      </p:sp>
-      <p:sp>
-        <p:nvSpPr>
-          <p:cNvPr id="5" name="Rounded Rectangle 4"/>
-          <p:cNvSpPr/>
-          <p:nvPr/>
-        </p:nvSpPr>
-        <p:spPr>
-          <a:xfrm>
-            <a:off x="731520" y="1554480"/>
-            <a:ext cx="2066543" cy="4389120"/>
-          </a:xfrm>
-          <a:prstGeom prst="roundRect">
-            <a:avLst/>
-          </a:prstGeom>
           <a:solidFill>
-            <a:srgbClr val="FFFFFF"/>
+            <a:srgbClr val="1B4332"/>
           </a:solidFill>
-          <a:ln w="19050">
-            <a:solidFill>
-              <a:srgbClr val="0F2A1D"/>
-            </a:solidFill>
+          <a:ln>
+            <a:noFill/>
           </a:ln>
         </p:spPr>
         <p:style>
@@ -4937,14 +5429,14 @@
       </p:sp>
       <p:sp>
         <p:nvSpPr>
-          <p:cNvPr id="6" name="TextBox 5"/>
+          <p:cNvPr id="4" name="TextBox 3"/>
           <p:cNvSpPr txBox="1"/>
           <p:nvPr/>
         </p:nvSpPr>
         <p:spPr>
           <a:xfrm>
-            <a:off x="932688" y="1755648"/>
-            <a:ext cx="1664207" cy="3986784"/>
+            <a:off x="731520" y="502920"/>
+            <a:ext cx="9144000" cy="320040"/>
           </a:xfrm>
           <a:prstGeom prst="rect">
             <a:avLst/>
@@ -4958,86 +5450,73 @@
           <a:lstStyle/>
           <a:p>
             <a:pPr>
-              <a:spcAft>
-                <a:spcPts val="800"/>
-              </a:spcAft>
-              <a:defRPr sz="1400" b="1">
-                <a:solidFill>
-                  <a:srgbClr val="0F2A1D"/>
-                </a:solidFill>
-              </a:defRPr>
-            </a:pPr>
-            <a:r>
-              <a:t>Tier 1: Ingestion Layer</a:t>
-            </a:r>
-          </a:p>
-          <a:p>
-            <a:pPr>
-              <a:spcAft>
-                <a:spcPts val="400"/>
-              </a:spcAft>
-              <a:defRPr sz="1150">
-                <a:solidFill>
-                  <a:srgbClr val="5C564A"/>
-                </a:solidFill>
-              </a:defRPr>
-            </a:pPr>
-            <a:r>
-              <a:t>• Konektor ERP (SAP/Oracle)</a:t>
-            </a:r>
-          </a:p>
-          <a:p>
-            <a:pPr>
-              <a:spcAft>
-                <a:spcPts val="400"/>
-              </a:spcAft>
-              <a:defRPr sz="1150">
-                <a:solidFill>
-                  <a:srgbClr val="5C564A"/>
-                </a:solidFill>
-              </a:defRPr>
-            </a:pPr>
-            <a:r>
-              <a:t>• Excel / XBRL Parser</a:t>
-            </a:r>
-          </a:p>
-          <a:p>
-            <a:pPr>
-              <a:spcAft>
-                <a:spcPts val="400"/>
-              </a:spcAft>
-              <a:defRPr sz="1150">
-                <a:solidFill>
-                  <a:srgbClr val="5C564A"/>
-                </a:solidFill>
-              </a:defRPr>
-            </a:pPr>
-            <a:r>
-              <a:t>• Validasi Neraca CY &amp; PY</a:t>
-            </a:r>
-          </a:p>
-        </p:txBody>
-      </p:sp>
-      <p:sp>
-        <p:nvSpPr>
-          <p:cNvPr id="7" name="Rounded Rectangle 6"/>
+              <a:defRPr sz="1000" b="1">
+                <a:solidFill>
+                  <a:srgbClr val="B48214"/>
+                </a:solidFill>
+              </a:defRPr>
+            </a:pPr>
+            <a:r>
+              <a:t>SYSTEM ARCHITECTURE</a:t>
+            </a:r>
+          </a:p>
+        </p:txBody>
+      </p:sp>
+      <p:sp>
+        <p:nvSpPr>
+          <p:cNvPr id="5" name="TextBox 4"/>
+          <p:cNvSpPr txBox="1"/>
+          <p:nvPr/>
+        </p:nvSpPr>
+        <p:spPr>
+          <a:xfrm>
+            <a:off x="731520" y="777240"/>
+            <a:ext cx="10728655" cy="640080"/>
+          </a:xfrm>
+          <a:prstGeom prst="rect">
+            <a:avLst/>
+          </a:prstGeom>
+          <a:noFill/>
+        </p:spPr>
+        <p:txBody>
+          <a:bodyPr wrap="square">
+            <a:spAutoFit/>
+          </a:bodyPr>
+          <a:lstStyle/>
+          <a:p>
+            <a:pPr>
+              <a:defRPr sz="2200" b="1">
+                <a:solidFill>
+                  <a:srgbClr val="0F172A"/>
+                </a:solidFill>
+              </a:defRPr>
+            </a:pPr>
+            <a:r>
+              <a:t>End-to-End 5-Tier Technical Blueprint</a:t>
+            </a:r>
+          </a:p>
+        </p:txBody>
+      </p:sp>
+      <p:sp>
+        <p:nvSpPr>
+          <p:cNvPr id="6" name="Rounded Rectangle 5"/>
           <p:cNvSpPr/>
           <p:nvPr/>
         </p:nvSpPr>
         <p:spPr>
           <a:xfrm>
-            <a:off x="2944368" y="1554480"/>
+            <a:off x="731520" y="1600200"/>
             <a:ext cx="2066543" cy="4389120"/>
           </a:xfrm>
           <a:prstGeom prst="roundRect">
             <a:avLst/>
           </a:prstGeom>
           <a:solidFill>
-            <a:srgbClr val="FFFFFF"/>
+            <a:srgbClr val="F8FAFC"/>
           </a:solidFill>
-          <a:ln w="19050">
+          <a:ln w="12700">
             <a:solidFill>
-              <a:srgbClr val="1B4332"/>
+              <a:srgbClr val="E2E8F0"/>
             </a:solidFill>
           </a:ln>
         </p:spPr>
@@ -5065,108 +5544,23 @@
       </p:sp>
       <p:sp>
         <p:nvSpPr>
-          <p:cNvPr id="8" name="TextBox 7"/>
-          <p:cNvSpPr txBox="1"/>
-          <p:nvPr/>
-        </p:nvSpPr>
-        <p:spPr>
-          <a:xfrm>
-            <a:off x="3145536" y="1755648"/>
-            <a:ext cx="1664207" cy="3986784"/>
-          </a:xfrm>
-          <a:prstGeom prst="rect">
-            <a:avLst/>
-          </a:prstGeom>
-          <a:noFill/>
-        </p:spPr>
-        <p:txBody>
-          <a:bodyPr wrap="square">
-            <a:spAutoFit/>
-          </a:bodyPr>
-          <a:lstStyle/>
-          <a:p>
-            <a:pPr>
-              <a:spcAft>
-                <a:spcPts val="800"/>
-              </a:spcAft>
-              <a:defRPr sz="1400" b="1">
-                <a:solidFill>
-                  <a:srgbClr val="1B4332"/>
-                </a:solidFill>
-              </a:defRPr>
-            </a:pPr>
-            <a:r>
-              <a:t>Tier 2: Consolidation</a:t>
-            </a:r>
-          </a:p>
-          <a:p>
-            <a:pPr>
-              <a:spcAft>
-                <a:spcPts val="400"/>
-              </a:spcAft>
-              <a:defRPr sz="1150">
-                <a:solidFill>
-                  <a:srgbClr val="5C564A"/>
-                </a:solidFill>
-              </a:defRPr>
-            </a:pPr>
-            <a:r>
-              <a:t>• Agregator Multientitas</a:t>
-            </a:r>
-          </a:p>
-          <a:p>
-            <a:pPr>
-              <a:spcAft>
-                <a:spcPts val="400"/>
-              </a:spcAft>
-              <a:defRPr sz="1150">
-                <a:solidFill>
-                  <a:srgbClr val="5C564A"/>
-                </a:solidFill>
-              </a:defRPr>
-            </a:pPr>
-            <a:r>
-              <a:t>• Matriks Eliminasi Relasi</a:t>
-            </a:r>
-          </a:p>
-          <a:p>
-            <a:pPr>
-              <a:spcAft>
-                <a:spcPts val="400"/>
-              </a:spcAft>
-              <a:defRPr sz="1150">
-                <a:solidFill>
-                  <a:srgbClr val="5C564A"/>
-                </a:solidFill>
-              </a:defRPr>
-            </a:pPr>
-            <a:r>
-              <a:t>• Kalkulasi NCI PSAK 65</a:t>
-            </a:r>
-          </a:p>
-        </p:txBody>
-      </p:sp>
-      <p:sp>
-        <p:nvSpPr>
-          <p:cNvPr id="9" name="Rounded Rectangle 8"/>
+          <p:cNvPr id="7" name="Rounded Rectangle 6"/>
           <p:cNvSpPr/>
           <p:nvPr/>
         </p:nvSpPr>
         <p:spPr>
           <a:xfrm>
-            <a:off x="5157216" y="1554480"/>
-            <a:ext cx="2066543" cy="4389120"/>
+            <a:off x="731520" y="1600200"/>
+            <a:ext cx="2066543" cy="73152"/>
           </a:xfrm>
           <a:prstGeom prst="roundRect">
             <a:avLst/>
           </a:prstGeom>
           <a:solidFill>
-            <a:srgbClr val="FFFFFF"/>
+            <a:srgbClr val="0F172A"/>
           </a:solidFill>
-          <a:ln w="19050">
-            <a:solidFill>
-              <a:srgbClr val="0F2A1D"/>
-            </a:solidFill>
+          <a:ln>
+            <a:noFill/>
           </a:ln>
         </p:spPr>
         <p:style>
@@ -5193,14 +5587,14 @@
       </p:sp>
       <p:sp>
         <p:nvSpPr>
-          <p:cNvPr id="10" name="TextBox 9"/>
+          <p:cNvPr id="8" name="TextBox 7"/>
           <p:cNvSpPr txBox="1"/>
           <p:nvPr/>
         </p:nvSpPr>
         <p:spPr>
           <a:xfrm>
-            <a:off x="5358384" y="1755648"/>
-            <a:ext cx="1664207" cy="3986784"/>
+            <a:off x="950976" y="1819656"/>
+            <a:ext cx="1627631" cy="3950208"/>
           </a:xfrm>
           <a:prstGeom prst="rect">
             <a:avLst/>
@@ -5217,14 +5611,14 @@
               <a:spcAft>
                 <a:spcPts val="800"/>
               </a:spcAft>
-              <a:defRPr sz="1400" b="1">
-                <a:solidFill>
-                  <a:srgbClr val="0F2A1D"/>
-                </a:solidFill>
-              </a:defRPr>
-            </a:pPr>
-            <a:r>
-              <a:t>Tier 3: Forensic Rules</a:t>
+              <a:defRPr sz="1350" b="1">
+                <a:solidFill>
+                  <a:srgbClr val="0F172A"/>
+                </a:solidFill>
+              </a:defRPr>
+            </a:pPr>
+            <a:r>
+              <a:t>Tier 1: Ingestion Layer</a:t>
             </a:r>
           </a:p>
           <a:p>
@@ -5232,14 +5626,14 @@
               <a:spcAft>
                 <a:spcPts val="400"/>
               </a:spcAft>
-              <a:defRPr sz="1150">
-                <a:solidFill>
-                  <a:srgbClr val="5C564A"/>
-                </a:solidFill>
-              </a:defRPr>
-            </a:pPr>
-            <a:r>
-              <a:t>• Deteksi Mismatch NCI</a:t>
+              <a:defRPr sz="1100">
+                <a:solidFill>
+                  <a:srgbClr val="1E293B"/>
+                </a:solidFill>
+              </a:defRPr>
+            </a:pPr>
+            <a:r>
+              <a:t>• ERP / SAP / Oracle GL</a:t>
             </a:r>
           </a:p>
           <a:p>
@@ -5247,14 +5641,14 @@
               <a:spcAft>
                 <a:spcPts val="400"/>
               </a:spcAft>
-              <a:defRPr sz="1150">
-                <a:solidFill>
-                  <a:srgbClr val="5C564A"/>
-                </a:solidFill>
-              </a:defRPr>
-            </a:pPr>
-            <a:r>
-              <a:t>• Lonjakan Piutang Relasi</a:t>
+              <a:defRPr sz="1100">
+                <a:solidFill>
+                  <a:srgbClr val="1E293B"/>
+                </a:solidFill>
+              </a:defRPr>
+            </a:pPr>
+            <a:r>
+              <a:t>• Excel &amp; XBRL Ingestor</a:t>
             </a:r>
           </a:p>
           <a:p>
@@ -5262,38 +5656,38 @@
               <a:spcAft>
                 <a:spcPts val="400"/>
               </a:spcAft>
-              <a:defRPr sz="1150">
-                <a:solidFill>
-                  <a:srgbClr val="5C564A"/>
-                </a:solidFill>
-              </a:defRPr>
-            </a:pPr>
-            <a:r>
-              <a:t>• Spike Leverage &amp; Margin</a:t>
-            </a:r>
-          </a:p>
-        </p:txBody>
-      </p:sp>
-      <p:sp>
-        <p:nvSpPr>
-          <p:cNvPr id="11" name="Rounded Rectangle 10"/>
+              <a:defRPr sz="1100">
+                <a:solidFill>
+                  <a:srgbClr val="1E293B"/>
+                </a:solidFill>
+              </a:defRPr>
+            </a:pPr>
+            <a:r>
+              <a:t>• CY &amp; PY Data Sanity Checks</a:t>
+            </a:r>
+          </a:p>
+        </p:txBody>
+      </p:sp>
+      <p:sp>
+        <p:nvSpPr>
+          <p:cNvPr id="9" name="Rounded Rectangle 8"/>
           <p:cNvSpPr/>
           <p:nvPr/>
         </p:nvSpPr>
         <p:spPr>
           <a:xfrm>
-            <a:off x="7370064" y="1554480"/>
+            <a:off x="2944368" y="1600200"/>
             <a:ext cx="2066543" cy="4389120"/>
           </a:xfrm>
           <a:prstGeom prst="roundRect">
             <a:avLst/>
           </a:prstGeom>
           <a:solidFill>
-            <a:srgbClr val="FFFFFF"/>
+            <a:srgbClr val="F8FAFC"/>
           </a:solidFill>
-          <a:ln w="19050">
+          <a:ln w="12700">
             <a:solidFill>
-              <a:srgbClr val="1B4332"/>
+              <a:srgbClr val="E2E8F0"/>
             </a:solidFill>
           </a:ln>
         </p:spPr>
@@ -5321,108 +5715,23 @@
       </p:sp>
       <p:sp>
         <p:nvSpPr>
-          <p:cNvPr id="12" name="TextBox 11"/>
-          <p:cNvSpPr txBox="1"/>
-          <p:nvPr/>
-        </p:nvSpPr>
-        <p:spPr>
-          <a:xfrm>
-            <a:off x="7571232" y="1755648"/>
-            <a:ext cx="1664207" cy="3986784"/>
-          </a:xfrm>
-          <a:prstGeom prst="rect">
-            <a:avLst/>
-          </a:prstGeom>
-          <a:noFill/>
-        </p:spPr>
-        <p:txBody>
-          <a:bodyPr wrap="square">
-            <a:spAutoFit/>
-          </a:bodyPr>
-          <a:lstStyle/>
-          <a:p>
-            <a:pPr>
-              <a:spcAft>
-                <a:spcPts val="800"/>
-              </a:spcAft>
-              <a:defRPr sz="1400" b="1">
-                <a:solidFill>
-                  <a:srgbClr val="1B4332"/>
-                </a:solidFill>
-              </a:defRPr>
-            </a:pPr>
-            <a:r>
-              <a:t>Tier 4: Agent Copilot</a:t>
-            </a:r>
-          </a:p>
-          <a:p>
-            <a:pPr>
-              <a:spcAft>
-                <a:spcPts val="400"/>
-              </a:spcAft>
-              <a:defRPr sz="1150">
-                <a:solidFill>
-                  <a:srgbClr val="5C564A"/>
-                </a:solidFill>
-              </a:defRPr>
-            </a:pPr>
-            <a:r>
-              <a:t>• Multi-Agent Coordinator</a:t>
-            </a:r>
-          </a:p>
-          <a:p>
-            <a:pPr>
-              <a:spcAft>
-                <a:spcPts val="400"/>
-              </a:spcAft>
-              <a:defRPr sz="1150">
-                <a:solidFill>
-                  <a:srgbClr val="5C564A"/>
-                </a:solidFill>
-              </a:defRPr>
-            </a:pPr>
-            <a:r>
-              <a:t>• Forensic Explainer Agent</a:t>
-            </a:r>
-          </a:p>
-          <a:p>
-            <a:pPr>
-              <a:spcAft>
-                <a:spcPts val="400"/>
-              </a:spcAft>
-              <a:defRPr sz="1150">
-                <a:solidFill>
-                  <a:srgbClr val="5C564A"/>
-                </a:solidFill>
-              </a:defRPr>
-            </a:pPr>
-            <a:r>
-              <a:t>• Benchmarking Sektor OJK</a:t>
-            </a:r>
-          </a:p>
-        </p:txBody>
-      </p:sp>
-      <p:sp>
-        <p:nvSpPr>
-          <p:cNvPr id="13" name="Rounded Rectangle 12"/>
+          <p:cNvPr id="10" name="Rounded Rectangle 9"/>
           <p:cNvSpPr/>
           <p:nvPr/>
         </p:nvSpPr>
         <p:spPr>
           <a:xfrm>
-            <a:off x="9582912" y="1554480"/>
-            <a:ext cx="2066543" cy="4389120"/>
+            <a:off x="2944368" y="1600200"/>
+            <a:ext cx="2066543" cy="73152"/>
           </a:xfrm>
           <a:prstGeom prst="roundRect">
             <a:avLst/>
           </a:prstGeom>
           <a:solidFill>
-            <a:srgbClr val="FFFFFF"/>
+            <a:srgbClr val="1B4332"/>
           </a:solidFill>
-          <a:ln w="19050">
-            <a:solidFill>
-              <a:srgbClr val="0F2A1D"/>
-            </a:solidFill>
+          <a:ln>
+            <a:noFill/>
           </a:ln>
         </p:spPr>
         <p:style>
@@ -5449,14 +5758,14 @@
       </p:sp>
       <p:sp>
         <p:nvSpPr>
-          <p:cNvPr id="14" name="TextBox 13"/>
+          <p:cNvPr id="11" name="TextBox 10"/>
           <p:cNvSpPr txBox="1"/>
           <p:nvPr/>
         </p:nvSpPr>
         <p:spPr>
           <a:xfrm>
-            <a:off x="9784080" y="1755648"/>
-            <a:ext cx="1664207" cy="3986784"/>
+            <a:off x="3163824" y="1819656"/>
+            <a:ext cx="1627631" cy="3950208"/>
           </a:xfrm>
           <a:prstGeom prst="rect">
             <a:avLst/>
@@ -5473,14 +5782,14 @@
               <a:spcAft>
                 <a:spcPts val="800"/>
               </a:spcAft>
-              <a:defRPr sz="1400" b="1">
-                <a:solidFill>
-                  <a:srgbClr val="0F2A1D"/>
-                </a:solidFill>
-              </a:defRPr>
-            </a:pPr>
-            <a:r>
-              <a:t>Tier 5: Review UI</a:t>
+              <a:defRPr sz="1350" b="1">
+                <a:solidFill>
+                  <a:srgbClr val="1B4332"/>
+                </a:solidFill>
+              </a:defRPr>
+            </a:pPr>
+            <a:r>
+              <a:t>Tier 2: Consolidation</a:t>
             </a:r>
           </a:p>
           <a:p>
@@ -5488,14 +5797,14 @@
               <a:spcAft>
                 <a:spcPts val="400"/>
               </a:spcAft>
-              <a:defRPr sz="1150">
-                <a:solidFill>
-                  <a:srgbClr val="5C564A"/>
-                </a:solidFill>
-              </a:defRPr>
-            </a:pPr>
-            <a:r>
-              <a:t>• Chat Copilot Split View</a:t>
+              <a:defRPr sz="1100">
+                <a:solidFill>
+                  <a:srgbClr val="1E293B"/>
+                </a:solidFill>
+              </a:defRPr>
+            </a:pPr>
+            <a:r>
+              <a:t>• Multi-Entity Aggregator</a:t>
             </a:r>
           </a:p>
           <a:p>
@@ -5503,14 +5812,14 @@
               <a:spcAft>
                 <a:spcPts val="400"/>
               </a:spcAft>
-              <a:defRPr sz="1150">
-                <a:solidFill>
-                  <a:srgbClr val="5C564A"/>
-                </a:solidFill>
-              </a:defRPr>
-            </a:pPr>
-            <a:r>
-              <a:t>• Review Action Cards</a:t>
+              <a:defRPr sz="1100">
+                <a:solidFill>
+                  <a:srgbClr val="1E293B"/>
+                </a:solidFill>
+              </a:defRPr>
+            </a:pPr>
+            <a:r>
+              <a:t>• Elimination Engine</a:t>
             </a:r>
           </a:p>
           <a:p>
@@ -5518,14 +5827,527 @@
               <a:spcAft>
                 <a:spcPts val="400"/>
               </a:spcAft>
-              <a:defRPr sz="1150">
-                <a:solidFill>
-                  <a:srgbClr val="5C564A"/>
-                </a:solidFill>
-              </a:defRPr>
-            </a:pPr>
-            <a:r>
-              <a:t>• Sign-Off &amp; PDF Export</a:t>
+              <a:defRPr sz="1100">
+                <a:solidFill>
+                  <a:srgbClr val="1E293B"/>
+                </a:solidFill>
+              </a:defRPr>
+            </a:pPr>
+            <a:r>
+              <a:t>• IFRS 10 NCI Attribution</a:t>
+            </a:r>
+          </a:p>
+        </p:txBody>
+      </p:sp>
+      <p:sp>
+        <p:nvSpPr>
+          <p:cNvPr id="12" name="Rounded Rectangle 11"/>
+          <p:cNvSpPr/>
+          <p:nvPr/>
+        </p:nvSpPr>
+        <p:spPr>
+          <a:xfrm>
+            <a:off x="5157216" y="1600200"/>
+            <a:ext cx="2066543" cy="4389120"/>
+          </a:xfrm>
+          <a:prstGeom prst="roundRect">
+            <a:avLst/>
+          </a:prstGeom>
+          <a:solidFill>
+            <a:srgbClr val="F8FAFC"/>
+          </a:solidFill>
+          <a:ln w="12700">
+            <a:solidFill>
+              <a:srgbClr val="E2E8F0"/>
+            </a:solidFill>
+          </a:ln>
+        </p:spPr>
+        <p:style>
+          <a:lnRef idx="1">
+            <a:schemeClr val="accent1"/>
+          </a:lnRef>
+          <a:fillRef idx="3">
+            <a:schemeClr val="accent1"/>
+          </a:fillRef>
+          <a:effectRef idx="2">
+            <a:schemeClr val="accent1"/>
+          </a:effectRef>
+          <a:fontRef idx="minor">
+            <a:schemeClr val="lt1"/>
+          </a:fontRef>
+        </p:style>
+        <p:txBody>
+          <a:bodyPr rtlCol="0" anchor="ctr"/>
+          <a:lstStyle/>
+          <a:p>
+            <a:pPr algn="ctr"/>
+          </a:p>
+        </p:txBody>
+      </p:sp>
+      <p:sp>
+        <p:nvSpPr>
+          <p:cNvPr id="13" name="Rounded Rectangle 12"/>
+          <p:cNvSpPr/>
+          <p:nvPr/>
+        </p:nvSpPr>
+        <p:spPr>
+          <a:xfrm>
+            <a:off x="5157216" y="1600200"/>
+            <a:ext cx="2066543" cy="73152"/>
+          </a:xfrm>
+          <a:prstGeom prst="roundRect">
+            <a:avLst/>
+          </a:prstGeom>
+          <a:solidFill>
+            <a:srgbClr val="E11D48"/>
+          </a:solidFill>
+          <a:ln>
+            <a:noFill/>
+          </a:ln>
+        </p:spPr>
+        <p:style>
+          <a:lnRef idx="1">
+            <a:schemeClr val="accent1"/>
+          </a:lnRef>
+          <a:fillRef idx="3">
+            <a:schemeClr val="accent1"/>
+          </a:fillRef>
+          <a:effectRef idx="2">
+            <a:schemeClr val="accent1"/>
+          </a:effectRef>
+          <a:fontRef idx="minor">
+            <a:schemeClr val="lt1"/>
+          </a:fontRef>
+        </p:style>
+        <p:txBody>
+          <a:bodyPr rtlCol="0" anchor="ctr"/>
+          <a:lstStyle/>
+          <a:p>
+            <a:pPr algn="ctr"/>
+          </a:p>
+        </p:txBody>
+      </p:sp>
+      <p:sp>
+        <p:nvSpPr>
+          <p:cNvPr id="14" name="TextBox 13"/>
+          <p:cNvSpPr txBox="1"/>
+          <p:nvPr/>
+        </p:nvSpPr>
+        <p:spPr>
+          <a:xfrm>
+            <a:off x="5376672" y="1819656"/>
+            <a:ext cx="1627631" cy="3950208"/>
+          </a:xfrm>
+          <a:prstGeom prst="rect">
+            <a:avLst/>
+          </a:prstGeom>
+          <a:noFill/>
+        </p:spPr>
+        <p:txBody>
+          <a:bodyPr wrap="square">
+            <a:spAutoFit/>
+          </a:bodyPr>
+          <a:lstStyle/>
+          <a:p>
+            <a:pPr>
+              <a:spcAft>
+                <a:spcPts val="800"/>
+              </a:spcAft>
+              <a:defRPr sz="1350" b="1">
+                <a:solidFill>
+                  <a:srgbClr val="E11D48"/>
+                </a:solidFill>
+              </a:defRPr>
+            </a:pPr>
+            <a:r>
+              <a:t>Tier 3: Forensic Rules</a:t>
+            </a:r>
+          </a:p>
+          <a:p>
+            <a:pPr>
+              <a:spcAft>
+                <a:spcPts val="400"/>
+              </a:spcAft>
+              <a:defRPr sz="1100">
+                <a:solidFill>
+                  <a:srgbClr val="1E293B"/>
+                </a:solidFill>
+              </a:defRPr>
+            </a:pPr>
+            <a:r>
+              <a:t>• NCI Mismatch Vector</a:t>
+            </a:r>
+          </a:p>
+          <a:p>
+            <a:pPr>
+              <a:spcAft>
+                <a:spcPts val="400"/>
+              </a:spcAft>
+              <a:defRPr sz="1100">
+                <a:solidFill>
+                  <a:srgbClr val="1E293B"/>
+                </a:solidFill>
+              </a:defRPr>
+            </a:pPr>
+            <a:r>
+              <a:t>• Related-Party Spike Detector</a:t>
+            </a:r>
+          </a:p>
+          <a:p>
+            <a:pPr>
+              <a:spcAft>
+                <a:spcPts val="400"/>
+              </a:spcAft>
+              <a:defRPr sz="1100">
+                <a:solidFill>
+                  <a:srgbClr val="1E293B"/>
+                </a:solidFill>
+              </a:defRPr>
+            </a:pPr>
+            <a:r>
+              <a:t>• Leverage &amp; Margin Scanners</a:t>
+            </a:r>
+          </a:p>
+        </p:txBody>
+      </p:sp>
+      <p:sp>
+        <p:nvSpPr>
+          <p:cNvPr id="15" name="Rounded Rectangle 14"/>
+          <p:cNvSpPr/>
+          <p:nvPr/>
+        </p:nvSpPr>
+        <p:spPr>
+          <a:xfrm>
+            <a:off x="7370064" y="1600200"/>
+            <a:ext cx="2066543" cy="4389120"/>
+          </a:xfrm>
+          <a:prstGeom prst="roundRect">
+            <a:avLst/>
+          </a:prstGeom>
+          <a:solidFill>
+            <a:srgbClr val="F8FAFC"/>
+          </a:solidFill>
+          <a:ln w="12700">
+            <a:solidFill>
+              <a:srgbClr val="E2E8F0"/>
+            </a:solidFill>
+          </a:ln>
+        </p:spPr>
+        <p:style>
+          <a:lnRef idx="1">
+            <a:schemeClr val="accent1"/>
+          </a:lnRef>
+          <a:fillRef idx="3">
+            <a:schemeClr val="accent1"/>
+          </a:fillRef>
+          <a:effectRef idx="2">
+            <a:schemeClr val="accent1"/>
+          </a:effectRef>
+          <a:fontRef idx="minor">
+            <a:schemeClr val="lt1"/>
+          </a:fontRef>
+        </p:style>
+        <p:txBody>
+          <a:bodyPr rtlCol="0" anchor="ctr"/>
+          <a:lstStyle/>
+          <a:p>
+            <a:pPr algn="ctr"/>
+          </a:p>
+        </p:txBody>
+      </p:sp>
+      <p:sp>
+        <p:nvSpPr>
+          <p:cNvPr id="16" name="Rounded Rectangle 15"/>
+          <p:cNvSpPr/>
+          <p:nvPr/>
+        </p:nvSpPr>
+        <p:spPr>
+          <a:xfrm>
+            <a:off x="7370064" y="1600200"/>
+            <a:ext cx="2066543" cy="73152"/>
+          </a:xfrm>
+          <a:prstGeom prst="roundRect">
+            <a:avLst/>
+          </a:prstGeom>
+          <a:solidFill>
+            <a:srgbClr val="B48214"/>
+          </a:solidFill>
+          <a:ln>
+            <a:noFill/>
+          </a:ln>
+        </p:spPr>
+        <p:style>
+          <a:lnRef idx="1">
+            <a:schemeClr val="accent1"/>
+          </a:lnRef>
+          <a:fillRef idx="3">
+            <a:schemeClr val="accent1"/>
+          </a:fillRef>
+          <a:effectRef idx="2">
+            <a:schemeClr val="accent1"/>
+          </a:effectRef>
+          <a:fontRef idx="minor">
+            <a:schemeClr val="lt1"/>
+          </a:fontRef>
+        </p:style>
+        <p:txBody>
+          <a:bodyPr rtlCol="0" anchor="ctr"/>
+          <a:lstStyle/>
+          <a:p>
+            <a:pPr algn="ctr"/>
+          </a:p>
+        </p:txBody>
+      </p:sp>
+      <p:sp>
+        <p:nvSpPr>
+          <p:cNvPr id="17" name="TextBox 16"/>
+          <p:cNvSpPr txBox="1"/>
+          <p:nvPr/>
+        </p:nvSpPr>
+        <p:spPr>
+          <a:xfrm>
+            <a:off x="7589520" y="1819656"/>
+            <a:ext cx="1627631" cy="3950208"/>
+          </a:xfrm>
+          <a:prstGeom prst="rect">
+            <a:avLst/>
+          </a:prstGeom>
+          <a:noFill/>
+        </p:spPr>
+        <p:txBody>
+          <a:bodyPr wrap="square">
+            <a:spAutoFit/>
+          </a:bodyPr>
+          <a:lstStyle/>
+          <a:p>
+            <a:pPr>
+              <a:spcAft>
+                <a:spcPts val="800"/>
+              </a:spcAft>
+              <a:defRPr sz="1350" b="1">
+                <a:solidFill>
+                  <a:srgbClr val="B48214"/>
+                </a:solidFill>
+              </a:defRPr>
+            </a:pPr>
+            <a:r>
+              <a:t>Tier 4: AI Copilot</a:t>
+            </a:r>
+          </a:p>
+          <a:p>
+            <a:pPr>
+              <a:spcAft>
+                <a:spcPts val="400"/>
+              </a:spcAft>
+              <a:defRPr sz="1100">
+                <a:solidFill>
+                  <a:srgbClr val="1E293B"/>
+                </a:solidFill>
+              </a:defRPr>
+            </a:pPr>
+            <a:r>
+              <a:t>• Multi-Agent Orchestrator</a:t>
+            </a:r>
+          </a:p>
+          <a:p>
+            <a:pPr>
+              <a:spcAft>
+                <a:spcPts val="400"/>
+              </a:spcAft>
+              <a:defRPr sz="1100">
+                <a:solidFill>
+                  <a:srgbClr val="1E293B"/>
+                </a:solidFill>
+              </a:defRPr>
+            </a:pPr>
+            <a:r>
+              <a:t>• Forensic Explainer Agent</a:t>
+            </a:r>
+          </a:p>
+          <a:p>
+            <a:pPr>
+              <a:spcAft>
+                <a:spcPts val="400"/>
+              </a:spcAft>
+              <a:defRPr sz="1100">
+                <a:solidFill>
+                  <a:srgbClr val="1E293B"/>
+                </a:solidFill>
+              </a:defRPr>
+            </a:pPr>
+            <a:r>
+              <a:t>• Regulatory Benchmark Agent</a:t>
+            </a:r>
+          </a:p>
+        </p:txBody>
+      </p:sp>
+      <p:sp>
+        <p:nvSpPr>
+          <p:cNvPr id="18" name="Rounded Rectangle 17"/>
+          <p:cNvSpPr/>
+          <p:nvPr/>
+        </p:nvSpPr>
+        <p:spPr>
+          <a:xfrm>
+            <a:off x="9582912" y="1600200"/>
+            <a:ext cx="2066543" cy="4389120"/>
+          </a:xfrm>
+          <a:prstGeom prst="roundRect">
+            <a:avLst/>
+          </a:prstGeom>
+          <a:solidFill>
+            <a:srgbClr val="F8FAFC"/>
+          </a:solidFill>
+          <a:ln w="12700">
+            <a:solidFill>
+              <a:srgbClr val="E2E8F0"/>
+            </a:solidFill>
+          </a:ln>
+        </p:spPr>
+        <p:style>
+          <a:lnRef idx="1">
+            <a:schemeClr val="accent1"/>
+          </a:lnRef>
+          <a:fillRef idx="3">
+            <a:schemeClr val="accent1"/>
+          </a:fillRef>
+          <a:effectRef idx="2">
+            <a:schemeClr val="accent1"/>
+          </a:effectRef>
+          <a:fontRef idx="minor">
+            <a:schemeClr val="lt1"/>
+          </a:fontRef>
+        </p:style>
+        <p:txBody>
+          <a:bodyPr rtlCol="0" anchor="ctr"/>
+          <a:lstStyle/>
+          <a:p>
+            <a:pPr algn="ctr"/>
+          </a:p>
+        </p:txBody>
+      </p:sp>
+      <p:sp>
+        <p:nvSpPr>
+          <p:cNvPr id="19" name="Rounded Rectangle 18"/>
+          <p:cNvSpPr/>
+          <p:nvPr/>
+        </p:nvSpPr>
+        <p:spPr>
+          <a:xfrm>
+            <a:off x="9582912" y="1600200"/>
+            <a:ext cx="2066543" cy="73152"/>
+          </a:xfrm>
+          <a:prstGeom prst="roundRect">
+            <a:avLst/>
+          </a:prstGeom>
+          <a:solidFill>
+            <a:srgbClr val="0284C7"/>
+          </a:solidFill>
+          <a:ln>
+            <a:noFill/>
+          </a:ln>
+        </p:spPr>
+        <p:style>
+          <a:lnRef idx="1">
+            <a:schemeClr val="accent1"/>
+          </a:lnRef>
+          <a:fillRef idx="3">
+            <a:schemeClr val="accent1"/>
+          </a:fillRef>
+          <a:effectRef idx="2">
+            <a:schemeClr val="accent1"/>
+          </a:effectRef>
+          <a:fontRef idx="minor">
+            <a:schemeClr val="lt1"/>
+          </a:fontRef>
+        </p:style>
+        <p:txBody>
+          <a:bodyPr rtlCol="0" anchor="ctr"/>
+          <a:lstStyle/>
+          <a:p>
+            <a:pPr algn="ctr"/>
+          </a:p>
+        </p:txBody>
+      </p:sp>
+      <p:sp>
+        <p:nvSpPr>
+          <p:cNvPr id="20" name="TextBox 19"/>
+          <p:cNvSpPr txBox="1"/>
+          <p:nvPr/>
+        </p:nvSpPr>
+        <p:spPr>
+          <a:xfrm>
+            <a:off x="9802368" y="1819656"/>
+            <a:ext cx="1627631" cy="3950208"/>
+          </a:xfrm>
+          <a:prstGeom prst="rect">
+            <a:avLst/>
+          </a:prstGeom>
+          <a:noFill/>
+        </p:spPr>
+        <p:txBody>
+          <a:bodyPr wrap="square">
+            <a:spAutoFit/>
+          </a:bodyPr>
+          <a:lstStyle/>
+          <a:p>
+            <a:pPr>
+              <a:spcAft>
+                <a:spcPts val="800"/>
+              </a:spcAft>
+              <a:defRPr sz="1350" b="1">
+                <a:solidFill>
+                  <a:srgbClr val="0284C7"/>
+                </a:solidFill>
+              </a:defRPr>
+            </a:pPr>
+            <a:r>
+              <a:t>Tier 5: Review UI</a:t>
+            </a:r>
+          </a:p>
+          <a:p>
+            <a:pPr>
+              <a:spcAft>
+                <a:spcPts val="400"/>
+              </a:spcAft>
+              <a:defRPr sz="1100">
+                <a:solidFill>
+                  <a:srgbClr val="1E293B"/>
+                </a:solidFill>
+              </a:defRPr>
+            </a:pPr>
+            <a:r>
+              <a:t>• Interactive Split View</a:t>
+            </a:r>
+          </a:p>
+          <a:p>
+            <a:pPr>
+              <a:spcAft>
+                <a:spcPts val="400"/>
+              </a:spcAft>
+              <a:defRPr sz="1100">
+                <a:solidFill>
+                  <a:srgbClr val="1E293B"/>
+                </a:solidFill>
+              </a:defRPr>
+            </a:pPr>
+            <a:r>
+              <a:t>• Review Decision Cards</a:t>
+            </a:r>
+          </a:p>
+          <a:p>
+            <a:pPr>
+              <a:spcAft>
+                <a:spcPts val="400"/>
+              </a:spcAft>
+              <a:defRPr sz="1100">
+                <a:solidFill>
+                  <a:srgbClr val="1E293B"/>
+                </a:solidFill>
+              </a:defRPr>
+            </a:pPr>
+            <a:r>
+              <a:t>• Formal Sign-off &amp; PDF Export</a:t>
             </a:r>
           </a:p>
         </p:txBody>
@@ -5563,7 +6385,7 @@
             <a:avLst/>
           </a:prstGeom>
           <a:solidFill>
-            <a:srgbClr val="F6F3EC"/>
+            <a:srgbClr val="FFFFFF"/>
           </a:solidFill>
           <a:ln>
             <a:noFill/>
@@ -5593,95 +6415,23 @@
       </p:sp>
       <p:sp>
         <p:nvSpPr>
-          <p:cNvPr id="3" name="TextBox 2"/>
-          <p:cNvSpPr txBox="1"/>
-          <p:nvPr/>
-        </p:nvSpPr>
-        <p:spPr>
-          <a:xfrm>
-            <a:off x="731520" y="457200"/>
-            <a:ext cx="9144000" cy="365760"/>
+          <p:cNvPr id="3" name="Rectangle 2"/>
+          <p:cNvSpPr/>
+          <p:nvPr/>
+        </p:nvSpPr>
+        <p:spPr>
+          <a:xfrm>
+            <a:off x="731520" y="365760"/>
+            <a:ext cx="10728655" cy="36576"/>
           </a:xfrm>
           <a:prstGeom prst="rect">
             <a:avLst/>
           </a:prstGeom>
-          <a:noFill/>
-        </p:spPr>
-        <p:txBody>
-          <a:bodyPr wrap="square">
-            <a:spAutoFit/>
-          </a:bodyPr>
-          <a:lstStyle/>
-          <a:p>
-            <a:pPr>
-              <a:defRPr sz="1050" b="1">
-                <a:solidFill>
-                  <a:srgbClr val="B8902E"/>
-                </a:solidFill>
-              </a:defRPr>
-            </a:pPr>
-            <a:r>
-              <a:t>FORENSIC RULES</a:t>
-            </a:r>
-          </a:p>
-        </p:txBody>
-      </p:sp>
-      <p:sp>
-        <p:nvSpPr>
-          <p:cNvPr id="4" name="TextBox 3"/>
-          <p:cNvSpPr txBox="1"/>
-          <p:nvPr/>
-        </p:nvSpPr>
-        <p:spPr>
-          <a:xfrm>
-            <a:off x="731520" y="731520"/>
-            <a:ext cx="10698480" cy="640080"/>
-          </a:xfrm>
-          <a:prstGeom prst="rect">
-            <a:avLst/>
-          </a:prstGeom>
-          <a:noFill/>
-        </p:spPr>
-        <p:txBody>
-          <a:bodyPr wrap="square">
-            <a:spAutoFit/>
-          </a:bodyPr>
-          <a:lstStyle/>
-          <a:p>
-            <a:pPr>
-              <a:defRPr sz="2200" b="1">
-                <a:solidFill>
-                  <a:srgbClr val="0F2A1D"/>
-                </a:solidFill>
-              </a:defRPr>
-            </a:pPr>
-            <a:r>
-              <a:t>Mesin Deteksi Anomali Finansial &amp; Ambang Batas</a:t>
-            </a:r>
-          </a:p>
-        </p:txBody>
-      </p:sp>
-      <p:sp>
-        <p:nvSpPr>
-          <p:cNvPr id="5" name="Rounded Rectangle 4"/>
-          <p:cNvSpPr/>
-          <p:nvPr/>
-        </p:nvSpPr>
-        <p:spPr>
-          <a:xfrm>
-            <a:off x="731520" y="1554480"/>
-            <a:ext cx="10698480" cy="1005840"/>
-          </a:xfrm>
-          <a:prstGeom prst="roundRect">
-            <a:avLst/>
-          </a:prstGeom>
           <a:solidFill>
-            <a:srgbClr val="FFFFFF"/>
+            <a:srgbClr val="1B4332"/>
           </a:solidFill>
-          <a:ln w="19050">
-            <a:solidFill>
-              <a:srgbClr val="A6402A"/>
-            </a:solidFill>
+          <a:ln>
+            <a:noFill/>
           </a:ln>
         </p:spPr>
         <p:style>
@@ -5708,14 +6458,14 @@
       </p:sp>
       <p:sp>
         <p:nvSpPr>
-          <p:cNvPr id="6" name="TextBox 5"/>
+          <p:cNvPr id="4" name="TextBox 3"/>
           <p:cNvSpPr txBox="1"/>
           <p:nvPr/>
         </p:nvSpPr>
         <p:spPr>
           <a:xfrm>
-            <a:off x="914400" y="1664208"/>
-            <a:ext cx="10332720" cy="786384"/>
+            <a:off x="731520" y="502920"/>
+            <a:ext cx="9144000" cy="320040"/>
           </a:xfrm>
           <a:prstGeom prst="rect">
             <a:avLst/>
@@ -5729,50 +6479,73 @@
           <a:lstStyle/>
           <a:p>
             <a:pPr>
-              <a:defRPr sz="1300" b="1">
-                <a:solidFill>
-                  <a:srgbClr val="0F2A1D"/>
-                </a:solidFill>
-              </a:defRPr>
-            </a:pPr>
-            <a:r>
-              <a:t>1. NCI Profit Allocation Disparity  [Kritis (High)]</a:t>
-            </a:r>
-          </a:p>
-          <a:p>
-            <a:pPr>
-              <a:defRPr sz="1080">
-                <a:solidFill>
-                  <a:srgbClr val="5C564A"/>
-                </a:solidFill>
-              </a:defRPr>
-            </a:pPr>
-            <a:r>
-              <a:t>Formula: |Reported NCI - Computed NCI| &gt; 8%  •  Tujuan Audit: Mencegah distorsi laba induk dan memastikan hak dividen pemegang saham minoritas terlindungi sesuai PSAK 65.</a:t>
-            </a:r>
-          </a:p>
-        </p:txBody>
-      </p:sp>
-      <p:sp>
-        <p:nvSpPr>
-          <p:cNvPr id="7" name="Rounded Rectangle 6"/>
+              <a:defRPr sz="1000" b="1">
+                <a:solidFill>
+                  <a:srgbClr val="B48214"/>
+                </a:solidFill>
+              </a:defRPr>
+            </a:pPr>
+            <a:r>
+              <a:t>QUANTITATIVE RULES</a:t>
+            </a:r>
+          </a:p>
+        </p:txBody>
+      </p:sp>
+      <p:sp>
+        <p:nvSpPr>
+          <p:cNvPr id="5" name="TextBox 4"/>
+          <p:cNvSpPr txBox="1"/>
+          <p:nvPr/>
+        </p:nvSpPr>
+        <p:spPr>
+          <a:xfrm>
+            <a:off x="731520" y="777240"/>
+            <a:ext cx="10728655" cy="640080"/>
+          </a:xfrm>
+          <a:prstGeom prst="rect">
+            <a:avLst/>
+          </a:prstGeom>
+          <a:noFill/>
+        </p:spPr>
+        <p:txBody>
+          <a:bodyPr wrap="square">
+            <a:spAutoFit/>
+          </a:bodyPr>
+          <a:lstStyle/>
+          <a:p>
+            <a:pPr>
+              <a:defRPr sz="2200" b="1">
+                <a:solidFill>
+                  <a:srgbClr val="0F172A"/>
+                </a:solidFill>
+              </a:defRPr>
+            </a:pPr>
+            <a:r>
+              <a:t>Forensic Anomaly Detection Engine: Vectors &amp; Thresholds</a:t>
+            </a:r>
+          </a:p>
+        </p:txBody>
+      </p:sp>
+      <p:sp>
+        <p:nvSpPr>
+          <p:cNvPr id="6" name="Rounded Rectangle 5"/>
           <p:cNvSpPr/>
           <p:nvPr/>
         </p:nvSpPr>
         <p:spPr>
           <a:xfrm>
-            <a:off x="731520" y="2697480"/>
-            <a:ext cx="10698480" cy="1005840"/>
+            <a:off x="731520" y="1600200"/>
+            <a:ext cx="10728655" cy="1005840"/>
           </a:xfrm>
           <a:prstGeom prst="roundRect">
             <a:avLst/>
           </a:prstGeom>
           <a:solidFill>
-            <a:srgbClr val="FFFFFF"/>
+            <a:srgbClr val="F8FAFC"/>
           </a:solidFill>
-          <a:ln w="19050">
+          <a:ln>
             <a:solidFill>
-              <a:srgbClr val="A6402A"/>
+              <a:srgbClr val="E2E8F0"/>
             </a:solidFill>
           </a:ln>
         </p:spPr>
@@ -5800,72 +6573,23 @@
       </p:sp>
       <p:sp>
         <p:nvSpPr>
-          <p:cNvPr id="8" name="TextBox 7"/>
-          <p:cNvSpPr txBox="1"/>
-          <p:nvPr/>
-        </p:nvSpPr>
-        <p:spPr>
-          <a:xfrm>
-            <a:off x="914400" y="2807208"/>
-            <a:ext cx="10332720" cy="786384"/>
+          <p:cNvPr id="7" name="Rectangle 6"/>
+          <p:cNvSpPr/>
+          <p:nvPr/>
+        </p:nvSpPr>
+        <p:spPr>
+          <a:xfrm>
+            <a:off x="731520" y="1600200"/>
+            <a:ext cx="73152" cy="1005840"/>
           </a:xfrm>
           <a:prstGeom prst="rect">
             <a:avLst/>
           </a:prstGeom>
-          <a:noFill/>
-        </p:spPr>
-        <p:txBody>
-          <a:bodyPr wrap="square">
-            <a:spAutoFit/>
-          </a:bodyPr>
-          <a:lstStyle/>
-          <a:p>
-            <a:pPr>
-              <a:defRPr sz="1300" b="1">
-                <a:solidFill>
-                  <a:srgbClr val="0F2A1D"/>
-                </a:solidFill>
-              </a:defRPr>
-            </a:pPr>
-            <a:r>
-              <a:t>2. Related-Party Debt Spike  [Kritis (High)]</a:t>
-            </a:r>
-          </a:p>
-          <a:p>
-            <a:pPr>
-              <a:defRPr sz="1080">
-                <a:solidFill>
-                  <a:srgbClr val="5C564A"/>
-                </a:solidFill>
-              </a:defRPr>
-            </a:pPr>
-            <a:r>
-              <a:t>Formula: ΔPiutang Relasi - ΔRevenue &gt; 30%  •  Tujuan Audit: Mendeteksi aliran likuiditas keluar ke entitas berelasi dan mencegah akumulasi kredit macet internal (PSAK 7).</a:t>
-            </a:r>
-          </a:p>
-        </p:txBody>
-      </p:sp>
-      <p:sp>
-        <p:nvSpPr>
-          <p:cNvPr id="9" name="Rounded Rectangle 8"/>
-          <p:cNvSpPr/>
-          <p:nvPr/>
-        </p:nvSpPr>
-        <p:spPr>
-          <a:xfrm>
-            <a:off x="731520" y="3840480"/>
-            <a:ext cx="10698480" cy="1005840"/>
-          </a:xfrm>
-          <a:prstGeom prst="roundRect">
-            <a:avLst/>
-          </a:prstGeom>
           <a:solidFill>
-            <a:srgbClr val="FFFFFF"/>
+            <a:srgbClr val="E11D48"/>
           </a:solidFill>
-          <a:ln w="19050">
-            <a:solidFill>
-              <a:srgbClr val="B8902E"/>
-            </a:solidFill>
+          <a:ln>
+            <a:noFill/>
           </a:ln>
         </p:spPr>
         <p:style>
@@ -5892,13 +6616,13 @@
       </p:sp>
       <p:sp>
         <p:nvSpPr>
-          <p:cNvPr id="10" name="TextBox 9"/>
+          <p:cNvPr id="8" name="TextBox 7"/>
           <p:cNvSpPr txBox="1"/>
           <p:nvPr/>
         </p:nvSpPr>
         <p:spPr>
           <a:xfrm>
-            <a:off x="914400" y="3950208"/>
+            <a:off x="960120" y="1709928"/>
             <a:ext cx="10332720" cy="786384"/>
           </a:xfrm>
           <a:prstGeom prst="rect">
@@ -5913,50 +6637,53 @@
           <a:lstStyle/>
           <a:p>
             <a:pPr>
-              <a:defRPr sz="1300" b="1">
-                <a:solidFill>
-                  <a:srgbClr val="0F2A1D"/>
-                </a:solidFill>
-              </a:defRPr>
-            </a:pPr>
-            <a:r>
-              <a:t>3. Leverage / DER Surge  [Sedang (Med)]</a:t>
-            </a:r>
-          </a:p>
-          <a:p>
-            <a:pPr>
-              <a:defRPr sz="1080">
-                <a:solidFill>
-                  <a:srgbClr val="5C564A"/>
-                </a:solidFill>
-              </a:defRPr>
-            </a:pPr>
-            <a:r>
-              <a:t>Formula: DER CY / DER PY - 1 &gt; 18%  •  Tujuan Audit: Mengontrol risiko solvabilitas anak perusahaan sebelum melanggar debt covenant perbankan.</a:t>
-            </a:r>
-          </a:p>
-        </p:txBody>
-      </p:sp>
-      <p:sp>
-        <p:nvSpPr>
-          <p:cNvPr id="11" name="Rounded Rectangle 10"/>
+              <a:defRPr sz="1350" b="1">
+                <a:solidFill>
+                  <a:srgbClr val="E11D48"/>
+                </a:solidFill>
+              </a:defRPr>
+            </a:pPr>
+            <a:r>
+              <a:t>1. NCI Profit Allocation Disparity  [CRITICAL]</a:t>
+            </a:r>
+          </a:p>
+          <a:p>
+            <a:pPr>
+              <a:spcBef>
+                <a:spcPts val="300"/>
+              </a:spcBef>
+              <a:defRPr sz="1100">
+                <a:solidFill>
+                  <a:srgbClr val="1E293B"/>
+                </a:solidFill>
+              </a:defRPr>
+            </a:pPr>
+            <a:r>
+              <a:t>Formula: |Reported NCI - Computed NCI| &gt; 8%   •   Audit Objective: Prevents parent income distortion and safeguards minority shareholder dividend equity under IFRS 10 / PSAK 65.</a:t>
+            </a:r>
+          </a:p>
+        </p:txBody>
+      </p:sp>
+      <p:sp>
+        <p:nvSpPr>
+          <p:cNvPr id="9" name="Rounded Rectangle 8"/>
           <p:cNvSpPr/>
           <p:nvPr/>
         </p:nvSpPr>
         <p:spPr>
           <a:xfrm>
-            <a:off x="731520" y="4983480"/>
-            <a:ext cx="10698480" cy="1005840"/>
+            <a:off x="731520" y="2743200"/>
+            <a:ext cx="10728655" cy="1005840"/>
           </a:xfrm>
           <a:prstGeom prst="roundRect">
             <a:avLst/>
           </a:prstGeom>
           <a:solidFill>
-            <a:srgbClr val="FFFFFF"/>
+            <a:srgbClr val="F8FAFC"/>
           </a:solidFill>
-          <a:ln w="19050">
+          <a:ln>
             <a:solidFill>
-              <a:srgbClr val="B8902E"/>
+              <a:srgbClr val="E2E8F0"/>
             </a:solidFill>
           </a:ln>
         </p:spPr>
@@ -5984,13 +6711,56 @@
       </p:sp>
       <p:sp>
         <p:nvSpPr>
-          <p:cNvPr id="12" name="TextBox 11"/>
+          <p:cNvPr id="10" name="Rectangle 9"/>
+          <p:cNvSpPr/>
+          <p:nvPr/>
+        </p:nvSpPr>
+        <p:spPr>
+          <a:xfrm>
+            <a:off x="731520" y="2743200"/>
+            <a:ext cx="73152" cy="1005840"/>
+          </a:xfrm>
+          <a:prstGeom prst="rect">
+            <a:avLst/>
+          </a:prstGeom>
+          <a:solidFill>
+            <a:srgbClr val="E11D48"/>
+          </a:solidFill>
+          <a:ln>
+            <a:noFill/>
+          </a:ln>
+        </p:spPr>
+        <p:style>
+          <a:lnRef idx="1">
+            <a:schemeClr val="accent1"/>
+          </a:lnRef>
+          <a:fillRef idx="3">
+            <a:schemeClr val="accent1"/>
+          </a:fillRef>
+          <a:effectRef idx="2">
+            <a:schemeClr val="accent1"/>
+          </a:effectRef>
+          <a:fontRef idx="minor">
+            <a:schemeClr val="lt1"/>
+          </a:fontRef>
+        </p:style>
+        <p:txBody>
+          <a:bodyPr rtlCol="0" anchor="ctr"/>
+          <a:lstStyle/>
+          <a:p>
+            <a:pPr algn="ctr"/>
+          </a:p>
+        </p:txBody>
+      </p:sp>
+      <p:sp>
+        <p:nvSpPr>
+          <p:cNvPr id="11" name="TextBox 10"/>
           <p:cNvSpPr txBox="1"/>
           <p:nvPr/>
         </p:nvSpPr>
         <p:spPr>
           <a:xfrm>
-            <a:off x="914400" y="5093208"/>
+            <a:off x="960120" y="2852928"/>
             <a:ext cx="10332720" cy="786384"/>
           </a:xfrm>
           <a:prstGeom prst="rect">
@@ -6005,26 +6775,305 @@
           <a:lstStyle/>
           <a:p>
             <a:pPr>
-              <a:defRPr sz="1300" b="1">
-                <a:solidFill>
-                  <a:srgbClr val="0F2A1D"/>
-                </a:solidFill>
-              </a:defRPr>
-            </a:pPr>
-            <a:r>
-              <a:t>4. Profit Margin Distortion  [Rendah / Sedang]</a:t>
-            </a:r>
-          </a:p>
-          <a:p>
-            <a:pPr>
-              <a:defRPr sz="1080">
-                <a:solidFill>
-                  <a:srgbClr val="5C564A"/>
-                </a:solidFill>
-              </a:defRPr>
-            </a:pPr>
-            <a:r>
-              <a:t>Formula: |Margin CY - Margin PY| ≥ 3.5pp  •  Tujuan Audit: Mengidentifikasi keuntungan non-operasional satu kali (one-off) atau inefisiensi beban pokok operasional.</a:t>
+              <a:defRPr sz="1350" b="1">
+                <a:solidFill>
+                  <a:srgbClr val="E11D48"/>
+                </a:solidFill>
+              </a:defRPr>
+            </a:pPr>
+            <a:r>
+              <a:t>2. Related-Party Debt Acceleration  [CRITICAL]</a:t>
+            </a:r>
+          </a:p>
+          <a:p>
+            <a:pPr>
+              <a:spcBef>
+                <a:spcPts val="300"/>
+              </a:spcBef>
+              <a:defRPr sz="1100">
+                <a:solidFill>
+                  <a:srgbClr val="1E293B"/>
+                </a:solidFill>
+              </a:defRPr>
+            </a:pPr>
+            <a:r>
+              <a:t>Formula: ΔRP Receivables - ΔRevenue &gt; 30%   •   Audit Objective: Detects liquidity outflows into affiliated entities and halts hidden internal non-performing debt under IAS 24 / PSAK 7.</a:t>
+            </a:r>
+          </a:p>
+        </p:txBody>
+      </p:sp>
+      <p:sp>
+        <p:nvSpPr>
+          <p:cNvPr id="12" name="Rounded Rectangle 11"/>
+          <p:cNvSpPr/>
+          <p:nvPr/>
+        </p:nvSpPr>
+        <p:spPr>
+          <a:xfrm>
+            <a:off x="731520" y="3886200"/>
+            <a:ext cx="10728655" cy="1005840"/>
+          </a:xfrm>
+          <a:prstGeom prst="roundRect">
+            <a:avLst/>
+          </a:prstGeom>
+          <a:solidFill>
+            <a:srgbClr val="F8FAFC"/>
+          </a:solidFill>
+          <a:ln>
+            <a:solidFill>
+              <a:srgbClr val="E2E8F0"/>
+            </a:solidFill>
+          </a:ln>
+        </p:spPr>
+        <p:style>
+          <a:lnRef idx="1">
+            <a:schemeClr val="accent1"/>
+          </a:lnRef>
+          <a:fillRef idx="3">
+            <a:schemeClr val="accent1"/>
+          </a:fillRef>
+          <a:effectRef idx="2">
+            <a:schemeClr val="accent1"/>
+          </a:effectRef>
+          <a:fontRef idx="minor">
+            <a:schemeClr val="lt1"/>
+          </a:fontRef>
+        </p:style>
+        <p:txBody>
+          <a:bodyPr rtlCol="0" anchor="ctr"/>
+          <a:lstStyle/>
+          <a:p>
+            <a:pPr algn="ctr"/>
+          </a:p>
+        </p:txBody>
+      </p:sp>
+      <p:sp>
+        <p:nvSpPr>
+          <p:cNvPr id="13" name="Rectangle 12"/>
+          <p:cNvSpPr/>
+          <p:nvPr/>
+        </p:nvSpPr>
+        <p:spPr>
+          <a:xfrm>
+            <a:off x="731520" y="3886200"/>
+            <a:ext cx="73152" cy="1005840"/>
+          </a:xfrm>
+          <a:prstGeom prst="rect">
+            <a:avLst/>
+          </a:prstGeom>
+          <a:solidFill>
+            <a:srgbClr val="D97706"/>
+          </a:solidFill>
+          <a:ln>
+            <a:noFill/>
+          </a:ln>
+        </p:spPr>
+        <p:style>
+          <a:lnRef idx="1">
+            <a:schemeClr val="accent1"/>
+          </a:lnRef>
+          <a:fillRef idx="3">
+            <a:schemeClr val="accent1"/>
+          </a:fillRef>
+          <a:effectRef idx="2">
+            <a:schemeClr val="accent1"/>
+          </a:effectRef>
+          <a:fontRef idx="minor">
+            <a:schemeClr val="lt1"/>
+          </a:fontRef>
+        </p:style>
+        <p:txBody>
+          <a:bodyPr rtlCol="0" anchor="ctr"/>
+          <a:lstStyle/>
+          <a:p>
+            <a:pPr algn="ctr"/>
+          </a:p>
+        </p:txBody>
+      </p:sp>
+      <p:sp>
+        <p:nvSpPr>
+          <p:cNvPr id="14" name="TextBox 13"/>
+          <p:cNvSpPr txBox="1"/>
+          <p:nvPr/>
+        </p:nvSpPr>
+        <p:spPr>
+          <a:xfrm>
+            <a:off x="960120" y="3995928"/>
+            <a:ext cx="10332720" cy="786384"/>
+          </a:xfrm>
+          <a:prstGeom prst="rect">
+            <a:avLst/>
+          </a:prstGeom>
+          <a:noFill/>
+        </p:spPr>
+        <p:txBody>
+          <a:bodyPr wrap="square">
+            <a:spAutoFit/>
+          </a:bodyPr>
+          <a:lstStyle/>
+          <a:p>
+            <a:pPr>
+              <a:defRPr sz="1350" b="1">
+                <a:solidFill>
+                  <a:srgbClr val="D97706"/>
+                </a:solidFill>
+              </a:defRPr>
+            </a:pPr>
+            <a:r>
+              <a:t>3. Sudden Leverage / DER Escalation  [MEDIUM]</a:t>
+            </a:r>
+          </a:p>
+          <a:p>
+            <a:pPr>
+              <a:spcBef>
+                <a:spcPts val="300"/>
+              </a:spcBef>
+              <a:defRPr sz="1100">
+                <a:solidFill>
+                  <a:srgbClr val="1E293B"/>
+                </a:solidFill>
+              </a:defRPr>
+            </a:pPr>
+            <a:r>
+              <a:t>Formula: DER CY / DER PY - 1 &gt; 18%   •   Audit Objective: Monitors subsidiary debt growth before debt-to-equity ratios breach bank debt covenants or regulatory limits.</a:t>
+            </a:r>
+          </a:p>
+        </p:txBody>
+      </p:sp>
+      <p:sp>
+        <p:nvSpPr>
+          <p:cNvPr id="15" name="Rounded Rectangle 14"/>
+          <p:cNvSpPr/>
+          <p:nvPr/>
+        </p:nvSpPr>
+        <p:spPr>
+          <a:xfrm>
+            <a:off x="731520" y="5029200"/>
+            <a:ext cx="10728655" cy="1005840"/>
+          </a:xfrm>
+          <a:prstGeom prst="roundRect">
+            <a:avLst/>
+          </a:prstGeom>
+          <a:solidFill>
+            <a:srgbClr val="F8FAFC"/>
+          </a:solidFill>
+          <a:ln>
+            <a:solidFill>
+              <a:srgbClr val="E2E8F0"/>
+            </a:solidFill>
+          </a:ln>
+        </p:spPr>
+        <p:style>
+          <a:lnRef idx="1">
+            <a:schemeClr val="accent1"/>
+          </a:lnRef>
+          <a:fillRef idx="3">
+            <a:schemeClr val="accent1"/>
+          </a:fillRef>
+          <a:effectRef idx="2">
+            <a:schemeClr val="accent1"/>
+          </a:effectRef>
+          <a:fontRef idx="minor">
+            <a:schemeClr val="lt1"/>
+          </a:fontRef>
+        </p:style>
+        <p:txBody>
+          <a:bodyPr rtlCol="0" anchor="ctr"/>
+          <a:lstStyle/>
+          <a:p>
+            <a:pPr algn="ctr"/>
+          </a:p>
+        </p:txBody>
+      </p:sp>
+      <p:sp>
+        <p:nvSpPr>
+          <p:cNvPr id="16" name="Rectangle 15"/>
+          <p:cNvSpPr/>
+          <p:nvPr/>
+        </p:nvSpPr>
+        <p:spPr>
+          <a:xfrm>
+            <a:off x="731520" y="5029200"/>
+            <a:ext cx="73152" cy="1005840"/>
+          </a:xfrm>
+          <a:prstGeom prst="rect">
+            <a:avLst/>
+          </a:prstGeom>
+          <a:solidFill>
+            <a:srgbClr val="0D9488"/>
+          </a:solidFill>
+          <a:ln>
+            <a:noFill/>
+          </a:ln>
+        </p:spPr>
+        <p:style>
+          <a:lnRef idx="1">
+            <a:schemeClr val="accent1"/>
+          </a:lnRef>
+          <a:fillRef idx="3">
+            <a:schemeClr val="accent1"/>
+          </a:fillRef>
+          <a:effectRef idx="2">
+            <a:schemeClr val="accent1"/>
+          </a:effectRef>
+          <a:fontRef idx="minor">
+            <a:schemeClr val="lt1"/>
+          </a:fontRef>
+        </p:style>
+        <p:txBody>
+          <a:bodyPr rtlCol="0" anchor="ctr"/>
+          <a:lstStyle/>
+          <a:p>
+            <a:pPr algn="ctr"/>
+          </a:p>
+        </p:txBody>
+      </p:sp>
+      <p:sp>
+        <p:nvSpPr>
+          <p:cNvPr id="17" name="TextBox 16"/>
+          <p:cNvSpPr txBox="1"/>
+          <p:nvPr/>
+        </p:nvSpPr>
+        <p:spPr>
+          <a:xfrm>
+            <a:off x="960120" y="5138928"/>
+            <a:ext cx="10332720" cy="786384"/>
+          </a:xfrm>
+          <a:prstGeom prst="rect">
+            <a:avLst/>
+          </a:prstGeom>
+          <a:noFill/>
+        </p:spPr>
+        <p:txBody>
+          <a:bodyPr wrap="square">
+            <a:spAutoFit/>
+          </a:bodyPr>
+          <a:lstStyle/>
+          <a:p>
+            <a:pPr>
+              <a:defRPr sz="1350" b="1">
+                <a:solidFill>
+                  <a:srgbClr val="0D9488"/>
+                </a:solidFill>
+              </a:defRPr>
+            </a:pPr>
+            <a:r>
+              <a:t>4. Profit Margin Distortion  [MODERATE]</a:t>
+            </a:r>
+          </a:p>
+          <a:p>
+            <a:pPr>
+              <a:spcBef>
+                <a:spcPts val="300"/>
+              </a:spcBef>
+              <a:defRPr sz="1100">
+                <a:solidFill>
+                  <a:srgbClr val="1E293B"/>
+                </a:solidFill>
+              </a:defRPr>
+            </a:pPr>
+            <a:r>
+              <a:t>Formula: |Margin CY - Margin PY| ≥ 3.5 pp   •   Audit Objective: Verifies whether margin expansion/compression stems from genuine operations or one-off artificial transactions.</a:t>
             </a:r>
           </a:p>
         </p:txBody>
@@ -6062,7 +7111,7 @@
             <a:avLst/>
           </a:prstGeom>
           <a:solidFill>
-            <a:srgbClr val="F6F3EC"/>
+            <a:srgbClr val="FFFFFF"/>
           </a:solidFill>
           <a:ln>
             <a:noFill/>
@@ -6092,95 +7141,23 @@
       </p:sp>
       <p:sp>
         <p:nvSpPr>
-          <p:cNvPr id="3" name="TextBox 2"/>
-          <p:cNvSpPr txBox="1"/>
-          <p:nvPr/>
-        </p:nvSpPr>
-        <p:spPr>
-          <a:xfrm>
-            <a:off x="731520" y="457200"/>
-            <a:ext cx="9144000" cy="365760"/>
+          <p:cNvPr id="3" name="Rectangle 2"/>
+          <p:cNvSpPr/>
+          <p:nvPr/>
+        </p:nvSpPr>
+        <p:spPr>
+          <a:xfrm>
+            <a:off x="731520" y="365760"/>
+            <a:ext cx="10728655" cy="36576"/>
           </a:xfrm>
           <a:prstGeom prst="rect">
             <a:avLst/>
           </a:prstGeom>
-          <a:noFill/>
-        </p:spPr>
-        <p:txBody>
-          <a:bodyPr wrap="square">
-            <a:spAutoFit/>
-          </a:bodyPr>
-          <a:lstStyle/>
-          <a:p>
-            <a:pPr>
-              <a:defRPr sz="1050" b="1">
-                <a:solidFill>
-                  <a:srgbClr val="B8902E"/>
-                </a:solidFill>
-              </a:defRPr>
-            </a:pPr>
-            <a:r>
-              <a:t>HUMAN-IN-THE-LOOP</a:t>
-            </a:r>
-          </a:p>
-        </p:txBody>
-      </p:sp>
-      <p:sp>
-        <p:nvSpPr>
-          <p:cNvPr id="4" name="TextBox 3"/>
-          <p:cNvSpPr txBox="1"/>
-          <p:nvPr/>
-        </p:nvSpPr>
-        <p:spPr>
-          <a:xfrm>
-            <a:off x="731520" y="731520"/>
-            <a:ext cx="10698480" cy="640080"/>
-          </a:xfrm>
-          <a:prstGeom prst="rect">
-            <a:avLst/>
-          </a:prstGeom>
-          <a:noFill/>
-        </p:spPr>
-        <p:txBody>
-          <a:bodyPr wrap="square">
-            <a:spAutoFit/>
-          </a:bodyPr>
-          <a:lstStyle/>
-          <a:p>
-            <a:pPr>
-              <a:defRPr sz="2200" b="1">
-                <a:solidFill>
-                  <a:srgbClr val="0F2A1D"/>
-                </a:solidFill>
-              </a:defRPr>
-            </a:pPr>
-            <a:r>
-              <a:t>Review Workspace: Hasil yang Perlu Di-Review</a:t>
-            </a:r>
-          </a:p>
-        </p:txBody>
-      </p:sp>
-      <p:sp>
-        <p:nvSpPr>
-          <p:cNvPr id="5" name="Rounded Rectangle 4"/>
-          <p:cNvSpPr/>
-          <p:nvPr/>
-        </p:nvSpPr>
-        <p:spPr>
-          <a:xfrm>
-            <a:off x="731520" y="1554480"/>
-            <a:ext cx="2560320" cy="4389120"/>
-          </a:xfrm>
-          <a:prstGeom prst="roundRect">
-            <a:avLst/>
-          </a:prstGeom>
           <a:solidFill>
-            <a:srgbClr val="FFFFFF"/>
+            <a:srgbClr val="1B4332"/>
           </a:solidFill>
-          <a:ln w="19050">
-            <a:solidFill>
-              <a:srgbClr val="1B4332"/>
-            </a:solidFill>
+          <a:ln>
+            <a:noFill/>
           </a:ln>
         </p:spPr>
         <p:style>
@@ -6207,14 +7184,14 @@
       </p:sp>
       <p:sp>
         <p:nvSpPr>
-          <p:cNvPr id="6" name="TextBox 5"/>
+          <p:cNvPr id="4" name="TextBox 3"/>
           <p:cNvSpPr txBox="1"/>
           <p:nvPr/>
         </p:nvSpPr>
         <p:spPr>
           <a:xfrm>
-            <a:off x="932688" y="1755648"/>
-            <a:ext cx="2157984" cy="3986784"/>
+            <a:off x="731520" y="502920"/>
+            <a:ext cx="9144000" cy="320040"/>
           </a:xfrm>
           <a:prstGeom prst="rect">
             <a:avLst/>
@@ -6228,86 +7205,73 @@
           <a:lstStyle/>
           <a:p>
             <a:pPr>
-              <a:spcAft>
-                <a:spcPts val="800"/>
-              </a:spcAft>
-              <a:defRPr sz="1400" b="1">
-                <a:solidFill>
-                  <a:srgbClr val="1B4332"/>
-                </a:solidFill>
-              </a:defRPr>
-            </a:pPr>
-            <a:r>
-              <a:t>Step 1: Automated Flagging</a:t>
-            </a:r>
-          </a:p>
-          <a:p>
-            <a:pPr>
-              <a:spcAft>
-                <a:spcPts val="400"/>
-              </a:spcAft>
-              <a:defRPr sz="1150">
-                <a:solidFill>
-                  <a:srgbClr val="5C564A"/>
-                </a:solidFill>
-              </a:defRPr>
-            </a:pPr>
-            <a:r>
-              <a:t>• Rule Engine mengeksekusi pemeriksaan pada seluruh entitas.</a:t>
-            </a:r>
-          </a:p>
-          <a:p>
-            <a:pPr>
-              <a:spcAft>
-                <a:spcPts val="400"/>
-              </a:spcAft>
-              <a:defRPr sz="1150">
-                <a:solidFill>
-                  <a:srgbClr val="5C564A"/>
-                </a:solidFill>
-              </a:defRPr>
-            </a:pPr>
-            <a:r>
-              <a:t>• 4 temuan anomali otomatis diklasifikasikan berdasarkan tingkat keparahan.</a:t>
-            </a:r>
-          </a:p>
-          <a:p>
-            <a:pPr>
-              <a:spcAft>
-                <a:spcPts val="400"/>
-              </a:spcAft>
-              <a:defRPr sz="1150">
-                <a:solidFill>
-                  <a:srgbClr val="5C564A"/>
-                </a:solidFill>
-              </a:defRPr>
-            </a:pPr>
-            <a:r>
-              <a:t>• Badge Kritis / Sedang / Rendah dimunculkan pada workspace.</a:t>
-            </a:r>
-          </a:p>
-        </p:txBody>
-      </p:sp>
-      <p:sp>
-        <p:nvSpPr>
-          <p:cNvPr id="7" name="Rounded Rectangle 6"/>
+              <a:defRPr sz="1000" b="1">
+                <a:solidFill>
+                  <a:srgbClr val="B48214"/>
+                </a:solidFill>
+              </a:defRPr>
+            </a:pPr>
+            <a:r>
+              <a:t>AUDIT OPERATIONS</a:t>
+            </a:r>
+          </a:p>
+        </p:txBody>
+      </p:sp>
+      <p:sp>
+        <p:nvSpPr>
+          <p:cNvPr id="5" name="TextBox 4"/>
+          <p:cNvSpPr txBox="1"/>
+          <p:nvPr/>
+        </p:nvSpPr>
+        <p:spPr>
+          <a:xfrm>
+            <a:off x="731520" y="777240"/>
+            <a:ext cx="10728655" cy="640080"/>
+          </a:xfrm>
+          <a:prstGeom prst="rect">
+            <a:avLst/>
+          </a:prstGeom>
+          <a:noFill/>
+        </p:spPr>
+        <p:txBody>
+          <a:bodyPr wrap="square">
+            <a:spAutoFit/>
+          </a:bodyPr>
+          <a:lstStyle/>
+          <a:p>
+            <a:pPr>
+              <a:defRPr sz="2200" b="1">
+                <a:solidFill>
+                  <a:srgbClr val="0F172A"/>
+                </a:solidFill>
+              </a:defRPr>
+            </a:pPr>
+            <a:r>
+              <a:t>Actionable Review Workspace: Human-in-the-Loop Workflow</a:t>
+            </a:r>
+          </a:p>
+        </p:txBody>
+      </p:sp>
+      <p:sp>
+        <p:nvSpPr>
+          <p:cNvPr id="6" name="Rounded Rectangle 5"/>
           <p:cNvSpPr/>
           <p:nvPr/>
         </p:nvSpPr>
         <p:spPr>
           <a:xfrm>
-            <a:off x="3438144" y="1554480"/>
+            <a:off x="731520" y="1600200"/>
             <a:ext cx="2560320" cy="4389120"/>
           </a:xfrm>
           <a:prstGeom prst="roundRect">
             <a:avLst/>
           </a:prstGeom>
           <a:solidFill>
-            <a:srgbClr val="FFFFFF"/>
+            <a:srgbClr val="F8FAFC"/>
           </a:solidFill>
-          <a:ln w="19050">
+          <a:ln w="12700">
             <a:solidFill>
-              <a:srgbClr val="1B4332"/>
+              <a:srgbClr val="E2E8F0"/>
             </a:solidFill>
           </a:ln>
         </p:spPr>
@@ -6335,108 +7299,23 @@
       </p:sp>
       <p:sp>
         <p:nvSpPr>
-          <p:cNvPr id="8" name="TextBox 7"/>
-          <p:cNvSpPr txBox="1"/>
-          <p:nvPr/>
-        </p:nvSpPr>
-        <p:spPr>
-          <a:xfrm>
-            <a:off x="3639312" y="1755648"/>
-            <a:ext cx="2157984" cy="3986784"/>
-          </a:xfrm>
-          <a:prstGeom prst="rect">
-            <a:avLst/>
-          </a:prstGeom>
-          <a:noFill/>
-        </p:spPr>
-        <p:txBody>
-          <a:bodyPr wrap="square">
-            <a:spAutoFit/>
-          </a:bodyPr>
-          <a:lstStyle/>
-          <a:p>
-            <a:pPr>
-              <a:spcAft>
-                <a:spcPts val="800"/>
-              </a:spcAft>
-              <a:defRPr sz="1400" b="1">
-                <a:solidFill>
-                  <a:srgbClr val="1B4332"/>
-                </a:solidFill>
-              </a:defRPr>
-            </a:pPr>
-            <a:r>
-              <a:t>Step 2: AI Rationale &amp; Impact</a:t>
-            </a:r>
-          </a:p>
-          <a:p>
-            <a:pPr>
-              <a:spcAft>
-                <a:spcPts val="400"/>
-              </a:spcAft>
-              <a:defRPr sz="1150">
-                <a:solidFill>
-                  <a:srgbClr val="5C564A"/>
-                </a:solidFill>
-              </a:defRPr>
-            </a:pPr>
-            <a:r>
-              <a:t>• Agent menghasilkan rekomendasi tindakan dan analisa dampak risiko.</a:t>
-            </a:r>
-          </a:p>
-          <a:p>
-            <a:pPr>
-              <a:spcAft>
-                <a:spcPts val="400"/>
-              </a:spcAft>
-              <a:defRPr sz="1150">
-                <a:solidFill>
-                  <a:srgbClr val="5C564A"/>
-                </a:solidFill>
-              </a:defRPr>
-            </a:pPr>
-            <a:r>
-              <a:t>• Referensi standar akuntansi PSAK 65 dan PSAK 7 dicantumkan.</a:t>
-            </a:r>
-          </a:p>
-          <a:p>
-            <a:pPr>
-              <a:spcAft>
-                <a:spcPts val="400"/>
-              </a:spcAft>
-              <a:defRPr sz="1150">
-                <a:solidFill>
-                  <a:srgbClr val="5C564A"/>
-                </a:solidFill>
-              </a:defRPr>
-            </a:pPr>
-            <a:r>
-              <a:t>• Chat copilot merangkum temuan untuk pimpinan secara instan.</a:t>
-            </a:r>
-          </a:p>
-        </p:txBody>
-      </p:sp>
-      <p:sp>
-        <p:nvSpPr>
-          <p:cNvPr id="9" name="Rounded Rectangle 8"/>
+          <p:cNvPr id="7" name="Rounded Rectangle 6"/>
           <p:cNvSpPr/>
           <p:nvPr/>
         </p:nvSpPr>
         <p:spPr>
           <a:xfrm>
-            <a:off x="6144768" y="1554480"/>
-            <a:ext cx="2560320" cy="4389120"/>
+            <a:off x="731520" y="1600200"/>
+            <a:ext cx="2560320" cy="73152"/>
           </a:xfrm>
           <a:prstGeom prst="roundRect">
             <a:avLst/>
           </a:prstGeom>
           <a:solidFill>
-            <a:srgbClr val="FFFFFF"/>
+            <a:srgbClr val="E11D48"/>
           </a:solidFill>
-          <a:ln w="19050">
-            <a:solidFill>
-              <a:srgbClr val="1B4332"/>
-            </a:solidFill>
+          <a:ln>
+            <a:noFill/>
           </a:ln>
         </p:spPr>
         <p:style>
@@ -6463,14 +7342,14 @@
       </p:sp>
       <p:sp>
         <p:nvSpPr>
-          <p:cNvPr id="10" name="TextBox 9"/>
+          <p:cNvPr id="8" name="TextBox 7"/>
           <p:cNvSpPr txBox="1"/>
           <p:nvPr/>
         </p:nvSpPr>
         <p:spPr>
           <a:xfrm>
-            <a:off x="6345936" y="1755648"/>
-            <a:ext cx="2157984" cy="3986784"/>
+            <a:off x="950976" y="1819656"/>
+            <a:ext cx="2121408" cy="3950208"/>
           </a:xfrm>
           <a:prstGeom prst="rect">
             <a:avLst/>
@@ -6487,14 +7366,14 @@
               <a:spcAft>
                 <a:spcPts val="800"/>
               </a:spcAft>
-              <a:defRPr sz="1400" b="1">
-                <a:solidFill>
-                  <a:srgbClr val="1B4332"/>
-                </a:solidFill>
-              </a:defRPr>
-            </a:pPr>
-            <a:r>
-              <a:t>Step 3: Reviewer Action</a:t>
+              <a:defRPr sz="1350" b="1">
+                <a:solidFill>
+                  <a:srgbClr val="E11D48"/>
+                </a:solidFill>
+              </a:defRPr>
+            </a:pPr>
+            <a:r>
+              <a:t>Step 1: Automated Flagging</a:t>
             </a:r>
           </a:p>
           <a:p>
@@ -6502,14 +7381,14 @@
               <a:spcAft>
                 <a:spcPts val="400"/>
               </a:spcAft>
-              <a:defRPr sz="1150">
-                <a:solidFill>
-                  <a:srgbClr val="5C564A"/>
-                </a:solidFill>
-              </a:defRPr>
-            </a:pPr>
-            <a:r>
-              <a:t>• Auditor menetapkan status: Perlu Klarifikasi / Temuan / Disetujui.</a:t>
+              <a:defRPr sz="1100">
+                <a:solidFill>
+                  <a:srgbClr val="1E293B"/>
+                </a:solidFill>
+              </a:defRPr>
+            </a:pPr>
+            <a:r>
+              <a:t>• Rule Engine scans all 6 entities instantly.</a:t>
             </a:r>
           </a:p>
           <a:p>
@@ -6517,14 +7396,14 @@
               <a:spcAft>
                 <a:spcPts val="400"/>
               </a:spcAft>
-              <a:defRPr sz="1150">
-                <a:solidFill>
-                  <a:srgbClr val="5C564A"/>
-                </a:solidFill>
-              </a:defRPr>
-            </a:pPr>
-            <a:r>
-              <a:t>• Input catatan auditor internal dan permintaan data pendukung.</a:t>
+              <a:defRPr sz="1100">
+                <a:solidFill>
+                  <a:srgbClr val="1E293B"/>
+                </a:solidFill>
+              </a:defRPr>
+            </a:pPr>
+            <a:r>
+              <a:t>• Anomalies classified by severity: Critical, Medium, Moderate.</a:t>
             </a:r>
           </a:p>
           <a:p>
@@ -6532,38 +7411,38 @@
               <a:spcAft>
                 <a:spcPts val="400"/>
               </a:spcAft>
-              <a:defRPr sz="1150">
-                <a:solidFill>
-                  <a:srgbClr val="5C564A"/>
-                </a:solidFill>
-              </a:defRPr>
-            </a:pPr>
-            <a:r>
-              <a:t>• Fitur satu klik 'Kirim Notif Entitas' untuk surat konfirmasi.</a:t>
-            </a:r>
-          </a:p>
-        </p:txBody>
-      </p:sp>
-      <p:sp>
-        <p:nvSpPr>
-          <p:cNvPr id="11" name="Rounded Rectangle 10"/>
+              <a:defRPr sz="1100">
+                <a:solidFill>
+                  <a:srgbClr val="1E293B"/>
+                </a:solidFill>
+              </a:defRPr>
+            </a:pPr>
+            <a:r>
+              <a:t>• Dynamic badges populate the review dashboard.</a:t>
+            </a:r>
+          </a:p>
+        </p:txBody>
+      </p:sp>
+      <p:sp>
+        <p:nvSpPr>
+          <p:cNvPr id="9" name="Rounded Rectangle 8"/>
           <p:cNvSpPr/>
           <p:nvPr/>
         </p:nvSpPr>
         <p:spPr>
           <a:xfrm>
-            <a:off x="8851392" y="1554480"/>
+            <a:off x="3438144" y="1600200"/>
             <a:ext cx="2560320" cy="4389120"/>
           </a:xfrm>
           <a:prstGeom prst="roundRect">
             <a:avLst/>
           </a:prstGeom>
           <a:solidFill>
-            <a:srgbClr val="FFFFFF"/>
+            <a:srgbClr val="F8FAFC"/>
           </a:solidFill>
-          <a:ln w="19050">
+          <a:ln w="12700">
             <a:solidFill>
-              <a:srgbClr val="1B4332"/>
+              <a:srgbClr val="E2E8F0"/>
             </a:solidFill>
           </a:ln>
         </p:spPr>
@@ -6591,14 +7470,57 @@
       </p:sp>
       <p:sp>
         <p:nvSpPr>
-          <p:cNvPr id="12" name="TextBox 11"/>
+          <p:cNvPr id="10" name="Rounded Rectangle 9"/>
+          <p:cNvSpPr/>
+          <p:nvPr/>
+        </p:nvSpPr>
+        <p:spPr>
+          <a:xfrm>
+            <a:off x="3438144" y="1600200"/>
+            <a:ext cx="2560320" cy="73152"/>
+          </a:xfrm>
+          <a:prstGeom prst="roundRect">
+            <a:avLst/>
+          </a:prstGeom>
+          <a:solidFill>
+            <a:srgbClr val="B48214"/>
+          </a:solidFill>
+          <a:ln>
+            <a:noFill/>
+          </a:ln>
+        </p:spPr>
+        <p:style>
+          <a:lnRef idx="1">
+            <a:schemeClr val="accent1"/>
+          </a:lnRef>
+          <a:fillRef idx="3">
+            <a:schemeClr val="accent1"/>
+          </a:fillRef>
+          <a:effectRef idx="2">
+            <a:schemeClr val="accent1"/>
+          </a:effectRef>
+          <a:fontRef idx="minor">
+            <a:schemeClr val="lt1"/>
+          </a:fontRef>
+        </p:style>
+        <p:txBody>
+          <a:bodyPr rtlCol="0" anchor="ctr"/>
+          <a:lstStyle/>
+          <a:p>
+            <a:pPr algn="ctr"/>
+          </a:p>
+        </p:txBody>
+      </p:sp>
+      <p:sp>
+        <p:nvSpPr>
+          <p:cNvPr id="11" name="TextBox 10"/>
           <p:cNvSpPr txBox="1"/>
           <p:nvPr/>
         </p:nvSpPr>
         <p:spPr>
           <a:xfrm>
-            <a:off x="9052560" y="1755648"/>
-            <a:ext cx="2157984" cy="3986784"/>
+            <a:off x="3657600" y="1819656"/>
+            <a:ext cx="2121408" cy="3950208"/>
           </a:xfrm>
           <a:prstGeom prst="rect">
             <a:avLst/>
@@ -6615,14 +7537,14 @@
               <a:spcAft>
                 <a:spcPts val="800"/>
               </a:spcAft>
-              <a:defRPr sz="1400" b="1">
-                <a:solidFill>
-                  <a:srgbClr val="1B4332"/>
-                </a:solidFill>
-              </a:defRPr>
-            </a:pPr>
-            <a:r>
-              <a:t>Step 4: Formal Sign-off</a:t>
+              <a:defRPr sz="1350" b="1">
+                <a:solidFill>
+                  <a:srgbClr val="B48214"/>
+                </a:solidFill>
+              </a:defRPr>
+            </a:pPr>
+            <a:r>
+              <a:t>Step 2: AI Reasoning &amp; Impact</a:t>
             </a:r>
           </a:p>
           <a:p>
@@ -6630,14 +7552,14 @@
               <a:spcAft>
                 <a:spcPts val="400"/>
               </a:spcAft>
-              <a:defRPr sz="1150">
-                <a:solidFill>
-                  <a:srgbClr val="5C564A"/>
-                </a:solidFill>
-              </a:defRPr>
-            </a:pPr>
-            <a:r>
-              <a:t>• Tracking progres: X dari Y temuan telah diselesaikan.</a:t>
+              <a:defRPr sz="1100">
+                <a:solidFill>
+                  <a:srgbClr val="1E293B"/>
+                </a:solidFill>
+              </a:defRPr>
+            </a:pPr>
+            <a:r>
+              <a:t>• AI Agent derives analytical root causes and accounting impact.</a:t>
             </a:r>
           </a:p>
           <a:p>
@@ -6645,14 +7567,14 @@
               <a:spcAft>
                 <a:spcPts val="400"/>
               </a:spcAft>
-              <a:defRPr sz="1150">
-                <a:solidFill>
-                  <a:srgbClr val="5C564A"/>
-                </a:solidFill>
-              </a:defRPr>
-            </a:pPr>
-            <a:r>
-              <a:t>• Tombol pengesahan resmi penguncian kertas kerja telaah.</a:t>
+              <a:defRPr sz="1100">
+                <a:solidFill>
+                  <a:srgbClr val="1E293B"/>
+                </a:solidFill>
+              </a:defRPr>
+            </a:pPr>
+            <a:r>
+              <a:t>• Relevant IFRS 10 / IAS 24 standards cited.</a:t>
             </a:r>
           </a:p>
           <a:p>
@@ -6660,14 +7582,356 @@
               <a:spcAft>
                 <a:spcPts val="400"/>
               </a:spcAft>
-              <a:defRPr sz="1150">
-                <a:solidFill>
-                  <a:srgbClr val="5C564A"/>
-                </a:solidFill>
-              </a:defRPr>
-            </a:pPr>
-            <a:r>
-              <a:t>• Ekspor Lembar Review tercetak rapi siap rapat Komite Audit.</a:t>
+              <a:defRPr sz="1100">
+                <a:solidFill>
+                  <a:srgbClr val="1E293B"/>
+                </a:solidFill>
+              </a:defRPr>
+            </a:pPr>
+            <a:r>
+              <a:t>• Conversational Copilot delivers instant executive briefs.</a:t>
+            </a:r>
+          </a:p>
+        </p:txBody>
+      </p:sp>
+      <p:sp>
+        <p:nvSpPr>
+          <p:cNvPr id="12" name="Rounded Rectangle 11"/>
+          <p:cNvSpPr/>
+          <p:nvPr/>
+        </p:nvSpPr>
+        <p:spPr>
+          <a:xfrm>
+            <a:off x="6144768" y="1600200"/>
+            <a:ext cx="2560320" cy="4389120"/>
+          </a:xfrm>
+          <a:prstGeom prst="roundRect">
+            <a:avLst/>
+          </a:prstGeom>
+          <a:solidFill>
+            <a:srgbClr val="F8FAFC"/>
+          </a:solidFill>
+          <a:ln w="12700">
+            <a:solidFill>
+              <a:srgbClr val="E2E8F0"/>
+            </a:solidFill>
+          </a:ln>
+        </p:spPr>
+        <p:style>
+          <a:lnRef idx="1">
+            <a:schemeClr val="accent1"/>
+          </a:lnRef>
+          <a:fillRef idx="3">
+            <a:schemeClr val="accent1"/>
+          </a:fillRef>
+          <a:effectRef idx="2">
+            <a:schemeClr val="accent1"/>
+          </a:effectRef>
+          <a:fontRef idx="minor">
+            <a:schemeClr val="lt1"/>
+          </a:fontRef>
+        </p:style>
+        <p:txBody>
+          <a:bodyPr rtlCol="0" anchor="ctr"/>
+          <a:lstStyle/>
+          <a:p>
+            <a:pPr algn="ctr"/>
+          </a:p>
+        </p:txBody>
+      </p:sp>
+      <p:sp>
+        <p:nvSpPr>
+          <p:cNvPr id="13" name="Rounded Rectangle 12"/>
+          <p:cNvSpPr/>
+          <p:nvPr/>
+        </p:nvSpPr>
+        <p:spPr>
+          <a:xfrm>
+            <a:off x="6144768" y="1600200"/>
+            <a:ext cx="2560320" cy="73152"/>
+          </a:xfrm>
+          <a:prstGeom prst="roundRect">
+            <a:avLst/>
+          </a:prstGeom>
+          <a:solidFill>
+            <a:srgbClr val="1B4332"/>
+          </a:solidFill>
+          <a:ln>
+            <a:noFill/>
+          </a:ln>
+        </p:spPr>
+        <p:style>
+          <a:lnRef idx="1">
+            <a:schemeClr val="accent1"/>
+          </a:lnRef>
+          <a:fillRef idx="3">
+            <a:schemeClr val="accent1"/>
+          </a:fillRef>
+          <a:effectRef idx="2">
+            <a:schemeClr val="accent1"/>
+          </a:effectRef>
+          <a:fontRef idx="minor">
+            <a:schemeClr val="lt1"/>
+          </a:fontRef>
+        </p:style>
+        <p:txBody>
+          <a:bodyPr rtlCol="0" anchor="ctr"/>
+          <a:lstStyle/>
+          <a:p>
+            <a:pPr algn="ctr"/>
+          </a:p>
+        </p:txBody>
+      </p:sp>
+      <p:sp>
+        <p:nvSpPr>
+          <p:cNvPr id="14" name="TextBox 13"/>
+          <p:cNvSpPr txBox="1"/>
+          <p:nvPr/>
+        </p:nvSpPr>
+        <p:spPr>
+          <a:xfrm>
+            <a:off x="6364224" y="1819656"/>
+            <a:ext cx="2121408" cy="3950208"/>
+          </a:xfrm>
+          <a:prstGeom prst="rect">
+            <a:avLst/>
+          </a:prstGeom>
+          <a:noFill/>
+        </p:spPr>
+        <p:txBody>
+          <a:bodyPr wrap="square">
+            <a:spAutoFit/>
+          </a:bodyPr>
+          <a:lstStyle/>
+          <a:p>
+            <a:pPr>
+              <a:spcAft>
+                <a:spcPts val="800"/>
+              </a:spcAft>
+              <a:defRPr sz="1350" b="1">
+                <a:solidFill>
+                  <a:srgbClr val="1B4332"/>
+                </a:solidFill>
+              </a:defRPr>
+            </a:pPr>
+            <a:r>
+              <a:t>Step 3: Auditor Decisions</a:t>
+            </a:r>
+          </a:p>
+          <a:p>
+            <a:pPr>
+              <a:spcAft>
+                <a:spcPts val="400"/>
+              </a:spcAft>
+              <a:defRPr sz="1100">
+                <a:solidFill>
+                  <a:srgbClr val="1E293B"/>
+                </a:solidFill>
+              </a:defRPr>
+            </a:pPr>
+            <a:r>
+              <a:t>• Auditor selects status: Clarify / Audit Finding / Approved.</a:t>
+            </a:r>
+          </a:p>
+          <a:p>
+            <a:pPr>
+              <a:spcAft>
+                <a:spcPts val="400"/>
+              </a:spcAft>
+              <a:defRPr sz="1100">
+                <a:solidFill>
+                  <a:srgbClr val="1E293B"/>
+                </a:solidFill>
+              </a:defRPr>
+            </a:pPr>
+            <a:r>
+              <a:t>• Input field records auditor remarks &amp; requested documentation.</a:t>
+            </a:r>
+          </a:p>
+          <a:p>
+            <a:pPr>
+              <a:spcAft>
+                <a:spcPts val="400"/>
+              </a:spcAft>
+              <a:defRPr sz="1100">
+                <a:solidFill>
+                  <a:srgbClr val="1E293B"/>
+                </a:solidFill>
+              </a:defRPr>
+            </a:pPr>
+            <a:r>
+              <a:t>• One-click 'Request Clarification' logs notice to subsidiary.</a:t>
+            </a:r>
+          </a:p>
+        </p:txBody>
+      </p:sp>
+      <p:sp>
+        <p:nvSpPr>
+          <p:cNvPr id="15" name="Rounded Rectangle 14"/>
+          <p:cNvSpPr/>
+          <p:nvPr/>
+        </p:nvSpPr>
+        <p:spPr>
+          <a:xfrm>
+            <a:off x="8851392" y="1600200"/>
+            <a:ext cx="2560320" cy="4389120"/>
+          </a:xfrm>
+          <a:prstGeom prst="roundRect">
+            <a:avLst/>
+          </a:prstGeom>
+          <a:solidFill>
+            <a:srgbClr val="F8FAFC"/>
+          </a:solidFill>
+          <a:ln w="12700">
+            <a:solidFill>
+              <a:srgbClr val="E2E8F0"/>
+            </a:solidFill>
+          </a:ln>
+        </p:spPr>
+        <p:style>
+          <a:lnRef idx="1">
+            <a:schemeClr val="accent1"/>
+          </a:lnRef>
+          <a:fillRef idx="3">
+            <a:schemeClr val="accent1"/>
+          </a:fillRef>
+          <a:effectRef idx="2">
+            <a:schemeClr val="accent1"/>
+          </a:effectRef>
+          <a:fontRef idx="minor">
+            <a:schemeClr val="lt1"/>
+          </a:fontRef>
+        </p:style>
+        <p:txBody>
+          <a:bodyPr rtlCol="0" anchor="ctr"/>
+          <a:lstStyle/>
+          <a:p>
+            <a:pPr algn="ctr"/>
+          </a:p>
+        </p:txBody>
+      </p:sp>
+      <p:sp>
+        <p:nvSpPr>
+          <p:cNvPr id="16" name="Rounded Rectangle 15"/>
+          <p:cNvSpPr/>
+          <p:nvPr/>
+        </p:nvSpPr>
+        <p:spPr>
+          <a:xfrm>
+            <a:off x="8851392" y="1600200"/>
+            <a:ext cx="2560320" cy="73152"/>
+          </a:xfrm>
+          <a:prstGeom prst="roundRect">
+            <a:avLst/>
+          </a:prstGeom>
+          <a:solidFill>
+            <a:srgbClr val="0284C7"/>
+          </a:solidFill>
+          <a:ln>
+            <a:noFill/>
+          </a:ln>
+        </p:spPr>
+        <p:style>
+          <a:lnRef idx="1">
+            <a:schemeClr val="accent1"/>
+          </a:lnRef>
+          <a:fillRef idx="3">
+            <a:schemeClr val="accent1"/>
+          </a:fillRef>
+          <a:effectRef idx="2">
+            <a:schemeClr val="accent1"/>
+          </a:effectRef>
+          <a:fontRef idx="minor">
+            <a:schemeClr val="lt1"/>
+          </a:fontRef>
+        </p:style>
+        <p:txBody>
+          <a:bodyPr rtlCol="0" anchor="ctr"/>
+          <a:lstStyle/>
+          <a:p>
+            <a:pPr algn="ctr"/>
+          </a:p>
+        </p:txBody>
+      </p:sp>
+      <p:sp>
+        <p:nvSpPr>
+          <p:cNvPr id="17" name="TextBox 16"/>
+          <p:cNvSpPr txBox="1"/>
+          <p:nvPr/>
+        </p:nvSpPr>
+        <p:spPr>
+          <a:xfrm>
+            <a:off x="9070848" y="1819656"/>
+            <a:ext cx="2121408" cy="3950208"/>
+          </a:xfrm>
+          <a:prstGeom prst="rect">
+            <a:avLst/>
+          </a:prstGeom>
+          <a:noFill/>
+        </p:spPr>
+        <p:txBody>
+          <a:bodyPr wrap="square">
+            <a:spAutoFit/>
+          </a:bodyPr>
+          <a:lstStyle/>
+          <a:p>
+            <a:pPr>
+              <a:spcAft>
+                <a:spcPts val="800"/>
+              </a:spcAft>
+              <a:defRPr sz="1350" b="1">
+                <a:solidFill>
+                  <a:srgbClr val="0284C7"/>
+                </a:solidFill>
+              </a:defRPr>
+            </a:pPr>
+            <a:r>
+              <a:t>Step 4: Formal Sign-off</a:t>
+            </a:r>
+          </a:p>
+          <a:p>
+            <a:pPr>
+              <a:spcAft>
+                <a:spcPts val="400"/>
+              </a:spcAft>
+              <a:defRPr sz="1100">
+                <a:solidFill>
+                  <a:srgbClr val="1E293B"/>
+                </a:solidFill>
+              </a:defRPr>
+            </a:pPr>
+            <a:r>
+              <a:t>• Real-time tracking: X of Y anomalies reviewed.</a:t>
+            </a:r>
+          </a:p>
+          <a:p>
+            <a:pPr>
+              <a:spcAft>
+                <a:spcPts val="400"/>
+              </a:spcAft>
+              <a:defRPr sz="1100">
+                <a:solidFill>
+                  <a:srgbClr val="1E293B"/>
+                </a:solidFill>
+              </a:defRPr>
+            </a:pPr>
+            <a:r>
+              <a:t>• Formal sign-off locks workpaper with timestamp.</a:t>
+            </a:r>
+          </a:p>
+          <a:p>
+            <a:pPr>
+              <a:spcAft>
+                <a:spcPts val="400"/>
+              </a:spcAft>
+              <a:defRPr sz="1100">
+                <a:solidFill>
+                  <a:srgbClr val="1E293B"/>
+                </a:solidFill>
+              </a:defRPr>
+            </a:pPr>
+            <a:r>
+              <a:t>• One-click clean print to PDF ready for the Audit Committee.</a:t>
             </a:r>
           </a:p>
         </p:txBody>
@@ -6705,7 +7969,7 @@
             <a:avLst/>
           </a:prstGeom>
           <a:solidFill>
-            <a:srgbClr val="F6F3EC"/>
+            <a:srgbClr val="FFFFFF"/>
           </a:solidFill>
           <a:ln>
             <a:noFill/>
@@ -6735,95 +7999,23 @@
       </p:sp>
       <p:sp>
         <p:nvSpPr>
-          <p:cNvPr id="3" name="TextBox 2"/>
-          <p:cNvSpPr txBox="1"/>
-          <p:nvPr/>
-        </p:nvSpPr>
-        <p:spPr>
-          <a:xfrm>
-            <a:off x="731520" y="457200"/>
-            <a:ext cx="9144000" cy="365760"/>
+          <p:cNvPr id="3" name="Rectangle 2"/>
+          <p:cNvSpPr/>
+          <p:nvPr/>
+        </p:nvSpPr>
+        <p:spPr>
+          <a:xfrm>
+            <a:off x="731520" y="365760"/>
+            <a:ext cx="10728655" cy="36576"/>
           </a:xfrm>
           <a:prstGeom prst="rect">
             <a:avLst/>
           </a:prstGeom>
-          <a:noFill/>
-        </p:spPr>
-        <p:txBody>
-          <a:bodyPr wrap="square">
-            <a:spAutoFit/>
-          </a:bodyPr>
-          <a:lstStyle/>
-          <a:p>
-            <a:pPr>
-              <a:defRPr sz="1050" b="1">
-                <a:solidFill>
-                  <a:srgbClr val="B8902E"/>
-                </a:solidFill>
-              </a:defRPr>
-            </a:pPr>
-            <a:r>
-              <a:t>ANALISIS SEKTORAL</a:t>
-            </a:r>
-          </a:p>
-        </p:txBody>
-      </p:sp>
-      <p:sp>
-        <p:nvSpPr>
-          <p:cNvPr id="4" name="TextBox 3"/>
-          <p:cNvSpPr txBox="1"/>
-          <p:nvPr/>
-        </p:nvSpPr>
-        <p:spPr>
-          <a:xfrm>
-            <a:off x="731520" y="731520"/>
-            <a:ext cx="10698480" cy="640080"/>
-          </a:xfrm>
-          <a:prstGeom prst="rect">
-            <a:avLst/>
-          </a:prstGeom>
-          <a:noFill/>
-        </p:spPr>
-        <p:txBody>
-          <a:bodyPr wrap="square">
-            <a:spAutoFit/>
-          </a:bodyPr>
-          <a:lstStyle/>
-          <a:p>
-            <a:pPr>
-              <a:defRPr sz="2200" b="1">
-                <a:solidFill>
-                  <a:srgbClr val="0F2A1D"/>
-                </a:solidFill>
-              </a:defRPr>
-            </a:pPr>
-            <a:r>
-              <a:t>Kesehatan Finansial Konsolidasi vs Benchmark OJK</a:t>
-            </a:r>
-          </a:p>
-        </p:txBody>
-      </p:sp>
-      <p:sp>
-        <p:nvSpPr>
-          <p:cNvPr id="5" name="Rounded Rectangle 4"/>
-          <p:cNvSpPr/>
-          <p:nvPr/>
-        </p:nvSpPr>
-        <p:spPr>
-          <a:xfrm>
-            <a:off x="731520" y="1554480"/>
-            <a:ext cx="3328416" cy="4389120"/>
-          </a:xfrm>
-          <a:prstGeom prst="roundRect">
-            <a:avLst/>
-          </a:prstGeom>
           <a:solidFill>
-            <a:srgbClr val="FFFFFF"/>
+            <a:srgbClr val="1B4332"/>
           </a:solidFill>
-          <a:ln w="19050">
-            <a:solidFill>
-              <a:srgbClr val="2D6A4F"/>
-            </a:solidFill>
+          <a:ln>
+            <a:noFill/>
           </a:ln>
         </p:spPr>
         <p:style>
@@ -6850,14 +8042,14 @@
       </p:sp>
       <p:sp>
         <p:nvSpPr>
-          <p:cNvPr id="6" name="TextBox 5"/>
+          <p:cNvPr id="4" name="TextBox 3"/>
           <p:cNvSpPr txBox="1"/>
           <p:nvPr/>
         </p:nvSpPr>
         <p:spPr>
           <a:xfrm>
-            <a:off x="914400" y="1737360"/>
-            <a:ext cx="2962656" cy="4023360"/>
+            <a:off x="731520" y="502920"/>
+            <a:ext cx="9144000" cy="320040"/>
           </a:xfrm>
           <a:prstGeom prst="rect">
             <a:avLst/>
@@ -6871,105 +8063,73 @@
           <a:lstStyle/>
           <a:p>
             <a:pPr>
-              <a:spcAft>
-                <a:spcPts val="600"/>
-              </a:spcAft>
-              <a:defRPr sz="1400" b="1">
-                <a:solidFill>
-                  <a:srgbClr val="0F2A1D"/>
-                </a:solidFill>
-              </a:defRPr>
-            </a:pPr>
-            <a:r>
-              <a:t>Solvabilitas (DER)</a:t>
-            </a:r>
-          </a:p>
-          <a:p>
-            <a:pPr>
-              <a:spcAft>
-                <a:spcPts val="600"/>
-              </a:spcAft>
-              <a:defRPr sz="1100" b="1">
-                <a:solidFill>
-                  <a:srgbClr val="221E18"/>
-                </a:solidFill>
-              </a:defRPr>
-            </a:pPr>
-            <a:r>
-              <a:t>Konsolidasi: 0.96x</a:t>
-            </a:r>
-            <a:br/>
-            <a:r>
-              <a:t>Batas POJK: Max 5.0x</a:t>
-            </a:r>
-          </a:p>
-          <a:p>
-            <a:pPr>
-              <a:spcAft>
-                <a:spcPts val="1000"/>
-              </a:spcAft>
-              <a:defRPr sz="1050" b="1">
-                <a:solidFill>
-                  <a:srgbClr val="2D6A4F"/>
-                </a:solidFill>
-              </a:defRPr>
-            </a:pPr>
-            <a:r>
-              <a:t>STATUS: SANGAT AMAN</a:t>
-            </a:r>
-          </a:p>
-          <a:p>
-            <a:pPr>
-              <a:spcAft>
-                <a:spcPts val="400"/>
-              </a:spcAft>
-              <a:defRPr sz="1100">
-                <a:solidFill>
-                  <a:srgbClr val="5C564A"/>
-                </a:solidFill>
-              </a:defRPr>
-            </a:pPr>
-            <a:r>
-              <a:t>• Leverage sangat konservatif, memberikan ruang ekspansi pembiayaan luas.</a:t>
-            </a:r>
-          </a:p>
-          <a:p>
-            <a:pPr>
-              <a:spcAft>
-                <a:spcPts val="400"/>
-              </a:spcAft>
-              <a:defRPr sz="1100">
-                <a:solidFill>
-                  <a:srgbClr val="5C564A"/>
-                </a:solidFill>
-              </a:defRPr>
-            </a:pPr>
-            <a:r>
-              <a:t>• Jauh di bawah batas risiko solvabilitas lembaga keuangan non-bank.</a:t>
-            </a:r>
-          </a:p>
-        </p:txBody>
-      </p:sp>
-      <p:sp>
-        <p:nvSpPr>
-          <p:cNvPr id="7" name="Rounded Rectangle 6"/>
+              <a:defRPr sz="1000" b="1">
+                <a:solidFill>
+                  <a:srgbClr val="B48214"/>
+                </a:solidFill>
+              </a:defRPr>
+            </a:pPr>
+            <a:r>
+              <a:t>PRUDENTIAL RATIOS</a:t>
+            </a:r>
+          </a:p>
+        </p:txBody>
+      </p:sp>
+      <p:sp>
+        <p:nvSpPr>
+          <p:cNvPr id="5" name="TextBox 4"/>
+          <p:cNvSpPr txBox="1"/>
+          <p:nvPr/>
+        </p:nvSpPr>
+        <p:spPr>
+          <a:xfrm>
+            <a:off x="731520" y="777240"/>
+            <a:ext cx="10728655" cy="640080"/>
+          </a:xfrm>
+          <a:prstGeom prst="rect">
+            <a:avLst/>
+          </a:prstGeom>
+          <a:noFill/>
+        </p:spPr>
+        <p:txBody>
+          <a:bodyPr wrap="square">
+            <a:spAutoFit/>
+          </a:bodyPr>
+          <a:lstStyle/>
+          <a:p>
+            <a:pPr>
+              <a:defRPr sz="2200" b="1">
+                <a:solidFill>
+                  <a:srgbClr val="0F172A"/>
+                </a:solidFill>
+              </a:defRPr>
+            </a:pPr>
+            <a:r>
+              <a:t>Consolidated Financial Health vs. Sectoral Benchmarks</a:t>
+            </a:r>
+          </a:p>
+        </p:txBody>
+      </p:sp>
+      <p:sp>
+        <p:nvSpPr>
+          <p:cNvPr id="6" name="Rounded Rectangle 5"/>
           <p:cNvSpPr/>
           <p:nvPr/>
         </p:nvSpPr>
         <p:spPr>
           <a:xfrm>
-            <a:off x="4416552" y="1554480"/>
+            <a:off x="731520" y="1600200"/>
             <a:ext cx="3328416" cy="4389120"/>
           </a:xfrm>
           <a:prstGeom prst="roundRect">
             <a:avLst/>
           </a:prstGeom>
           <a:solidFill>
-            <a:srgbClr val="FFFFFF"/>
+            <a:srgbClr val="F8FAFC"/>
           </a:solidFill>
-          <a:ln w="19050">
+          <a:ln>
             <a:solidFill>
-              <a:srgbClr val="2D6A4F"/>
+              <a:srgbClr val="E2E8F0"/>
             </a:solidFill>
           </a:ln>
         </p:spPr>
@@ -6997,127 +8157,23 @@
       </p:sp>
       <p:sp>
         <p:nvSpPr>
-          <p:cNvPr id="8" name="TextBox 7"/>
-          <p:cNvSpPr txBox="1"/>
-          <p:nvPr/>
-        </p:nvSpPr>
-        <p:spPr>
-          <a:xfrm>
-            <a:off x="4599432" y="1737360"/>
-            <a:ext cx="2962656" cy="4023360"/>
-          </a:xfrm>
-          <a:prstGeom prst="rect">
-            <a:avLst/>
-          </a:prstGeom>
-          <a:noFill/>
-        </p:spPr>
-        <p:txBody>
-          <a:bodyPr wrap="square">
-            <a:spAutoFit/>
-          </a:bodyPr>
-          <a:lstStyle/>
-          <a:p>
-            <a:pPr>
-              <a:spcAft>
-                <a:spcPts val="600"/>
-              </a:spcAft>
-              <a:defRPr sz="1400" b="1">
-                <a:solidFill>
-                  <a:srgbClr val="0F2A1D"/>
-                </a:solidFill>
-              </a:defRPr>
-            </a:pPr>
-            <a:r>
-              <a:t>Rentabilitas (ROA)</a:t>
-            </a:r>
-          </a:p>
-          <a:p>
-            <a:pPr>
-              <a:spcAft>
-                <a:spcPts val="600"/>
-              </a:spcAft>
-              <a:defRPr sz="1100" b="1">
-                <a:solidFill>
-                  <a:srgbClr val="221E18"/>
-                </a:solidFill>
-              </a:defRPr>
-            </a:pPr>
-            <a:r>
-              <a:t>Konsolidasi: 5.4%</a:t>
-            </a:r>
-            <a:br/>
-            <a:r>
-              <a:t>Benchmark Industri: 3.5% - 5.2%</a:t>
-            </a:r>
-          </a:p>
-          <a:p>
-            <a:pPr>
-              <a:spcAft>
-                <a:spcPts val="1000"/>
-              </a:spcAft>
-              <a:defRPr sz="1050" b="1">
-                <a:solidFill>
-                  <a:srgbClr val="2D6A4F"/>
-                </a:solidFill>
-              </a:defRPr>
-            </a:pPr>
-            <a:r>
-              <a:t>STATUS: OUTPERFORMING</a:t>
-            </a:r>
-          </a:p>
-          <a:p>
-            <a:pPr>
-              <a:spcAft>
-                <a:spcPts val="400"/>
-              </a:spcAft>
-              <a:defRPr sz="1100">
-                <a:solidFill>
-                  <a:srgbClr val="5C564A"/>
-                </a:solidFill>
-              </a:defRPr>
-            </a:pPr>
-            <a:r>
-              <a:t>• Kemampuan menghasilkan laba dari aset berada di kuartil teratas industri.</a:t>
-            </a:r>
-          </a:p>
-          <a:p>
-            <a:pPr>
-              <a:spcAft>
-                <a:spcPts val="400"/>
-              </a:spcAft>
-              <a:defRPr sz="1100">
-                <a:solidFill>
-                  <a:srgbClr val="5C564A"/>
-                </a:solidFill>
-              </a:defRPr>
-            </a:pPr>
-            <a:r>
-              <a:t>• Laba konsolidasi tumbuh +14.2% YoY (325 M vs 284.7 M).</a:t>
-            </a:r>
-          </a:p>
-        </p:txBody>
-      </p:sp>
-      <p:sp>
-        <p:nvSpPr>
-          <p:cNvPr id="9" name="Rounded Rectangle 8"/>
+          <p:cNvPr id="7" name="Rounded Rectangle 6"/>
           <p:cNvSpPr/>
           <p:nvPr/>
         </p:nvSpPr>
         <p:spPr>
           <a:xfrm>
-            <a:off x="8101584" y="1554480"/>
-            <a:ext cx="3328416" cy="4389120"/>
+            <a:off x="731520" y="1600200"/>
+            <a:ext cx="3328416" cy="73152"/>
           </a:xfrm>
           <a:prstGeom prst="roundRect">
             <a:avLst/>
           </a:prstGeom>
           <a:solidFill>
-            <a:srgbClr val="FFFFFF"/>
+            <a:srgbClr val="0D9488"/>
           </a:solidFill>
-          <a:ln w="19050">
-            <a:solidFill>
-              <a:srgbClr val="B8902E"/>
-            </a:solidFill>
+          <a:ln>
+            <a:noFill/>
           </a:ln>
         </p:spPr>
         <p:style>
@@ -7144,14 +8200,14 @@
       </p:sp>
       <p:sp>
         <p:nvSpPr>
-          <p:cNvPr id="10" name="TextBox 9"/>
+          <p:cNvPr id="8" name="TextBox 7"/>
           <p:cNvSpPr txBox="1"/>
           <p:nvPr/>
         </p:nvSpPr>
         <p:spPr>
           <a:xfrm>
-            <a:off x="8284464" y="1737360"/>
-            <a:ext cx="2962656" cy="4023360"/>
+            <a:off x="950976" y="1819656"/>
+            <a:ext cx="2889504" cy="3931920"/>
           </a:xfrm>
           <a:prstGeom prst="rect">
             <a:avLst/>
@@ -7170,12 +8226,12 @@
               </a:spcAft>
               <a:defRPr sz="1400" b="1">
                 <a:solidFill>
-                  <a:srgbClr val="0F2A1D"/>
-                </a:solidFill>
-              </a:defRPr>
-            </a:pPr>
-            <a:r>
-              <a:t>Transaksi Afiliasi (RP)</a:t>
+                  <a:srgbClr val="0F172A"/>
+                </a:solidFill>
+              </a:defRPr>
+            </a:pPr>
+            <a:r>
+              <a:t>Solvency (DER)</a:t>
             </a:r>
           </a:p>
           <a:p>
@@ -7185,16 +8241,16 @@
               </a:spcAft>
               <a:defRPr sz="1100" b="1">
                 <a:solidFill>
-                  <a:srgbClr val="221E18"/>
-                </a:solidFill>
-              </a:defRPr>
-            </a:pPr>
-            <a:r>
-              <a:t>Konsolidasi: 241 M</a:t>
+                  <a:srgbClr val="1E293B"/>
+                </a:solidFill>
+              </a:defRPr>
+            </a:pPr>
+            <a:r>
+              <a:t>Consolidated: 0.96x</a:t>
             </a:r>
             <a:br/>
             <a:r>
-              <a:t>Rasio terhadap Aset: 4.3%</a:t>
+              <a:t>Regulatory Ceiling: Max 5.0x</a:t>
             </a:r>
           </a:p>
           <a:p>
@@ -7202,14 +8258,14 @@
               <a:spcAft>
                 <a:spcPts val="1000"/>
               </a:spcAft>
-              <a:defRPr sz="1050" b="1">
-                <a:solidFill>
-                  <a:srgbClr val="B8902E"/>
-                </a:solidFill>
-              </a:defRPr>
-            </a:pPr>
-            <a:r>
-              <a:t>STATUS: MONITORING KHUSUS</a:t>
+              <a:defRPr sz="1000" b="1">
+                <a:solidFill>
+                  <a:srgbClr val="0D9488"/>
+                </a:solidFill>
+              </a:defRPr>
+            </a:pPr>
+            <a:r>
+              <a:t>STATUS: HIGHLY CONSERVATIVE</a:t>
             </a:r>
           </a:p>
           <a:p>
@@ -7219,12 +8275,12 @@
               </a:spcAft>
               <a:defRPr sz="1100">
                 <a:solidFill>
-                  <a:srgbClr val="5C564A"/>
-                </a:solidFill>
-              </a:defRPr>
-            </a:pPr>
-            <a:r>
-              <a:t>• Secara agregat terkendali, namun konsentrasi di PT Anak II (88 M) perlu audit khusus.</a:t>
+                  <a:srgbClr val="1E293B"/>
+                </a:solidFill>
+              </a:defRPr>
+            </a:pPr>
+            <a:r>
+              <a:t>• Capital structure provides ample liquidity buffer for operational growth.</a:t>
             </a:r>
           </a:p>
           <a:p>
@@ -7234,12 +8290,392 @@
               </a:spcAft>
               <a:defRPr sz="1100">
                 <a:solidFill>
-                  <a:srgbClr val="5C564A"/>
-                </a:solidFill>
-              </a:defRPr>
-            </a:pPr>
-            <a:r>
-              <a:t>• Diperlukan pembatasan plafon kredit intercompany antar anak perusahaan.</a:t>
+                  <a:srgbClr val="1E293B"/>
+                </a:solidFill>
+              </a:defRPr>
+            </a:pPr>
+            <a:r>
+              <a:t>• Well below regulatory leverage thresholds for financial institutions.</a:t>
+            </a:r>
+          </a:p>
+        </p:txBody>
+      </p:sp>
+      <p:sp>
+        <p:nvSpPr>
+          <p:cNvPr id="9" name="Rounded Rectangle 8"/>
+          <p:cNvSpPr/>
+          <p:nvPr/>
+        </p:nvSpPr>
+        <p:spPr>
+          <a:xfrm>
+            <a:off x="4416552" y="1600200"/>
+            <a:ext cx="3328416" cy="4389120"/>
+          </a:xfrm>
+          <a:prstGeom prst="roundRect">
+            <a:avLst/>
+          </a:prstGeom>
+          <a:solidFill>
+            <a:srgbClr val="F8FAFC"/>
+          </a:solidFill>
+          <a:ln>
+            <a:solidFill>
+              <a:srgbClr val="E2E8F0"/>
+            </a:solidFill>
+          </a:ln>
+        </p:spPr>
+        <p:style>
+          <a:lnRef idx="1">
+            <a:schemeClr val="accent1"/>
+          </a:lnRef>
+          <a:fillRef idx="3">
+            <a:schemeClr val="accent1"/>
+          </a:fillRef>
+          <a:effectRef idx="2">
+            <a:schemeClr val="accent1"/>
+          </a:effectRef>
+          <a:fontRef idx="minor">
+            <a:schemeClr val="lt1"/>
+          </a:fontRef>
+        </p:style>
+        <p:txBody>
+          <a:bodyPr rtlCol="0" anchor="ctr"/>
+          <a:lstStyle/>
+          <a:p>
+            <a:pPr algn="ctr"/>
+          </a:p>
+        </p:txBody>
+      </p:sp>
+      <p:sp>
+        <p:nvSpPr>
+          <p:cNvPr id="10" name="Rounded Rectangle 9"/>
+          <p:cNvSpPr/>
+          <p:nvPr/>
+        </p:nvSpPr>
+        <p:spPr>
+          <a:xfrm>
+            <a:off x="4416552" y="1600200"/>
+            <a:ext cx="3328416" cy="73152"/>
+          </a:xfrm>
+          <a:prstGeom prst="roundRect">
+            <a:avLst/>
+          </a:prstGeom>
+          <a:solidFill>
+            <a:srgbClr val="0D9488"/>
+          </a:solidFill>
+          <a:ln>
+            <a:noFill/>
+          </a:ln>
+        </p:spPr>
+        <p:style>
+          <a:lnRef idx="1">
+            <a:schemeClr val="accent1"/>
+          </a:lnRef>
+          <a:fillRef idx="3">
+            <a:schemeClr val="accent1"/>
+          </a:fillRef>
+          <a:effectRef idx="2">
+            <a:schemeClr val="accent1"/>
+          </a:effectRef>
+          <a:fontRef idx="minor">
+            <a:schemeClr val="lt1"/>
+          </a:fontRef>
+        </p:style>
+        <p:txBody>
+          <a:bodyPr rtlCol="0" anchor="ctr"/>
+          <a:lstStyle/>
+          <a:p>
+            <a:pPr algn="ctr"/>
+          </a:p>
+        </p:txBody>
+      </p:sp>
+      <p:sp>
+        <p:nvSpPr>
+          <p:cNvPr id="11" name="TextBox 10"/>
+          <p:cNvSpPr txBox="1"/>
+          <p:nvPr/>
+        </p:nvSpPr>
+        <p:spPr>
+          <a:xfrm>
+            <a:off x="4636008" y="1819656"/>
+            <a:ext cx="2889504" cy="3931920"/>
+          </a:xfrm>
+          <a:prstGeom prst="rect">
+            <a:avLst/>
+          </a:prstGeom>
+          <a:noFill/>
+        </p:spPr>
+        <p:txBody>
+          <a:bodyPr wrap="square">
+            <a:spAutoFit/>
+          </a:bodyPr>
+          <a:lstStyle/>
+          <a:p>
+            <a:pPr>
+              <a:spcAft>
+                <a:spcPts val="600"/>
+              </a:spcAft>
+              <a:defRPr sz="1400" b="1">
+                <a:solidFill>
+                  <a:srgbClr val="0F172A"/>
+                </a:solidFill>
+              </a:defRPr>
+            </a:pPr>
+            <a:r>
+              <a:t>Profitability (ROA)</a:t>
+            </a:r>
+          </a:p>
+          <a:p>
+            <a:pPr>
+              <a:spcAft>
+                <a:spcPts val="600"/>
+              </a:spcAft>
+              <a:defRPr sz="1100" b="1">
+                <a:solidFill>
+                  <a:srgbClr val="1E293B"/>
+                </a:solidFill>
+              </a:defRPr>
+            </a:pPr>
+            <a:r>
+              <a:t>Consolidated: 5.4%</a:t>
+            </a:r>
+            <a:br/>
+            <a:r>
+              <a:t>Industry Average: 3.5% - 5.2%</a:t>
+            </a:r>
+          </a:p>
+          <a:p>
+            <a:pPr>
+              <a:spcAft>
+                <a:spcPts val="1000"/>
+              </a:spcAft>
+              <a:defRPr sz="1000" b="1">
+                <a:solidFill>
+                  <a:srgbClr val="0D9488"/>
+                </a:solidFill>
+              </a:defRPr>
+            </a:pPr>
+            <a:r>
+              <a:t>STATUS: OUTPERFORMING</a:t>
+            </a:r>
+          </a:p>
+          <a:p>
+            <a:pPr>
+              <a:spcAft>
+                <a:spcPts val="400"/>
+              </a:spcAft>
+              <a:defRPr sz="1100">
+                <a:solidFill>
+                  <a:srgbClr val="1E293B"/>
+                </a:solidFill>
+              </a:defRPr>
+            </a:pPr>
+            <a:r>
+              <a:t>• Group asset return sits in the upper quartile of microfinance peers.</a:t>
+            </a:r>
+          </a:p>
+          <a:p>
+            <a:pPr>
+              <a:spcAft>
+                <a:spcPts val="400"/>
+              </a:spcAft>
+              <a:defRPr sz="1100">
+                <a:solidFill>
+                  <a:srgbClr val="1E293B"/>
+                </a:solidFill>
+              </a:defRPr>
+            </a:pPr>
+            <a:r>
+              <a:t>• Consolidated Net Income expanded +14.2% YoY ($325M vs $284.7M).</a:t>
+            </a:r>
+          </a:p>
+        </p:txBody>
+      </p:sp>
+      <p:sp>
+        <p:nvSpPr>
+          <p:cNvPr id="12" name="Rounded Rectangle 11"/>
+          <p:cNvSpPr/>
+          <p:nvPr/>
+        </p:nvSpPr>
+        <p:spPr>
+          <a:xfrm>
+            <a:off x="8101584" y="1600200"/>
+            <a:ext cx="3328416" cy="4389120"/>
+          </a:xfrm>
+          <a:prstGeom prst="roundRect">
+            <a:avLst/>
+          </a:prstGeom>
+          <a:solidFill>
+            <a:srgbClr val="F8FAFC"/>
+          </a:solidFill>
+          <a:ln>
+            <a:solidFill>
+              <a:srgbClr val="E2E8F0"/>
+            </a:solidFill>
+          </a:ln>
+        </p:spPr>
+        <p:style>
+          <a:lnRef idx="1">
+            <a:schemeClr val="accent1"/>
+          </a:lnRef>
+          <a:fillRef idx="3">
+            <a:schemeClr val="accent1"/>
+          </a:fillRef>
+          <a:effectRef idx="2">
+            <a:schemeClr val="accent1"/>
+          </a:effectRef>
+          <a:fontRef idx="minor">
+            <a:schemeClr val="lt1"/>
+          </a:fontRef>
+        </p:style>
+        <p:txBody>
+          <a:bodyPr rtlCol="0" anchor="ctr"/>
+          <a:lstStyle/>
+          <a:p>
+            <a:pPr algn="ctr"/>
+          </a:p>
+        </p:txBody>
+      </p:sp>
+      <p:sp>
+        <p:nvSpPr>
+          <p:cNvPr id="13" name="Rounded Rectangle 12"/>
+          <p:cNvSpPr/>
+          <p:nvPr/>
+        </p:nvSpPr>
+        <p:spPr>
+          <a:xfrm>
+            <a:off x="8101584" y="1600200"/>
+            <a:ext cx="3328416" cy="73152"/>
+          </a:xfrm>
+          <a:prstGeom prst="roundRect">
+            <a:avLst/>
+          </a:prstGeom>
+          <a:solidFill>
+            <a:srgbClr val="D97706"/>
+          </a:solidFill>
+          <a:ln>
+            <a:noFill/>
+          </a:ln>
+        </p:spPr>
+        <p:style>
+          <a:lnRef idx="1">
+            <a:schemeClr val="accent1"/>
+          </a:lnRef>
+          <a:fillRef idx="3">
+            <a:schemeClr val="accent1"/>
+          </a:fillRef>
+          <a:effectRef idx="2">
+            <a:schemeClr val="accent1"/>
+          </a:effectRef>
+          <a:fontRef idx="minor">
+            <a:schemeClr val="lt1"/>
+          </a:fontRef>
+        </p:style>
+        <p:txBody>
+          <a:bodyPr rtlCol="0" anchor="ctr"/>
+          <a:lstStyle/>
+          <a:p>
+            <a:pPr algn="ctr"/>
+          </a:p>
+        </p:txBody>
+      </p:sp>
+      <p:sp>
+        <p:nvSpPr>
+          <p:cNvPr id="14" name="TextBox 13"/>
+          <p:cNvSpPr txBox="1"/>
+          <p:nvPr/>
+        </p:nvSpPr>
+        <p:spPr>
+          <a:xfrm>
+            <a:off x="8321040" y="1819656"/>
+            <a:ext cx="2889504" cy="3931920"/>
+          </a:xfrm>
+          <a:prstGeom prst="rect">
+            <a:avLst/>
+          </a:prstGeom>
+          <a:noFill/>
+        </p:spPr>
+        <p:txBody>
+          <a:bodyPr wrap="square">
+            <a:spAutoFit/>
+          </a:bodyPr>
+          <a:lstStyle/>
+          <a:p>
+            <a:pPr>
+              <a:spcAft>
+                <a:spcPts val="600"/>
+              </a:spcAft>
+              <a:defRPr sz="1400" b="1">
+                <a:solidFill>
+                  <a:srgbClr val="0F172A"/>
+                </a:solidFill>
+              </a:defRPr>
+            </a:pPr>
+            <a:r>
+              <a:t>Affiliated Debt (RP)</a:t>
+            </a:r>
+          </a:p>
+          <a:p>
+            <a:pPr>
+              <a:spcAft>
+                <a:spcPts val="600"/>
+              </a:spcAft>
+              <a:defRPr sz="1100" b="1">
+                <a:solidFill>
+                  <a:srgbClr val="1E293B"/>
+                </a:solidFill>
+              </a:defRPr>
+            </a:pPr>
+            <a:r>
+              <a:t>Total RP Receivables: $241M</a:t>
+            </a:r>
+            <a:br/>
+            <a:r>
+              <a:t>Share of Total Assets: 4.3%</a:t>
+            </a:r>
+          </a:p>
+          <a:p>
+            <a:pPr>
+              <a:spcAft>
+                <a:spcPts val="1000"/>
+              </a:spcAft>
+              <a:defRPr sz="1000" b="1">
+                <a:solidFill>
+                  <a:srgbClr val="D97706"/>
+                </a:solidFill>
+              </a:defRPr>
+            </a:pPr>
+            <a:r>
+              <a:t>STATUS: CONCENTRATION WATCH</a:t>
+            </a:r>
+          </a:p>
+          <a:p>
+            <a:pPr>
+              <a:spcAft>
+                <a:spcPts val="400"/>
+              </a:spcAft>
+              <a:defRPr sz="1100">
+                <a:solidFill>
+                  <a:srgbClr val="1E293B"/>
+                </a:solidFill>
+              </a:defRPr>
+            </a:pPr>
+            <a:r>
+              <a:t>• Aggregate exposure is proportional to balance sheet scale.</a:t>
+            </a:r>
+          </a:p>
+          <a:p>
+            <a:pPr>
+              <a:spcAft>
+                <a:spcPts val="400"/>
+              </a:spcAft>
+              <a:defRPr sz="1100">
+                <a:solidFill>
+                  <a:srgbClr val="1E293B"/>
+                </a:solidFill>
+              </a:defRPr>
+            </a:pPr>
+            <a:r>
+              <a:t>• However, concentration at Subsidiary II ($88M) warrants tight monitoring.</a:t>
             </a:r>
           </a:p>
         </p:txBody>
@@ -7277,7 +8713,7 @@
             <a:avLst/>
           </a:prstGeom>
           <a:solidFill>
-            <a:srgbClr val="F6F3EC"/>
+            <a:srgbClr val="FFFFFF"/>
           </a:solidFill>
           <a:ln>
             <a:noFill/>
@@ -7307,95 +8743,23 @@
       </p:sp>
       <p:sp>
         <p:nvSpPr>
-          <p:cNvPr id="3" name="TextBox 2"/>
-          <p:cNvSpPr txBox="1"/>
-          <p:nvPr/>
-        </p:nvSpPr>
-        <p:spPr>
-          <a:xfrm>
-            <a:off x="731520" y="457200"/>
-            <a:ext cx="9144000" cy="365760"/>
+          <p:cNvPr id="3" name="Rectangle 2"/>
+          <p:cNvSpPr/>
+          <p:nvPr/>
+        </p:nvSpPr>
+        <p:spPr>
+          <a:xfrm>
+            <a:off x="731520" y="365760"/>
+            <a:ext cx="10728655" cy="36576"/>
           </a:xfrm>
           <a:prstGeom prst="rect">
             <a:avLst/>
           </a:prstGeom>
-          <a:noFill/>
-        </p:spPr>
-        <p:txBody>
-          <a:bodyPr wrap="square">
-            <a:spAutoFit/>
-          </a:bodyPr>
-          <a:lstStyle/>
-          <a:p>
-            <a:pPr>
-              <a:defRPr sz="1050" b="1">
-                <a:solidFill>
-                  <a:srgbClr val="B8902E"/>
-                </a:solidFill>
-              </a:defRPr>
-            </a:pPr>
-            <a:r>
-              <a:t>STAKEHOLDER ALIGNMENT</a:t>
-            </a:r>
-          </a:p>
-        </p:txBody>
-      </p:sp>
-      <p:sp>
-        <p:nvSpPr>
-          <p:cNvPr id="4" name="TextBox 3"/>
-          <p:cNvSpPr txBox="1"/>
-          <p:nvPr/>
-        </p:nvSpPr>
-        <p:spPr>
-          <a:xfrm>
-            <a:off x="731520" y="731520"/>
-            <a:ext cx="10698480" cy="640080"/>
-          </a:xfrm>
-          <a:prstGeom prst="rect">
-            <a:avLst/>
-          </a:prstGeom>
-          <a:noFill/>
-        </p:spPr>
-        <p:txBody>
-          <a:bodyPr wrap="square">
-            <a:spAutoFit/>
-          </a:bodyPr>
-          <a:lstStyle/>
-          <a:p>
-            <a:pPr>
-              <a:defRPr sz="2200" b="1">
-                <a:solidFill>
-                  <a:srgbClr val="0F2A1D"/>
-                </a:solidFill>
-              </a:defRPr>
-            </a:pPr>
-            <a:r>
-              <a:t>Matriks Keselarasan Ekspektasi Pemangku Kepentingan</a:t>
-            </a:r>
-          </a:p>
-        </p:txBody>
-      </p:sp>
-      <p:sp>
-        <p:nvSpPr>
-          <p:cNvPr id="5" name="Rounded Rectangle 4"/>
-          <p:cNvSpPr/>
-          <p:nvPr/>
-        </p:nvSpPr>
-        <p:spPr>
-          <a:xfrm>
-            <a:off x="731520" y="1508760"/>
-            <a:ext cx="10698480" cy="822960"/>
-          </a:xfrm>
-          <a:prstGeom prst="roundRect">
-            <a:avLst/>
-          </a:prstGeom>
           <a:solidFill>
-            <a:srgbClr val="FFFFFF"/>
+            <a:srgbClr val="1B4332"/>
           </a:solidFill>
           <a:ln>
-            <a:solidFill>
-              <a:srgbClr val="E2DBD0"/>
-            </a:solidFill>
+            <a:noFill/>
           </a:ln>
         </p:spPr>
         <p:style>
@@ -7422,14 +8786,14 @@
       </p:sp>
       <p:sp>
         <p:nvSpPr>
-          <p:cNvPr id="6" name="TextBox 5"/>
+          <p:cNvPr id="4" name="TextBox 3"/>
           <p:cNvSpPr txBox="1"/>
           <p:nvPr/>
         </p:nvSpPr>
         <p:spPr>
           <a:xfrm>
-            <a:off x="914400" y="1581912"/>
-            <a:ext cx="10332720" cy="685800"/>
+            <a:off x="731520" y="502920"/>
+            <a:ext cx="9144000" cy="320040"/>
           </a:xfrm>
           <a:prstGeom prst="rect">
             <a:avLst/>
@@ -7443,50 +8807,73 @@
           <a:lstStyle/>
           <a:p>
             <a:pPr>
-              <a:defRPr sz="1100" b="1">
-                <a:solidFill>
-                  <a:srgbClr val="B8902E"/>
-                </a:solidFill>
-              </a:defRPr>
-            </a:pPr>
-            <a:r>
-              <a:t>KOMITE AUDIT / PENGAWAS</a:t>
-            </a:r>
-          </a:p>
-          <a:p>
-            <a:pPr>
-              <a:defRPr sz="1050">
-                <a:solidFill>
-                  <a:srgbClr val="221E18"/>
-                </a:solidFill>
-              </a:defRPr>
-            </a:pPr>
-            <a:r>
-              <a:t>Ekspektasi: "Mencegah temuan material &amp; kebocoran NCI sebelum audit eksternal."  ➔  Solusi: Rule Engine otomatis memvalidasi alokasi laba PSAK 65 &amp; menyajikan ranking anomali kritis.</a:t>
-            </a:r>
-          </a:p>
-        </p:txBody>
-      </p:sp>
-      <p:sp>
-        <p:nvSpPr>
-          <p:cNvPr id="7" name="Rounded Rectangle 6"/>
+              <a:defRPr sz="1000" b="1">
+                <a:solidFill>
+                  <a:srgbClr val="B48214"/>
+                </a:solidFill>
+              </a:defRPr>
+            </a:pPr>
+            <a:r>
+              <a:t>VALUE DELIVERY</a:t>
+            </a:r>
+          </a:p>
+        </p:txBody>
+      </p:sp>
+      <p:sp>
+        <p:nvSpPr>
+          <p:cNvPr id="5" name="TextBox 4"/>
+          <p:cNvSpPr txBox="1"/>
+          <p:nvPr/>
+        </p:nvSpPr>
+        <p:spPr>
+          <a:xfrm>
+            <a:off x="731520" y="777240"/>
+            <a:ext cx="10728655" cy="640080"/>
+          </a:xfrm>
+          <a:prstGeom prst="rect">
+            <a:avLst/>
+          </a:prstGeom>
+          <a:noFill/>
+        </p:spPr>
+        <p:txBody>
+          <a:bodyPr wrap="square">
+            <a:spAutoFit/>
+          </a:bodyPr>
+          <a:lstStyle/>
+          <a:p>
+            <a:pPr>
+              <a:defRPr sz="2200" b="1">
+                <a:solidFill>
+                  <a:srgbClr val="0F172A"/>
+                </a:solidFill>
+              </a:defRPr>
+            </a:pPr>
+            <a:r>
+              <a:t>Stakeholder Expectation Alignment Matrix</a:t>
+            </a:r>
+          </a:p>
+        </p:txBody>
+      </p:sp>
+      <p:sp>
+        <p:nvSpPr>
+          <p:cNvPr id="6" name="Rounded Rectangle 5"/>
           <p:cNvSpPr/>
           <p:nvPr/>
         </p:nvSpPr>
         <p:spPr>
           <a:xfrm>
-            <a:off x="731520" y="2423160"/>
-            <a:ext cx="10698480" cy="822960"/>
+            <a:off x="731520" y="1554480"/>
+            <a:ext cx="10728655" cy="822960"/>
           </a:xfrm>
           <a:prstGeom prst="roundRect">
             <a:avLst/>
           </a:prstGeom>
           <a:solidFill>
-            <a:srgbClr val="FFFFFF"/>
+            <a:srgbClr val="F8FAFC"/>
           </a:solidFill>
           <a:ln>
             <a:solidFill>
-              <a:srgbClr val="E2DBD0"/>
+              <a:srgbClr val="E2E8F0"/>
             </a:solidFill>
           </a:ln>
         </p:spPr>
@@ -7514,72 +8901,23 @@
       </p:sp>
       <p:sp>
         <p:nvSpPr>
-          <p:cNvPr id="8" name="TextBox 7"/>
-          <p:cNvSpPr txBox="1"/>
-          <p:nvPr/>
-        </p:nvSpPr>
-        <p:spPr>
-          <a:xfrm>
-            <a:off x="914400" y="2496312"/>
-            <a:ext cx="10332720" cy="685800"/>
+          <p:cNvPr id="7" name="Rectangle 6"/>
+          <p:cNvSpPr/>
+          <p:nvPr/>
+        </p:nvSpPr>
+        <p:spPr>
+          <a:xfrm>
+            <a:off x="731520" y="1554480"/>
+            <a:ext cx="54864" cy="822960"/>
           </a:xfrm>
           <a:prstGeom prst="rect">
             <a:avLst/>
           </a:prstGeom>
-          <a:noFill/>
-        </p:spPr>
-        <p:txBody>
-          <a:bodyPr wrap="square">
-            <a:spAutoFit/>
-          </a:bodyPr>
-          <a:lstStyle/>
-          <a:p>
-            <a:pPr>
-              <a:defRPr sz="1100" b="1">
-                <a:solidFill>
-                  <a:srgbClr val="B8902E"/>
-                </a:solidFill>
-              </a:defRPr>
-            </a:pPr>
-            <a:r>
-              <a:t>DIREKTUR KEUANGAN / CFO</a:t>
-            </a:r>
-          </a:p>
-          <a:p>
-            <a:pPr>
-              <a:defRPr sz="1050">
-                <a:solidFill>
-                  <a:srgbClr val="221E18"/>
-                </a:solidFill>
-              </a:defRPr>
-            </a:pPr>
-            <a:r>
-              <a:t>Ekspektasi: "Mempercepat closing laporan konsolidasi tanpa risiko kesalahan manusia."  ➔  Solusi: Kompilasi rasio instan, simulasi angka interaktif, dan ringkasan eksekutif komite.</a:t>
-            </a:r>
-          </a:p>
-        </p:txBody>
-      </p:sp>
-      <p:sp>
-        <p:nvSpPr>
-          <p:cNvPr id="9" name="Rounded Rectangle 8"/>
-          <p:cNvSpPr/>
-          <p:nvPr/>
-        </p:nvSpPr>
-        <p:spPr>
-          <a:xfrm>
-            <a:off x="731520" y="3337560"/>
-            <a:ext cx="10698480" cy="822960"/>
-          </a:xfrm>
-          <a:prstGeom prst="roundRect">
-            <a:avLst/>
-          </a:prstGeom>
           <a:solidFill>
-            <a:srgbClr val="FFFFFF"/>
+            <a:srgbClr val="1B4332"/>
           </a:solidFill>
           <a:ln>
-            <a:solidFill>
-              <a:srgbClr val="E2DBD0"/>
-            </a:solidFill>
+            <a:noFill/>
           </a:ln>
         </p:spPr>
         <p:style>
@@ -7606,13 +8944,13 @@
       </p:sp>
       <p:sp>
         <p:nvSpPr>
-          <p:cNvPr id="10" name="TextBox 9"/>
+          <p:cNvPr id="8" name="TextBox 7"/>
           <p:cNvSpPr txBox="1"/>
           <p:nvPr/>
         </p:nvSpPr>
         <p:spPr>
           <a:xfrm>
-            <a:off x="914400" y="3410712"/>
+            <a:off x="914400" y="1627632"/>
             <a:ext cx="10332720" cy="685800"/>
           </a:xfrm>
           <a:prstGeom prst="rect">
@@ -7627,50 +8965,50 @@
           <a:lstStyle/>
           <a:p>
             <a:pPr>
-              <a:defRPr sz="1100" b="1">
-                <a:solidFill>
-                  <a:srgbClr val="B8902E"/>
-                </a:solidFill>
-              </a:defRPr>
-            </a:pPr>
-            <a:r>
-              <a:t>TIM INTERNAL AUDIT</a:t>
+              <a:defRPr sz="1050" b="1">
+                <a:solidFill>
+                  <a:srgbClr val="B48214"/>
+                </a:solidFill>
+              </a:defRPr>
+            </a:pPr>
+            <a:r>
+              <a:t>AUDIT COMMITTEE / BOARD OF SUPERVISORS</a:t>
             </a:r>
           </a:p>
           <a:p>
             <a:pPr>
               <a:defRPr sz="1050">
                 <a:solidFill>
-                  <a:srgbClr val="221E18"/>
-                </a:solidFill>
-              </a:defRPr>
-            </a:pPr>
-            <a:r>
-              <a:t>Ekspektasi: "Memiliki kertas kerja telaah terstruktur dengan audit trail yang sah."  ➔  Solusi: Review Workspace dengan status klarifikasi, catatan auditor, dan log pengesahan tertanggal.</a:t>
-            </a:r>
-          </a:p>
-        </p:txBody>
-      </p:sp>
-      <p:sp>
-        <p:nvSpPr>
-          <p:cNvPr id="11" name="Rounded Rectangle 10"/>
+                  <a:srgbClr val="1E293B"/>
+                </a:solidFill>
+              </a:defRPr>
+            </a:pPr>
+            <a:r>
+              <a:t>Expectation: "Prevent material misstatements &amp; NCI leakage prior to external audits."  ➔  Delivery: Automated IFRS 10 rule engine verifies profit distribution &amp; flags critical anomalies instantly.</a:t>
+            </a:r>
+          </a:p>
+        </p:txBody>
+      </p:sp>
+      <p:sp>
+        <p:nvSpPr>
+          <p:cNvPr id="9" name="Rounded Rectangle 8"/>
           <p:cNvSpPr/>
           <p:nvPr/>
         </p:nvSpPr>
         <p:spPr>
           <a:xfrm>
-            <a:off x="731520" y="4251960"/>
-            <a:ext cx="10698480" cy="822960"/>
+            <a:off x="731520" y="2468880"/>
+            <a:ext cx="10728655" cy="822960"/>
           </a:xfrm>
           <a:prstGeom prst="roundRect">
             <a:avLst/>
           </a:prstGeom>
           <a:solidFill>
-            <a:srgbClr val="FFFFFF"/>
+            <a:srgbClr val="F8FAFC"/>
           </a:solidFill>
           <a:ln>
             <a:solidFill>
-              <a:srgbClr val="E2DBD0"/>
+              <a:srgbClr val="E2E8F0"/>
             </a:solidFill>
           </a:ln>
         </p:spPr>
@@ -7698,72 +9036,23 @@
       </p:sp>
       <p:sp>
         <p:nvSpPr>
-          <p:cNvPr id="12" name="TextBox 11"/>
-          <p:cNvSpPr txBox="1"/>
-          <p:nvPr/>
-        </p:nvSpPr>
-        <p:spPr>
-          <a:xfrm>
-            <a:off x="914400" y="4325112"/>
-            <a:ext cx="10332720" cy="685800"/>
+          <p:cNvPr id="10" name="Rectangle 9"/>
+          <p:cNvSpPr/>
+          <p:nvPr/>
+        </p:nvSpPr>
+        <p:spPr>
+          <a:xfrm>
+            <a:off x="731520" y="2468880"/>
+            <a:ext cx="54864" cy="822960"/>
           </a:xfrm>
           <a:prstGeom prst="rect">
             <a:avLst/>
           </a:prstGeom>
-          <a:noFill/>
-        </p:spPr>
-        <p:txBody>
-          <a:bodyPr wrap="square">
-            <a:spAutoFit/>
-          </a:bodyPr>
-          <a:lstStyle/>
-          <a:p>
-            <a:pPr>
-              <a:defRPr sz="1100" b="1">
-                <a:solidFill>
-                  <a:srgbClr val="B8902E"/>
-                </a:solidFill>
-              </a:defRPr>
-            </a:pPr>
-            <a:r>
-              <a:t>CFO ANAK PERUSAHAAN</a:t>
-            </a:r>
-          </a:p>
-          <a:p>
-            <a:pPr>
-              <a:defRPr sz="1050">
-                <a:solidFill>
-                  <a:srgbClr val="221E18"/>
-                </a:solidFill>
-              </a:defRPr>
-            </a:pPr>
-            <a:r>
-              <a:t>Ekspektasi: "Transparansi perhitungan eliminasi &amp; rekonsiliasi yang adil."  ➔  Solusi: Rincian deviasi disajikan angka demi angka sehingga mudah diverifikasi dengan GL entitas.</a:t>
-            </a:r>
-          </a:p>
-        </p:txBody>
-      </p:sp>
-      <p:sp>
-        <p:nvSpPr>
-          <p:cNvPr id="13" name="Rounded Rectangle 12"/>
-          <p:cNvSpPr/>
-          <p:nvPr/>
-        </p:nvSpPr>
-        <p:spPr>
-          <a:xfrm>
-            <a:off x="731520" y="5166360"/>
-            <a:ext cx="10698480" cy="822960"/>
-          </a:xfrm>
-          <a:prstGeom prst="roundRect">
-            <a:avLst/>
-          </a:prstGeom>
           <a:solidFill>
-            <a:srgbClr val="FFFFFF"/>
+            <a:srgbClr val="1B4332"/>
           </a:solidFill>
           <a:ln>
-            <a:solidFill>
-              <a:srgbClr val="E2DBD0"/>
-            </a:solidFill>
+            <a:noFill/>
           </a:ln>
         </p:spPr>
         <p:style>
@@ -7790,13 +9079,13 @@
       </p:sp>
       <p:sp>
         <p:nvSpPr>
-          <p:cNvPr id="14" name="TextBox 13"/>
+          <p:cNvPr id="11" name="TextBox 10"/>
           <p:cNvSpPr txBox="1"/>
           <p:nvPr/>
         </p:nvSpPr>
         <p:spPr>
           <a:xfrm>
-            <a:off x="914400" y="5239512"/>
+            <a:off x="914400" y="2542032"/>
             <a:ext cx="10332720" cy="685800"/>
           </a:xfrm>
           <a:prstGeom prst="rect">
@@ -7811,26 +9100,431 @@
           <a:lstStyle/>
           <a:p>
             <a:pPr>
-              <a:defRPr sz="1100" b="1">
-                <a:solidFill>
-                  <a:srgbClr val="B8902E"/>
-                </a:solidFill>
-              </a:defRPr>
-            </a:pPr>
-            <a:r>
-              <a:t>IT &amp; GOVERNANCE</a:t>
+              <a:defRPr sz="1050" b="1">
+                <a:solidFill>
+                  <a:srgbClr val="B48214"/>
+                </a:solidFill>
+              </a:defRPr>
+            </a:pPr>
+            <a:r>
+              <a:t>GROUP CHIEF FINANCIAL OFFICER (CFO)</a:t>
             </a:r>
           </a:p>
           <a:p>
             <a:pPr>
               <a:defRPr sz="1050">
                 <a:solidFill>
-                  <a:srgbClr val="221E18"/>
-                </a:solidFill>
-              </a:defRPr>
-            </a:pPr>
-            <a:r>
-              <a:t>Ekspektasi: "Keamanan data laporan keuangan internal dan integritas sistem."  ➔  Solusi: Dapat berjalan offline tanpa kirim data ke LLM publik; append-only point-in-time snapshot.</a:t>
+                  <a:srgbClr val="1E293B"/>
+                </a:solidFill>
+              </a:defRPr>
+            </a:pPr>
+            <a:r>
+              <a:t>Expectation: "Accelerate group consolidation closing cycles with zero arithmetic risk."  ➔  Delivery: Dynamic KPI summaries, instant sensitivity simulations, and executive board-ready memos.</a:t>
+            </a:r>
+          </a:p>
+        </p:txBody>
+      </p:sp>
+      <p:sp>
+        <p:nvSpPr>
+          <p:cNvPr id="12" name="Rounded Rectangle 11"/>
+          <p:cNvSpPr/>
+          <p:nvPr/>
+        </p:nvSpPr>
+        <p:spPr>
+          <a:xfrm>
+            <a:off x="731520" y="3383280"/>
+            <a:ext cx="10728655" cy="822960"/>
+          </a:xfrm>
+          <a:prstGeom prst="roundRect">
+            <a:avLst/>
+          </a:prstGeom>
+          <a:solidFill>
+            <a:srgbClr val="F8FAFC"/>
+          </a:solidFill>
+          <a:ln>
+            <a:solidFill>
+              <a:srgbClr val="E2E8F0"/>
+            </a:solidFill>
+          </a:ln>
+        </p:spPr>
+        <p:style>
+          <a:lnRef idx="1">
+            <a:schemeClr val="accent1"/>
+          </a:lnRef>
+          <a:fillRef idx="3">
+            <a:schemeClr val="accent1"/>
+          </a:fillRef>
+          <a:effectRef idx="2">
+            <a:schemeClr val="accent1"/>
+          </a:effectRef>
+          <a:fontRef idx="minor">
+            <a:schemeClr val="lt1"/>
+          </a:fontRef>
+        </p:style>
+        <p:txBody>
+          <a:bodyPr rtlCol="0" anchor="ctr"/>
+          <a:lstStyle/>
+          <a:p>
+            <a:pPr algn="ctr"/>
+          </a:p>
+        </p:txBody>
+      </p:sp>
+      <p:sp>
+        <p:nvSpPr>
+          <p:cNvPr id="13" name="Rectangle 12"/>
+          <p:cNvSpPr/>
+          <p:nvPr/>
+        </p:nvSpPr>
+        <p:spPr>
+          <a:xfrm>
+            <a:off x="731520" y="3383280"/>
+            <a:ext cx="54864" cy="822960"/>
+          </a:xfrm>
+          <a:prstGeom prst="rect">
+            <a:avLst/>
+          </a:prstGeom>
+          <a:solidFill>
+            <a:srgbClr val="1B4332"/>
+          </a:solidFill>
+          <a:ln>
+            <a:noFill/>
+          </a:ln>
+        </p:spPr>
+        <p:style>
+          <a:lnRef idx="1">
+            <a:schemeClr val="accent1"/>
+          </a:lnRef>
+          <a:fillRef idx="3">
+            <a:schemeClr val="accent1"/>
+          </a:fillRef>
+          <a:effectRef idx="2">
+            <a:schemeClr val="accent1"/>
+          </a:effectRef>
+          <a:fontRef idx="minor">
+            <a:schemeClr val="lt1"/>
+          </a:fontRef>
+        </p:style>
+        <p:txBody>
+          <a:bodyPr rtlCol="0" anchor="ctr"/>
+          <a:lstStyle/>
+          <a:p>
+            <a:pPr algn="ctr"/>
+          </a:p>
+        </p:txBody>
+      </p:sp>
+      <p:sp>
+        <p:nvSpPr>
+          <p:cNvPr id="14" name="TextBox 13"/>
+          <p:cNvSpPr txBox="1"/>
+          <p:nvPr/>
+        </p:nvSpPr>
+        <p:spPr>
+          <a:xfrm>
+            <a:off x="914400" y="3456432"/>
+            <a:ext cx="10332720" cy="685800"/>
+          </a:xfrm>
+          <a:prstGeom prst="rect">
+            <a:avLst/>
+          </a:prstGeom>
+          <a:noFill/>
+        </p:spPr>
+        <p:txBody>
+          <a:bodyPr wrap="square">
+            <a:spAutoFit/>
+          </a:bodyPr>
+          <a:lstStyle/>
+          <a:p>
+            <a:pPr>
+              <a:defRPr sz="1050" b="1">
+                <a:solidFill>
+                  <a:srgbClr val="B48214"/>
+                </a:solidFill>
+              </a:defRPr>
+            </a:pPr>
+            <a:r>
+              <a:t>INTERNAL AUDIT LEADERSHIP</a:t>
+            </a:r>
+          </a:p>
+          <a:p>
+            <a:pPr>
+              <a:defRPr sz="1050">
+                <a:solidFill>
+                  <a:srgbClr val="1E293B"/>
+                </a:solidFill>
+              </a:defRPr>
+            </a:pPr>
+            <a:r>
+              <a:t>Expectation: "Maintain structured electronic workpapers with traceable sign-offs."  ➔  Delivery: Actionable Review Workspace with item status toggles, auditor notes, and timestamped audit trails.</a:t>
+            </a:r>
+          </a:p>
+        </p:txBody>
+      </p:sp>
+      <p:sp>
+        <p:nvSpPr>
+          <p:cNvPr id="15" name="Rounded Rectangle 14"/>
+          <p:cNvSpPr/>
+          <p:nvPr/>
+        </p:nvSpPr>
+        <p:spPr>
+          <a:xfrm>
+            <a:off x="731520" y="4297680"/>
+            <a:ext cx="10728655" cy="822960"/>
+          </a:xfrm>
+          <a:prstGeom prst="roundRect">
+            <a:avLst/>
+          </a:prstGeom>
+          <a:solidFill>
+            <a:srgbClr val="F8FAFC"/>
+          </a:solidFill>
+          <a:ln>
+            <a:solidFill>
+              <a:srgbClr val="E2E8F0"/>
+            </a:solidFill>
+          </a:ln>
+        </p:spPr>
+        <p:style>
+          <a:lnRef idx="1">
+            <a:schemeClr val="accent1"/>
+          </a:lnRef>
+          <a:fillRef idx="3">
+            <a:schemeClr val="accent1"/>
+          </a:fillRef>
+          <a:effectRef idx="2">
+            <a:schemeClr val="accent1"/>
+          </a:effectRef>
+          <a:fontRef idx="minor">
+            <a:schemeClr val="lt1"/>
+          </a:fontRef>
+        </p:style>
+        <p:txBody>
+          <a:bodyPr rtlCol="0" anchor="ctr"/>
+          <a:lstStyle/>
+          <a:p>
+            <a:pPr algn="ctr"/>
+          </a:p>
+        </p:txBody>
+      </p:sp>
+      <p:sp>
+        <p:nvSpPr>
+          <p:cNvPr id="16" name="Rectangle 15"/>
+          <p:cNvSpPr/>
+          <p:nvPr/>
+        </p:nvSpPr>
+        <p:spPr>
+          <a:xfrm>
+            <a:off x="731520" y="4297680"/>
+            <a:ext cx="54864" cy="822960"/>
+          </a:xfrm>
+          <a:prstGeom prst="rect">
+            <a:avLst/>
+          </a:prstGeom>
+          <a:solidFill>
+            <a:srgbClr val="1B4332"/>
+          </a:solidFill>
+          <a:ln>
+            <a:noFill/>
+          </a:ln>
+        </p:spPr>
+        <p:style>
+          <a:lnRef idx="1">
+            <a:schemeClr val="accent1"/>
+          </a:lnRef>
+          <a:fillRef idx="3">
+            <a:schemeClr val="accent1"/>
+          </a:fillRef>
+          <a:effectRef idx="2">
+            <a:schemeClr val="accent1"/>
+          </a:effectRef>
+          <a:fontRef idx="minor">
+            <a:schemeClr val="lt1"/>
+          </a:fontRef>
+        </p:style>
+        <p:txBody>
+          <a:bodyPr rtlCol="0" anchor="ctr"/>
+          <a:lstStyle/>
+          <a:p>
+            <a:pPr algn="ctr"/>
+          </a:p>
+        </p:txBody>
+      </p:sp>
+      <p:sp>
+        <p:nvSpPr>
+          <p:cNvPr id="17" name="TextBox 16"/>
+          <p:cNvSpPr txBox="1"/>
+          <p:nvPr/>
+        </p:nvSpPr>
+        <p:spPr>
+          <a:xfrm>
+            <a:off x="914400" y="4370832"/>
+            <a:ext cx="10332720" cy="685800"/>
+          </a:xfrm>
+          <a:prstGeom prst="rect">
+            <a:avLst/>
+          </a:prstGeom>
+          <a:noFill/>
+        </p:spPr>
+        <p:txBody>
+          <a:bodyPr wrap="square">
+            <a:spAutoFit/>
+          </a:bodyPr>
+          <a:lstStyle/>
+          <a:p>
+            <a:pPr>
+              <a:defRPr sz="1050" b="1">
+                <a:solidFill>
+                  <a:srgbClr val="B48214"/>
+                </a:solidFill>
+              </a:defRPr>
+            </a:pPr>
+            <a:r>
+              <a:t>SUBSIDIARY CFOS (OPERATING UNITS)</a:t>
+            </a:r>
+          </a:p>
+          <a:p>
+            <a:pPr>
+              <a:defRPr sz="1050">
+                <a:solidFill>
+                  <a:srgbClr val="1E293B"/>
+                </a:solidFill>
+              </a:defRPr>
+            </a:pPr>
+            <a:r>
+              <a:t>Expectation: "Ensure transparent, fair elimination and reconciliation calculations."  ➔  Delivery: Line-by-line breakdown of all variances enables rapid cross-checking against subsidiary general ledgers.</a:t>
+            </a:r>
+          </a:p>
+        </p:txBody>
+      </p:sp>
+      <p:sp>
+        <p:nvSpPr>
+          <p:cNvPr id="18" name="Rounded Rectangle 17"/>
+          <p:cNvSpPr/>
+          <p:nvPr/>
+        </p:nvSpPr>
+        <p:spPr>
+          <a:xfrm>
+            <a:off x="731520" y="5212080"/>
+            <a:ext cx="10728655" cy="822960"/>
+          </a:xfrm>
+          <a:prstGeom prst="roundRect">
+            <a:avLst/>
+          </a:prstGeom>
+          <a:solidFill>
+            <a:srgbClr val="F8FAFC"/>
+          </a:solidFill>
+          <a:ln>
+            <a:solidFill>
+              <a:srgbClr val="E2E8F0"/>
+            </a:solidFill>
+          </a:ln>
+        </p:spPr>
+        <p:style>
+          <a:lnRef idx="1">
+            <a:schemeClr val="accent1"/>
+          </a:lnRef>
+          <a:fillRef idx="3">
+            <a:schemeClr val="accent1"/>
+          </a:fillRef>
+          <a:effectRef idx="2">
+            <a:schemeClr val="accent1"/>
+          </a:effectRef>
+          <a:fontRef idx="minor">
+            <a:schemeClr val="lt1"/>
+          </a:fontRef>
+        </p:style>
+        <p:txBody>
+          <a:bodyPr rtlCol="0" anchor="ctr"/>
+          <a:lstStyle/>
+          <a:p>
+            <a:pPr algn="ctr"/>
+          </a:p>
+        </p:txBody>
+      </p:sp>
+      <p:sp>
+        <p:nvSpPr>
+          <p:cNvPr id="19" name="Rectangle 18"/>
+          <p:cNvSpPr/>
+          <p:nvPr/>
+        </p:nvSpPr>
+        <p:spPr>
+          <a:xfrm>
+            <a:off x="731520" y="5212080"/>
+            <a:ext cx="54864" cy="822960"/>
+          </a:xfrm>
+          <a:prstGeom prst="rect">
+            <a:avLst/>
+          </a:prstGeom>
+          <a:solidFill>
+            <a:srgbClr val="1B4332"/>
+          </a:solidFill>
+          <a:ln>
+            <a:noFill/>
+          </a:ln>
+        </p:spPr>
+        <p:style>
+          <a:lnRef idx="1">
+            <a:schemeClr val="accent1"/>
+          </a:lnRef>
+          <a:fillRef idx="3">
+            <a:schemeClr val="accent1"/>
+          </a:fillRef>
+          <a:effectRef idx="2">
+            <a:schemeClr val="accent1"/>
+          </a:effectRef>
+          <a:fontRef idx="minor">
+            <a:schemeClr val="lt1"/>
+          </a:fontRef>
+        </p:style>
+        <p:txBody>
+          <a:bodyPr rtlCol="0" anchor="ctr"/>
+          <a:lstStyle/>
+          <a:p>
+            <a:pPr algn="ctr"/>
+          </a:p>
+        </p:txBody>
+      </p:sp>
+      <p:sp>
+        <p:nvSpPr>
+          <p:cNvPr id="20" name="TextBox 19"/>
+          <p:cNvSpPr txBox="1"/>
+          <p:nvPr/>
+        </p:nvSpPr>
+        <p:spPr>
+          <a:xfrm>
+            <a:off x="914400" y="5285232"/>
+            <a:ext cx="10332720" cy="685800"/>
+          </a:xfrm>
+          <a:prstGeom prst="rect">
+            <a:avLst/>
+          </a:prstGeom>
+          <a:noFill/>
+        </p:spPr>
+        <p:txBody>
+          <a:bodyPr wrap="square">
+            <a:spAutoFit/>
+          </a:bodyPr>
+          <a:lstStyle/>
+          <a:p>
+            <a:pPr>
+              <a:defRPr sz="1050" b="1">
+                <a:solidFill>
+                  <a:srgbClr val="B48214"/>
+                </a:solidFill>
+              </a:defRPr>
+            </a:pPr>
+            <a:r>
+              <a:t>IT &amp; DATA GOVERNANCE</a:t>
+            </a:r>
+          </a:p>
+          <a:p>
+            <a:pPr>
+              <a:defRPr sz="1050">
+                <a:solidFill>
+                  <a:srgbClr val="1E293B"/>
+                </a:solidFill>
+              </a:defRPr>
+            </a:pPr>
+            <a:r>
+              <a:t>Expectation: "Strict data privacy with no exposure of unreleased financials to public LLMs."  ➔  Delivery: Runs entirely client-side/on-premise; append-only point-in-time snapshot persistence.</a:t>
             </a:r>
           </a:p>
         </p:txBody>
@@ -7868,7 +9562,7 @@
             <a:avLst/>
           </a:prstGeom>
           <a:solidFill>
-            <a:srgbClr val="F6F3EC"/>
+            <a:srgbClr val="FFFFFF"/>
           </a:solidFill>
           <a:ln>
             <a:noFill/>
@@ -7898,95 +9592,23 @@
       </p:sp>
       <p:sp>
         <p:nvSpPr>
-          <p:cNvPr id="3" name="TextBox 2"/>
-          <p:cNvSpPr txBox="1"/>
-          <p:nvPr/>
-        </p:nvSpPr>
-        <p:spPr>
-          <a:xfrm>
-            <a:off x="731520" y="457200"/>
-            <a:ext cx="9144000" cy="365760"/>
+          <p:cNvPr id="3" name="Rectangle 2"/>
+          <p:cNvSpPr/>
+          <p:nvPr/>
+        </p:nvSpPr>
+        <p:spPr>
+          <a:xfrm>
+            <a:off x="731520" y="365760"/>
+            <a:ext cx="10728655" cy="36576"/>
           </a:xfrm>
           <a:prstGeom prst="rect">
             <a:avLst/>
           </a:prstGeom>
-          <a:noFill/>
-        </p:spPr>
-        <p:txBody>
-          <a:bodyPr wrap="square">
-            <a:spAutoFit/>
-          </a:bodyPr>
-          <a:lstStyle/>
-          <a:p>
-            <a:pPr>
-              <a:defRPr sz="1050" b="1">
-                <a:solidFill>
-                  <a:srgbClr val="B8902E"/>
-                </a:solidFill>
-              </a:defRPr>
-            </a:pPr>
-            <a:r>
-              <a:t>ROADMAP &amp; ROLLOUT</a:t>
-            </a:r>
-          </a:p>
-        </p:txBody>
-      </p:sp>
-      <p:sp>
-        <p:nvSpPr>
-          <p:cNvPr id="4" name="TextBox 3"/>
-          <p:cNvSpPr txBox="1"/>
-          <p:nvPr/>
-        </p:nvSpPr>
-        <p:spPr>
-          <a:xfrm>
-            <a:off x="731520" y="731520"/>
-            <a:ext cx="10698480" cy="640080"/>
-          </a:xfrm>
-          <a:prstGeom prst="rect">
-            <a:avLst/>
-          </a:prstGeom>
-          <a:noFill/>
-        </p:spPr>
-        <p:txBody>
-          <a:bodyPr wrap="square">
-            <a:spAutoFit/>
-          </a:bodyPr>
-          <a:lstStyle/>
-          <a:p>
-            <a:pPr>
-              <a:defRPr sz="2200" b="1">
-                <a:solidFill>
-                  <a:srgbClr val="0F2A1D"/>
-                </a:solidFill>
-              </a:defRPr>
-            </a:pPr>
-            <a:r>
-              <a:t>Rencana Implementasi Bertahap Menuju Produksi</a:t>
-            </a:r>
-          </a:p>
-        </p:txBody>
-      </p:sp>
-      <p:sp>
-        <p:nvSpPr>
-          <p:cNvPr id="5" name="Rounded Rectangle 4"/>
-          <p:cNvSpPr/>
-          <p:nvPr/>
-        </p:nvSpPr>
-        <p:spPr>
-          <a:xfrm>
-            <a:off x="731520" y="1554480"/>
-            <a:ext cx="3328416" cy="4389120"/>
-          </a:xfrm>
-          <a:prstGeom prst="roundRect">
-            <a:avLst/>
-          </a:prstGeom>
           <a:solidFill>
-            <a:srgbClr val="FFFFFF"/>
+            <a:srgbClr val="1B4332"/>
           </a:solidFill>
-          <a:ln w="19050">
-            <a:solidFill>
-              <a:srgbClr val="2D6A4F"/>
-            </a:solidFill>
+          <a:ln>
+            <a:noFill/>
           </a:ln>
         </p:spPr>
         <p:style>
@@ -8013,14 +9635,14 @@
       </p:sp>
       <p:sp>
         <p:nvSpPr>
-          <p:cNvPr id="6" name="TextBox 5"/>
+          <p:cNvPr id="4" name="TextBox 3"/>
           <p:cNvSpPr txBox="1"/>
           <p:nvPr/>
         </p:nvSpPr>
         <p:spPr>
           <a:xfrm>
-            <a:off x="932688" y="1755648"/>
-            <a:ext cx="2926080" cy="3986784"/>
+            <a:off x="731520" y="502920"/>
+            <a:ext cx="9144000" cy="320040"/>
           </a:xfrm>
           <a:prstGeom prst="rect">
             <a:avLst/>
@@ -8034,105 +9656,73 @@
           <a:lstStyle/>
           <a:p>
             <a:pPr>
-              <a:spcAft>
-                <a:spcPts val="800"/>
-              </a:spcAft>
-              <a:defRPr sz="1400" b="1">
-                <a:solidFill>
-                  <a:srgbClr val="2D6A4F"/>
-                </a:solidFill>
-              </a:defRPr>
-            </a:pPr>
-            <a:r>
-              <a:t>Fase 1: Working PoC (Selesai)</a:t>
-            </a:r>
-            <a:br/>
-            <a:r>
-              <a:t>(Bulan 1)</a:t>
-            </a:r>
-          </a:p>
-          <a:p>
-            <a:pPr>
-              <a:spcAft>
-                <a:spcPts val="400"/>
-              </a:spcAft>
-              <a:defRPr sz="1150">
-                <a:solidFill>
-                  <a:srgbClr val="5C564A"/>
-                </a:solidFill>
-              </a:defRPr>
-            </a:pPr>
-            <a:r>
-              <a:t>• Rule engine konsolidasi 6 entitas tervalidasi.</a:t>
-            </a:r>
-          </a:p>
-          <a:p>
-            <a:pPr>
-              <a:spcAft>
-                <a:spcPts val="400"/>
-              </a:spcAft>
-              <a:defRPr sz="1150">
-                <a:solidFill>
-                  <a:srgbClr val="5C564A"/>
-                </a:solidFill>
-              </a:defRPr>
-            </a:pPr>
-            <a:r>
-              <a:t>• Conversational Copilot dengan prompt pills.</a:t>
-            </a:r>
-          </a:p>
-          <a:p>
-            <a:pPr>
-              <a:spcAft>
-                <a:spcPts val="400"/>
-              </a:spcAft>
-              <a:defRPr sz="1150">
-                <a:solidFill>
-                  <a:srgbClr val="5C564A"/>
-                </a:solidFill>
-              </a:defRPr>
-            </a:pPr>
-            <a:r>
-              <a:t>• Review Workspace 'Hasil yang Perlu Di-Review'.</a:t>
-            </a:r>
-          </a:p>
-          <a:p>
-            <a:pPr>
-              <a:spcAft>
-                <a:spcPts val="400"/>
-              </a:spcAft>
-              <a:defRPr sz="1150">
-                <a:solidFill>
-                  <a:srgbClr val="5C564A"/>
-                </a:solidFill>
-              </a:defRPr>
-            </a:pPr>
-            <a:r>
-              <a:t>• Ekspor laporan dan tracking status review.</a:t>
-            </a:r>
-          </a:p>
-        </p:txBody>
-      </p:sp>
-      <p:sp>
-        <p:nvSpPr>
-          <p:cNvPr id="7" name="Rounded Rectangle 6"/>
+              <a:defRPr sz="1000" b="1">
+                <a:solidFill>
+                  <a:srgbClr val="B48214"/>
+                </a:solidFill>
+              </a:defRPr>
+            </a:pPr>
+            <a:r>
+              <a:t>DEPLOYMENT PLAN</a:t>
+            </a:r>
+          </a:p>
+        </p:txBody>
+      </p:sp>
+      <p:sp>
+        <p:nvSpPr>
+          <p:cNvPr id="5" name="TextBox 4"/>
+          <p:cNvSpPr txBox="1"/>
+          <p:nvPr/>
+        </p:nvSpPr>
+        <p:spPr>
+          <a:xfrm>
+            <a:off x="731520" y="777240"/>
+            <a:ext cx="10728655" cy="640080"/>
+          </a:xfrm>
+          <a:prstGeom prst="rect">
+            <a:avLst/>
+          </a:prstGeom>
+          <a:noFill/>
+        </p:spPr>
+        <p:txBody>
+          <a:bodyPr wrap="square">
+            <a:spAutoFit/>
+          </a:bodyPr>
+          <a:lstStyle/>
+          <a:p>
+            <a:pPr>
+              <a:defRPr sz="2200" b="1">
+                <a:solidFill>
+                  <a:srgbClr val="0F172A"/>
+                </a:solidFill>
+              </a:defRPr>
+            </a:pPr>
+            <a:r>
+              <a:t>Phased Enterprise Implementation Roadmap</a:t>
+            </a:r>
+          </a:p>
+        </p:txBody>
+      </p:sp>
+      <p:sp>
+        <p:nvSpPr>
+          <p:cNvPr id="6" name="Rounded Rectangle 5"/>
           <p:cNvSpPr/>
           <p:nvPr/>
         </p:nvSpPr>
         <p:spPr>
           <a:xfrm>
-            <a:off x="4416552" y="1554480"/>
+            <a:off x="731520" y="1600200"/>
             <a:ext cx="3328416" cy="4389120"/>
           </a:xfrm>
           <a:prstGeom prst="roundRect">
             <a:avLst/>
           </a:prstGeom>
           <a:solidFill>
-            <a:srgbClr val="FFFFFF"/>
+            <a:srgbClr val="F8FAFC"/>
           </a:solidFill>
-          <a:ln w="19050">
+          <a:ln w="12700">
             <a:solidFill>
-              <a:srgbClr val="B8902E"/>
+              <a:srgbClr val="E2E8F0"/>
             </a:solidFill>
           </a:ln>
         </p:spPr>
@@ -8160,127 +9750,23 @@
       </p:sp>
       <p:sp>
         <p:nvSpPr>
-          <p:cNvPr id="8" name="TextBox 7"/>
-          <p:cNvSpPr txBox="1"/>
-          <p:nvPr/>
-        </p:nvSpPr>
-        <p:spPr>
-          <a:xfrm>
-            <a:off x="4617720" y="1755648"/>
-            <a:ext cx="2926080" cy="3986784"/>
-          </a:xfrm>
-          <a:prstGeom prst="rect">
-            <a:avLst/>
-          </a:prstGeom>
-          <a:noFill/>
-        </p:spPr>
-        <p:txBody>
-          <a:bodyPr wrap="square">
-            <a:spAutoFit/>
-          </a:bodyPr>
-          <a:lstStyle/>
-          <a:p>
-            <a:pPr>
-              <a:spcAft>
-                <a:spcPts val="800"/>
-              </a:spcAft>
-              <a:defRPr sz="1400" b="1">
-                <a:solidFill>
-                  <a:srgbClr val="B8902E"/>
-                </a:solidFill>
-              </a:defRPr>
-            </a:pPr>
-            <a:r>
-              <a:t>Fase 2: Integrasi &amp; Pilot</a:t>
-            </a:r>
-            <a:br/>
-            <a:r>
-              <a:t>(Bulan 2 - 3)</a:t>
-            </a:r>
-          </a:p>
-          <a:p>
-            <a:pPr>
-              <a:spcAft>
-                <a:spcPts val="400"/>
-              </a:spcAft>
-              <a:defRPr sz="1150">
-                <a:solidFill>
-                  <a:srgbClr val="5C564A"/>
-                </a:solidFill>
-              </a:defRPr>
-            </a:pPr>
-            <a:r>
-              <a:t>• Konektor otomatis ke GL/ERP anak perusahaan.</a:t>
-            </a:r>
-          </a:p>
-          <a:p>
-            <a:pPr>
-              <a:spcAft>
-                <a:spcPts val="400"/>
-              </a:spcAft>
-              <a:defRPr sz="1150">
-                <a:solidFill>
-                  <a:srgbClr val="5C564A"/>
-                </a:solidFill>
-              </a:defRPr>
-            </a:pPr>
-            <a:r>
-              <a:t>• Penyimpanan database snapshot point-in-time.</a:t>
-            </a:r>
-          </a:p>
-          <a:p>
-            <a:pPr>
-              <a:spcAft>
-                <a:spcPts val="400"/>
-              </a:spcAft>
-              <a:defRPr sz="1150">
-                <a:solidFill>
-                  <a:srgbClr val="5C564A"/>
-                </a:solidFill>
-              </a:defRPr>
-            </a:pPr>
-            <a:r>
-              <a:t>• Workflow notifikasi email/chat ke tim akuntansi anak.</a:t>
-            </a:r>
-          </a:p>
-          <a:p>
-            <a:pPr>
-              <a:spcAft>
-                <a:spcPts val="400"/>
-              </a:spcAft>
-              <a:defRPr sz="1150">
-                <a:solidFill>
-                  <a:srgbClr val="5C564A"/>
-                </a:solidFill>
-              </a:defRPr>
-            </a:pPr>
-            <a:r>
-              <a:t>• Pilot pengujian paralel dengan audit tahun sebelumnya.</a:t>
-            </a:r>
-          </a:p>
-        </p:txBody>
-      </p:sp>
-      <p:sp>
-        <p:nvSpPr>
-          <p:cNvPr id="9" name="Rounded Rectangle 8"/>
+          <p:cNvPr id="7" name="Rounded Rectangle 6"/>
           <p:cNvSpPr/>
           <p:nvPr/>
         </p:nvSpPr>
         <p:spPr>
           <a:xfrm>
-            <a:off x="8101584" y="1554480"/>
-            <a:ext cx="3328416" cy="4389120"/>
+            <a:off x="731520" y="1600200"/>
+            <a:ext cx="3328416" cy="73152"/>
           </a:xfrm>
           <a:prstGeom prst="roundRect">
             <a:avLst/>
           </a:prstGeom>
           <a:solidFill>
-            <a:srgbClr val="FFFFFF"/>
+            <a:srgbClr val="0D9488"/>
           </a:solidFill>
-          <a:ln w="19050">
-            <a:solidFill>
-              <a:srgbClr val="1B4332"/>
-            </a:solidFill>
+          <a:ln>
+            <a:noFill/>
           </a:ln>
         </p:spPr>
         <p:style>
@@ -8307,14 +9793,14 @@
       </p:sp>
       <p:sp>
         <p:nvSpPr>
-          <p:cNvPr id="10" name="TextBox 9"/>
+          <p:cNvPr id="8" name="TextBox 7"/>
           <p:cNvSpPr txBox="1"/>
           <p:nvPr/>
         </p:nvSpPr>
         <p:spPr>
           <a:xfrm>
-            <a:off x="8302752" y="1755648"/>
-            <a:ext cx="2926080" cy="3986784"/>
+            <a:off x="950976" y="1819656"/>
+            <a:ext cx="2889504" cy="3950208"/>
           </a:xfrm>
           <a:prstGeom prst="rect">
             <a:avLst/>
@@ -8331,18 +9817,18 @@
               <a:spcAft>
                 <a:spcPts val="800"/>
               </a:spcAft>
-              <a:defRPr sz="1400" b="1">
-                <a:solidFill>
-                  <a:srgbClr val="1B4332"/>
-                </a:solidFill>
-              </a:defRPr>
-            </a:pPr>
-            <a:r>
-              <a:t>Fase 3: Enterprise Rollout</a:t>
+              <a:defRPr sz="1350" b="1">
+                <a:solidFill>
+                  <a:srgbClr val="0D9488"/>
+                </a:solidFill>
+              </a:defRPr>
+            </a:pPr>
+            <a:r>
+              <a:t>Phase 1: Working PoC (Delivered)</a:t>
             </a:r>
             <a:br/>
             <a:r>
-              <a:t>(Bulan 4+)</a:t>
+              <a:t>(Month 1)</a:t>
             </a:r>
           </a:p>
           <a:p>
@@ -8350,14 +9836,14 @@
               <a:spcAft>
                 <a:spcPts val="400"/>
               </a:spcAft>
-              <a:defRPr sz="1150">
-                <a:solidFill>
-                  <a:srgbClr val="5C564A"/>
-                </a:solidFill>
-              </a:defRPr>
-            </a:pPr>
-            <a:r>
-              <a:t>• Multi-tenant RBAC &amp; Single Sign-On (SSO).</a:t>
+              <a:defRPr sz="1100">
+                <a:solidFill>
+                  <a:srgbClr val="1E293B"/>
+                </a:solidFill>
+              </a:defRPr>
+            </a:pPr>
+            <a:r>
+              <a:t>• Consolidation rule engine validated for 6 entities.</a:t>
             </a:r>
           </a:p>
           <a:p>
@@ -8365,14 +9851,14 @@
               <a:spcAft>
                 <a:spcPts val="400"/>
               </a:spcAft>
-              <a:defRPr sz="1150">
-                <a:solidFill>
-                  <a:srgbClr val="5C564A"/>
-                </a:solidFill>
-              </a:defRPr>
-            </a:pPr>
-            <a:r>
-              <a:t>• Elimination engine otomatis tingkat transaksi (full GL).</a:t>
+              <a:defRPr sz="1100">
+                <a:solidFill>
+                  <a:srgbClr val="1E293B"/>
+                </a:solidFill>
+              </a:defRPr>
+            </a:pPr>
+            <a:r>
+              <a:t>• Conversational AI Copilot with quick-action chips.</a:t>
             </a:r>
           </a:p>
           <a:p>
@@ -8380,14 +9866,14 @@
               <a:spcAft>
                 <a:spcPts val="400"/>
               </a:spcAft>
-              <a:defRPr sz="1150">
-                <a:solidFill>
-                  <a:srgbClr val="5C564A"/>
-                </a:solidFill>
-              </a:defRPr>
-            </a:pPr>
-            <a:r>
-              <a:t>• Portal telaah formal untuk auditor eksternal.</a:t>
+              <a:defRPr sz="1100">
+                <a:solidFill>
+                  <a:srgbClr val="1E293B"/>
+                </a:solidFill>
+              </a:defRPr>
+            </a:pPr>
+            <a:r>
+              <a:t>• Actionable 'Review Workspace' for anomaly tracking.</a:t>
             </a:r>
           </a:p>
           <a:p>
@@ -8395,14 +9881,394 @@
               <a:spcAft>
                 <a:spcPts val="400"/>
               </a:spcAft>
-              <a:defRPr sz="1150">
-                <a:solidFill>
-                  <a:srgbClr val="5C564A"/>
-                </a:solidFill>
-              </a:defRPr>
-            </a:pPr>
-            <a:r>
-              <a:t>• Monitoring performa portofolio investasi holding terpadu.</a:t>
+              <a:defRPr sz="1100">
+                <a:solidFill>
+                  <a:srgbClr val="1E293B"/>
+                </a:solidFill>
+              </a:defRPr>
+            </a:pPr>
+            <a:r>
+              <a:t>• Self-contained local execution &amp; GitHub repository.</a:t>
+            </a:r>
+          </a:p>
+        </p:txBody>
+      </p:sp>
+      <p:sp>
+        <p:nvSpPr>
+          <p:cNvPr id="9" name="Rounded Rectangle 8"/>
+          <p:cNvSpPr/>
+          <p:nvPr/>
+        </p:nvSpPr>
+        <p:spPr>
+          <a:xfrm>
+            <a:off x="4416552" y="1600200"/>
+            <a:ext cx="3328416" cy="4389120"/>
+          </a:xfrm>
+          <a:prstGeom prst="roundRect">
+            <a:avLst/>
+          </a:prstGeom>
+          <a:solidFill>
+            <a:srgbClr val="F8FAFC"/>
+          </a:solidFill>
+          <a:ln w="12700">
+            <a:solidFill>
+              <a:srgbClr val="E2E8F0"/>
+            </a:solidFill>
+          </a:ln>
+        </p:spPr>
+        <p:style>
+          <a:lnRef idx="1">
+            <a:schemeClr val="accent1"/>
+          </a:lnRef>
+          <a:fillRef idx="3">
+            <a:schemeClr val="accent1"/>
+          </a:fillRef>
+          <a:effectRef idx="2">
+            <a:schemeClr val="accent1"/>
+          </a:effectRef>
+          <a:fontRef idx="minor">
+            <a:schemeClr val="lt1"/>
+          </a:fontRef>
+        </p:style>
+        <p:txBody>
+          <a:bodyPr rtlCol="0" anchor="ctr"/>
+          <a:lstStyle/>
+          <a:p>
+            <a:pPr algn="ctr"/>
+          </a:p>
+        </p:txBody>
+      </p:sp>
+      <p:sp>
+        <p:nvSpPr>
+          <p:cNvPr id="10" name="Rounded Rectangle 9"/>
+          <p:cNvSpPr/>
+          <p:nvPr/>
+        </p:nvSpPr>
+        <p:spPr>
+          <a:xfrm>
+            <a:off x="4416552" y="1600200"/>
+            <a:ext cx="3328416" cy="73152"/>
+          </a:xfrm>
+          <a:prstGeom prst="roundRect">
+            <a:avLst/>
+          </a:prstGeom>
+          <a:solidFill>
+            <a:srgbClr val="B48214"/>
+          </a:solidFill>
+          <a:ln>
+            <a:noFill/>
+          </a:ln>
+        </p:spPr>
+        <p:style>
+          <a:lnRef idx="1">
+            <a:schemeClr val="accent1"/>
+          </a:lnRef>
+          <a:fillRef idx="3">
+            <a:schemeClr val="accent1"/>
+          </a:fillRef>
+          <a:effectRef idx="2">
+            <a:schemeClr val="accent1"/>
+          </a:effectRef>
+          <a:fontRef idx="minor">
+            <a:schemeClr val="lt1"/>
+          </a:fontRef>
+        </p:style>
+        <p:txBody>
+          <a:bodyPr rtlCol="0" anchor="ctr"/>
+          <a:lstStyle/>
+          <a:p>
+            <a:pPr algn="ctr"/>
+          </a:p>
+        </p:txBody>
+      </p:sp>
+      <p:sp>
+        <p:nvSpPr>
+          <p:cNvPr id="11" name="TextBox 10"/>
+          <p:cNvSpPr txBox="1"/>
+          <p:nvPr/>
+        </p:nvSpPr>
+        <p:spPr>
+          <a:xfrm>
+            <a:off x="4636008" y="1819656"/>
+            <a:ext cx="2889504" cy="3950208"/>
+          </a:xfrm>
+          <a:prstGeom prst="rect">
+            <a:avLst/>
+          </a:prstGeom>
+          <a:noFill/>
+        </p:spPr>
+        <p:txBody>
+          <a:bodyPr wrap="square">
+            <a:spAutoFit/>
+          </a:bodyPr>
+          <a:lstStyle/>
+          <a:p>
+            <a:pPr>
+              <a:spcAft>
+                <a:spcPts val="800"/>
+              </a:spcAft>
+              <a:defRPr sz="1350" b="1">
+                <a:solidFill>
+                  <a:srgbClr val="B48214"/>
+                </a:solidFill>
+              </a:defRPr>
+            </a:pPr>
+            <a:r>
+              <a:t>Phase 2: Integration &amp; Pilot</a:t>
+            </a:r>
+            <a:br/>
+            <a:r>
+              <a:t>(Months 2 - 3)</a:t>
+            </a:r>
+          </a:p>
+          <a:p>
+            <a:pPr>
+              <a:spcAft>
+                <a:spcPts val="400"/>
+              </a:spcAft>
+              <a:defRPr sz="1100">
+                <a:solidFill>
+                  <a:srgbClr val="1E293B"/>
+                </a:solidFill>
+              </a:defRPr>
+            </a:pPr>
+            <a:r>
+              <a:t>• Direct ERP/GL database connectors (SAP/Oracle).</a:t>
+            </a:r>
+          </a:p>
+          <a:p>
+            <a:pPr>
+              <a:spcAft>
+                <a:spcPts val="400"/>
+              </a:spcAft>
+              <a:defRPr sz="1100">
+                <a:solidFill>
+                  <a:srgbClr val="1E293B"/>
+                </a:solidFill>
+              </a:defRPr>
+            </a:pPr>
+            <a:r>
+              <a:t>• Immutable point-in-time snapshot database store.</a:t>
+            </a:r>
+          </a:p>
+          <a:p>
+            <a:pPr>
+              <a:spcAft>
+                <a:spcPts val="400"/>
+              </a:spcAft>
+              <a:defRPr sz="1100">
+                <a:solidFill>
+                  <a:srgbClr val="1E293B"/>
+                </a:solidFill>
+              </a:defRPr>
+            </a:pPr>
+            <a:r>
+              <a:t>• Automated email/chat notification dispatch to subsidiaries.</a:t>
+            </a:r>
+          </a:p>
+          <a:p>
+            <a:pPr>
+              <a:spcAft>
+                <a:spcPts val="400"/>
+              </a:spcAft>
+              <a:defRPr sz="1100">
+                <a:solidFill>
+                  <a:srgbClr val="1E293B"/>
+                </a:solidFill>
+              </a:defRPr>
+            </a:pPr>
+            <a:r>
+              <a:t>• Parallel dry-run benchmarked against prior-year audited data.</a:t>
+            </a:r>
+          </a:p>
+        </p:txBody>
+      </p:sp>
+      <p:sp>
+        <p:nvSpPr>
+          <p:cNvPr id="12" name="Rounded Rectangle 11"/>
+          <p:cNvSpPr/>
+          <p:nvPr/>
+        </p:nvSpPr>
+        <p:spPr>
+          <a:xfrm>
+            <a:off x="8101584" y="1600200"/>
+            <a:ext cx="3328416" cy="4389120"/>
+          </a:xfrm>
+          <a:prstGeom prst="roundRect">
+            <a:avLst/>
+          </a:prstGeom>
+          <a:solidFill>
+            <a:srgbClr val="F8FAFC"/>
+          </a:solidFill>
+          <a:ln w="12700">
+            <a:solidFill>
+              <a:srgbClr val="E2E8F0"/>
+            </a:solidFill>
+          </a:ln>
+        </p:spPr>
+        <p:style>
+          <a:lnRef idx="1">
+            <a:schemeClr val="accent1"/>
+          </a:lnRef>
+          <a:fillRef idx="3">
+            <a:schemeClr val="accent1"/>
+          </a:fillRef>
+          <a:effectRef idx="2">
+            <a:schemeClr val="accent1"/>
+          </a:effectRef>
+          <a:fontRef idx="minor">
+            <a:schemeClr val="lt1"/>
+          </a:fontRef>
+        </p:style>
+        <p:txBody>
+          <a:bodyPr rtlCol="0" anchor="ctr"/>
+          <a:lstStyle/>
+          <a:p>
+            <a:pPr algn="ctr"/>
+          </a:p>
+        </p:txBody>
+      </p:sp>
+      <p:sp>
+        <p:nvSpPr>
+          <p:cNvPr id="13" name="Rounded Rectangle 12"/>
+          <p:cNvSpPr/>
+          <p:nvPr/>
+        </p:nvSpPr>
+        <p:spPr>
+          <a:xfrm>
+            <a:off x="8101584" y="1600200"/>
+            <a:ext cx="3328416" cy="73152"/>
+          </a:xfrm>
+          <a:prstGeom prst="roundRect">
+            <a:avLst/>
+          </a:prstGeom>
+          <a:solidFill>
+            <a:srgbClr val="1B4332"/>
+          </a:solidFill>
+          <a:ln>
+            <a:noFill/>
+          </a:ln>
+        </p:spPr>
+        <p:style>
+          <a:lnRef idx="1">
+            <a:schemeClr val="accent1"/>
+          </a:lnRef>
+          <a:fillRef idx="3">
+            <a:schemeClr val="accent1"/>
+          </a:fillRef>
+          <a:effectRef idx="2">
+            <a:schemeClr val="accent1"/>
+          </a:effectRef>
+          <a:fontRef idx="minor">
+            <a:schemeClr val="lt1"/>
+          </a:fontRef>
+        </p:style>
+        <p:txBody>
+          <a:bodyPr rtlCol="0" anchor="ctr"/>
+          <a:lstStyle/>
+          <a:p>
+            <a:pPr algn="ctr"/>
+          </a:p>
+        </p:txBody>
+      </p:sp>
+      <p:sp>
+        <p:nvSpPr>
+          <p:cNvPr id="14" name="TextBox 13"/>
+          <p:cNvSpPr txBox="1"/>
+          <p:nvPr/>
+        </p:nvSpPr>
+        <p:spPr>
+          <a:xfrm>
+            <a:off x="8321040" y="1819656"/>
+            <a:ext cx="2889504" cy="3950208"/>
+          </a:xfrm>
+          <a:prstGeom prst="rect">
+            <a:avLst/>
+          </a:prstGeom>
+          <a:noFill/>
+        </p:spPr>
+        <p:txBody>
+          <a:bodyPr wrap="square">
+            <a:spAutoFit/>
+          </a:bodyPr>
+          <a:lstStyle/>
+          <a:p>
+            <a:pPr>
+              <a:spcAft>
+                <a:spcPts val="800"/>
+              </a:spcAft>
+              <a:defRPr sz="1350" b="1">
+                <a:solidFill>
+                  <a:srgbClr val="1B4332"/>
+                </a:solidFill>
+              </a:defRPr>
+            </a:pPr>
+            <a:r>
+              <a:t>Phase 3: Full Enterprise Rollout</a:t>
+            </a:r>
+            <a:br/>
+            <a:r>
+              <a:t>(Month 4+)</a:t>
+            </a:r>
+          </a:p>
+          <a:p>
+            <a:pPr>
+              <a:spcAft>
+                <a:spcPts val="400"/>
+              </a:spcAft>
+              <a:defRPr sz="1100">
+                <a:solidFill>
+                  <a:srgbClr val="1E293B"/>
+                </a:solidFill>
+              </a:defRPr>
+            </a:pPr>
+            <a:r>
+              <a:t>• Multi-tenant Role-Based Access Control (RBAC) &amp; SSO.</a:t>
+            </a:r>
+          </a:p>
+          <a:p>
+            <a:pPr>
+              <a:spcAft>
+                <a:spcPts val="400"/>
+              </a:spcAft>
+              <a:defRPr sz="1100">
+                <a:solidFill>
+                  <a:srgbClr val="1E293B"/>
+                </a:solidFill>
+              </a:defRPr>
+            </a:pPr>
+            <a:r>
+              <a:t>• Transaction-level automated intercompany elimination.</a:t>
+            </a:r>
+          </a:p>
+          <a:p>
+            <a:pPr>
+              <a:spcAft>
+                <a:spcPts val="400"/>
+              </a:spcAft>
+              <a:defRPr sz="1100">
+                <a:solidFill>
+                  <a:srgbClr val="1E293B"/>
+                </a:solidFill>
+              </a:defRPr>
+            </a:pPr>
+            <a:r>
+              <a:t>• Dedicated secure portal for external audit review teams.</a:t>
+            </a:r>
+          </a:p>
+          <a:p>
+            <a:pPr>
+              <a:spcAft>
+                <a:spcPts val="400"/>
+              </a:spcAft>
+              <a:defRPr sz="1100">
+                <a:solidFill>
+                  <a:srgbClr val="1E293B"/>
+                </a:solidFill>
+              </a:defRPr>
+            </a:pPr>
+            <a:r>
+              <a:t>• Continuous group-wide financial health telemetry.</a:t>
             </a:r>
           </a:p>
         </p:txBody>

--- a/Konsolidasi_Analyzer_Solution_Architecture.pptx
+++ b/Konsolidasi_Analyzer_Solution_Architecture.pptx
@@ -15,6 +15,7 @@
     <p:sldId id="263" r:id="rId14"/>
     <p:sldId id="264" r:id="rId15"/>
     <p:sldId id="265" r:id="rId16"/>
+    <p:sldId id="266" r:id="rId17"/>
   </p:sldIdLst>
   <p:sldSz cx="12191695" cy="6858000" type="screen4x3"/>
   <p:notesSz cx="6858000" cy="9144000"/>
@@ -3213,7 +3214,7 @@
               </a:defRPr>
             </a:pPr>
             <a:r>
-              <a:t>ENTERPRISE SOLUTION ARCHITECTURE &amp; STAKEHOLDER ALIGNMENT</a:t>
+              <a:t>ENTERPRISE SOLUTION ARCHITECTURE &amp; PRESENTATION OUTPUT</a:t>
             </a:r>
           </a:p>
           <a:p>
@@ -3258,7 +3259,7 @@
               </a:defRPr>
             </a:pPr>
             <a:r>
-              <a:t>An automated system for group financial consolidation review, mathematical anomaly detection (IFRS 10 / PSAK 65 NCI &amp; IAS 24 / PSAK 7 Related-Parties), and internal audit sign-off workflows.</a:t>
+              <a:t>Executive presentation deck showcasing the architectural blueprint, live tool outputs, quantitative anomaly flags, and auditor sign-off workflows for Holding Foundation &amp; 5 Subsidiaries.</a:t>
             </a:r>
           </a:p>
         </p:txBody>
@@ -3338,7 +3339,7 @@
               </a:defRPr>
             </a:pPr>
             <a:r>
-              <a:t>Target Structure: Holding Foundation (Induk) &amp; 5 Operating Subsidiaries (Subsidiaries I – V)</a:t>
+              <a:t>Entities: Holding Foundation (Induk) &amp; 5 Operating Subsidiaries (PT Anak I – V)</a:t>
             </a:r>
           </a:p>
           <a:p>
@@ -3353,7 +3354,7 @@
               </a:defRPr>
             </a:pPr>
             <a:r>
-              <a:t>Standards: IFRS 10 / PSAK 65 (NCI Attribution) &amp;bull; IAS 24 / PSAK 7 (Related-Party Transactions) &amp;bull; POJK Prudential Ratios</a:t>
+              <a:t>Standards: IFRS 10 / PSAK 65 (NCI Attribution) &amp;bull; IAS 24 / PSAK 7 (Related-Parties) &amp;bull; POJK Prudential Ratios</a:t>
             </a:r>
           </a:p>
         </p:txBody>
@@ -3492,6 +3493,750 @@
               </a:defRPr>
             </a:pPr>
             <a:r>
+              <a:t>DEPLOYMENT PLAN</a:t>
+            </a:r>
+          </a:p>
+        </p:txBody>
+      </p:sp>
+      <p:sp>
+        <p:nvSpPr>
+          <p:cNvPr id="5" name="TextBox 4"/>
+          <p:cNvSpPr txBox="1"/>
+          <p:nvPr/>
+        </p:nvSpPr>
+        <p:spPr>
+          <a:xfrm>
+            <a:off x="731520" y="777240"/>
+            <a:ext cx="10728655" cy="640080"/>
+          </a:xfrm>
+          <a:prstGeom prst="rect">
+            <a:avLst/>
+          </a:prstGeom>
+          <a:noFill/>
+        </p:spPr>
+        <p:txBody>
+          <a:bodyPr wrap="square">
+            <a:spAutoFit/>
+          </a:bodyPr>
+          <a:lstStyle/>
+          <a:p>
+            <a:pPr>
+              <a:defRPr sz="2200" b="1">
+                <a:solidFill>
+                  <a:srgbClr val="0F172A"/>
+                </a:solidFill>
+              </a:defRPr>
+            </a:pPr>
+            <a:r>
+              <a:t>Phased Enterprise Implementation Roadmap</a:t>
+            </a:r>
+          </a:p>
+        </p:txBody>
+      </p:sp>
+      <p:sp>
+        <p:nvSpPr>
+          <p:cNvPr id="6" name="Rounded Rectangle 5"/>
+          <p:cNvSpPr/>
+          <p:nvPr/>
+        </p:nvSpPr>
+        <p:spPr>
+          <a:xfrm>
+            <a:off x="731520" y="1600200"/>
+            <a:ext cx="3328416" cy="4389120"/>
+          </a:xfrm>
+          <a:prstGeom prst="roundRect">
+            <a:avLst/>
+          </a:prstGeom>
+          <a:solidFill>
+            <a:srgbClr val="F8FAFC"/>
+          </a:solidFill>
+          <a:ln w="12700">
+            <a:solidFill>
+              <a:srgbClr val="E2E8F0"/>
+            </a:solidFill>
+          </a:ln>
+        </p:spPr>
+        <p:style>
+          <a:lnRef idx="1">
+            <a:schemeClr val="accent1"/>
+          </a:lnRef>
+          <a:fillRef idx="3">
+            <a:schemeClr val="accent1"/>
+          </a:fillRef>
+          <a:effectRef idx="2">
+            <a:schemeClr val="accent1"/>
+          </a:effectRef>
+          <a:fontRef idx="minor">
+            <a:schemeClr val="lt1"/>
+          </a:fontRef>
+        </p:style>
+        <p:txBody>
+          <a:bodyPr rtlCol="0" anchor="ctr"/>
+          <a:lstStyle/>
+          <a:p>
+            <a:pPr algn="ctr"/>
+          </a:p>
+        </p:txBody>
+      </p:sp>
+      <p:sp>
+        <p:nvSpPr>
+          <p:cNvPr id="7" name="Rounded Rectangle 6"/>
+          <p:cNvSpPr/>
+          <p:nvPr/>
+        </p:nvSpPr>
+        <p:spPr>
+          <a:xfrm>
+            <a:off x="731520" y="1600200"/>
+            <a:ext cx="3328416" cy="73152"/>
+          </a:xfrm>
+          <a:prstGeom prst="roundRect">
+            <a:avLst/>
+          </a:prstGeom>
+          <a:solidFill>
+            <a:srgbClr val="0D9488"/>
+          </a:solidFill>
+          <a:ln>
+            <a:noFill/>
+          </a:ln>
+        </p:spPr>
+        <p:style>
+          <a:lnRef idx="1">
+            <a:schemeClr val="accent1"/>
+          </a:lnRef>
+          <a:fillRef idx="3">
+            <a:schemeClr val="accent1"/>
+          </a:fillRef>
+          <a:effectRef idx="2">
+            <a:schemeClr val="accent1"/>
+          </a:effectRef>
+          <a:fontRef idx="minor">
+            <a:schemeClr val="lt1"/>
+          </a:fontRef>
+        </p:style>
+        <p:txBody>
+          <a:bodyPr rtlCol="0" anchor="ctr"/>
+          <a:lstStyle/>
+          <a:p>
+            <a:pPr algn="ctr"/>
+          </a:p>
+        </p:txBody>
+      </p:sp>
+      <p:sp>
+        <p:nvSpPr>
+          <p:cNvPr id="8" name="TextBox 7"/>
+          <p:cNvSpPr txBox="1"/>
+          <p:nvPr/>
+        </p:nvSpPr>
+        <p:spPr>
+          <a:xfrm>
+            <a:off x="950976" y="1819656"/>
+            <a:ext cx="2889504" cy="3950208"/>
+          </a:xfrm>
+          <a:prstGeom prst="rect">
+            <a:avLst/>
+          </a:prstGeom>
+          <a:noFill/>
+        </p:spPr>
+        <p:txBody>
+          <a:bodyPr wrap="square">
+            <a:spAutoFit/>
+          </a:bodyPr>
+          <a:lstStyle/>
+          <a:p>
+            <a:pPr>
+              <a:spcAft>
+                <a:spcPts val="800"/>
+              </a:spcAft>
+              <a:defRPr sz="1350" b="1">
+                <a:solidFill>
+                  <a:srgbClr val="0D9488"/>
+                </a:solidFill>
+              </a:defRPr>
+            </a:pPr>
+            <a:r>
+              <a:t>Phase 1: Working PoC (Delivered)</a:t>
+            </a:r>
+            <a:br/>
+            <a:r>
+              <a:t>(Month 1)</a:t>
+            </a:r>
+          </a:p>
+          <a:p>
+            <a:pPr>
+              <a:spcAft>
+                <a:spcPts val="400"/>
+              </a:spcAft>
+              <a:defRPr sz="1100">
+                <a:solidFill>
+                  <a:srgbClr val="1E293B"/>
+                </a:solidFill>
+              </a:defRPr>
+            </a:pPr>
+            <a:r>
+              <a:t>• Consolidation rule engine validated for 6 entities.</a:t>
+            </a:r>
+          </a:p>
+          <a:p>
+            <a:pPr>
+              <a:spcAft>
+                <a:spcPts val="400"/>
+              </a:spcAft>
+              <a:defRPr sz="1100">
+                <a:solidFill>
+                  <a:srgbClr val="1E293B"/>
+                </a:solidFill>
+              </a:defRPr>
+            </a:pPr>
+            <a:r>
+              <a:t>• Conversational AI Copilot with quick-action chips.</a:t>
+            </a:r>
+          </a:p>
+          <a:p>
+            <a:pPr>
+              <a:spcAft>
+                <a:spcPts val="400"/>
+              </a:spcAft>
+              <a:defRPr sz="1100">
+                <a:solidFill>
+                  <a:srgbClr val="1E293B"/>
+                </a:solidFill>
+              </a:defRPr>
+            </a:pPr>
+            <a:r>
+              <a:t>• Actionable 'Review Workspace' for anomaly tracking.</a:t>
+            </a:r>
+          </a:p>
+          <a:p>
+            <a:pPr>
+              <a:spcAft>
+                <a:spcPts val="400"/>
+              </a:spcAft>
+              <a:defRPr sz="1100">
+                <a:solidFill>
+                  <a:srgbClr val="1E293B"/>
+                </a:solidFill>
+              </a:defRPr>
+            </a:pPr>
+            <a:r>
+              <a:t>• Self-contained local execution &amp; GitHub repository.</a:t>
+            </a:r>
+          </a:p>
+        </p:txBody>
+      </p:sp>
+      <p:sp>
+        <p:nvSpPr>
+          <p:cNvPr id="9" name="Rounded Rectangle 8"/>
+          <p:cNvSpPr/>
+          <p:nvPr/>
+        </p:nvSpPr>
+        <p:spPr>
+          <a:xfrm>
+            <a:off x="4416552" y="1600200"/>
+            <a:ext cx="3328416" cy="4389120"/>
+          </a:xfrm>
+          <a:prstGeom prst="roundRect">
+            <a:avLst/>
+          </a:prstGeom>
+          <a:solidFill>
+            <a:srgbClr val="F8FAFC"/>
+          </a:solidFill>
+          <a:ln w="12700">
+            <a:solidFill>
+              <a:srgbClr val="E2E8F0"/>
+            </a:solidFill>
+          </a:ln>
+        </p:spPr>
+        <p:style>
+          <a:lnRef idx="1">
+            <a:schemeClr val="accent1"/>
+          </a:lnRef>
+          <a:fillRef idx="3">
+            <a:schemeClr val="accent1"/>
+          </a:fillRef>
+          <a:effectRef idx="2">
+            <a:schemeClr val="accent1"/>
+          </a:effectRef>
+          <a:fontRef idx="minor">
+            <a:schemeClr val="lt1"/>
+          </a:fontRef>
+        </p:style>
+        <p:txBody>
+          <a:bodyPr rtlCol="0" anchor="ctr"/>
+          <a:lstStyle/>
+          <a:p>
+            <a:pPr algn="ctr"/>
+          </a:p>
+        </p:txBody>
+      </p:sp>
+      <p:sp>
+        <p:nvSpPr>
+          <p:cNvPr id="10" name="Rounded Rectangle 9"/>
+          <p:cNvSpPr/>
+          <p:nvPr/>
+        </p:nvSpPr>
+        <p:spPr>
+          <a:xfrm>
+            <a:off x="4416552" y="1600200"/>
+            <a:ext cx="3328416" cy="73152"/>
+          </a:xfrm>
+          <a:prstGeom prst="roundRect">
+            <a:avLst/>
+          </a:prstGeom>
+          <a:solidFill>
+            <a:srgbClr val="B48214"/>
+          </a:solidFill>
+          <a:ln>
+            <a:noFill/>
+          </a:ln>
+        </p:spPr>
+        <p:style>
+          <a:lnRef idx="1">
+            <a:schemeClr val="accent1"/>
+          </a:lnRef>
+          <a:fillRef idx="3">
+            <a:schemeClr val="accent1"/>
+          </a:fillRef>
+          <a:effectRef idx="2">
+            <a:schemeClr val="accent1"/>
+          </a:effectRef>
+          <a:fontRef idx="minor">
+            <a:schemeClr val="lt1"/>
+          </a:fontRef>
+        </p:style>
+        <p:txBody>
+          <a:bodyPr rtlCol="0" anchor="ctr"/>
+          <a:lstStyle/>
+          <a:p>
+            <a:pPr algn="ctr"/>
+          </a:p>
+        </p:txBody>
+      </p:sp>
+      <p:sp>
+        <p:nvSpPr>
+          <p:cNvPr id="11" name="TextBox 10"/>
+          <p:cNvSpPr txBox="1"/>
+          <p:nvPr/>
+        </p:nvSpPr>
+        <p:spPr>
+          <a:xfrm>
+            <a:off x="4636008" y="1819656"/>
+            <a:ext cx="2889504" cy="3950208"/>
+          </a:xfrm>
+          <a:prstGeom prst="rect">
+            <a:avLst/>
+          </a:prstGeom>
+          <a:noFill/>
+        </p:spPr>
+        <p:txBody>
+          <a:bodyPr wrap="square">
+            <a:spAutoFit/>
+          </a:bodyPr>
+          <a:lstStyle/>
+          <a:p>
+            <a:pPr>
+              <a:spcAft>
+                <a:spcPts val="800"/>
+              </a:spcAft>
+              <a:defRPr sz="1350" b="1">
+                <a:solidFill>
+                  <a:srgbClr val="B48214"/>
+                </a:solidFill>
+              </a:defRPr>
+            </a:pPr>
+            <a:r>
+              <a:t>Phase 2: Integration &amp; Pilot</a:t>
+            </a:r>
+            <a:br/>
+            <a:r>
+              <a:t>(Months 2 - 3)</a:t>
+            </a:r>
+          </a:p>
+          <a:p>
+            <a:pPr>
+              <a:spcAft>
+                <a:spcPts val="400"/>
+              </a:spcAft>
+              <a:defRPr sz="1100">
+                <a:solidFill>
+                  <a:srgbClr val="1E293B"/>
+                </a:solidFill>
+              </a:defRPr>
+            </a:pPr>
+            <a:r>
+              <a:t>• Direct ERP/GL database connectors (SAP/Oracle).</a:t>
+            </a:r>
+          </a:p>
+          <a:p>
+            <a:pPr>
+              <a:spcAft>
+                <a:spcPts val="400"/>
+              </a:spcAft>
+              <a:defRPr sz="1100">
+                <a:solidFill>
+                  <a:srgbClr val="1E293B"/>
+                </a:solidFill>
+              </a:defRPr>
+            </a:pPr>
+            <a:r>
+              <a:t>• Immutable point-in-time snapshot database store.</a:t>
+            </a:r>
+          </a:p>
+          <a:p>
+            <a:pPr>
+              <a:spcAft>
+                <a:spcPts val="400"/>
+              </a:spcAft>
+              <a:defRPr sz="1100">
+                <a:solidFill>
+                  <a:srgbClr val="1E293B"/>
+                </a:solidFill>
+              </a:defRPr>
+            </a:pPr>
+            <a:r>
+              <a:t>• Automated email/chat notification dispatch to subsidiaries.</a:t>
+            </a:r>
+          </a:p>
+          <a:p>
+            <a:pPr>
+              <a:spcAft>
+                <a:spcPts val="400"/>
+              </a:spcAft>
+              <a:defRPr sz="1100">
+                <a:solidFill>
+                  <a:srgbClr val="1E293B"/>
+                </a:solidFill>
+              </a:defRPr>
+            </a:pPr>
+            <a:r>
+              <a:t>• Parallel dry-run benchmarked against prior-year audited data.</a:t>
+            </a:r>
+          </a:p>
+        </p:txBody>
+      </p:sp>
+      <p:sp>
+        <p:nvSpPr>
+          <p:cNvPr id="12" name="Rounded Rectangle 11"/>
+          <p:cNvSpPr/>
+          <p:nvPr/>
+        </p:nvSpPr>
+        <p:spPr>
+          <a:xfrm>
+            <a:off x="8101584" y="1600200"/>
+            <a:ext cx="3328416" cy="4389120"/>
+          </a:xfrm>
+          <a:prstGeom prst="roundRect">
+            <a:avLst/>
+          </a:prstGeom>
+          <a:solidFill>
+            <a:srgbClr val="F8FAFC"/>
+          </a:solidFill>
+          <a:ln w="12700">
+            <a:solidFill>
+              <a:srgbClr val="E2E8F0"/>
+            </a:solidFill>
+          </a:ln>
+        </p:spPr>
+        <p:style>
+          <a:lnRef idx="1">
+            <a:schemeClr val="accent1"/>
+          </a:lnRef>
+          <a:fillRef idx="3">
+            <a:schemeClr val="accent1"/>
+          </a:fillRef>
+          <a:effectRef idx="2">
+            <a:schemeClr val="accent1"/>
+          </a:effectRef>
+          <a:fontRef idx="minor">
+            <a:schemeClr val="lt1"/>
+          </a:fontRef>
+        </p:style>
+        <p:txBody>
+          <a:bodyPr rtlCol="0" anchor="ctr"/>
+          <a:lstStyle/>
+          <a:p>
+            <a:pPr algn="ctr"/>
+          </a:p>
+        </p:txBody>
+      </p:sp>
+      <p:sp>
+        <p:nvSpPr>
+          <p:cNvPr id="13" name="Rounded Rectangle 12"/>
+          <p:cNvSpPr/>
+          <p:nvPr/>
+        </p:nvSpPr>
+        <p:spPr>
+          <a:xfrm>
+            <a:off x="8101584" y="1600200"/>
+            <a:ext cx="3328416" cy="73152"/>
+          </a:xfrm>
+          <a:prstGeom prst="roundRect">
+            <a:avLst/>
+          </a:prstGeom>
+          <a:solidFill>
+            <a:srgbClr val="1B4332"/>
+          </a:solidFill>
+          <a:ln>
+            <a:noFill/>
+          </a:ln>
+        </p:spPr>
+        <p:style>
+          <a:lnRef idx="1">
+            <a:schemeClr val="accent1"/>
+          </a:lnRef>
+          <a:fillRef idx="3">
+            <a:schemeClr val="accent1"/>
+          </a:fillRef>
+          <a:effectRef idx="2">
+            <a:schemeClr val="accent1"/>
+          </a:effectRef>
+          <a:fontRef idx="minor">
+            <a:schemeClr val="lt1"/>
+          </a:fontRef>
+        </p:style>
+        <p:txBody>
+          <a:bodyPr rtlCol="0" anchor="ctr"/>
+          <a:lstStyle/>
+          <a:p>
+            <a:pPr algn="ctr"/>
+          </a:p>
+        </p:txBody>
+      </p:sp>
+      <p:sp>
+        <p:nvSpPr>
+          <p:cNvPr id="14" name="TextBox 13"/>
+          <p:cNvSpPr txBox="1"/>
+          <p:nvPr/>
+        </p:nvSpPr>
+        <p:spPr>
+          <a:xfrm>
+            <a:off x="8321040" y="1819656"/>
+            <a:ext cx="2889504" cy="3950208"/>
+          </a:xfrm>
+          <a:prstGeom prst="rect">
+            <a:avLst/>
+          </a:prstGeom>
+          <a:noFill/>
+        </p:spPr>
+        <p:txBody>
+          <a:bodyPr wrap="square">
+            <a:spAutoFit/>
+          </a:bodyPr>
+          <a:lstStyle/>
+          <a:p>
+            <a:pPr>
+              <a:spcAft>
+                <a:spcPts val="800"/>
+              </a:spcAft>
+              <a:defRPr sz="1350" b="1">
+                <a:solidFill>
+                  <a:srgbClr val="1B4332"/>
+                </a:solidFill>
+              </a:defRPr>
+            </a:pPr>
+            <a:r>
+              <a:t>Phase 3: Full Enterprise Rollout</a:t>
+            </a:r>
+            <a:br/>
+            <a:r>
+              <a:t>(Month 4+)</a:t>
+            </a:r>
+          </a:p>
+          <a:p>
+            <a:pPr>
+              <a:spcAft>
+                <a:spcPts val="400"/>
+              </a:spcAft>
+              <a:defRPr sz="1100">
+                <a:solidFill>
+                  <a:srgbClr val="1E293B"/>
+                </a:solidFill>
+              </a:defRPr>
+            </a:pPr>
+            <a:r>
+              <a:t>• Multi-tenant Role-Based Access Control (RBAC) &amp; SSO.</a:t>
+            </a:r>
+          </a:p>
+          <a:p>
+            <a:pPr>
+              <a:spcAft>
+                <a:spcPts val="400"/>
+              </a:spcAft>
+              <a:defRPr sz="1100">
+                <a:solidFill>
+                  <a:srgbClr val="1E293B"/>
+                </a:solidFill>
+              </a:defRPr>
+            </a:pPr>
+            <a:r>
+              <a:t>• Transaction-level automated intercompany elimination.</a:t>
+            </a:r>
+          </a:p>
+          <a:p>
+            <a:pPr>
+              <a:spcAft>
+                <a:spcPts val="400"/>
+              </a:spcAft>
+              <a:defRPr sz="1100">
+                <a:solidFill>
+                  <a:srgbClr val="1E293B"/>
+                </a:solidFill>
+              </a:defRPr>
+            </a:pPr>
+            <a:r>
+              <a:t>• Dedicated secure portal for external audit review teams.</a:t>
+            </a:r>
+          </a:p>
+          <a:p>
+            <a:pPr>
+              <a:spcAft>
+                <a:spcPts val="400"/>
+              </a:spcAft>
+              <a:defRPr sz="1100">
+                <a:solidFill>
+                  <a:srgbClr val="1E293B"/>
+                </a:solidFill>
+              </a:defRPr>
+            </a:pPr>
+            <a:r>
+              <a:t>• Continuous group-wide financial health telemetry.</a:t>
+            </a:r>
+          </a:p>
+        </p:txBody>
+      </p:sp>
+    </p:spTree>
+  </p:cSld>
+  <p:clrMapOvr>
+    <a:masterClrMapping/>
+  </p:clrMapOvr>
+</p:sld>
+</file>
+
+<file path=ppt/slides/slide11.xml><?xml version="1.0" encoding="utf-8"?>
+<p:sld xmlns:a="http://schemas.openxmlformats.org/drawingml/2006/main" xmlns:p="http://schemas.openxmlformats.org/presentationml/2006/main" xmlns:r="http://schemas.openxmlformats.org/officeDocument/2006/relationships">
+  <p:cSld>
+    <p:spTree>
+      <p:nvGrpSpPr>
+        <p:cNvPr id="1" name=""/>
+        <p:cNvGrpSpPr/>
+        <p:nvPr/>
+      </p:nvGrpSpPr>
+      <p:grpSpPr/>
+      <p:sp>
+        <p:nvSpPr>
+          <p:cNvPr id="2" name="Rectangle 1"/>
+          <p:cNvSpPr/>
+          <p:nvPr/>
+        </p:nvSpPr>
+        <p:spPr>
+          <a:xfrm>
+            <a:off x="0" y="0"/>
+            <a:ext cx="12191695" cy="6858000"/>
+          </a:xfrm>
+          <a:prstGeom prst="rect">
+            <a:avLst/>
+          </a:prstGeom>
+          <a:solidFill>
+            <a:srgbClr val="FFFFFF"/>
+          </a:solidFill>
+          <a:ln>
+            <a:noFill/>
+          </a:ln>
+        </p:spPr>
+        <p:style>
+          <a:lnRef idx="1">
+            <a:schemeClr val="accent1"/>
+          </a:lnRef>
+          <a:fillRef idx="3">
+            <a:schemeClr val="accent1"/>
+          </a:fillRef>
+          <a:effectRef idx="2">
+            <a:schemeClr val="accent1"/>
+          </a:effectRef>
+          <a:fontRef idx="minor">
+            <a:schemeClr val="lt1"/>
+          </a:fontRef>
+        </p:style>
+        <p:txBody>
+          <a:bodyPr rtlCol="0" anchor="ctr"/>
+          <a:lstStyle/>
+          <a:p>
+            <a:pPr algn="ctr"/>
+          </a:p>
+        </p:txBody>
+      </p:sp>
+      <p:sp>
+        <p:nvSpPr>
+          <p:cNvPr id="3" name="Rectangle 2"/>
+          <p:cNvSpPr/>
+          <p:nvPr/>
+        </p:nvSpPr>
+        <p:spPr>
+          <a:xfrm>
+            <a:off x="731520" y="365760"/>
+            <a:ext cx="10728655" cy="36576"/>
+          </a:xfrm>
+          <a:prstGeom prst="rect">
+            <a:avLst/>
+          </a:prstGeom>
+          <a:solidFill>
+            <a:srgbClr val="1B4332"/>
+          </a:solidFill>
+          <a:ln>
+            <a:noFill/>
+          </a:ln>
+        </p:spPr>
+        <p:style>
+          <a:lnRef idx="1">
+            <a:schemeClr val="accent1"/>
+          </a:lnRef>
+          <a:fillRef idx="3">
+            <a:schemeClr val="accent1"/>
+          </a:fillRef>
+          <a:effectRef idx="2">
+            <a:schemeClr val="accent1"/>
+          </a:effectRef>
+          <a:fontRef idx="minor">
+            <a:schemeClr val="lt1"/>
+          </a:fontRef>
+        </p:style>
+        <p:txBody>
+          <a:bodyPr rtlCol="0" anchor="ctr"/>
+          <a:lstStyle/>
+          <a:p>
+            <a:pPr algn="ctr"/>
+          </a:p>
+        </p:txBody>
+      </p:sp>
+      <p:sp>
+        <p:nvSpPr>
+          <p:cNvPr id="4" name="TextBox 3"/>
+          <p:cNvSpPr txBox="1"/>
+          <p:nvPr/>
+        </p:nvSpPr>
+        <p:spPr>
+          <a:xfrm>
+            <a:off x="731520" y="502920"/>
+            <a:ext cx="9144000" cy="320040"/>
+          </a:xfrm>
+          <a:prstGeom prst="rect">
+            <a:avLst/>
+          </a:prstGeom>
+          <a:noFill/>
+        </p:spPr>
+        <p:txBody>
+          <a:bodyPr wrap="square">
+            <a:spAutoFit/>
+          </a:bodyPr>
+          <a:lstStyle/>
+          <a:p>
+            <a:pPr>
+              <a:defRPr sz="1000" b="1">
+                <a:solidFill>
+                  <a:srgbClr val="B48214"/>
+                </a:solidFill>
+              </a:defRPr>
+            </a:pPr>
+            <a:r>
               <a:t>STRATEGIC IMPACT</a:t>
             </a:r>
           </a:p>
@@ -4340,7 +5085,7 @@
               </a:defRPr>
             </a:pPr>
             <a:r>
-              <a:t>• Case in Point: Subsidiary II reported NCI profit share of $24.4M vs. statutory share of $18.2M (+34.1% gap).</a:t>
+              <a:t>• Case in Point: Subsidiary II reported NCI profit share of $24.4M vs statutory share of $18.2M (+34.1% gap).</a:t>
             </a:r>
           </a:p>
           <a:p>
@@ -4526,7 +5271,7 @@
               </a:defRPr>
             </a:pPr>
             <a:r>
-              <a:t>• Case in Point: Subsidiary II related-party receivables spiked +158.8% YoY while revenues grew just +4.9%.</a:t>
+              <a:t>• Case in Point: Subsidiary II related-party receivables spiked +158.8% YoY while revenue grew just +4.9%.</a:t>
             </a:r>
           </a:p>
           <a:p>
@@ -4556,7 +5301,7 @@
               </a:defRPr>
             </a:pPr>
             <a:r>
-              <a:t>• Increases intercompany elimination friction and triggers uncollectible debt exposure.</a:t>
+              <a:t>• Increases intercompany elimination friction and uncollectible debt exposure.</a:t>
             </a:r>
           </a:p>
         </p:txBody>
@@ -5087,7 +5832,7 @@
               </a:defRPr>
             </a:pPr>
             <a:r>
-              <a:t>• Statutory NCI Attribution: Precise IFRS 10 formulas calculate parent earnings vs. minority equity claims.</a:t>
+              <a:t>• Statutory NCI Attribution: Precise IFRS 10 formulas calculate parent earnings vs minority equity claims.</a:t>
             </a:r>
           </a:p>
           <a:p>
@@ -6486,7 +7231,7 @@
               </a:defRPr>
             </a:pPr>
             <a:r>
-              <a:t>QUANTITATIVE RULES</a:t>
+              <a:t>LIVE FINANCIAL METRICS</a:t>
             </a:r>
           </a:p>
         </p:txBody>
@@ -6521,7 +7266,7 @@
               </a:defRPr>
             </a:pPr>
             <a:r>
-              <a:t>Forensic Anomaly Detection Engine: Vectors &amp; Thresholds</a:t>
+              <a:t>Tool Output: Consolidated Financial KPI Dashboard</a:t>
             </a:r>
           </a:p>
         </p:txBody>
@@ -6535,7 +7280,7 @@
         <p:spPr>
           <a:xfrm>
             <a:off x="731520" y="1600200"/>
-            <a:ext cx="10728655" cy="1005840"/>
+            <a:ext cx="3328416" cy="1325880"/>
           </a:xfrm>
           <a:prstGeom prst="roundRect">
             <a:avLst/>
@@ -6580,13 +7325,13 @@
         <p:spPr>
           <a:xfrm>
             <a:off x="731520" y="1600200"/>
-            <a:ext cx="73152" cy="1005840"/>
+            <a:ext cx="73152" cy="1325880"/>
           </a:xfrm>
           <a:prstGeom prst="rect">
             <a:avLst/>
           </a:prstGeom>
           <a:solidFill>
-            <a:srgbClr val="E11D48"/>
+            <a:srgbClr val="1B4332"/>
           </a:solidFill>
           <a:ln>
             <a:noFill/>
@@ -6622,8 +7367,8 @@
         </p:nvSpPr>
         <p:spPr>
           <a:xfrm>
-            <a:off x="960120" y="1709928"/>
-            <a:ext cx="10332720" cy="786384"/>
+            <a:off x="896112" y="1691640"/>
+            <a:ext cx="3054096" cy="1143000"/>
           </a:xfrm>
           <a:prstGeom prst="rect">
             <a:avLst/>
@@ -6637,29 +7382,44 @@
           <a:lstStyle/>
           <a:p>
             <a:pPr>
-              <a:defRPr sz="1350" b="1">
-                <a:solidFill>
-                  <a:srgbClr val="E11D48"/>
-                </a:solidFill>
-              </a:defRPr>
-            </a:pPr>
-            <a:r>
-              <a:t>1. NCI Profit Allocation Disparity  [CRITICAL]</a:t>
+              <a:defRPr sz="1000" b="1">
+                <a:solidFill>
+                  <a:srgbClr val="64748B"/>
+                </a:solidFill>
+              </a:defRPr>
+            </a:pPr>
+            <a:r>
+              <a:t>CONSOLIDATED REVENUE</a:t>
             </a:r>
           </a:p>
           <a:p>
             <a:pPr>
               <a:spcBef>
-                <a:spcPts val="300"/>
+                <a:spcPts val="200"/>
               </a:spcBef>
-              <a:defRPr sz="1100">
-                <a:solidFill>
-                  <a:srgbClr val="1E293B"/>
-                </a:solidFill>
-              </a:defRPr>
-            </a:pPr>
-            <a:r>
-              <a:t>Formula: |Reported NCI - Computed NCI| &gt; 8%   •   Audit Objective: Prevents parent income distortion and safeguards minority shareholder dividend equity under IFRS 10 / PSAK 65.</a:t>
+              <a:defRPr sz="1800" b="1">
+                <a:solidFill>
+                  <a:srgbClr val="0F172A"/>
+                </a:solidFill>
+              </a:defRPr>
+            </a:pPr>
+            <a:r>
+              <a:t>$3,885.0 M</a:t>
+            </a:r>
+          </a:p>
+          <a:p>
+            <a:pPr>
+              <a:spcBef>
+                <a:spcPts val="200"/>
+              </a:spcBef>
+              <a:defRPr sz="1000">
+                <a:solidFill>
+                  <a:srgbClr val="1B4332"/>
+                </a:solidFill>
+              </a:defRPr>
+            </a:pPr>
+            <a:r>
+              <a:t>PY: $3,635.0 M (+6.9% YoY)</a:t>
             </a:r>
           </a:p>
         </p:txBody>
@@ -6672,8 +7432,8 @@
         </p:nvSpPr>
         <p:spPr>
           <a:xfrm>
-            <a:off x="731520" y="2743200"/>
-            <a:ext cx="10728655" cy="1005840"/>
+            <a:off x="4416552" y="1600200"/>
+            <a:ext cx="3328416" cy="1325880"/>
           </a:xfrm>
           <a:prstGeom prst="roundRect">
             <a:avLst/>
@@ -6717,14 +7477,14 @@
         </p:nvSpPr>
         <p:spPr>
           <a:xfrm>
-            <a:off x="731520" y="2743200"/>
-            <a:ext cx="73152" cy="1005840"/>
+            <a:off x="4416552" y="1600200"/>
+            <a:ext cx="73152" cy="1325880"/>
           </a:xfrm>
           <a:prstGeom prst="rect">
             <a:avLst/>
           </a:prstGeom>
           <a:solidFill>
-            <a:srgbClr val="E11D48"/>
+            <a:srgbClr val="1B4332"/>
           </a:solidFill>
           <a:ln>
             <a:noFill/>
@@ -6760,8 +7520,8 @@
         </p:nvSpPr>
         <p:spPr>
           <a:xfrm>
-            <a:off x="960120" y="2852928"/>
-            <a:ext cx="10332720" cy="786384"/>
+            <a:off x="4581144" y="1691640"/>
+            <a:ext cx="3054096" cy="1143000"/>
           </a:xfrm>
           <a:prstGeom prst="rect">
             <a:avLst/>
@@ -6775,29 +7535,44 @@
           <a:lstStyle/>
           <a:p>
             <a:pPr>
-              <a:defRPr sz="1350" b="1">
-                <a:solidFill>
-                  <a:srgbClr val="E11D48"/>
-                </a:solidFill>
-              </a:defRPr>
-            </a:pPr>
-            <a:r>
-              <a:t>2. Related-Party Debt Acceleration  [CRITICAL]</a:t>
+              <a:defRPr sz="1000" b="1">
+                <a:solidFill>
+                  <a:srgbClr val="64748B"/>
+                </a:solidFill>
+              </a:defRPr>
+            </a:pPr>
+            <a:r>
+              <a:t>CONSOLIDATED NET INCOME</a:t>
             </a:r>
           </a:p>
           <a:p>
             <a:pPr>
               <a:spcBef>
-                <a:spcPts val="300"/>
+                <a:spcPts val="200"/>
               </a:spcBef>
-              <a:defRPr sz="1100">
-                <a:solidFill>
-                  <a:srgbClr val="1E293B"/>
-                </a:solidFill>
-              </a:defRPr>
-            </a:pPr>
-            <a:r>
-              <a:t>Formula: ΔRP Receivables - ΔRevenue &gt; 30%   •   Audit Objective: Detects liquidity outflows into affiliated entities and halts hidden internal non-performing debt under IAS 24 / PSAK 7.</a:t>
+              <a:defRPr sz="1800" b="1">
+                <a:solidFill>
+                  <a:srgbClr val="0F172A"/>
+                </a:solidFill>
+              </a:defRPr>
+            </a:pPr>
+            <a:r>
+              <a:t>$325.0 M</a:t>
+            </a:r>
+          </a:p>
+          <a:p>
+            <a:pPr>
+              <a:spcBef>
+                <a:spcPts val="200"/>
+              </a:spcBef>
+              <a:defRPr sz="1000">
+                <a:solidFill>
+                  <a:srgbClr val="1B4332"/>
+                </a:solidFill>
+              </a:defRPr>
+            </a:pPr>
+            <a:r>
+              <a:t>PY: $284.7 M (+14.2% YoY)</a:t>
             </a:r>
           </a:p>
         </p:txBody>
@@ -6810,8 +7585,8 @@
         </p:nvSpPr>
         <p:spPr>
           <a:xfrm>
-            <a:off x="731520" y="3886200"/>
-            <a:ext cx="10728655" cy="1005840"/>
+            <a:off x="8101584" y="1600200"/>
+            <a:ext cx="3328416" cy="1325880"/>
           </a:xfrm>
           <a:prstGeom prst="roundRect">
             <a:avLst/>
@@ -6855,14 +7630,14 @@
         </p:nvSpPr>
         <p:spPr>
           <a:xfrm>
-            <a:off x="731520" y="3886200"/>
-            <a:ext cx="73152" cy="1005840"/>
+            <a:off x="8101584" y="1600200"/>
+            <a:ext cx="73152" cy="1325880"/>
           </a:xfrm>
           <a:prstGeom prst="rect">
             <a:avLst/>
           </a:prstGeom>
           <a:solidFill>
-            <a:srgbClr val="D97706"/>
+            <a:srgbClr val="B48214"/>
           </a:solidFill>
           <a:ln>
             <a:noFill/>
@@ -6898,8 +7673,8 @@
         </p:nvSpPr>
         <p:spPr>
           <a:xfrm>
-            <a:off x="960120" y="3995928"/>
-            <a:ext cx="10332720" cy="786384"/>
+            <a:off x="8266176" y="1691640"/>
+            <a:ext cx="3054096" cy="1143000"/>
           </a:xfrm>
           <a:prstGeom prst="rect">
             <a:avLst/>
@@ -6913,29 +7688,44 @@
           <a:lstStyle/>
           <a:p>
             <a:pPr>
-              <a:defRPr sz="1350" b="1">
-                <a:solidFill>
-                  <a:srgbClr val="D97706"/>
-                </a:solidFill>
-              </a:defRPr>
-            </a:pPr>
-            <a:r>
-              <a:t>3. Sudden Leverage / DER Escalation  [MEDIUM]</a:t>
+              <a:defRPr sz="1000" b="1">
+                <a:solidFill>
+                  <a:srgbClr val="64748B"/>
+                </a:solidFill>
+              </a:defRPr>
+            </a:pPr>
+            <a:r>
+              <a:t>PARENT ATTRIBUTABLE INCOME</a:t>
             </a:r>
           </a:p>
           <a:p>
             <a:pPr>
               <a:spcBef>
-                <a:spcPts val="300"/>
+                <a:spcPts val="200"/>
               </a:spcBef>
-              <a:defRPr sz="1100">
-                <a:solidFill>
-                  <a:srgbClr val="1E293B"/>
-                </a:solidFill>
-              </a:defRPr>
-            </a:pPr>
-            <a:r>
-              <a:t>Formula: DER CY / DER PY - 1 &gt; 18%   •   Audit Objective: Monitors subsidiary debt growth before debt-to-equity ratios breach bank debt covenants or regulatory limits.</a:t>
+              <a:defRPr sz="1800" b="1">
+                <a:solidFill>
+                  <a:srgbClr val="0F172A"/>
+                </a:solidFill>
+              </a:defRPr>
+            </a:pPr>
+            <a:r>
+              <a:t>$279.7 M</a:t>
+            </a:r>
+          </a:p>
+          <a:p>
+            <a:pPr>
+              <a:spcBef>
+                <a:spcPts val="200"/>
+              </a:spcBef>
+              <a:defRPr sz="1000">
+                <a:solidFill>
+                  <a:srgbClr val="B48214"/>
+                </a:solidFill>
+              </a:defRPr>
+            </a:pPr>
+            <a:r>
+              <a:t>86.1% share of net profits</a:t>
             </a:r>
           </a:p>
         </p:txBody>
@@ -6948,8 +7738,8 @@
         </p:nvSpPr>
         <p:spPr>
           <a:xfrm>
-            <a:off x="731520" y="5029200"/>
-            <a:ext cx="10728655" cy="1005840"/>
+            <a:off x="731520" y="3063240"/>
+            <a:ext cx="3328416" cy="1325880"/>
           </a:xfrm>
           <a:prstGeom prst="roundRect">
             <a:avLst/>
@@ -6993,14 +7783,14 @@
         </p:nvSpPr>
         <p:spPr>
           <a:xfrm>
-            <a:off x="731520" y="5029200"/>
-            <a:ext cx="73152" cy="1005840"/>
+            <a:off x="731520" y="3063240"/>
+            <a:ext cx="73152" cy="1325880"/>
           </a:xfrm>
           <a:prstGeom prst="rect">
             <a:avLst/>
           </a:prstGeom>
           <a:solidFill>
-            <a:srgbClr val="0D9488"/>
+            <a:srgbClr val="D97706"/>
           </a:solidFill>
           <a:ln>
             <a:noFill/>
@@ -7036,8 +7826,8 @@
         </p:nvSpPr>
         <p:spPr>
           <a:xfrm>
-            <a:off x="960120" y="5138928"/>
-            <a:ext cx="10332720" cy="786384"/>
+            <a:off x="896112" y="3154680"/>
+            <a:ext cx="3054096" cy="1143000"/>
           </a:xfrm>
           <a:prstGeom prst="rect">
             <a:avLst/>
@@ -7051,20 +7841,436 @@
           <a:lstStyle/>
           <a:p>
             <a:pPr>
-              <a:defRPr sz="1350" b="1">
+              <a:defRPr sz="1000" b="1">
+                <a:solidFill>
+                  <a:srgbClr val="64748B"/>
+                </a:solidFill>
+              </a:defRPr>
+            </a:pPr>
+            <a:r>
+              <a:t>NCI MINORITY PROFIT SHARE</a:t>
+            </a:r>
+          </a:p>
+          <a:p>
+            <a:pPr>
+              <a:spcBef>
+                <a:spcPts val="200"/>
+              </a:spcBef>
+              <a:defRPr sz="1800" b="1">
+                <a:solidFill>
+                  <a:srgbClr val="0F172A"/>
+                </a:solidFill>
+              </a:defRPr>
+            </a:pPr>
+            <a:r>
+              <a:t>$45.3 M</a:t>
+            </a:r>
+          </a:p>
+          <a:p>
+            <a:pPr>
+              <a:spcBef>
+                <a:spcPts val="200"/>
+              </a:spcBef>
+              <a:defRPr sz="1000">
+                <a:solidFill>
+                  <a:srgbClr val="D97706"/>
+                </a:solidFill>
+              </a:defRPr>
+            </a:pPr>
+            <a:r>
+              <a:t>13.9% across 4 subsidiaries</a:t>
+            </a:r>
+          </a:p>
+        </p:txBody>
+      </p:sp>
+      <p:sp>
+        <p:nvSpPr>
+          <p:cNvPr id="18" name="Rounded Rectangle 17"/>
+          <p:cNvSpPr/>
+          <p:nvPr/>
+        </p:nvSpPr>
+        <p:spPr>
+          <a:xfrm>
+            <a:off x="4416552" y="3063240"/>
+            <a:ext cx="3328416" cy="1325880"/>
+          </a:xfrm>
+          <a:prstGeom prst="roundRect">
+            <a:avLst/>
+          </a:prstGeom>
+          <a:solidFill>
+            <a:srgbClr val="F8FAFC"/>
+          </a:solidFill>
+          <a:ln>
+            <a:solidFill>
+              <a:srgbClr val="E2E8F0"/>
+            </a:solidFill>
+          </a:ln>
+        </p:spPr>
+        <p:style>
+          <a:lnRef idx="1">
+            <a:schemeClr val="accent1"/>
+          </a:lnRef>
+          <a:fillRef idx="3">
+            <a:schemeClr val="accent1"/>
+          </a:fillRef>
+          <a:effectRef idx="2">
+            <a:schemeClr val="accent1"/>
+          </a:effectRef>
+          <a:fontRef idx="minor">
+            <a:schemeClr val="lt1"/>
+          </a:fontRef>
+        </p:style>
+        <p:txBody>
+          <a:bodyPr rtlCol="0" anchor="ctr"/>
+          <a:lstStyle/>
+          <a:p>
+            <a:pPr algn="ctr"/>
+          </a:p>
+        </p:txBody>
+      </p:sp>
+      <p:sp>
+        <p:nvSpPr>
+          <p:cNvPr id="19" name="Rectangle 18"/>
+          <p:cNvSpPr/>
+          <p:nvPr/>
+        </p:nvSpPr>
+        <p:spPr>
+          <a:xfrm>
+            <a:off x="4416552" y="3063240"/>
+            <a:ext cx="73152" cy="1325880"/>
+          </a:xfrm>
+          <a:prstGeom prst="rect">
+            <a:avLst/>
+          </a:prstGeom>
+          <a:solidFill>
+            <a:srgbClr val="0F172A"/>
+          </a:solidFill>
+          <a:ln>
+            <a:noFill/>
+          </a:ln>
+        </p:spPr>
+        <p:style>
+          <a:lnRef idx="1">
+            <a:schemeClr val="accent1"/>
+          </a:lnRef>
+          <a:fillRef idx="3">
+            <a:schemeClr val="accent1"/>
+          </a:fillRef>
+          <a:effectRef idx="2">
+            <a:schemeClr val="accent1"/>
+          </a:effectRef>
+          <a:fontRef idx="minor">
+            <a:schemeClr val="lt1"/>
+          </a:fontRef>
+        </p:style>
+        <p:txBody>
+          <a:bodyPr rtlCol="0" anchor="ctr"/>
+          <a:lstStyle/>
+          <a:p>
+            <a:pPr algn="ctr"/>
+          </a:p>
+        </p:txBody>
+      </p:sp>
+      <p:sp>
+        <p:nvSpPr>
+          <p:cNvPr id="20" name="TextBox 19"/>
+          <p:cNvSpPr txBox="1"/>
+          <p:nvPr/>
+        </p:nvSpPr>
+        <p:spPr>
+          <a:xfrm>
+            <a:off x="4581144" y="3154680"/>
+            <a:ext cx="3054096" cy="1143000"/>
+          </a:xfrm>
+          <a:prstGeom prst="rect">
+            <a:avLst/>
+          </a:prstGeom>
+          <a:noFill/>
+        </p:spPr>
+        <p:txBody>
+          <a:bodyPr wrap="square">
+            <a:spAutoFit/>
+          </a:bodyPr>
+          <a:lstStyle/>
+          <a:p>
+            <a:pPr>
+              <a:defRPr sz="1000" b="1">
+                <a:solidFill>
+                  <a:srgbClr val="64748B"/>
+                </a:solidFill>
+              </a:defRPr>
+            </a:pPr>
+            <a:r>
+              <a:t>CONSOLIDATED TOTAL ASSETS</a:t>
+            </a:r>
+          </a:p>
+          <a:p>
+            <a:pPr>
+              <a:spcBef>
+                <a:spcPts val="200"/>
+              </a:spcBef>
+              <a:defRPr sz="1800" b="1">
+                <a:solidFill>
+                  <a:srgbClr val="0F172A"/>
+                </a:solidFill>
+              </a:defRPr>
+            </a:pPr>
+            <a:r>
+              <a:t>$6,000.0 M</a:t>
+            </a:r>
+          </a:p>
+          <a:p>
+            <a:pPr>
+              <a:spcBef>
+                <a:spcPts val="200"/>
+              </a:spcBef>
+              <a:defRPr sz="1000">
+                <a:solidFill>
+                  <a:srgbClr val="0F172A"/>
+                </a:solidFill>
+              </a:defRPr>
+            </a:pPr>
+            <a:r>
+              <a:t>ROA: 5.4% (Industry top-quartile)</a:t>
+            </a:r>
+          </a:p>
+        </p:txBody>
+      </p:sp>
+      <p:sp>
+        <p:nvSpPr>
+          <p:cNvPr id="21" name="Rounded Rectangle 20"/>
+          <p:cNvSpPr/>
+          <p:nvPr/>
+        </p:nvSpPr>
+        <p:spPr>
+          <a:xfrm>
+            <a:off x="8101584" y="3063240"/>
+            <a:ext cx="3328416" cy="1325880"/>
+          </a:xfrm>
+          <a:prstGeom prst="roundRect">
+            <a:avLst/>
+          </a:prstGeom>
+          <a:solidFill>
+            <a:srgbClr val="F8FAFC"/>
+          </a:solidFill>
+          <a:ln>
+            <a:solidFill>
+              <a:srgbClr val="E2E8F0"/>
+            </a:solidFill>
+          </a:ln>
+        </p:spPr>
+        <p:style>
+          <a:lnRef idx="1">
+            <a:schemeClr val="accent1"/>
+          </a:lnRef>
+          <a:fillRef idx="3">
+            <a:schemeClr val="accent1"/>
+          </a:fillRef>
+          <a:effectRef idx="2">
+            <a:schemeClr val="accent1"/>
+          </a:effectRef>
+          <a:fontRef idx="minor">
+            <a:schemeClr val="lt1"/>
+          </a:fontRef>
+        </p:style>
+        <p:txBody>
+          <a:bodyPr rtlCol="0" anchor="ctr"/>
+          <a:lstStyle/>
+          <a:p>
+            <a:pPr algn="ctr"/>
+          </a:p>
+        </p:txBody>
+      </p:sp>
+      <p:sp>
+        <p:nvSpPr>
+          <p:cNvPr id="22" name="Rectangle 21"/>
+          <p:cNvSpPr/>
+          <p:nvPr/>
+        </p:nvSpPr>
+        <p:spPr>
+          <a:xfrm>
+            <a:off x="8101584" y="3063240"/>
+            <a:ext cx="73152" cy="1325880"/>
+          </a:xfrm>
+          <a:prstGeom prst="rect">
+            <a:avLst/>
+          </a:prstGeom>
+          <a:solidFill>
+            <a:srgbClr val="0D9488"/>
+          </a:solidFill>
+          <a:ln>
+            <a:noFill/>
+          </a:ln>
+        </p:spPr>
+        <p:style>
+          <a:lnRef idx="1">
+            <a:schemeClr val="accent1"/>
+          </a:lnRef>
+          <a:fillRef idx="3">
+            <a:schemeClr val="accent1"/>
+          </a:fillRef>
+          <a:effectRef idx="2">
+            <a:schemeClr val="accent1"/>
+          </a:effectRef>
+          <a:fontRef idx="minor">
+            <a:schemeClr val="lt1"/>
+          </a:fontRef>
+        </p:style>
+        <p:txBody>
+          <a:bodyPr rtlCol="0" anchor="ctr"/>
+          <a:lstStyle/>
+          <a:p>
+            <a:pPr algn="ctr"/>
+          </a:p>
+        </p:txBody>
+      </p:sp>
+      <p:sp>
+        <p:nvSpPr>
+          <p:cNvPr id="23" name="TextBox 22"/>
+          <p:cNvSpPr txBox="1"/>
+          <p:nvPr/>
+        </p:nvSpPr>
+        <p:spPr>
+          <a:xfrm>
+            <a:off x="8266176" y="3154680"/>
+            <a:ext cx="3054096" cy="1143000"/>
+          </a:xfrm>
+          <a:prstGeom prst="rect">
+            <a:avLst/>
+          </a:prstGeom>
+          <a:noFill/>
+        </p:spPr>
+        <p:txBody>
+          <a:bodyPr wrap="square">
+            <a:spAutoFit/>
+          </a:bodyPr>
+          <a:lstStyle/>
+          <a:p>
+            <a:pPr>
+              <a:defRPr sz="1000" b="1">
+                <a:solidFill>
+                  <a:srgbClr val="64748B"/>
+                </a:solidFill>
+              </a:defRPr>
+            </a:pPr>
+            <a:r>
+              <a:t>CONSOLIDATED SOLVENCY (DER)</a:t>
+            </a:r>
+          </a:p>
+          <a:p>
+            <a:pPr>
+              <a:spcBef>
+                <a:spcPts val="200"/>
+              </a:spcBef>
+              <a:defRPr sz="1800" b="1">
+                <a:solidFill>
+                  <a:srgbClr val="0F172A"/>
+                </a:solidFill>
+              </a:defRPr>
+            </a:pPr>
+            <a:r>
+              <a:t>0.96x</a:t>
+            </a:r>
+          </a:p>
+          <a:p>
+            <a:pPr>
+              <a:spcBef>
+                <a:spcPts val="200"/>
+              </a:spcBef>
+              <a:defRPr sz="1000">
                 <a:solidFill>
                   <a:srgbClr val="0D9488"/>
                 </a:solidFill>
               </a:defRPr>
             </a:pPr>
             <a:r>
-              <a:t>4. Profit Margin Distortion  [MODERATE]</a:t>
+              <a:t>PY: 0.94x (POJK Max: 5.0x Safe)</a:t>
+            </a:r>
+          </a:p>
+        </p:txBody>
+      </p:sp>
+      <p:sp>
+        <p:nvSpPr>
+          <p:cNvPr id="24" name="Rounded Rectangle 23"/>
+          <p:cNvSpPr/>
+          <p:nvPr/>
+        </p:nvSpPr>
+        <p:spPr>
+          <a:xfrm>
+            <a:off x="731520" y="4663440"/>
+            <a:ext cx="10728655" cy="1645920"/>
+          </a:xfrm>
+          <a:prstGeom prst="roundRect">
+            <a:avLst/>
+          </a:prstGeom>
+          <a:solidFill>
+            <a:srgbClr val="F8FAFC"/>
+          </a:solidFill>
+          <a:ln>
+            <a:solidFill>
+              <a:srgbClr val="E2E8F0"/>
+            </a:solidFill>
+          </a:ln>
+        </p:spPr>
+        <p:style>
+          <a:lnRef idx="1">
+            <a:schemeClr val="accent1"/>
+          </a:lnRef>
+          <a:fillRef idx="3">
+            <a:schemeClr val="accent1"/>
+          </a:fillRef>
+          <a:effectRef idx="2">
+            <a:schemeClr val="accent1"/>
+          </a:effectRef>
+          <a:fontRef idx="minor">
+            <a:schemeClr val="lt1"/>
+          </a:fontRef>
+        </p:style>
+        <p:txBody>
+          <a:bodyPr rtlCol="0" anchor="ctr"/>
+          <a:lstStyle/>
+          <a:p>
+            <a:pPr algn="ctr"/>
+          </a:p>
+        </p:txBody>
+      </p:sp>
+      <p:sp>
+        <p:nvSpPr>
+          <p:cNvPr id="25" name="TextBox 24"/>
+          <p:cNvSpPr txBox="1"/>
+          <p:nvPr/>
+        </p:nvSpPr>
+        <p:spPr>
+          <a:xfrm>
+            <a:off x="914400" y="4754880"/>
+            <a:ext cx="10332720" cy="1463040"/>
+          </a:xfrm>
+          <a:prstGeom prst="rect">
+            <a:avLst/>
+          </a:prstGeom>
+          <a:noFill/>
+        </p:spPr>
+        <p:txBody>
+          <a:bodyPr wrap="square">
+            <a:spAutoFit/>
+          </a:bodyPr>
+          <a:lstStyle/>
+          <a:p>
+            <a:pPr>
+              <a:defRPr sz="1100" b="1">
+                <a:solidFill>
+                  <a:srgbClr val="0F172A"/>
+                </a:solidFill>
+              </a:defRPr>
+            </a:pPr>
+            <a:r>
+              <a:t>NET INCOME CONTRIBUTION BREAKDOWN ACROSS 6 ENTITIES</a:t>
             </a:r>
           </a:p>
           <a:p>
             <a:pPr>
               <a:spcBef>
-                <a:spcPts val="300"/>
+                <a:spcPts val="600"/>
               </a:spcBef>
               <a:defRPr sz="1100">
                 <a:solidFill>
@@ -7073,7 +8279,15 @@
               </a:defRPr>
             </a:pPr>
             <a:r>
-              <a:t>Formula: |Margin CY - Margin PY| ≥ 3.5 pp   •   Audit Objective: Verifies whether margin expansion/compression stems from genuine operations or one-off artificial transactions.</a:t>
+              <a:t>• Yayasan Holding (Induk): $64.0M (19.7%)    • Subsidiary I (100% Control): $118.0M (36.3%)</a:t>
+            </a:r>
+            <a:br/>
+            <a:r>
+              <a:t>• Subsidiary II (35% NCI): $52.0M (16.0%)     • Subsidiary III (40% NCI): $31.0M (9.5%)</a:t>
+            </a:r>
+            <a:br/>
+            <a:r>
+              <a:t>• Subsidiary IV (22% NCI): $41.0M (12.6%)     • Subsidiary V (30% NCI): $19.0M (5.8%)</a:t>
             </a:r>
           </a:p>
         </p:txBody>
@@ -7212,7 +8426,7 @@
               </a:defRPr>
             </a:pPr>
             <a:r>
-              <a:t>AUDIT OPERATIONS</a:t>
+              <a:t>REVIEW WORKSPACE</a:t>
             </a:r>
           </a:p>
         </p:txBody>
@@ -7247,7 +8461,7 @@
               </a:defRPr>
             </a:pPr>
             <a:r>
-              <a:t>Actionable Review Workspace: Human-in-the-Loop Workflow</a:t>
+              <a:t>Tool Output: Items Requiring Review (Findings &amp; Decisions)</a:t>
             </a:r>
           </a:p>
         </p:txBody>
@@ -7261,7 +8475,7 @@
         <p:spPr>
           <a:xfrm>
             <a:off x="731520" y="1600200"/>
-            <a:ext cx="2560320" cy="4389120"/>
+            <a:ext cx="10728655" cy="1005840"/>
           </a:xfrm>
           <a:prstGeom prst="roundRect">
             <a:avLst/>
@@ -7269,7 +8483,7 @@
           <a:solidFill>
             <a:srgbClr val="F8FAFC"/>
           </a:solidFill>
-          <a:ln w="12700">
+          <a:ln>
             <a:solidFill>
               <a:srgbClr val="E2E8F0"/>
             </a:solidFill>
@@ -7299,16 +8513,16 @@
       </p:sp>
       <p:sp>
         <p:nvSpPr>
-          <p:cNvPr id="7" name="Rounded Rectangle 6"/>
+          <p:cNvPr id="7" name="Rectangle 6"/>
           <p:cNvSpPr/>
           <p:nvPr/>
         </p:nvSpPr>
         <p:spPr>
           <a:xfrm>
             <a:off x="731520" y="1600200"/>
-            <a:ext cx="2560320" cy="73152"/>
-          </a:xfrm>
-          <a:prstGeom prst="roundRect">
+            <a:ext cx="73152" cy="1005840"/>
+          </a:xfrm>
+          <a:prstGeom prst="rect">
             <a:avLst/>
           </a:prstGeom>
           <a:solidFill>
@@ -7348,8 +8562,8 @@
         </p:nvSpPr>
         <p:spPr>
           <a:xfrm>
-            <a:off x="950976" y="1819656"/>
-            <a:ext cx="2121408" cy="3950208"/>
+            <a:off x="960120" y="1673352"/>
+            <a:ext cx="10332720" cy="868680"/>
           </a:xfrm>
           <a:prstGeom prst="rect">
             <a:avLst/>
@@ -7363,62 +8577,29 @@
           <a:lstStyle/>
           <a:p>
             <a:pPr>
-              <a:spcAft>
-                <a:spcPts val="800"/>
-              </a:spcAft>
-              <a:defRPr sz="1350" b="1">
+              <a:defRPr sz="1250" b="1">
                 <a:solidFill>
                   <a:srgbClr val="E11D48"/>
                 </a:solidFill>
               </a:defRPr>
             </a:pPr>
             <a:r>
-              <a:t>Step 1: Automated Flagging</a:t>
-            </a:r>
-          </a:p>
-          <a:p>
-            <a:pPr>
-              <a:spcAft>
-                <a:spcPts val="400"/>
-              </a:spcAft>
-              <a:defRPr sz="1100">
+              <a:t>#1. NCI Allocation Mismatch — Subsidiary II  [CRITICAL]  •  Status: Needs Management Clarification</a:t>
+            </a:r>
+          </a:p>
+          <a:p>
+            <a:pPr>
+              <a:spcBef>
+                <a:spcPts val="300"/>
+              </a:spcBef>
+              <a:defRPr sz="1050">
                 <a:solidFill>
                   <a:srgbClr val="1E293B"/>
                 </a:solidFill>
               </a:defRPr>
             </a:pPr>
             <a:r>
-              <a:t>• Rule Engine scans all 6 entities instantly.</a:t>
-            </a:r>
-          </a:p>
-          <a:p>
-            <a:pPr>
-              <a:spcAft>
-                <a:spcPts val="400"/>
-              </a:spcAft>
-              <a:defRPr sz="1100">
-                <a:solidFill>
-                  <a:srgbClr val="1E293B"/>
-                </a:solidFill>
-              </a:defRPr>
-            </a:pPr>
-            <a:r>
-              <a:t>• Anomalies classified by severity: Critical, Medium, Moderate.</a:t>
-            </a:r>
-          </a:p>
-          <a:p>
-            <a:pPr>
-              <a:spcAft>
-                <a:spcPts val="400"/>
-              </a:spcAft>
-              <a:defRPr sz="1100">
-                <a:solidFill>
-                  <a:srgbClr val="1E293B"/>
-                </a:solidFill>
-              </a:defRPr>
-            </a:pPr>
-            <a:r>
-              <a:t>• Dynamic badges populate the review dashboard.</a:t>
+              <a:t>Quantified Delta: Reported $24.4M vs Computed $18.2M (+34.1% gap)   |   Audit Impact: Understatement of parent attributable earnings; potential disguised dividend allocation.</a:t>
             </a:r>
           </a:p>
         </p:txBody>
@@ -7431,8 +8612,8 @@
         </p:nvSpPr>
         <p:spPr>
           <a:xfrm>
-            <a:off x="3438144" y="1600200"/>
-            <a:ext cx="2560320" cy="4389120"/>
+            <a:off x="731520" y="2743200"/>
+            <a:ext cx="10728655" cy="1005840"/>
           </a:xfrm>
           <a:prstGeom prst="roundRect">
             <a:avLst/>
@@ -7440,7 +8621,7 @@
           <a:solidFill>
             <a:srgbClr val="F8FAFC"/>
           </a:solidFill>
-          <a:ln w="12700">
+          <a:ln>
             <a:solidFill>
               <a:srgbClr val="E2E8F0"/>
             </a:solidFill>
@@ -7470,20 +8651,20 @@
       </p:sp>
       <p:sp>
         <p:nvSpPr>
-          <p:cNvPr id="10" name="Rounded Rectangle 9"/>
+          <p:cNvPr id="10" name="Rectangle 9"/>
           <p:cNvSpPr/>
           <p:nvPr/>
         </p:nvSpPr>
         <p:spPr>
           <a:xfrm>
-            <a:off x="3438144" y="1600200"/>
-            <a:ext cx="2560320" cy="73152"/>
-          </a:xfrm>
-          <a:prstGeom prst="roundRect">
-            <a:avLst/>
-          </a:prstGeom>
-          <a:solidFill>
-            <a:srgbClr val="B48214"/>
+            <a:off x="731520" y="2743200"/>
+            <a:ext cx="73152" cy="1005840"/>
+          </a:xfrm>
+          <a:prstGeom prst="rect">
+            <a:avLst/>
+          </a:prstGeom>
+          <a:solidFill>
+            <a:srgbClr val="E11D48"/>
           </a:solidFill>
           <a:ln>
             <a:noFill/>
@@ -7519,8 +8700,8 @@
         </p:nvSpPr>
         <p:spPr>
           <a:xfrm>
-            <a:off x="3657600" y="1819656"/>
-            <a:ext cx="2121408" cy="3950208"/>
+            <a:off x="960120" y="2816352"/>
+            <a:ext cx="10332720" cy="868680"/>
           </a:xfrm>
           <a:prstGeom prst="rect">
             <a:avLst/>
@@ -7534,62 +8715,29 @@
           <a:lstStyle/>
           <a:p>
             <a:pPr>
-              <a:spcAft>
-                <a:spcPts val="800"/>
-              </a:spcAft>
-              <a:defRPr sz="1350" b="1">
-                <a:solidFill>
-                  <a:srgbClr val="B48214"/>
-                </a:solidFill>
-              </a:defRPr>
-            </a:pPr>
-            <a:r>
-              <a:t>Step 2: AI Reasoning &amp; Impact</a:t>
-            </a:r>
-          </a:p>
-          <a:p>
-            <a:pPr>
-              <a:spcAft>
-                <a:spcPts val="400"/>
-              </a:spcAft>
-              <a:defRPr sz="1100">
+              <a:defRPr sz="1250" b="1">
+                <a:solidFill>
+                  <a:srgbClr val="E11D48"/>
+                </a:solidFill>
+              </a:defRPr>
+            </a:pPr>
+            <a:r>
+              <a:t>#2. Related-Party Receivable Surge — Subsidiary II  [CRITICAL]  •  Status: Audit Finding (Requires Revision)</a:t>
+            </a:r>
+          </a:p>
+          <a:p>
+            <a:pPr>
+              <a:spcBef>
+                <a:spcPts val="300"/>
+              </a:spcBef>
+              <a:defRPr sz="1050">
                 <a:solidFill>
                   <a:srgbClr val="1E293B"/>
                 </a:solidFill>
               </a:defRPr>
             </a:pPr>
             <a:r>
-              <a:t>• AI Agent derives analytical root causes and accounting impact.</a:t>
-            </a:r>
-          </a:p>
-          <a:p>
-            <a:pPr>
-              <a:spcAft>
-                <a:spcPts val="400"/>
-              </a:spcAft>
-              <a:defRPr sz="1100">
-                <a:solidFill>
-                  <a:srgbClr val="1E293B"/>
-                </a:solidFill>
-              </a:defRPr>
-            </a:pPr>
-            <a:r>
-              <a:t>• Relevant IFRS 10 / IAS 24 standards cited.</a:t>
-            </a:r>
-          </a:p>
-          <a:p>
-            <a:pPr>
-              <a:spcAft>
-                <a:spcPts val="400"/>
-              </a:spcAft>
-              <a:defRPr sz="1100">
-                <a:solidFill>
-                  <a:srgbClr val="1E293B"/>
-                </a:solidFill>
-              </a:defRPr>
-            </a:pPr>
-            <a:r>
-              <a:t>• Conversational Copilot delivers instant executive briefs.</a:t>
+              <a:t>Quantified Delta: RP Receivables spiked +158.8% YoY vs Revenue +4.9%   |   Audit Impact: Risk of unmonitored capital transfer to affiliates under non-arms-length terms.</a:t>
             </a:r>
           </a:p>
         </p:txBody>
@@ -7602,8 +8750,8 @@
         </p:nvSpPr>
         <p:spPr>
           <a:xfrm>
-            <a:off x="6144768" y="1600200"/>
-            <a:ext cx="2560320" cy="4389120"/>
+            <a:off x="731520" y="3886200"/>
+            <a:ext cx="10728655" cy="1005840"/>
           </a:xfrm>
           <a:prstGeom prst="roundRect">
             <a:avLst/>
@@ -7611,7 +8759,7 @@
           <a:solidFill>
             <a:srgbClr val="F8FAFC"/>
           </a:solidFill>
-          <a:ln w="12700">
+          <a:ln>
             <a:solidFill>
               <a:srgbClr val="E2E8F0"/>
             </a:solidFill>
@@ -7641,20 +8789,20 @@
       </p:sp>
       <p:sp>
         <p:nvSpPr>
-          <p:cNvPr id="13" name="Rounded Rectangle 12"/>
+          <p:cNvPr id="13" name="Rectangle 12"/>
           <p:cNvSpPr/>
           <p:nvPr/>
         </p:nvSpPr>
         <p:spPr>
           <a:xfrm>
-            <a:off x="6144768" y="1600200"/>
-            <a:ext cx="2560320" cy="73152"/>
-          </a:xfrm>
-          <a:prstGeom prst="roundRect">
-            <a:avLst/>
-          </a:prstGeom>
-          <a:solidFill>
-            <a:srgbClr val="1B4332"/>
+            <a:off x="731520" y="3886200"/>
+            <a:ext cx="73152" cy="1005840"/>
+          </a:xfrm>
+          <a:prstGeom prst="rect">
+            <a:avLst/>
+          </a:prstGeom>
+          <a:solidFill>
+            <a:srgbClr val="D97706"/>
           </a:solidFill>
           <a:ln>
             <a:noFill/>
@@ -7690,8 +8838,8 @@
         </p:nvSpPr>
         <p:spPr>
           <a:xfrm>
-            <a:off x="6364224" y="1819656"/>
-            <a:ext cx="2121408" cy="3950208"/>
+            <a:off x="960120" y="3959352"/>
+            <a:ext cx="10332720" cy="868680"/>
           </a:xfrm>
           <a:prstGeom prst="rect">
             <a:avLst/>
@@ -7705,62 +8853,29 @@
           <a:lstStyle/>
           <a:p>
             <a:pPr>
-              <a:spcAft>
-                <a:spcPts val="800"/>
-              </a:spcAft>
-              <a:defRPr sz="1350" b="1">
-                <a:solidFill>
-                  <a:srgbClr val="1B4332"/>
-                </a:solidFill>
-              </a:defRPr>
-            </a:pPr>
-            <a:r>
-              <a:t>Step 3: Auditor Decisions</a:t>
-            </a:r>
-          </a:p>
-          <a:p>
-            <a:pPr>
-              <a:spcAft>
-                <a:spcPts val="400"/>
-              </a:spcAft>
-              <a:defRPr sz="1100">
+              <a:defRPr sz="1250" b="1">
+                <a:solidFill>
+                  <a:srgbClr val="D97706"/>
+                </a:solidFill>
+              </a:defRPr>
+            </a:pPr>
+            <a:r>
+              <a:t>#3. Earnings Quality Divergence — Subsidiary III  [MEDIUM]  •  Status: Under Auditor Inquiry</a:t>
+            </a:r>
+          </a:p>
+          <a:p>
+            <a:pPr>
+              <a:spcBef>
+                <a:spcPts val="300"/>
+              </a:spcBef>
+              <a:defRPr sz="1050">
                 <a:solidFill>
                   <a:srgbClr val="1E293B"/>
                 </a:solidFill>
               </a:defRPr>
             </a:pPr>
             <a:r>
-              <a:t>• Auditor selects status: Clarify / Audit Finding / Approved.</a:t>
-            </a:r>
-          </a:p>
-          <a:p>
-            <a:pPr>
-              <a:spcAft>
-                <a:spcPts val="400"/>
-              </a:spcAft>
-              <a:defRPr sz="1100">
-                <a:solidFill>
-                  <a:srgbClr val="1E293B"/>
-                </a:solidFill>
-              </a:defRPr>
-            </a:pPr>
-            <a:r>
-              <a:t>• Input field records auditor remarks &amp; requested documentation.</a:t>
-            </a:r>
-          </a:p>
-          <a:p>
-            <a:pPr>
-              <a:spcAft>
-                <a:spcPts val="400"/>
-              </a:spcAft>
-              <a:defRPr sz="1100">
-                <a:solidFill>
-                  <a:srgbClr val="1E293B"/>
-                </a:solidFill>
-              </a:defRPr>
-            </a:pPr>
-            <a:r>
-              <a:t>• One-click 'Request Clarification' logs notice to subsidiary.</a:t>
+              <a:t>Quantified Delta: Revenue grew +3.0% YoY while Net Income fell -6.1%   |   Audit Impact: Operating margin compression from unvetted overhead and administrative expense spikes.</a:t>
             </a:r>
           </a:p>
         </p:txBody>
@@ -7773,8 +8888,8 @@
         </p:nvSpPr>
         <p:spPr>
           <a:xfrm>
-            <a:off x="8851392" y="1600200"/>
-            <a:ext cx="2560320" cy="4389120"/>
+            <a:off x="731520" y="5029200"/>
+            <a:ext cx="10728655" cy="1005840"/>
           </a:xfrm>
           <a:prstGeom prst="roundRect">
             <a:avLst/>
@@ -7782,7 +8897,7 @@
           <a:solidFill>
             <a:srgbClr val="F8FAFC"/>
           </a:solidFill>
-          <a:ln w="12700">
+          <a:ln>
             <a:solidFill>
               <a:srgbClr val="E2E8F0"/>
             </a:solidFill>
@@ -7812,20 +8927,20 @@
       </p:sp>
       <p:sp>
         <p:nvSpPr>
-          <p:cNvPr id="16" name="Rounded Rectangle 15"/>
+          <p:cNvPr id="16" name="Rectangle 15"/>
           <p:cNvSpPr/>
           <p:nvPr/>
         </p:nvSpPr>
         <p:spPr>
           <a:xfrm>
-            <a:off x="8851392" y="1600200"/>
-            <a:ext cx="2560320" cy="73152"/>
-          </a:xfrm>
-          <a:prstGeom prst="roundRect">
-            <a:avLst/>
-          </a:prstGeom>
-          <a:solidFill>
-            <a:srgbClr val="0284C7"/>
+            <a:off x="731520" y="5029200"/>
+            <a:ext cx="73152" cy="1005840"/>
+          </a:xfrm>
+          <a:prstGeom prst="rect">
+            <a:avLst/>
+          </a:prstGeom>
+          <a:solidFill>
+            <a:srgbClr val="0D9488"/>
           </a:solidFill>
           <a:ln>
             <a:noFill/>
@@ -7861,8 +8976,8 @@
         </p:nvSpPr>
         <p:spPr>
           <a:xfrm>
-            <a:off x="9070848" y="1819656"/>
-            <a:ext cx="2121408" cy="3950208"/>
+            <a:off x="960120" y="5102352"/>
+            <a:ext cx="10332720" cy="868680"/>
           </a:xfrm>
           <a:prstGeom prst="rect">
             <a:avLst/>
@@ -7876,62 +8991,29 @@
           <a:lstStyle/>
           <a:p>
             <a:pPr>
-              <a:spcAft>
-                <a:spcPts val="800"/>
-              </a:spcAft>
-              <a:defRPr sz="1350" b="1">
-                <a:solidFill>
-                  <a:srgbClr val="0284C7"/>
-                </a:solidFill>
-              </a:defRPr>
-            </a:pPr>
-            <a:r>
-              <a:t>Step 4: Formal Sign-off</a:t>
-            </a:r>
-          </a:p>
-          <a:p>
-            <a:pPr>
-              <a:spcAft>
-                <a:spcPts val="400"/>
-              </a:spcAft>
-              <a:defRPr sz="1100">
+              <a:defRPr sz="1250" b="1">
+                <a:solidFill>
+                  <a:srgbClr val="0D9488"/>
+                </a:solidFill>
+              </a:defRPr>
+            </a:pPr>
+            <a:r>
+              <a:t>#4. Net Margin Expansion Shift — Subsidiary IV  [MODERATE]  •  Status: Justified / Approved</a:t>
+            </a:r>
+          </a:p>
+          <a:p>
+            <a:pPr>
+              <a:spcBef>
+                <a:spcPts val="300"/>
+              </a:spcBef>
+              <a:defRPr sz="1050">
                 <a:solidFill>
                   <a:srgbClr val="1E293B"/>
                 </a:solidFill>
               </a:defRPr>
             </a:pPr>
             <a:r>
-              <a:t>• Real-time tracking: X of Y anomalies reviewed.</a:t>
-            </a:r>
-          </a:p>
-          <a:p>
-            <a:pPr>
-              <a:spcAft>
-                <a:spcPts val="400"/>
-              </a:spcAft>
-              <a:defRPr sz="1100">
-                <a:solidFill>
-                  <a:srgbClr val="1E293B"/>
-                </a:solidFill>
-              </a:defRPr>
-            </a:pPr>
-            <a:r>
-              <a:t>• Formal sign-off locks workpaper with timestamp.</a:t>
-            </a:r>
-          </a:p>
-          <a:p>
-            <a:pPr>
-              <a:spcAft>
-                <a:spcPts val="400"/>
-              </a:spcAft>
-              <a:defRPr sz="1100">
-                <a:solidFill>
-                  <a:srgbClr val="1E293B"/>
-                </a:solidFill>
-              </a:defRPr>
-            </a:pPr>
-            <a:r>
-              <a:t>• One-click clean print to PDF ready for the Audit Committee.</a:t>
+              <a:t>Quantified Delta: Profit margin jumped from 7.2% to 10.8% (+3.6 pp)   |   Audit Impact: Verifying if expansion is operational or driven by non-recurring one-off capital gains.</a:t>
             </a:r>
           </a:p>
         </p:txBody>
@@ -8070,7 +9152,7 @@
               </a:defRPr>
             </a:pPr>
             <a:r>
-              <a:t>PRUDENTIAL RATIOS</a:t>
+              <a:t>QUANTITATIVE RULES</a:t>
             </a:r>
           </a:p>
         </p:txBody>
@@ -8105,7 +9187,7 @@
               </a:defRPr>
             </a:pPr>
             <a:r>
-              <a:t>Consolidated Financial Health vs. Sectoral Benchmarks</a:t>
+              <a:t>Forensic Anomaly Detection Engine: Vectors &amp; Thresholds</a:t>
             </a:r>
           </a:p>
         </p:txBody>
@@ -8119,7 +9201,7 @@
         <p:spPr>
           <a:xfrm>
             <a:off x="731520" y="1600200"/>
-            <a:ext cx="3328416" cy="4389120"/>
+            <a:ext cx="10728655" cy="1005840"/>
           </a:xfrm>
           <a:prstGeom prst="roundRect">
             <a:avLst/>
@@ -8157,20 +9239,20 @@
       </p:sp>
       <p:sp>
         <p:nvSpPr>
-          <p:cNvPr id="7" name="Rounded Rectangle 6"/>
+          <p:cNvPr id="7" name="Rectangle 6"/>
           <p:cNvSpPr/>
           <p:nvPr/>
         </p:nvSpPr>
         <p:spPr>
           <a:xfrm>
             <a:off x="731520" y="1600200"/>
-            <a:ext cx="3328416" cy="73152"/>
-          </a:xfrm>
-          <a:prstGeom prst="roundRect">
-            <a:avLst/>
-          </a:prstGeom>
-          <a:solidFill>
-            <a:srgbClr val="0D9488"/>
+            <a:ext cx="73152" cy="1005840"/>
+          </a:xfrm>
+          <a:prstGeom prst="rect">
+            <a:avLst/>
+          </a:prstGeom>
+          <a:solidFill>
+            <a:srgbClr val="E11D48"/>
           </a:solidFill>
           <a:ln>
             <a:noFill/>
@@ -8206,8 +9288,8 @@
         </p:nvSpPr>
         <p:spPr>
           <a:xfrm>
-            <a:off x="950976" y="1819656"/>
-            <a:ext cx="2889504" cy="3931920"/>
+            <a:off x="960120" y="1709928"/>
+            <a:ext cx="10332720" cy="786384"/>
           </a:xfrm>
           <a:prstGeom prst="rect">
             <a:avLst/>
@@ -8221,81 +9303,29 @@
           <a:lstStyle/>
           <a:p>
             <a:pPr>
-              <a:spcAft>
-                <a:spcPts val="600"/>
-              </a:spcAft>
-              <a:defRPr sz="1400" b="1">
-                <a:solidFill>
-                  <a:srgbClr val="0F172A"/>
-                </a:solidFill>
-              </a:defRPr>
-            </a:pPr>
-            <a:r>
-              <a:t>Solvency (DER)</a:t>
-            </a:r>
-          </a:p>
-          <a:p>
-            <a:pPr>
-              <a:spcAft>
-                <a:spcPts val="600"/>
-              </a:spcAft>
-              <a:defRPr sz="1100" b="1">
+              <a:defRPr sz="1350" b="1">
+                <a:solidFill>
+                  <a:srgbClr val="E11D48"/>
+                </a:solidFill>
+              </a:defRPr>
+            </a:pPr>
+            <a:r>
+              <a:t>1. NCI Profit Allocation Disparity  [CRITICAL]</a:t>
+            </a:r>
+          </a:p>
+          <a:p>
+            <a:pPr>
+              <a:spcBef>
+                <a:spcPts val="300"/>
+              </a:spcBef>
+              <a:defRPr sz="1100">
                 <a:solidFill>
                   <a:srgbClr val="1E293B"/>
                 </a:solidFill>
               </a:defRPr>
             </a:pPr>
             <a:r>
-              <a:t>Consolidated: 0.96x</a:t>
-            </a:r>
-            <a:br/>
-            <a:r>
-              <a:t>Regulatory Ceiling: Max 5.0x</a:t>
-            </a:r>
-          </a:p>
-          <a:p>
-            <a:pPr>
-              <a:spcAft>
-                <a:spcPts val="1000"/>
-              </a:spcAft>
-              <a:defRPr sz="1000" b="1">
-                <a:solidFill>
-                  <a:srgbClr val="0D9488"/>
-                </a:solidFill>
-              </a:defRPr>
-            </a:pPr>
-            <a:r>
-              <a:t>STATUS: HIGHLY CONSERVATIVE</a:t>
-            </a:r>
-          </a:p>
-          <a:p>
-            <a:pPr>
-              <a:spcAft>
-                <a:spcPts val="400"/>
-              </a:spcAft>
-              <a:defRPr sz="1100">
-                <a:solidFill>
-                  <a:srgbClr val="1E293B"/>
-                </a:solidFill>
-              </a:defRPr>
-            </a:pPr>
-            <a:r>
-              <a:t>• Capital structure provides ample liquidity buffer for operational growth.</a:t>
-            </a:r>
-          </a:p>
-          <a:p>
-            <a:pPr>
-              <a:spcAft>
-                <a:spcPts val="400"/>
-              </a:spcAft>
-              <a:defRPr sz="1100">
-                <a:solidFill>
-                  <a:srgbClr val="1E293B"/>
-                </a:solidFill>
-              </a:defRPr>
-            </a:pPr>
-            <a:r>
-              <a:t>• Well below regulatory leverage thresholds for financial institutions.</a:t>
+              <a:t>Formula: |Reported NCI - Computed NCI| &gt; 8%   •   Audit Objective: Prevents parent income distortion and safeguards minority shareholder dividend equity under IFRS 10 / PSAK 65.</a:t>
             </a:r>
           </a:p>
         </p:txBody>
@@ -8308,8 +9338,8 @@
         </p:nvSpPr>
         <p:spPr>
           <a:xfrm>
-            <a:off x="4416552" y="1600200"/>
-            <a:ext cx="3328416" cy="4389120"/>
+            <a:off x="731520" y="2743200"/>
+            <a:ext cx="10728655" cy="1005840"/>
           </a:xfrm>
           <a:prstGeom prst="roundRect">
             <a:avLst/>
@@ -8347,20 +9377,20 @@
       </p:sp>
       <p:sp>
         <p:nvSpPr>
-          <p:cNvPr id="10" name="Rounded Rectangle 9"/>
+          <p:cNvPr id="10" name="Rectangle 9"/>
           <p:cNvSpPr/>
           <p:nvPr/>
         </p:nvSpPr>
         <p:spPr>
           <a:xfrm>
-            <a:off x="4416552" y="1600200"/>
-            <a:ext cx="3328416" cy="73152"/>
-          </a:xfrm>
-          <a:prstGeom prst="roundRect">
-            <a:avLst/>
-          </a:prstGeom>
-          <a:solidFill>
-            <a:srgbClr val="0D9488"/>
+            <a:off x="731520" y="2743200"/>
+            <a:ext cx="73152" cy="1005840"/>
+          </a:xfrm>
+          <a:prstGeom prst="rect">
+            <a:avLst/>
+          </a:prstGeom>
+          <a:solidFill>
+            <a:srgbClr val="E11D48"/>
           </a:solidFill>
           <a:ln>
             <a:noFill/>
@@ -8396,8 +9426,8 @@
         </p:nvSpPr>
         <p:spPr>
           <a:xfrm>
-            <a:off x="4636008" y="1819656"/>
-            <a:ext cx="2889504" cy="3931920"/>
+            <a:off x="960120" y="2852928"/>
+            <a:ext cx="10332720" cy="786384"/>
           </a:xfrm>
           <a:prstGeom prst="rect">
             <a:avLst/>
@@ -8411,81 +9441,29 @@
           <a:lstStyle/>
           <a:p>
             <a:pPr>
-              <a:spcAft>
-                <a:spcPts val="600"/>
-              </a:spcAft>
-              <a:defRPr sz="1400" b="1">
-                <a:solidFill>
-                  <a:srgbClr val="0F172A"/>
-                </a:solidFill>
-              </a:defRPr>
-            </a:pPr>
-            <a:r>
-              <a:t>Profitability (ROA)</a:t>
-            </a:r>
-          </a:p>
-          <a:p>
-            <a:pPr>
-              <a:spcAft>
-                <a:spcPts val="600"/>
-              </a:spcAft>
-              <a:defRPr sz="1100" b="1">
+              <a:defRPr sz="1350" b="1">
+                <a:solidFill>
+                  <a:srgbClr val="E11D48"/>
+                </a:solidFill>
+              </a:defRPr>
+            </a:pPr>
+            <a:r>
+              <a:t>2. Related-Party Debt Acceleration  [CRITICAL]</a:t>
+            </a:r>
+          </a:p>
+          <a:p>
+            <a:pPr>
+              <a:spcBef>
+                <a:spcPts val="300"/>
+              </a:spcBef>
+              <a:defRPr sz="1100">
                 <a:solidFill>
                   <a:srgbClr val="1E293B"/>
                 </a:solidFill>
               </a:defRPr>
             </a:pPr>
             <a:r>
-              <a:t>Consolidated: 5.4%</a:t>
-            </a:r>
-            <a:br/>
-            <a:r>
-              <a:t>Industry Average: 3.5% - 5.2%</a:t>
-            </a:r>
-          </a:p>
-          <a:p>
-            <a:pPr>
-              <a:spcAft>
-                <a:spcPts val="1000"/>
-              </a:spcAft>
-              <a:defRPr sz="1000" b="1">
-                <a:solidFill>
-                  <a:srgbClr val="0D9488"/>
-                </a:solidFill>
-              </a:defRPr>
-            </a:pPr>
-            <a:r>
-              <a:t>STATUS: OUTPERFORMING</a:t>
-            </a:r>
-          </a:p>
-          <a:p>
-            <a:pPr>
-              <a:spcAft>
-                <a:spcPts val="400"/>
-              </a:spcAft>
-              <a:defRPr sz="1100">
-                <a:solidFill>
-                  <a:srgbClr val="1E293B"/>
-                </a:solidFill>
-              </a:defRPr>
-            </a:pPr>
-            <a:r>
-              <a:t>• Group asset return sits in the upper quartile of microfinance peers.</a:t>
-            </a:r>
-          </a:p>
-          <a:p>
-            <a:pPr>
-              <a:spcAft>
-                <a:spcPts val="400"/>
-              </a:spcAft>
-              <a:defRPr sz="1100">
-                <a:solidFill>
-                  <a:srgbClr val="1E293B"/>
-                </a:solidFill>
-              </a:defRPr>
-            </a:pPr>
-            <a:r>
-              <a:t>• Consolidated Net Income expanded +14.2% YoY ($325M vs $284.7M).</a:t>
+              <a:t>Formula: ΔRP Receivables - ΔRevenue &gt; 30%   •   Audit Objective: Detects liquidity outflows into affiliated entities and halts hidden internal non-performing debt under IAS 24 / PSAK 7.</a:t>
             </a:r>
           </a:p>
         </p:txBody>
@@ -8498,8 +9476,8 @@
         </p:nvSpPr>
         <p:spPr>
           <a:xfrm>
-            <a:off x="8101584" y="1600200"/>
-            <a:ext cx="3328416" cy="4389120"/>
+            <a:off x="731520" y="3886200"/>
+            <a:ext cx="10728655" cy="1005840"/>
           </a:xfrm>
           <a:prstGeom prst="roundRect">
             <a:avLst/>
@@ -8537,16 +9515,16 @@
       </p:sp>
       <p:sp>
         <p:nvSpPr>
-          <p:cNvPr id="13" name="Rounded Rectangle 12"/>
+          <p:cNvPr id="13" name="Rectangle 12"/>
           <p:cNvSpPr/>
           <p:nvPr/>
         </p:nvSpPr>
         <p:spPr>
           <a:xfrm>
-            <a:off x="8101584" y="1600200"/>
-            <a:ext cx="3328416" cy="73152"/>
-          </a:xfrm>
-          <a:prstGeom prst="roundRect">
+            <a:off x="731520" y="3886200"/>
+            <a:ext cx="73152" cy="1005840"/>
+          </a:xfrm>
+          <a:prstGeom prst="rect">
             <a:avLst/>
           </a:prstGeom>
           <a:solidFill>
@@ -8586,8 +9564,8 @@
         </p:nvSpPr>
         <p:spPr>
           <a:xfrm>
-            <a:off x="8321040" y="1819656"/>
-            <a:ext cx="2889504" cy="3931920"/>
+            <a:off x="960120" y="3995928"/>
+            <a:ext cx="10332720" cy="786384"/>
           </a:xfrm>
           <a:prstGeom prst="rect">
             <a:avLst/>
@@ -8601,58 +9579,159 @@
           <a:lstStyle/>
           <a:p>
             <a:pPr>
-              <a:spcAft>
-                <a:spcPts val="600"/>
-              </a:spcAft>
-              <a:defRPr sz="1400" b="1">
-                <a:solidFill>
-                  <a:srgbClr val="0F172A"/>
-                </a:solidFill>
-              </a:defRPr>
-            </a:pPr>
-            <a:r>
-              <a:t>Affiliated Debt (RP)</a:t>
-            </a:r>
-          </a:p>
-          <a:p>
-            <a:pPr>
-              <a:spcAft>
-                <a:spcPts val="600"/>
-              </a:spcAft>
-              <a:defRPr sz="1100" b="1">
+              <a:defRPr sz="1350" b="1">
+                <a:solidFill>
+                  <a:srgbClr val="D97706"/>
+                </a:solidFill>
+              </a:defRPr>
+            </a:pPr>
+            <a:r>
+              <a:t>3. Sudden Leverage / DER Escalation  [MEDIUM]</a:t>
+            </a:r>
+          </a:p>
+          <a:p>
+            <a:pPr>
+              <a:spcBef>
+                <a:spcPts val="300"/>
+              </a:spcBef>
+              <a:defRPr sz="1100">
                 <a:solidFill>
                   <a:srgbClr val="1E293B"/>
                 </a:solidFill>
               </a:defRPr>
             </a:pPr>
             <a:r>
-              <a:t>Total RP Receivables: $241M</a:t>
-            </a:r>
-            <a:br/>
-            <a:r>
-              <a:t>Share of Total Assets: 4.3%</a:t>
-            </a:r>
-          </a:p>
-          <a:p>
-            <a:pPr>
-              <a:spcAft>
-                <a:spcPts val="1000"/>
-              </a:spcAft>
-              <a:defRPr sz="1000" b="1">
-                <a:solidFill>
-                  <a:srgbClr val="D97706"/>
-                </a:solidFill>
-              </a:defRPr>
-            </a:pPr>
-            <a:r>
-              <a:t>STATUS: CONCENTRATION WATCH</a:t>
-            </a:r>
-          </a:p>
-          <a:p>
-            <a:pPr>
-              <a:spcAft>
-                <a:spcPts val="400"/>
-              </a:spcAft>
+              <a:t>Formula: DER CY / DER PY - 1 &gt; 18%   •   Audit Objective: Monitors subsidiary debt growth before debt-to-equity ratios breach bank debt covenants or regulatory limits.</a:t>
+            </a:r>
+          </a:p>
+        </p:txBody>
+      </p:sp>
+      <p:sp>
+        <p:nvSpPr>
+          <p:cNvPr id="15" name="Rounded Rectangle 14"/>
+          <p:cNvSpPr/>
+          <p:nvPr/>
+        </p:nvSpPr>
+        <p:spPr>
+          <a:xfrm>
+            <a:off x="731520" y="5029200"/>
+            <a:ext cx="10728655" cy="1005840"/>
+          </a:xfrm>
+          <a:prstGeom prst="roundRect">
+            <a:avLst/>
+          </a:prstGeom>
+          <a:solidFill>
+            <a:srgbClr val="F8FAFC"/>
+          </a:solidFill>
+          <a:ln>
+            <a:solidFill>
+              <a:srgbClr val="E2E8F0"/>
+            </a:solidFill>
+          </a:ln>
+        </p:spPr>
+        <p:style>
+          <a:lnRef idx="1">
+            <a:schemeClr val="accent1"/>
+          </a:lnRef>
+          <a:fillRef idx="3">
+            <a:schemeClr val="accent1"/>
+          </a:fillRef>
+          <a:effectRef idx="2">
+            <a:schemeClr val="accent1"/>
+          </a:effectRef>
+          <a:fontRef idx="minor">
+            <a:schemeClr val="lt1"/>
+          </a:fontRef>
+        </p:style>
+        <p:txBody>
+          <a:bodyPr rtlCol="0" anchor="ctr"/>
+          <a:lstStyle/>
+          <a:p>
+            <a:pPr algn="ctr"/>
+          </a:p>
+        </p:txBody>
+      </p:sp>
+      <p:sp>
+        <p:nvSpPr>
+          <p:cNvPr id="16" name="Rectangle 15"/>
+          <p:cNvSpPr/>
+          <p:nvPr/>
+        </p:nvSpPr>
+        <p:spPr>
+          <a:xfrm>
+            <a:off x="731520" y="5029200"/>
+            <a:ext cx="73152" cy="1005840"/>
+          </a:xfrm>
+          <a:prstGeom prst="rect">
+            <a:avLst/>
+          </a:prstGeom>
+          <a:solidFill>
+            <a:srgbClr val="0D9488"/>
+          </a:solidFill>
+          <a:ln>
+            <a:noFill/>
+          </a:ln>
+        </p:spPr>
+        <p:style>
+          <a:lnRef idx="1">
+            <a:schemeClr val="accent1"/>
+          </a:lnRef>
+          <a:fillRef idx="3">
+            <a:schemeClr val="accent1"/>
+          </a:fillRef>
+          <a:effectRef idx="2">
+            <a:schemeClr val="accent1"/>
+          </a:effectRef>
+          <a:fontRef idx="minor">
+            <a:schemeClr val="lt1"/>
+          </a:fontRef>
+        </p:style>
+        <p:txBody>
+          <a:bodyPr rtlCol="0" anchor="ctr"/>
+          <a:lstStyle/>
+          <a:p>
+            <a:pPr algn="ctr"/>
+          </a:p>
+        </p:txBody>
+      </p:sp>
+      <p:sp>
+        <p:nvSpPr>
+          <p:cNvPr id="17" name="TextBox 16"/>
+          <p:cNvSpPr txBox="1"/>
+          <p:nvPr/>
+        </p:nvSpPr>
+        <p:spPr>
+          <a:xfrm>
+            <a:off x="960120" y="5138928"/>
+            <a:ext cx="10332720" cy="786384"/>
+          </a:xfrm>
+          <a:prstGeom prst="rect">
+            <a:avLst/>
+          </a:prstGeom>
+          <a:noFill/>
+        </p:spPr>
+        <p:txBody>
+          <a:bodyPr wrap="square">
+            <a:spAutoFit/>
+          </a:bodyPr>
+          <a:lstStyle/>
+          <a:p>
+            <a:pPr>
+              <a:defRPr sz="1350" b="1">
+                <a:solidFill>
+                  <a:srgbClr val="0D9488"/>
+                </a:solidFill>
+              </a:defRPr>
+            </a:pPr>
+            <a:r>
+              <a:t>4. Profit Margin Distortion  [MODERATE]</a:t>
+            </a:r>
+          </a:p>
+          <a:p>
+            <a:pPr>
+              <a:spcBef>
+                <a:spcPts val="300"/>
+              </a:spcBef>
               <a:defRPr sz="1100">
                 <a:solidFill>
                   <a:srgbClr val="1E293B"/>
@@ -8660,22 +9739,7 @@
               </a:defRPr>
             </a:pPr>
             <a:r>
-              <a:t>• Aggregate exposure is proportional to balance sheet scale.</a:t>
-            </a:r>
-          </a:p>
-          <a:p>
-            <a:pPr>
-              <a:spcAft>
-                <a:spcPts val="400"/>
-              </a:spcAft>
-              <a:defRPr sz="1100">
-                <a:solidFill>
-                  <a:srgbClr val="1E293B"/>
-                </a:solidFill>
-              </a:defRPr>
-            </a:pPr>
-            <a:r>
-              <a:t>• However, concentration at Subsidiary II ($88M) warrants tight monitoring.</a:t>
+              <a:t>Formula: |Margin CY - Margin PY| ≥ 3.5 pp   •   Audit Objective: Verifies whether margin expansion/compression stems from genuine operations or one-off artificial transactions.</a:t>
             </a:r>
           </a:p>
         </p:txBody>
@@ -8814,7 +9878,7 @@
               </a:defRPr>
             </a:pPr>
             <a:r>
-              <a:t>VALUE DELIVERY</a:t>
+              <a:t>PRUDENTIAL RATIOS</a:t>
             </a:r>
           </a:p>
         </p:txBody>
@@ -8849,7 +9913,7 @@
               </a:defRPr>
             </a:pPr>
             <a:r>
-              <a:t>Stakeholder Expectation Alignment Matrix</a:t>
+              <a:t>Consolidated Financial Health vs. Sectoral Benchmarks</a:t>
             </a:r>
           </a:p>
         </p:txBody>
@@ -8862,8 +9926,8 @@
         </p:nvSpPr>
         <p:spPr>
           <a:xfrm>
-            <a:off x="731520" y="1554480"/>
-            <a:ext cx="10728655" cy="822960"/>
+            <a:off x="731520" y="1600200"/>
+            <a:ext cx="3328416" cy="4389120"/>
           </a:xfrm>
           <a:prstGeom prst="roundRect">
             <a:avLst/>
@@ -8901,20 +9965,20 @@
       </p:sp>
       <p:sp>
         <p:nvSpPr>
-          <p:cNvPr id="7" name="Rectangle 6"/>
+          <p:cNvPr id="7" name="Rounded Rectangle 6"/>
           <p:cNvSpPr/>
           <p:nvPr/>
         </p:nvSpPr>
         <p:spPr>
           <a:xfrm>
-            <a:off x="731520" y="1554480"/>
-            <a:ext cx="54864" cy="822960"/>
-          </a:xfrm>
-          <a:prstGeom prst="rect">
-            <a:avLst/>
-          </a:prstGeom>
-          <a:solidFill>
-            <a:srgbClr val="1B4332"/>
+            <a:off x="731520" y="1600200"/>
+            <a:ext cx="3328416" cy="73152"/>
+          </a:xfrm>
+          <a:prstGeom prst="roundRect">
+            <a:avLst/>
+          </a:prstGeom>
+          <a:solidFill>
+            <a:srgbClr val="0D9488"/>
           </a:solidFill>
           <a:ln>
             <a:noFill/>
@@ -8950,8 +10014,8 @@
         </p:nvSpPr>
         <p:spPr>
           <a:xfrm>
-            <a:off x="914400" y="1627632"/>
-            <a:ext cx="10332720" cy="685800"/>
+            <a:off x="950976" y="1819656"/>
+            <a:ext cx="2889504" cy="3931920"/>
           </a:xfrm>
           <a:prstGeom prst="rect">
             <a:avLst/>
@@ -8965,26 +10029,81 @@
           <a:lstStyle/>
           <a:p>
             <a:pPr>
-              <a:defRPr sz="1050" b="1">
-                <a:solidFill>
-                  <a:srgbClr val="B48214"/>
-                </a:solidFill>
-              </a:defRPr>
-            </a:pPr>
-            <a:r>
-              <a:t>AUDIT COMMITTEE / BOARD OF SUPERVISORS</a:t>
-            </a:r>
-          </a:p>
-          <a:p>
-            <a:pPr>
-              <a:defRPr sz="1050">
+              <a:spcAft>
+                <a:spcPts val="600"/>
+              </a:spcAft>
+              <a:defRPr sz="1400" b="1">
+                <a:solidFill>
+                  <a:srgbClr val="0F172A"/>
+                </a:solidFill>
+              </a:defRPr>
+            </a:pPr>
+            <a:r>
+              <a:t>Solvency (DER)</a:t>
+            </a:r>
+          </a:p>
+          <a:p>
+            <a:pPr>
+              <a:spcAft>
+                <a:spcPts val="600"/>
+              </a:spcAft>
+              <a:defRPr sz="1100" b="1">
                 <a:solidFill>
                   <a:srgbClr val="1E293B"/>
                 </a:solidFill>
               </a:defRPr>
             </a:pPr>
             <a:r>
-              <a:t>Expectation: "Prevent material misstatements &amp; NCI leakage prior to external audits."  ➔  Delivery: Automated IFRS 10 rule engine verifies profit distribution &amp; flags critical anomalies instantly.</a:t>
+              <a:t>Consolidated: 0.96x</a:t>
+            </a:r>
+            <a:br/>
+            <a:r>
+              <a:t>Regulatory Ceiling: Max 5.0x</a:t>
+            </a:r>
+          </a:p>
+          <a:p>
+            <a:pPr>
+              <a:spcAft>
+                <a:spcPts val="1000"/>
+              </a:spcAft>
+              <a:defRPr sz="1000" b="1">
+                <a:solidFill>
+                  <a:srgbClr val="0D9488"/>
+                </a:solidFill>
+              </a:defRPr>
+            </a:pPr>
+            <a:r>
+              <a:t>STATUS: HIGHLY CONSERVATIVE</a:t>
+            </a:r>
+          </a:p>
+          <a:p>
+            <a:pPr>
+              <a:spcAft>
+                <a:spcPts val="400"/>
+              </a:spcAft>
+              <a:defRPr sz="1100">
+                <a:solidFill>
+                  <a:srgbClr val="1E293B"/>
+                </a:solidFill>
+              </a:defRPr>
+            </a:pPr>
+            <a:r>
+              <a:t>• Capital structure provides ample liquidity buffer for operational growth.</a:t>
+            </a:r>
+          </a:p>
+          <a:p>
+            <a:pPr>
+              <a:spcAft>
+                <a:spcPts val="400"/>
+              </a:spcAft>
+              <a:defRPr sz="1100">
+                <a:solidFill>
+                  <a:srgbClr val="1E293B"/>
+                </a:solidFill>
+              </a:defRPr>
+            </a:pPr>
+            <a:r>
+              <a:t>• Well below regulatory leverage thresholds for financial institutions.</a:t>
             </a:r>
           </a:p>
         </p:txBody>
@@ -8997,8 +10116,8 @@
         </p:nvSpPr>
         <p:spPr>
           <a:xfrm>
-            <a:off x="731520" y="2468880"/>
-            <a:ext cx="10728655" cy="822960"/>
+            <a:off x="4416552" y="1600200"/>
+            <a:ext cx="3328416" cy="4389120"/>
           </a:xfrm>
           <a:prstGeom prst="roundRect">
             <a:avLst/>
@@ -9036,20 +10155,20 @@
       </p:sp>
       <p:sp>
         <p:nvSpPr>
-          <p:cNvPr id="10" name="Rectangle 9"/>
+          <p:cNvPr id="10" name="Rounded Rectangle 9"/>
           <p:cNvSpPr/>
           <p:nvPr/>
         </p:nvSpPr>
         <p:spPr>
           <a:xfrm>
-            <a:off x="731520" y="2468880"/>
-            <a:ext cx="54864" cy="822960"/>
-          </a:xfrm>
-          <a:prstGeom prst="rect">
-            <a:avLst/>
-          </a:prstGeom>
-          <a:solidFill>
-            <a:srgbClr val="1B4332"/>
+            <a:off x="4416552" y="1600200"/>
+            <a:ext cx="3328416" cy="73152"/>
+          </a:xfrm>
+          <a:prstGeom prst="roundRect">
+            <a:avLst/>
+          </a:prstGeom>
+          <a:solidFill>
+            <a:srgbClr val="0D9488"/>
           </a:solidFill>
           <a:ln>
             <a:noFill/>
@@ -9085,8 +10204,8 @@
         </p:nvSpPr>
         <p:spPr>
           <a:xfrm>
-            <a:off x="914400" y="2542032"/>
-            <a:ext cx="10332720" cy="685800"/>
+            <a:off x="4636008" y="1819656"/>
+            <a:ext cx="2889504" cy="3931920"/>
           </a:xfrm>
           <a:prstGeom prst="rect">
             <a:avLst/>
@@ -9100,26 +10219,81 @@
           <a:lstStyle/>
           <a:p>
             <a:pPr>
-              <a:defRPr sz="1050" b="1">
-                <a:solidFill>
-                  <a:srgbClr val="B48214"/>
-                </a:solidFill>
-              </a:defRPr>
-            </a:pPr>
-            <a:r>
-              <a:t>GROUP CHIEF FINANCIAL OFFICER (CFO)</a:t>
-            </a:r>
-          </a:p>
-          <a:p>
-            <a:pPr>
-              <a:defRPr sz="1050">
+              <a:spcAft>
+                <a:spcPts val="600"/>
+              </a:spcAft>
+              <a:defRPr sz="1400" b="1">
+                <a:solidFill>
+                  <a:srgbClr val="0F172A"/>
+                </a:solidFill>
+              </a:defRPr>
+            </a:pPr>
+            <a:r>
+              <a:t>Profitability (ROA)</a:t>
+            </a:r>
+          </a:p>
+          <a:p>
+            <a:pPr>
+              <a:spcAft>
+                <a:spcPts val="600"/>
+              </a:spcAft>
+              <a:defRPr sz="1100" b="1">
                 <a:solidFill>
                   <a:srgbClr val="1E293B"/>
                 </a:solidFill>
               </a:defRPr>
             </a:pPr>
             <a:r>
-              <a:t>Expectation: "Accelerate group consolidation closing cycles with zero arithmetic risk."  ➔  Delivery: Dynamic KPI summaries, instant sensitivity simulations, and executive board-ready memos.</a:t>
+              <a:t>Consolidated: 5.4%</a:t>
+            </a:r>
+            <a:br/>
+            <a:r>
+              <a:t>Industry Average: 3.5% - 5.2%</a:t>
+            </a:r>
+          </a:p>
+          <a:p>
+            <a:pPr>
+              <a:spcAft>
+                <a:spcPts val="1000"/>
+              </a:spcAft>
+              <a:defRPr sz="1000" b="1">
+                <a:solidFill>
+                  <a:srgbClr val="0D9488"/>
+                </a:solidFill>
+              </a:defRPr>
+            </a:pPr>
+            <a:r>
+              <a:t>STATUS: OUTPERFORMING</a:t>
+            </a:r>
+          </a:p>
+          <a:p>
+            <a:pPr>
+              <a:spcAft>
+                <a:spcPts val="400"/>
+              </a:spcAft>
+              <a:defRPr sz="1100">
+                <a:solidFill>
+                  <a:srgbClr val="1E293B"/>
+                </a:solidFill>
+              </a:defRPr>
+            </a:pPr>
+            <a:r>
+              <a:t>• Group asset return sits in the upper quartile of microfinance peers.</a:t>
+            </a:r>
+          </a:p>
+          <a:p>
+            <a:pPr>
+              <a:spcAft>
+                <a:spcPts val="400"/>
+              </a:spcAft>
+              <a:defRPr sz="1100">
+                <a:solidFill>
+                  <a:srgbClr val="1E293B"/>
+                </a:solidFill>
+              </a:defRPr>
+            </a:pPr>
+            <a:r>
+              <a:t>• Consolidated Net Income expanded +14.2% YoY ($325M vs $284.7M).</a:t>
             </a:r>
           </a:p>
         </p:txBody>
@@ -9132,8 +10306,8 @@
         </p:nvSpPr>
         <p:spPr>
           <a:xfrm>
-            <a:off x="731520" y="3383280"/>
-            <a:ext cx="10728655" cy="822960"/>
+            <a:off x="8101584" y="1600200"/>
+            <a:ext cx="3328416" cy="4389120"/>
           </a:xfrm>
           <a:prstGeom prst="roundRect">
             <a:avLst/>
@@ -9171,20 +10345,20 @@
       </p:sp>
       <p:sp>
         <p:nvSpPr>
-          <p:cNvPr id="13" name="Rectangle 12"/>
+          <p:cNvPr id="13" name="Rounded Rectangle 12"/>
           <p:cNvSpPr/>
           <p:nvPr/>
         </p:nvSpPr>
         <p:spPr>
           <a:xfrm>
-            <a:off x="731520" y="3383280"/>
-            <a:ext cx="54864" cy="822960"/>
-          </a:xfrm>
-          <a:prstGeom prst="rect">
-            <a:avLst/>
-          </a:prstGeom>
-          <a:solidFill>
-            <a:srgbClr val="1B4332"/>
+            <a:off x="8101584" y="1600200"/>
+            <a:ext cx="3328416" cy="73152"/>
+          </a:xfrm>
+          <a:prstGeom prst="roundRect">
+            <a:avLst/>
+          </a:prstGeom>
+          <a:solidFill>
+            <a:srgbClr val="D97706"/>
           </a:solidFill>
           <a:ln>
             <a:noFill/>
@@ -9220,8 +10394,8 @@
         </p:nvSpPr>
         <p:spPr>
           <a:xfrm>
-            <a:off x="914400" y="3456432"/>
-            <a:ext cx="10332720" cy="685800"/>
+            <a:off x="8321040" y="1819656"/>
+            <a:ext cx="2889504" cy="3931920"/>
           </a:xfrm>
           <a:prstGeom prst="rect">
             <a:avLst/>
@@ -9235,296 +10409,81 @@
           <a:lstStyle/>
           <a:p>
             <a:pPr>
-              <a:defRPr sz="1050" b="1">
-                <a:solidFill>
-                  <a:srgbClr val="B48214"/>
-                </a:solidFill>
-              </a:defRPr>
-            </a:pPr>
-            <a:r>
-              <a:t>INTERNAL AUDIT LEADERSHIP</a:t>
-            </a:r>
-          </a:p>
-          <a:p>
-            <a:pPr>
-              <a:defRPr sz="1050">
+              <a:spcAft>
+                <a:spcPts val="600"/>
+              </a:spcAft>
+              <a:defRPr sz="1400" b="1">
+                <a:solidFill>
+                  <a:srgbClr val="0F172A"/>
+                </a:solidFill>
+              </a:defRPr>
+            </a:pPr>
+            <a:r>
+              <a:t>Affiliated Debt (RP)</a:t>
+            </a:r>
+          </a:p>
+          <a:p>
+            <a:pPr>
+              <a:spcAft>
+                <a:spcPts val="600"/>
+              </a:spcAft>
+              <a:defRPr sz="1100" b="1">
                 <a:solidFill>
                   <a:srgbClr val="1E293B"/>
                 </a:solidFill>
               </a:defRPr>
             </a:pPr>
             <a:r>
-              <a:t>Expectation: "Maintain structured electronic workpapers with traceable sign-offs."  ➔  Delivery: Actionable Review Workspace with item status toggles, auditor notes, and timestamped audit trails.</a:t>
-            </a:r>
-          </a:p>
-        </p:txBody>
-      </p:sp>
-      <p:sp>
-        <p:nvSpPr>
-          <p:cNvPr id="15" name="Rounded Rectangle 14"/>
-          <p:cNvSpPr/>
-          <p:nvPr/>
-        </p:nvSpPr>
-        <p:spPr>
-          <a:xfrm>
-            <a:off x="731520" y="4297680"/>
-            <a:ext cx="10728655" cy="822960"/>
-          </a:xfrm>
-          <a:prstGeom prst="roundRect">
-            <a:avLst/>
-          </a:prstGeom>
-          <a:solidFill>
-            <a:srgbClr val="F8FAFC"/>
-          </a:solidFill>
-          <a:ln>
-            <a:solidFill>
-              <a:srgbClr val="E2E8F0"/>
-            </a:solidFill>
-          </a:ln>
-        </p:spPr>
-        <p:style>
-          <a:lnRef idx="1">
-            <a:schemeClr val="accent1"/>
-          </a:lnRef>
-          <a:fillRef idx="3">
-            <a:schemeClr val="accent1"/>
-          </a:fillRef>
-          <a:effectRef idx="2">
-            <a:schemeClr val="accent1"/>
-          </a:effectRef>
-          <a:fontRef idx="minor">
-            <a:schemeClr val="lt1"/>
-          </a:fontRef>
-        </p:style>
-        <p:txBody>
-          <a:bodyPr rtlCol="0" anchor="ctr"/>
-          <a:lstStyle/>
-          <a:p>
-            <a:pPr algn="ctr"/>
-          </a:p>
-        </p:txBody>
-      </p:sp>
-      <p:sp>
-        <p:nvSpPr>
-          <p:cNvPr id="16" name="Rectangle 15"/>
-          <p:cNvSpPr/>
-          <p:nvPr/>
-        </p:nvSpPr>
-        <p:spPr>
-          <a:xfrm>
-            <a:off x="731520" y="4297680"/>
-            <a:ext cx="54864" cy="822960"/>
-          </a:xfrm>
-          <a:prstGeom prst="rect">
-            <a:avLst/>
-          </a:prstGeom>
-          <a:solidFill>
-            <a:srgbClr val="1B4332"/>
-          </a:solidFill>
-          <a:ln>
-            <a:noFill/>
-          </a:ln>
-        </p:spPr>
-        <p:style>
-          <a:lnRef idx="1">
-            <a:schemeClr val="accent1"/>
-          </a:lnRef>
-          <a:fillRef idx="3">
-            <a:schemeClr val="accent1"/>
-          </a:fillRef>
-          <a:effectRef idx="2">
-            <a:schemeClr val="accent1"/>
-          </a:effectRef>
-          <a:fontRef idx="minor">
-            <a:schemeClr val="lt1"/>
-          </a:fontRef>
-        </p:style>
-        <p:txBody>
-          <a:bodyPr rtlCol="0" anchor="ctr"/>
-          <a:lstStyle/>
-          <a:p>
-            <a:pPr algn="ctr"/>
-          </a:p>
-        </p:txBody>
-      </p:sp>
-      <p:sp>
-        <p:nvSpPr>
-          <p:cNvPr id="17" name="TextBox 16"/>
-          <p:cNvSpPr txBox="1"/>
-          <p:nvPr/>
-        </p:nvSpPr>
-        <p:spPr>
-          <a:xfrm>
-            <a:off x="914400" y="4370832"/>
-            <a:ext cx="10332720" cy="685800"/>
-          </a:xfrm>
-          <a:prstGeom prst="rect">
-            <a:avLst/>
-          </a:prstGeom>
-          <a:noFill/>
-        </p:spPr>
-        <p:txBody>
-          <a:bodyPr wrap="square">
-            <a:spAutoFit/>
-          </a:bodyPr>
-          <a:lstStyle/>
-          <a:p>
-            <a:pPr>
-              <a:defRPr sz="1050" b="1">
-                <a:solidFill>
-                  <a:srgbClr val="B48214"/>
-                </a:solidFill>
-              </a:defRPr>
-            </a:pPr>
-            <a:r>
-              <a:t>SUBSIDIARY CFOS (OPERATING UNITS)</a:t>
-            </a:r>
-          </a:p>
-          <a:p>
-            <a:pPr>
-              <a:defRPr sz="1050">
+              <a:t>Total RP Receivables: $241M</a:t>
+            </a:r>
+            <a:br/>
+            <a:r>
+              <a:t>Share of Total Assets: 4.3%</a:t>
+            </a:r>
+          </a:p>
+          <a:p>
+            <a:pPr>
+              <a:spcAft>
+                <a:spcPts val="1000"/>
+              </a:spcAft>
+              <a:defRPr sz="1000" b="1">
+                <a:solidFill>
+                  <a:srgbClr val="D97706"/>
+                </a:solidFill>
+              </a:defRPr>
+            </a:pPr>
+            <a:r>
+              <a:t>STATUS: CONCENTRATION WATCH</a:t>
+            </a:r>
+          </a:p>
+          <a:p>
+            <a:pPr>
+              <a:spcAft>
+                <a:spcPts val="400"/>
+              </a:spcAft>
+              <a:defRPr sz="1100">
                 <a:solidFill>
                   <a:srgbClr val="1E293B"/>
                 </a:solidFill>
               </a:defRPr>
             </a:pPr>
             <a:r>
-              <a:t>Expectation: "Ensure transparent, fair elimination and reconciliation calculations."  ➔  Delivery: Line-by-line breakdown of all variances enables rapid cross-checking against subsidiary general ledgers.</a:t>
-            </a:r>
-          </a:p>
-        </p:txBody>
-      </p:sp>
-      <p:sp>
-        <p:nvSpPr>
-          <p:cNvPr id="18" name="Rounded Rectangle 17"/>
-          <p:cNvSpPr/>
-          <p:nvPr/>
-        </p:nvSpPr>
-        <p:spPr>
-          <a:xfrm>
-            <a:off x="731520" y="5212080"/>
-            <a:ext cx="10728655" cy="822960"/>
-          </a:xfrm>
-          <a:prstGeom prst="roundRect">
-            <a:avLst/>
-          </a:prstGeom>
-          <a:solidFill>
-            <a:srgbClr val="F8FAFC"/>
-          </a:solidFill>
-          <a:ln>
-            <a:solidFill>
-              <a:srgbClr val="E2E8F0"/>
-            </a:solidFill>
-          </a:ln>
-        </p:spPr>
-        <p:style>
-          <a:lnRef idx="1">
-            <a:schemeClr val="accent1"/>
-          </a:lnRef>
-          <a:fillRef idx="3">
-            <a:schemeClr val="accent1"/>
-          </a:fillRef>
-          <a:effectRef idx="2">
-            <a:schemeClr val="accent1"/>
-          </a:effectRef>
-          <a:fontRef idx="minor">
-            <a:schemeClr val="lt1"/>
-          </a:fontRef>
-        </p:style>
-        <p:txBody>
-          <a:bodyPr rtlCol="0" anchor="ctr"/>
-          <a:lstStyle/>
-          <a:p>
-            <a:pPr algn="ctr"/>
-          </a:p>
-        </p:txBody>
-      </p:sp>
-      <p:sp>
-        <p:nvSpPr>
-          <p:cNvPr id="19" name="Rectangle 18"/>
-          <p:cNvSpPr/>
-          <p:nvPr/>
-        </p:nvSpPr>
-        <p:spPr>
-          <a:xfrm>
-            <a:off x="731520" y="5212080"/>
-            <a:ext cx="54864" cy="822960"/>
-          </a:xfrm>
-          <a:prstGeom prst="rect">
-            <a:avLst/>
-          </a:prstGeom>
-          <a:solidFill>
-            <a:srgbClr val="1B4332"/>
-          </a:solidFill>
-          <a:ln>
-            <a:noFill/>
-          </a:ln>
-        </p:spPr>
-        <p:style>
-          <a:lnRef idx="1">
-            <a:schemeClr val="accent1"/>
-          </a:lnRef>
-          <a:fillRef idx="3">
-            <a:schemeClr val="accent1"/>
-          </a:fillRef>
-          <a:effectRef idx="2">
-            <a:schemeClr val="accent1"/>
-          </a:effectRef>
-          <a:fontRef idx="minor">
-            <a:schemeClr val="lt1"/>
-          </a:fontRef>
-        </p:style>
-        <p:txBody>
-          <a:bodyPr rtlCol="0" anchor="ctr"/>
-          <a:lstStyle/>
-          <a:p>
-            <a:pPr algn="ctr"/>
-          </a:p>
-        </p:txBody>
-      </p:sp>
-      <p:sp>
-        <p:nvSpPr>
-          <p:cNvPr id="20" name="TextBox 19"/>
-          <p:cNvSpPr txBox="1"/>
-          <p:nvPr/>
-        </p:nvSpPr>
-        <p:spPr>
-          <a:xfrm>
-            <a:off x="914400" y="5285232"/>
-            <a:ext cx="10332720" cy="685800"/>
-          </a:xfrm>
-          <a:prstGeom prst="rect">
-            <a:avLst/>
-          </a:prstGeom>
-          <a:noFill/>
-        </p:spPr>
-        <p:txBody>
-          <a:bodyPr wrap="square">
-            <a:spAutoFit/>
-          </a:bodyPr>
-          <a:lstStyle/>
-          <a:p>
-            <a:pPr>
-              <a:defRPr sz="1050" b="1">
-                <a:solidFill>
-                  <a:srgbClr val="B48214"/>
-                </a:solidFill>
-              </a:defRPr>
-            </a:pPr>
-            <a:r>
-              <a:t>IT &amp; DATA GOVERNANCE</a:t>
-            </a:r>
-          </a:p>
-          <a:p>
-            <a:pPr>
-              <a:defRPr sz="1050">
+              <a:t>• Aggregate exposure is proportional to balance sheet scale.</a:t>
+            </a:r>
+          </a:p>
+          <a:p>
+            <a:pPr>
+              <a:spcAft>
+                <a:spcPts val="400"/>
+              </a:spcAft>
+              <a:defRPr sz="1100">
                 <a:solidFill>
                   <a:srgbClr val="1E293B"/>
                 </a:solidFill>
               </a:defRPr>
             </a:pPr>
             <a:r>
-              <a:t>Expectation: "Strict data privacy with no exposure of unreleased financials to public LLMs."  ➔  Delivery: Runs entirely client-side/on-premise; append-only point-in-time snapshot persistence.</a:t>
+              <a:t>• However, concentration at Subsidiary II ($88M) warrants tight monitoring.</a:t>
             </a:r>
           </a:p>
         </p:txBody>
@@ -9663,7 +10622,7 @@
               </a:defRPr>
             </a:pPr>
             <a:r>
-              <a:t>DEPLOYMENT PLAN</a:t>
+              <a:t>VALUE DELIVERY</a:t>
             </a:r>
           </a:p>
         </p:txBody>
@@ -9698,7 +10657,7 @@
               </a:defRPr>
             </a:pPr>
             <a:r>
-              <a:t>Phased Enterprise Implementation Roadmap</a:t>
+              <a:t>Stakeholder Expectation Alignment Matrix</a:t>
             </a:r>
           </a:p>
         </p:txBody>
@@ -9711,8 +10670,8 @@
         </p:nvSpPr>
         <p:spPr>
           <a:xfrm>
-            <a:off x="731520" y="1600200"/>
-            <a:ext cx="3328416" cy="4389120"/>
+            <a:off x="731520" y="1554480"/>
+            <a:ext cx="10728655" cy="822960"/>
           </a:xfrm>
           <a:prstGeom prst="roundRect">
             <a:avLst/>
@@ -9720,7 +10679,7 @@
           <a:solidFill>
             <a:srgbClr val="F8FAFC"/>
           </a:solidFill>
-          <a:ln w="12700">
+          <a:ln>
             <a:solidFill>
               <a:srgbClr val="E2E8F0"/>
             </a:solidFill>
@@ -9750,20 +10709,20 @@
       </p:sp>
       <p:sp>
         <p:nvSpPr>
-          <p:cNvPr id="7" name="Rounded Rectangle 6"/>
+          <p:cNvPr id="7" name="Rectangle 6"/>
           <p:cNvSpPr/>
           <p:nvPr/>
         </p:nvSpPr>
         <p:spPr>
           <a:xfrm>
-            <a:off x="731520" y="1600200"/>
-            <a:ext cx="3328416" cy="73152"/>
-          </a:xfrm>
-          <a:prstGeom prst="roundRect">
-            <a:avLst/>
-          </a:prstGeom>
-          <a:solidFill>
-            <a:srgbClr val="0D9488"/>
+            <a:off x="731520" y="1554480"/>
+            <a:ext cx="54864" cy="822960"/>
+          </a:xfrm>
+          <a:prstGeom prst="rect">
+            <a:avLst/>
+          </a:prstGeom>
+          <a:solidFill>
+            <a:srgbClr val="1B4332"/>
           </a:solidFill>
           <a:ln>
             <a:noFill/>
@@ -9799,8 +10758,8 @@
         </p:nvSpPr>
         <p:spPr>
           <a:xfrm>
-            <a:off x="950976" y="1819656"/>
-            <a:ext cx="2889504" cy="3950208"/>
+            <a:off x="914400" y="1627632"/>
+            <a:ext cx="10332720" cy="685800"/>
           </a:xfrm>
           <a:prstGeom prst="rect">
             <a:avLst/>
@@ -9814,81 +10773,26 @@
           <a:lstStyle/>
           <a:p>
             <a:pPr>
-              <a:spcAft>
-                <a:spcPts val="800"/>
-              </a:spcAft>
-              <a:defRPr sz="1350" b="1">
-                <a:solidFill>
-                  <a:srgbClr val="0D9488"/>
-                </a:solidFill>
-              </a:defRPr>
-            </a:pPr>
-            <a:r>
-              <a:t>Phase 1: Working PoC (Delivered)</a:t>
-            </a:r>
-            <a:br/>
-            <a:r>
-              <a:t>(Month 1)</a:t>
-            </a:r>
-          </a:p>
-          <a:p>
-            <a:pPr>
-              <a:spcAft>
-                <a:spcPts val="400"/>
-              </a:spcAft>
-              <a:defRPr sz="1100">
+              <a:defRPr sz="1050" b="1">
+                <a:solidFill>
+                  <a:srgbClr val="B48214"/>
+                </a:solidFill>
+              </a:defRPr>
+            </a:pPr>
+            <a:r>
+              <a:t>AUDIT COMMITTEE / BOARD OF SUPERVISORS</a:t>
+            </a:r>
+          </a:p>
+          <a:p>
+            <a:pPr>
+              <a:defRPr sz="1050">
                 <a:solidFill>
                   <a:srgbClr val="1E293B"/>
                 </a:solidFill>
               </a:defRPr>
             </a:pPr>
             <a:r>
-              <a:t>• Consolidation rule engine validated for 6 entities.</a:t>
-            </a:r>
-          </a:p>
-          <a:p>
-            <a:pPr>
-              <a:spcAft>
-                <a:spcPts val="400"/>
-              </a:spcAft>
-              <a:defRPr sz="1100">
-                <a:solidFill>
-                  <a:srgbClr val="1E293B"/>
-                </a:solidFill>
-              </a:defRPr>
-            </a:pPr>
-            <a:r>
-              <a:t>• Conversational AI Copilot with quick-action chips.</a:t>
-            </a:r>
-          </a:p>
-          <a:p>
-            <a:pPr>
-              <a:spcAft>
-                <a:spcPts val="400"/>
-              </a:spcAft>
-              <a:defRPr sz="1100">
-                <a:solidFill>
-                  <a:srgbClr val="1E293B"/>
-                </a:solidFill>
-              </a:defRPr>
-            </a:pPr>
-            <a:r>
-              <a:t>• Actionable 'Review Workspace' for anomaly tracking.</a:t>
-            </a:r>
-          </a:p>
-          <a:p>
-            <a:pPr>
-              <a:spcAft>
-                <a:spcPts val="400"/>
-              </a:spcAft>
-              <a:defRPr sz="1100">
-                <a:solidFill>
-                  <a:srgbClr val="1E293B"/>
-                </a:solidFill>
-              </a:defRPr>
-            </a:pPr>
-            <a:r>
-              <a:t>• Self-contained local execution &amp; GitHub repository.</a:t>
+              <a:t>Expectation: "Prevent material misstatements &amp; NCI leakage prior to external audits."  ➔  Delivery: Automated IFRS 10 rule engine verifies profit distribution &amp; flags critical anomalies instantly.</a:t>
             </a:r>
           </a:p>
         </p:txBody>
@@ -9901,8 +10805,8 @@
         </p:nvSpPr>
         <p:spPr>
           <a:xfrm>
-            <a:off x="4416552" y="1600200"/>
-            <a:ext cx="3328416" cy="4389120"/>
+            <a:off x="731520" y="2468880"/>
+            <a:ext cx="10728655" cy="822960"/>
           </a:xfrm>
           <a:prstGeom prst="roundRect">
             <a:avLst/>
@@ -9910,7 +10814,7 @@
           <a:solidFill>
             <a:srgbClr val="F8FAFC"/>
           </a:solidFill>
-          <a:ln w="12700">
+          <a:ln>
             <a:solidFill>
               <a:srgbClr val="E2E8F0"/>
             </a:solidFill>
@@ -9940,20 +10844,20 @@
       </p:sp>
       <p:sp>
         <p:nvSpPr>
-          <p:cNvPr id="10" name="Rounded Rectangle 9"/>
+          <p:cNvPr id="10" name="Rectangle 9"/>
           <p:cNvSpPr/>
           <p:nvPr/>
         </p:nvSpPr>
         <p:spPr>
           <a:xfrm>
-            <a:off x="4416552" y="1600200"/>
-            <a:ext cx="3328416" cy="73152"/>
-          </a:xfrm>
-          <a:prstGeom prst="roundRect">
-            <a:avLst/>
-          </a:prstGeom>
-          <a:solidFill>
-            <a:srgbClr val="B48214"/>
+            <a:off x="731520" y="2468880"/>
+            <a:ext cx="54864" cy="822960"/>
+          </a:xfrm>
+          <a:prstGeom prst="rect">
+            <a:avLst/>
+          </a:prstGeom>
+          <a:solidFill>
+            <a:srgbClr val="1B4332"/>
           </a:solidFill>
           <a:ln>
             <a:noFill/>
@@ -9989,8 +10893,8 @@
         </p:nvSpPr>
         <p:spPr>
           <a:xfrm>
-            <a:off x="4636008" y="1819656"/>
-            <a:ext cx="2889504" cy="3950208"/>
+            <a:off x="914400" y="2542032"/>
+            <a:ext cx="10332720" cy="685800"/>
           </a:xfrm>
           <a:prstGeom prst="rect">
             <a:avLst/>
@@ -10004,81 +10908,26 @@
           <a:lstStyle/>
           <a:p>
             <a:pPr>
-              <a:spcAft>
-                <a:spcPts val="800"/>
-              </a:spcAft>
-              <a:defRPr sz="1350" b="1">
+              <a:defRPr sz="1050" b="1">
                 <a:solidFill>
                   <a:srgbClr val="B48214"/>
                 </a:solidFill>
               </a:defRPr>
             </a:pPr>
             <a:r>
-              <a:t>Phase 2: Integration &amp; Pilot</a:t>
-            </a:r>
-            <a:br/>
-            <a:r>
-              <a:t>(Months 2 - 3)</a:t>
-            </a:r>
-          </a:p>
-          <a:p>
-            <a:pPr>
-              <a:spcAft>
-                <a:spcPts val="400"/>
-              </a:spcAft>
-              <a:defRPr sz="1100">
+              <a:t>GROUP CHIEF FINANCIAL OFFICER (CFO)</a:t>
+            </a:r>
+          </a:p>
+          <a:p>
+            <a:pPr>
+              <a:defRPr sz="1050">
                 <a:solidFill>
                   <a:srgbClr val="1E293B"/>
                 </a:solidFill>
               </a:defRPr>
             </a:pPr>
             <a:r>
-              <a:t>• Direct ERP/GL database connectors (SAP/Oracle).</a:t>
-            </a:r>
-          </a:p>
-          <a:p>
-            <a:pPr>
-              <a:spcAft>
-                <a:spcPts val="400"/>
-              </a:spcAft>
-              <a:defRPr sz="1100">
-                <a:solidFill>
-                  <a:srgbClr val="1E293B"/>
-                </a:solidFill>
-              </a:defRPr>
-            </a:pPr>
-            <a:r>
-              <a:t>• Immutable point-in-time snapshot database store.</a:t>
-            </a:r>
-          </a:p>
-          <a:p>
-            <a:pPr>
-              <a:spcAft>
-                <a:spcPts val="400"/>
-              </a:spcAft>
-              <a:defRPr sz="1100">
-                <a:solidFill>
-                  <a:srgbClr val="1E293B"/>
-                </a:solidFill>
-              </a:defRPr>
-            </a:pPr>
-            <a:r>
-              <a:t>• Automated email/chat notification dispatch to subsidiaries.</a:t>
-            </a:r>
-          </a:p>
-          <a:p>
-            <a:pPr>
-              <a:spcAft>
-                <a:spcPts val="400"/>
-              </a:spcAft>
-              <a:defRPr sz="1100">
-                <a:solidFill>
-                  <a:srgbClr val="1E293B"/>
-                </a:solidFill>
-              </a:defRPr>
-            </a:pPr>
-            <a:r>
-              <a:t>• Parallel dry-run benchmarked against prior-year audited data.</a:t>
+              <a:t>Expectation: "Accelerate group consolidation closing cycles with zero arithmetic risk."  ➔  Delivery: Dynamic KPI summaries, instant sensitivity simulations, and executive board-ready memos.</a:t>
             </a:r>
           </a:p>
         </p:txBody>
@@ -10091,8 +10940,8 @@
         </p:nvSpPr>
         <p:spPr>
           <a:xfrm>
-            <a:off x="8101584" y="1600200"/>
-            <a:ext cx="3328416" cy="4389120"/>
+            <a:off x="731520" y="3383280"/>
+            <a:ext cx="10728655" cy="822960"/>
           </a:xfrm>
           <a:prstGeom prst="roundRect">
             <a:avLst/>
@@ -10100,7 +10949,7 @@
           <a:solidFill>
             <a:srgbClr val="F8FAFC"/>
           </a:solidFill>
-          <a:ln w="12700">
+          <a:ln>
             <a:solidFill>
               <a:srgbClr val="E2E8F0"/>
             </a:solidFill>
@@ -10130,16 +10979,16 @@
       </p:sp>
       <p:sp>
         <p:nvSpPr>
-          <p:cNvPr id="13" name="Rounded Rectangle 12"/>
+          <p:cNvPr id="13" name="Rectangle 12"/>
           <p:cNvSpPr/>
           <p:nvPr/>
         </p:nvSpPr>
         <p:spPr>
           <a:xfrm>
-            <a:off x="8101584" y="1600200"/>
-            <a:ext cx="3328416" cy="73152"/>
-          </a:xfrm>
-          <a:prstGeom prst="roundRect">
+            <a:off x="731520" y="3383280"/>
+            <a:ext cx="54864" cy="822960"/>
+          </a:xfrm>
+          <a:prstGeom prst="rect">
             <a:avLst/>
           </a:prstGeom>
           <a:solidFill>
@@ -10179,8 +11028,8 @@
         </p:nvSpPr>
         <p:spPr>
           <a:xfrm>
-            <a:off x="8321040" y="1819656"/>
-            <a:ext cx="2889504" cy="3950208"/>
+            <a:off x="914400" y="3456432"/>
+            <a:ext cx="10332720" cy="685800"/>
           </a:xfrm>
           <a:prstGeom prst="rect">
             <a:avLst/>
@@ -10194,81 +11043,296 @@
           <a:lstStyle/>
           <a:p>
             <a:pPr>
-              <a:spcAft>
-                <a:spcPts val="800"/>
-              </a:spcAft>
-              <a:defRPr sz="1350" b="1">
-                <a:solidFill>
-                  <a:srgbClr val="1B4332"/>
-                </a:solidFill>
-              </a:defRPr>
-            </a:pPr>
-            <a:r>
-              <a:t>Phase 3: Full Enterprise Rollout</a:t>
-            </a:r>
-            <a:br/>
-            <a:r>
-              <a:t>(Month 4+)</a:t>
-            </a:r>
-          </a:p>
-          <a:p>
-            <a:pPr>
-              <a:spcAft>
-                <a:spcPts val="400"/>
-              </a:spcAft>
-              <a:defRPr sz="1100">
+              <a:defRPr sz="1050" b="1">
+                <a:solidFill>
+                  <a:srgbClr val="B48214"/>
+                </a:solidFill>
+              </a:defRPr>
+            </a:pPr>
+            <a:r>
+              <a:t>INTERNAL AUDIT LEADERSHIP</a:t>
+            </a:r>
+          </a:p>
+          <a:p>
+            <a:pPr>
+              <a:defRPr sz="1050">
                 <a:solidFill>
                   <a:srgbClr val="1E293B"/>
                 </a:solidFill>
               </a:defRPr>
             </a:pPr>
             <a:r>
-              <a:t>• Multi-tenant Role-Based Access Control (RBAC) &amp; SSO.</a:t>
-            </a:r>
-          </a:p>
-          <a:p>
-            <a:pPr>
-              <a:spcAft>
-                <a:spcPts val="400"/>
-              </a:spcAft>
-              <a:defRPr sz="1100">
+              <a:t>Expectation: "Maintain structured electronic workpapers with traceable sign-offs."  ➔  Delivery: Actionable Review Workspace with item status toggles, auditor notes, and timestamped audit trails.</a:t>
+            </a:r>
+          </a:p>
+        </p:txBody>
+      </p:sp>
+      <p:sp>
+        <p:nvSpPr>
+          <p:cNvPr id="15" name="Rounded Rectangle 14"/>
+          <p:cNvSpPr/>
+          <p:nvPr/>
+        </p:nvSpPr>
+        <p:spPr>
+          <a:xfrm>
+            <a:off x="731520" y="4297680"/>
+            <a:ext cx="10728655" cy="822960"/>
+          </a:xfrm>
+          <a:prstGeom prst="roundRect">
+            <a:avLst/>
+          </a:prstGeom>
+          <a:solidFill>
+            <a:srgbClr val="F8FAFC"/>
+          </a:solidFill>
+          <a:ln>
+            <a:solidFill>
+              <a:srgbClr val="E2E8F0"/>
+            </a:solidFill>
+          </a:ln>
+        </p:spPr>
+        <p:style>
+          <a:lnRef idx="1">
+            <a:schemeClr val="accent1"/>
+          </a:lnRef>
+          <a:fillRef idx="3">
+            <a:schemeClr val="accent1"/>
+          </a:fillRef>
+          <a:effectRef idx="2">
+            <a:schemeClr val="accent1"/>
+          </a:effectRef>
+          <a:fontRef idx="minor">
+            <a:schemeClr val="lt1"/>
+          </a:fontRef>
+        </p:style>
+        <p:txBody>
+          <a:bodyPr rtlCol="0" anchor="ctr"/>
+          <a:lstStyle/>
+          <a:p>
+            <a:pPr algn="ctr"/>
+          </a:p>
+        </p:txBody>
+      </p:sp>
+      <p:sp>
+        <p:nvSpPr>
+          <p:cNvPr id="16" name="Rectangle 15"/>
+          <p:cNvSpPr/>
+          <p:nvPr/>
+        </p:nvSpPr>
+        <p:spPr>
+          <a:xfrm>
+            <a:off x="731520" y="4297680"/>
+            <a:ext cx="54864" cy="822960"/>
+          </a:xfrm>
+          <a:prstGeom prst="rect">
+            <a:avLst/>
+          </a:prstGeom>
+          <a:solidFill>
+            <a:srgbClr val="1B4332"/>
+          </a:solidFill>
+          <a:ln>
+            <a:noFill/>
+          </a:ln>
+        </p:spPr>
+        <p:style>
+          <a:lnRef idx="1">
+            <a:schemeClr val="accent1"/>
+          </a:lnRef>
+          <a:fillRef idx="3">
+            <a:schemeClr val="accent1"/>
+          </a:fillRef>
+          <a:effectRef idx="2">
+            <a:schemeClr val="accent1"/>
+          </a:effectRef>
+          <a:fontRef idx="minor">
+            <a:schemeClr val="lt1"/>
+          </a:fontRef>
+        </p:style>
+        <p:txBody>
+          <a:bodyPr rtlCol="0" anchor="ctr"/>
+          <a:lstStyle/>
+          <a:p>
+            <a:pPr algn="ctr"/>
+          </a:p>
+        </p:txBody>
+      </p:sp>
+      <p:sp>
+        <p:nvSpPr>
+          <p:cNvPr id="17" name="TextBox 16"/>
+          <p:cNvSpPr txBox="1"/>
+          <p:nvPr/>
+        </p:nvSpPr>
+        <p:spPr>
+          <a:xfrm>
+            <a:off x="914400" y="4370832"/>
+            <a:ext cx="10332720" cy="685800"/>
+          </a:xfrm>
+          <a:prstGeom prst="rect">
+            <a:avLst/>
+          </a:prstGeom>
+          <a:noFill/>
+        </p:spPr>
+        <p:txBody>
+          <a:bodyPr wrap="square">
+            <a:spAutoFit/>
+          </a:bodyPr>
+          <a:lstStyle/>
+          <a:p>
+            <a:pPr>
+              <a:defRPr sz="1050" b="1">
+                <a:solidFill>
+                  <a:srgbClr val="B48214"/>
+                </a:solidFill>
+              </a:defRPr>
+            </a:pPr>
+            <a:r>
+              <a:t>SUBSIDIARY CFOS (OPERATING UNITS)</a:t>
+            </a:r>
+          </a:p>
+          <a:p>
+            <a:pPr>
+              <a:defRPr sz="1050">
                 <a:solidFill>
                   <a:srgbClr val="1E293B"/>
                 </a:solidFill>
               </a:defRPr>
             </a:pPr>
             <a:r>
-              <a:t>• Transaction-level automated intercompany elimination.</a:t>
-            </a:r>
-          </a:p>
-          <a:p>
-            <a:pPr>
-              <a:spcAft>
-                <a:spcPts val="400"/>
-              </a:spcAft>
-              <a:defRPr sz="1100">
+              <a:t>Expectation: "Ensure transparent, fair elimination and reconciliation calculations."  ➔  Delivery: Line-by-line breakdown of all variances enables rapid cross-checking against subsidiary general ledgers.</a:t>
+            </a:r>
+          </a:p>
+        </p:txBody>
+      </p:sp>
+      <p:sp>
+        <p:nvSpPr>
+          <p:cNvPr id="18" name="Rounded Rectangle 17"/>
+          <p:cNvSpPr/>
+          <p:nvPr/>
+        </p:nvSpPr>
+        <p:spPr>
+          <a:xfrm>
+            <a:off x="731520" y="5212080"/>
+            <a:ext cx="10728655" cy="822960"/>
+          </a:xfrm>
+          <a:prstGeom prst="roundRect">
+            <a:avLst/>
+          </a:prstGeom>
+          <a:solidFill>
+            <a:srgbClr val="F8FAFC"/>
+          </a:solidFill>
+          <a:ln>
+            <a:solidFill>
+              <a:srgbClr val="E2E8F0"/>
+            </a:solidFill>
+          </a:ln>
+        </p:spPr>
+        <p:style>
+          <a:lnRef idx="1">
+            <a:schemeClr val="accent1"/>
+          </a:lnRef>
+          <a:fillRef idx="3">
+            <a:schemeClr val="accent1"/>
+          </a:fillRef>
+          <a:effectRef idx="2">
+            <a:schemeClr val="accent1"/>
+          </a:effectRef>
+          <a:fontRef idx="minor">
+            <a:schemeClr val="lt1"/>
+          </a:fontRef>
+        </p:style>
+        <p:txBody>
+          <a:bodyPr rtlCol="0" anchor="ctr"/>
+          <a:lstStyle/>
+          <a:p>
+            <a:pPr algn="ctr"/>
+          </a:p>
+        </p:txBody>
+      </p:sp>
+      <p:sp>
+        <p:nvSpPr>
+          <p:cNvPr id="19" name="Rectangle 18"/>
+          <p:cNvSpPr/>
+          <p:nvPr/>
+        </p:nvSpPr>
+        <p:spPr>
+          <a:xfrm>
+            <a:off x="731520" y="5212080"/>
+            <a:ext cx="54864" cy="822960"/>
+          </a:xfrm>
+          <a:prstGeom prst="rect">
+            <a:avLst/>
+          </a:prstGeom>
+          <a:solidFill>
+            <a:srgbClr val="1B4332"/>
+          </a:solidFill>
+          <a:ln>
+            <a:noFill/>
+          </a:ln>
+        </p:spPr>
+        <p:style>
+          <a:lnRef idx="1">
+            <a:schemeClr val="accent1"/>
+          </a:lnRef>
+          <a:fillRef idx="3">
+            <a:schemeClr val="accent1"/>
+          </a:fillRef>
+          <a:effectRef idx="2">
+            <a:schemeClr val="accent1"/>
+          </a:effectRef>
+          <a:fontRef idx="minor">
+            <a:schemeClr val="lt1"/>
+          </a:fontRef>
+        </p:style>
+        <p:txBody>
+          <a:bodyPr rtlCol="0" anchor="ctr"/>
+          <a:lstStyle/>
+          <a:p>
+            <a:pPr algn="ctr"/>
+          </a:p>
+        </p:txBody>
+      </p:sp>
+      <p:sp>
+        <p:nvSpPr>
+          <p:cNvPr id="20" name="TextBox 19"/>
+          <p:cNvSpPr txBox="1"/>
+          <p:nvPr/>
+        </p:nvSpPr>
+        <p:spPr>
+          <a:xfrm>
+            <a:off x="914400" y="5285232"/>
+            <a:ext cx="10332720" cy="685800"/>
+          </a:xfrm>
+          <a:prstGeom prst="rect">
+            <a:avLst/>
+          </a:prstGeom>
+          <a:noFill/>
+        </p:spPr>
+        <p:txBody>
+          <a:bodyPr wrap="square">
+            <a:spAutoFit/>
+          </a:bodyPr>
+          <a:lstStyle/>
+          <a:p>
+            <a:pPr>
+              <a:defRPr sz="1050" b="1">
+                <a:solidFill>
+                  <a:srgbClr val="B48214"/>
+                </a:solidFill>
+              </a:defRPr>
+            </a:pPr>
+            <a:r>
+              <a:t>IT &amp; DATA GOVERNANCE</a:t>
+            </a:r>
+          </a:p>
+          <a:p>
+            <a:pPr>
+              <a:defRPr sz="1050">
                 <a:solidFill>
                   <a:srgbClr val="1E293B"/>
                 </a:solidFill>
               </a:defRPr>
             </a:pPr>
             <a:r>
-              <a:t>• Dedicated secure portal for external audit review teams.</a:t>
-            </a:r>
-          </a:p>
-          <a:p>
-            <a:pPr>
-              <a:spcAft>
-                <a:spcPts val="400"/>
-              </a:spcAft>
-              <a:defRPr sz="1100">
-                <a:solidFill>
-                  <a:srgbClr val="1E293B"/>
-                </a:solidFill>
-              </a:defRPr>
-            </a:pPr>
-            <a:r>
-              <a:t>• Continuous group-wide financial health telemetry.</a:t>
+              <a:t>Expectation: "Strict data privacy with no exposure of unreleased financials to public LLMs."  ➔  Delivery: Runs entirely client-side/on-premise; append-only point-in-time snapshot persistence.</a:t>
             </a:r>
           </a:p>
         </p:txBody>
